--- a/präsentationen/elektrofahrzeuge_datenanalyse_präsentation_tr.pptx
+++ b/präsentationen/elektrofahrzeuge_datenanalyse_präsentation_tr.pptx
@@ -1,23 +1,23 @@
 
 <file path=ppt/presentation.xml><?xml version="1.0" encoding="utf-8"?>
-<p:presentation xmlns:a="http://schemas.openxmlformats.org/drawingml/2006/main" xmlns:r="http://schemas.openxmlformats.org/officeDocument/2006/relationships" xmlns:mc="http://schemas.openxmlformats.org/markup-compatibility/2006" xmlns:mv="urn:schemas-microsoft-com:mac:vml" xmlns:p="http://schemas.openxmlformats.org/presentationml/2006/main" xmlns:c="http://schemas.openxmlformats.org/drawingml/2006/chart" xmlns:dgm="http://schemas.openxmlformats.org/drawingml/2006/diagram" xmlns:o="urn:schemas-microsoft-com:office:office" xmlns:v="urn:schemas-microsoft-com:vml" xmlns:pvml="urn:schemas-microsoft-com:office:powerpoint" xmlns:com="http://schemas.openxmlformats.org/drawingml/2006/compatibility" xmlns:p14="http://schemas.microsoft.com/office/powerpoint/2010/main" xmlns:p15="http://schemas.microsoft.com/office/powerpoint/2012/main" xmlns:ahyp="http://schemas.microsoft.com/office/drawing/2018/hyperlinkcolor" autoCompressPictures="0" strictFirstAndLastChars="0" saveSubsetFonts="1">
+<p:presentation xmlns:a="http://schemas.openxmlformats.org/drawingml/2006/main" xmlns:r="http://schemas.openxmlformats.org/officeDocument/2006/relationships" xmlns:p="http://schemas.openxmlformats.org/presentationml/2006/main" strictFirstAndLastChars="0" saveSubsetFonts="1" autoCompressPictures="0">
   <p:sldMasterIdLst>
-    <p:sldMasterId id="2147483650" r:id="rId3"/>
+    <p:sldMasterId id="2147483650" r:id="rId1"/>
   </p:sldMasterIdLst>
   <p:notesMasterIdLst>
-    <p:notesMasterId r:id="rId4"/>
+    <p:notesMasterId r:id="rId7"/>
   </p:notesMasterIdLst>
   <p:sldIdLst>
-    <p:sldId id="256" r:id="rId5"/>
-    <p:sldId id="257" r:id="rId6"/>
-    <p:sldId id="258" r:id="rId7"/>
-    <p:sldId id="259" r:id="rId8"/>
-    <p:sldId id="260" r:id="rId9"/>
+    <p:sldId id="256" r:id="rId2"/>
+    <p:sldId id="257" r:id="rId3"/>
+    <p:sldId id="258" r:id="rId4"/>
+    <p:sldId id="259" r:id="rId5"/>
+    <p:sldId id="260" r:id="rId6"/>
   </p:sldIdLst>
-  <p:sldSz cy="6858000" cx="12192000"/>
+  <p:sldSz cx="12192000" cy="6858000"/>
   <p:notesSz cx="6858000" cy="12192000"/>
   <p:defaultTextStyle>
-    <a:defPPr lvl="0" marR="0" rtl="0" algn="l">
+    <a:defPPr marR="0" lvl="0" algn="l" rtl="0">
       <a:lnSpc>
         <a:spcPct val="100000"/>
       </a:lnSpc>
@@ -28,7 +28,7 @@
         <a:spcPts val="0"/>
       </a:spcAft>
     </a:defPPr>
-    <a:lvl1pPr lvl="0" marR="0" rtl="0" algn="l">
+    <a:lvl1pPr marR="0" lvl="0" algn="l" rtl="0">
       <a:lnSpc>
         <a:spcPct val="100000"/>
       </a:lnSpc>
@@ -42,7 +42,7 @@
         <a:srgbClr val="000000"/>
       </a:buClr>
       <a:buFont typeface="Arial"/>
-      <a:defRPr b="0" i="0" sz="1400" u="none" cap="none" strike="noStrike">
+      <a:defRPr sz="1400" b="0" i="0" u="none" strike="noStrike" cap="none">
         <a:solidFill>
           <a:srgbClr val="000000"/>
         </a:solidFill>
@@ -52,7 +52,7 @@
         <a:sym typeface="Arial"/>
       </a:defRPr>
     </a:lvl1pPr>
-    <a:lvl2pPr lvl="1" marR="0" rtl="0" algn="l">
+    <a:lvl2pPr marR="0" lvl="1" algn="l" rtl="0">
       <a:lnSpc>
         <a:spcPct val="100000"/>
       </a:lnSpc>
@@ -66,7 +66,7 @@
         <a:srgbClr val="000000"/>
       </a:buClr>
       <a:buFont typeface="Arial"/>
-      <a:defRPr b="0" i="0" sz="1400" u="none" cap="none" strike="noStrike">
+      <a:defRPr sz="1400" b="0" i="0" u="none" strike="noStrike" cap="none">
         <a:solidFill>
           <a:srgbClr val="000000"/>
         </a:solidFill>
@@ -76,7 +76,7 @@
         <a:sym typeface="Arial"/>
       </a:defRPr>
     </a:lvl2pPr>
-    <a:lvl3pPr lvl="2" marR="0" rtl="0" algn="l">
+    <a:lvl3pPr marR="0" lvl="2" algn="l" rtl="0">
       <a:lnSpc>
         <a:spcPct val="100000"/>
       </a:lnSpc>
@@ -90,7 +90,7 @@
         <a:srgbClr val="000000"/>
       </a:buClr>
       <a:buFont typeface="Arial"/>
-      <a:defRPr b="0" i="0" sz="1400" u="none" cap="none" strike="noStrike">
+      <a:defRPr sz="1400" b="0" i="0" u="none" strike="noStrike" cap="none">
         <a:solidFill>
           <a:srgbClr val="000000"/>
         </a:solidFill>
@@ -100,7 +100,7 @@
         <a:sym typeface="Arial"/>
       </a:defRPr>
     </a:lvl3pPr>
-    <a:lvl4pPr lvl="3" marR="0" rtl="0" algn="l">
+    <a:lvl4pPr marR="0" lvl="3" algn="l" rtl="0">
       <a:lnSpc>
         <a:spcPct val="100000"/>
       </a:lnSpc>
@@ -114,7 +114,7 @@
         <a:srgbClr val="000000"/>
       </a:buClr>
       <a:buFont typeface="Arial"/>
-      <a:defRPr b="0" i="0" sz="1400" u="none" cap="none" strike="noStrike">
+      <a:defRPr sz="1400" b="0" i="0" u="none" strike="noStrike" cap="none">
         <a:solidFill>
           <a:srgbClr val="000000"/>
         </a:solidFill>
@@ -124,7 +124,7 @@
         <a:sym typeface="Arial"/>
       </a:defRPr>
     </a:lvl4pPr>
-    <a:lvl5pPr lvl="4" marR="0" rtl="0" algn="l">
+    <a:lvl5pPr marR="0" lvl="4" algn="l" rtl="0">
       <a:lnSpc>
         <a:spcPct val="100000"/>
       </a:lnSpc>
@@ -138,7 +138,7 @@
         <a:srgbClr val="000000"/>
       </a:buClr>
       <a:buFont typeface="Arial"/>
-      <a:defRPr b="0" i="0" sz="1400" u="none" cap="none" strike="noStrike">
+      <a:defRPr sz="1400" b="0" i="0" u="none" strike="noStrike" cap="none">
         <a:solidFill>
           <a:srgbClr val="000000"/>
         </a:solidFill>
@@ -148,7 +148,7 @@
         <a:sym typeface="Arial"/>
       </a:defRPr>
     </a:lvl5pPr>
-    <a:lvl6pPr lvl="5" marR="0" rtl="0" algn="l">
+    <a:lvl6pPr marR="0" lvl="5" algn="l" rtl="0">
       <a:lnSpc>
         <a:spcPct val="100000"/>
       </a:lnSpc>
@@ -162,7 +162,7 @@
         <a:srgbClr val="000000"/>
       </a:buClr>
       <a:buFont typeface="Arial"/>
-      <a:defRPr b="0" i="0" sz="1400" u="none" cap="none" strike="noStrike">
+      <a:defRPr sz="1400" b="0" i="0" u="none" strike="noStrike" cap="none">
         <a:solidFill>
           <a:srgbClr val="000000"/>
         </a:solidFill>
@@ -172,7 +172,7 @@
         <a:sym typeface="Arial"/>
       </a:defRPr>
     </a:lvl6pPr>
-    <a:lvl7pPr lvl="6" marR="0" rtl="0" algn="l">
+    <a:lvl7pPr marR="0" lvl="6" algn="l" rtl="0">
       <a:lnSpc>
         <a:spcPct val="100000"/>
       </a:lnSpc>
@@ -186,7 +186,7 @@
         <a:srgbClr val="000000"/>
       </a:buClr>
       <a:buFont typeface="Arial"/>
-      <a:defRPr b="0" i="0" sz="1400" u="none" cap="none" strike="noStrike">
+      <a:defRPr sz="1400" b="0" i="0" u="none" strike="noStrike" cap="none">
         <a:solidFill>
           <a:srgbClr val="000000"/>
         </a:solidFill>
@@ -196,7 +196,7 @@
         <a:sym typeface="Arial"/>
       </a:defRPr>
     </a:lvl7pPr>
-    <a:lvl8pPr lvl="7" marR="0" rtl="0" algn="l">
+    <a:lvl8pPr marR="0" lvl="7" algn="l" rtl="0">
       <a:lnSpc>
         <a:spcPct val="100000"/>
       </a:lnSpc>
@@ -210,7 +210,7 @@
         <a:srgbClr val="000000"/>
       </a:buClr>
       <a:buFont typeface="Arial"/>
-      <a:defRPr b="0" i="0" sz="1400" u="none" cap="none" strike="noStrike">
+      <a:defRPr sz="1400" b="0" i="0" u="none" strike="noStrike" cap="none">
         <a:solidFill>
           <a:srgbClr val="000000"/>
         </a:solidFill>
@@ -220,7 +220,7 @@
         <a:sym typeface="Arial"/>
       </a:defRPr>
     </a:lvl8pPr>
-    <a:lvl9pPr lvl="8" marR="0" rtl="0" algn="l">
+    <a:lvl9pPr marR="0" lvl="8" algn="l" rtl="0">
       <a:lnSpc>
         <a:spcPct val="100000"/>
       </a:lnSpc>
@@ -234,7 +234,7 @@
         <a:srgbClr val="000000"/>
       </a:buClr>
       <a:buFont typeface="Arial"/>
-      <a:defRPr b="0" i="0" sz="1400" u="none" cap="none" strike="noStrike">
+      <a:defRPr sz="1400" b="0" i="0" u="none" strike="noStrike" cap="none">
         <a:solidFill>
           <a:srgbClr val="000000"/>
         </a:solidFill>
@@ -249,18 +249,19 @@
 </file>
 
 <file path=ppt/notesMasters/notesMaster1.xml><?xml version="1.0" encoding="utf-8"?>
-<p:notesMaster xmlns:a="http://schemas.openxmlformats.org/drawingml/2006/main" xmlns:r="http://schemas.openxmlformats.org/officeDocument/2006/relationships" xmlns:mc="http://schemas.openxmlformats.org/markup-compatibility/2006" xmlns:mv="urn:schemas-microsoft-com:mac:vml" xmlns:p="http://schemas.openxmlformats.org/presentationml/2006/main" xmlns:c="http://schemas.openxmlformats.org/drawingml/2006/chart" xmlns:dgm="http://schemas.openxmlformats.org/drawingml/2006/diagram" xmlns:o="urn:schemas-microsoft-com:office:office" xmlns:v="urn:schemas-microsoft-com:vml" xmlns:pvml="urn:schemas-microsoft-com:office:powerpoint" xmlns:com="http://schemas.openxmlformats.org/drawingml/2006/compatibility" xmlns:p14="http://schemas.microsoft.com/office/powerpoint/2010/main" xmlns:p15="http://schemas.microsoft.com/office/powerpoint/2012/main" xmlns:ahyp="http://schemas.microsoft.com/office/drawing/2018/hyperlinkcolor">
+<p:notesMaster xmlns:a="http://schemas.openxmlformats.org/drawingml/2006/main" xmlns:r="http://schemas.openxmlformats.org/officeDocument/2006/relationships" xmlns:p="http://schemas.openxmlformats.org/presentationml/2006/main">
   <p:cSld>
     <p:bg>
       <p:bgPr>
         <a:solidFill>
           <a:schemeClr val="lt1"/>
         </a:solidFill>
+        <a:effectLst/>
       </p:bgPr>
     </p:bg>
     <p:spTree>
       <p:nvGrpSpPr>
-        <p:cNvPr id="2" name="Shape 2"/>
+        <p:cNvPr id="1" name="Shape 2"/>
         <p:cNvGrpSpPr/>
         <p:nvPr/>
       </p:nvGrpSpPr>
@@ -275,9 +276,11 @@
       <p:sp>
         <p:nvSpPr>
           <p:cNvPr id="3" name="Google Shape;3;n"/>
-          <p:cNvSpPr txBox="1"/>
+          <p:cNvSpPr txBox="1">
+            <a:spLocks noGrp="1"/>
+          </p:cNvSpPr>
           <p:nvPr>
-            <p:ph idx="2" type="hdr"/>
+            <p:ph type="hdr" idx="2"/>
           </p:nvPr>
         </p:nvSpPr>
         <p:spPr>
@@ -294,11 +297,11 @@
           </a:ln>
         </p:spPr>
         <p:txBody>
-          <a:bodyPr anchorCtr="0" anchor="t" bIns="45700" lIns="91425" spcFirstLastPara="1" rIns="91425" wrap="square" tIns="45700">
+          <a:bodyPr spcFirstLastPara="1" wrap="square" lIns="91425" tIns="45700" rIns="91425" bIns="45700" anchor="t" anchorCtr="0">
             <a:noAutofit/>
           </a:bodyPr>
           <a:lstStyle>
-            <a:lvl1pPr lvl="0" marR="0" rtl="0" algn="l">
+            <a:lvl1pPr marR="0" lvl="0" algn="l" rtl="0">
               <a:spcBef>
                 <a:spcPts val="0"/>
               </a:spcBef>
@@ -307,7 +310,7 @@
               </a:spcAft>
               <a:buSzPts val="1400"/>
               <a:buNone/>
-              <a:defRPr b="0" i="0" sz="1200" u="none" cap="none" strike="noStrike">
+              <a:defRPr sz="1200" b="0" i="0" u="none" strike="noStrike" cap="none">
                 <a:solidFill>
                   <a:schemeClr val="dk1"/>
                 </a:solidFill>
@@ -317,7 +320,7 @@
                 <a:sym typeface="Calibri"/>
               </a:defRPr>
             </a:lvl1pPr>
-            <a:lvl2pPr lvl="1" marR="0" rtl="0" algn="l">
+            <a:lvl2pPr marR="0" lvl="1" algn="l" rtl="0">
               <a:spcBef>
                 <a:spcPts val="0"/>
               </a:spcBef>
@@ -326,7 +329,7 @@
               </a:spcAft>
               <a:buSzPts val="1400"/>
               <a:buNone/>
-              <a:defRPr b="0" i="0" sz="1800" u="none" cap="none" strike="noStrike">
+              <a:defRPr sz="1800" b="0" i="0" u="none" strike="noStrike" cap="none">
                 <a:solidFill>
                   <a:schemeClr val="dk1"/>
                 </a:solidFill>
@@ -336,7 +339,7 @@
                 <a:sym typeface="Calibri"/>
               </a:defRPr>
             </a:lvl2pPr>
-            <a:lvl3pPr lvl="2" marR="0" rtl="0" algn="l">
+            <a:lvl3pPr marR="0" lvl="2" algn="l" rtl="0">
               <a:spcBef>
                 <a:spcPts val="0"/>
               </a:spcBef>
@@ -345,7 +348,7 @@
               </a:spcAft>
               <a:buSzPts val="1400"/>
               <a:buNone/>
-              <a:defRPr b="0" i="0" sz="1800" u="none" cap="none" strike="noStrike">
+              <a:defRPr sz="1800" b="0" i="0" u="none" strike="noStrike" cap="none">
                 <a:solidFill>
                   <a:schemeClr val="dk1"/>
                 </a:solidFill>
@@ -355,7 +358,7 @@
                 <a:sym typeface="Calibri"/>
               </a:defRPr>
             </a:lvl3pPr>
-            <a:lvl4pPr lvl="3" marR="0" rtl="0" algn="l">
+            <a:lvl4pPr marR="0" lvl="3" algn="l" rtl="0">
               <a:spcBef>
                 <a:spcPts val="0"/>
               </a:spcBef>
@@ -364,7 +367,7 @@
               </a:spcAft>
               <a:buSzPts val="1400"/>
               <a:buNone/>
-              <a:defRPr b="0" i="0" sz="1800" u="none" cap="none" strike="noStrike">
+              <a:defRPr sz="1800" b="0" i="0" u="none" strike="noStrike" cap="none">
                 <a:solidFill>
                   <a:schemeClr val="dk1"/>
                 </a:solidFill>
@@ -374,7 +377,7 @@
                 <a:sym typeface="Calibri"/>
               </a:defRPr>
             </a:lvl4pPr>
-            <a:lvl5pPr lvl="4" marR="0" rtl="0" algn="l">
+            <a:lvl5pPr marR="0" lvl="4" algn="l" rtl="0">
               <a:spcBef>
                 <a:spcPts val="0"/>
               </a:spcBef>
@@ -383,7 +386,7 @@
               </a:spcAft>
               <a:buSzPts val="1400"/>
               <a:buNone/>
-              <a:defRPr b="0" i="0" sz="1800" u="none" cap="none" strike="noStrike">
+              <a:defRPr sz="1800" b="0" i="0" u="none" strike="noStrike" cap="none">
                 <a:solidFill>
                   <a:schemeClr val="dk1"/>
                 </a:solidFill>
@@ -393,7 +396,7 @@
                 <a:sym typeface="Calibri"/>
               </a:defRPr>
             </a:lvl5pPr>
-            <a:lvl6pPr lvl="5" marR="0" rtl="0" algn="l">
+            <a:lvl6pPr marR="0" lvl="5" algn="l" rtl="0">
               <a:spcBef>
                 <a:spcPts val="0"/>
               </a:spcBef>
@@ -402,7 +405,7 @@
               </a:spcAft>
               <a:buSzPts val="1400"/>
               <a:buNone/>
-              <a:defRPr b="0" i="0" sz="1800" u="none" cap="none" strike="noStrike">
+              <a:defRPr sz="1800" b="0" i="0" u="none" strike="noStrike" cap="none">
                 <a:solidFill>
                   <a:schemeClr val="dk1"/>
                 </a:solidFill>
@@ -412,7 +415,7 @@
                 <a:sym typeface="Calibri"/>
               </a:defRPr>
             </a:lvl6pPr>
-            <a:lvl7pPr lvl="6" marR="0" rtl="0" algn="l">
+            <a:lvl7pPr marR="0" lvl="6" algn="l" rtl="0">
               <a:spcBef>
                 <a:spcPts val="0"/>
               </a:spcBef>
@@ -421,7 +424,7 @@
               </a:spcAft>
               <a:buSzPts val="1400"/>
               <a:buNone/>
-              <a:defRPr b="0" i="0" sz="1800" u="none" cap="none" strike="noStrike">
+              <a:defRPr sz="1800" b="0" i="0" u="none" strike="noStrike" cap="none">
                 <a:solidFill>
                   <a:schemeClr val="dk1"/>
                 </a:solidFill>
@@ -431,7 +434,7 @@
                 <a:sym typeface="Calibri"/>
               </a:defRPr>
             </a:lvl7pPr>
-            <a:lvl8pPr lvl="7" marR="0" rtl="0" algn="l">
+            <a:lvl8pPr marR="0" lvl="7" algn="l" rtl="0">
               <a:spcBef>
                 <a:spcPts val="0"/>
               </a:spcBef>
@@ -440,7 +443,7 @@
               </a:spcAft>
               <a:buSzPts val="1400"/>
               <a:buNone/>
-              <a:defRPr b="0" i="0" sz="1800" u="none" cap="none" strike="noStrike">
+              <a:defRPr sz="1800" b="0" i="0" u="none" strike="noStrike" cap="none">
                 <a:solidFill>
                   <a:schemeClr val="dk1"/>
                 </a:solidFill>
@@ -450,7 +453,7 @@
                 <a:sym typeface="Calibri"/>
               </a:defRPr>
             </a:lvl8pPr>
-            <a:lvl9pPr lvl="8" marR="0" rtl="0" algn="l">
+            <a:lvl9pPr marR="0" lvl="8" algn="l" rtl="0">
               <a:spcBef>
                 <a:spcPts val="0"/>
               </a:spcBef>
@@ -459,7 +462,7 @@
               </a:spcAft>
               <a:buSzPts val="1400"/>
               <a:buNone/>
-              <a:defRPr b="0" i="0" sz="1800" u="none" cap="none" strike="noStrike">
+              <a:defRPr sz="1800" b="0" i="0" u="none" strike="noStrike" cap="none">
                 <a:solidFill>
                   <a:schemeClr val="dk1"/>
                 </a:solidFill>
@@ -470,15 +473,19 @@
               </a:defRPr>
             </a:lvl9pPr>
           </a:lstStyle>
-          <a:p/>
+          <a:p>
+            <a:endParaRPr/>
+          </a:p>
         </p:txBody>
       </p:sp>
       <p:sp>
         <p:nvSpPr>
           <p:cNvPr id="4" name="Google Shape;4;n"/>
-          <p:cNvSpPr txBox="1"/>
+          <p:cNvSpPr txBox="1">
+            <a:spLocks noGrp="1"/>
+          </p:cNvSpPr>
           <p:nvPr>
-            <p:ph idx="10" type="dt"/>
+            <p:ph type="dt" idx="10"/>
           </p:nvPr>
         </p:nvSpPr>
         <p:spPr>
@@ -495,11 +502,11 @@
           </a:ln>
         </p:spPr>
         <p:txBody>
-          <a:bodyPr anchorCtr="0" anchor="t" bIns="45700" lIns="91425" spcFirstLastPara="1" rIns="91425" wrap="square" tIns="45700">
+          <a:bodyPr spcFirstLastPara="1" wrap="square" lIns="91425" tIns="45700" rIns="91425" bIns="45700" anchor="t" anchorCtr="0">
             <a:noAutofit/>
           </a:bodyPr>
           <a:lstStyle>
-            <a:lvl1pPr lvl="0" marR="0" rtl="0" algn="r">
+            <a:lvl1pPr marR="0" lvl="0" algn="r" rtl="0">
               <a:spcBef>
                 <a:spcPts val="0"/>
               </a:spcBef>
@@ -508,7 +515,7 @@
               </a:spcAft>
               <a:buSzPts val="1400"/>
               <a:buNone/>
-              <a:defRPr b="0" i="0" sz="1200" u="none" cap="none" strike="noStrike">
+              <a:defRPr sz="1200" b="0" i="0" u="none" strike="noStrike" cap="none">
                 <a:solidFill>
                   <a:schemeClr val="dk1"/>
                 </a:solidFill>
@@ -518,7 +525,7 @@
                 <a:sym typeface="Calibri"/>
               </a:defRPr>
             </a:lvl1pPr>
-            <a:lvl2pPr lvl="1" marR="0" rtl="0" algn="l">
+            <a:lvl2pPr marR="0" lvl="1" algn="l" rtl="0">
               <a:spcBef>
                 <a:spcPts val="0"/>
               </a:spcBef>
@@ -527,7 +534,7 @@
               </a:spcAft>
               <a:buSzPts val="1400"/>
               <a:buNone/>
-              <a:defRPr b="0" i="0" sz="1800" u="none" cap="none" strike="noStrike">
+              <a:defRPr sz="1800" b="0" i="0" u="none" strike="noStrike" cap="none">
                 <a:solidFill>
                   <a:schemeClr val="dk1"/>
                 </a:solidFill>
@@ -537,7 +544,7 @@
                 <a:sym typeface="Calibri"/>
               </a:defRPr>
             </a:lvl2pPr>
-            <a:lvl3pPr lvl="2" marR="0" rtl="0" algn="l">
+            <a:lvl3pPr marR="0" lvl="2" algn="l" rtl="0">
               <a:spcBef>
                 <a:spcPts val="0"/>
               </a:spcBef>
@@ -546,7 +553,7 @@
               </a:spcAft>
               <a:buSzPts val="1400"/>
               <a:buNone/>
-              <a:defRPr b="0" i="0" sz="1800" u="none" cap="none" strike="noStrike">
+              <a:defRPr sz="1800" b="0" i="0" u="none" strike="noStrike" cap="none">
                 <a:solidFill>
                   <a:schemeClr val="dk1"/>
                 </a:solidFill>
@@ -556,7 +563,7 @@
                 <a:sym typeface="Calibri"/>
               </a:defRPr>
             </a:lvl3pPr>
-            <a:lvl4pPr lvl="3" marR="0" rtl="0" algn="l">
+            <a:lvl4pPr marR="0" lvl="3" algn="l" rtl="0">
               <a:spcBef>
                 <a:spcPts val="0"/>
               </a:spcBef>
@@ -565,7 +572,7 @@
               </a:spcAft>
               <a:buSzPts val="1400"/>
               <a:buNone/>
-              <a:defRPr b="0" i="0" sz="1800" u="none" cap="none" strike="noStrike">
+              <a:defRPr sz="1800" b="0" i="0" u="none" strike="noStrike" cap="none">
                 <a:solidFill>
                   <a:schemeClr val="dk1"/>
                 </a:solidFill>
@@ -575,7 +582,7 @@
                 <a:sym typeface="Calibri"/>
               </a:defRPr>
             </a:lvl4pPr>
-            <a:lvl5pPr lvl="4" marR="0" rtl="0" algn="l">
+            <a:lvl5pPr marR="0" lvl="4" algn="l" rtl="0">
               <a:spcBef>
                 <a:spcPts val="0"/>
               </a:spcBef>
@@ -584,7 +591,7 @@
               </a:spcAft>
               <a:buSzPts val="1400"/>
               <a:buNone/>
-              <a:defRPr b="0" i="0" sz="1800" u="none" cap="none" strike="noStrike">
+              <a:defRPr sz="1800" b="0" i="0" u="none" strike="noStrike" cap="none">
                 <a:solidFill>
                   <a:schemeClr val="dk1"/>
                 </a:solidFill>
@@ -594,7 +601,7 @@
                 <a:sym typeface="Calibri"/>
               </a:defRPr>
             </a:lvl5pPr>
-            <a:lvl6pPr lvl="5" marR="0" rtl="0" algn="l">
+            <a:lvl6pPr marR="0" lvl="5" algn="l" rtl="0">
               <a:spcBef>
                 <a:spcPts val="0"/>
               </a:spcBef>
@@ -603,7 +610,7 @@
               </a:spcAft>
               <a:buSzPts val="1400"/>
               <a:buNone/>
-              <a:defRPr b="0" i="0" sz="1800" u="none" cap="none" strike="noStrike">
+              <a:defRPr sz="1800" b="0" i="0" u="none" strike="noStrike" cap="none">
                 <a:solidFill>
                   <a:schemeClr val="dk1"/>
                 </a:solidFill>
@@ -613,7 +620,7 @@
                 <a:sym typeface="Calibri"/>
               </a:defRPr>
             </a:lvl6pPr>
-            <a:lvl7pPr lvl="6" marR="0" rtl="0" algn="l">
+            <a:lvl7pPr marR="0" lvl="6" algn="l" rtl="0">
               <a:spcBef>
                 <a:spcPts val="0"/>
               </a:spcBef>
@@ -622,7 +629,7 @@
               </a:spcAft>
               <a:buSzPts val="1400"/>
               <a:buNone/>
-              <a:defRPr b="0" i="0" sz="1800" u="none" cap="none" strike="noStrike">
+              <a:defRPr sz="1800" b="0" i="0" u="none" strike="noStrike" cap="none">
                 <a:solidFill>
                   <a:schemeClr val="dk1"/>
                 </a:solidFill>
@@ -632,7 +639,7 @@
                 <a:sym typeface="Calibri"/>
               </a:defRPr>
             </a:lvl7pPr>
-            <a:lvl8pPr lvl="7" marR="0" rtl="0" algn="l">
+            <a:lvl8pPr marR="0" lvl="7" algn="l" rtl="0">
               <a:spcBef>
                 <a:spcPts val="0"/>
               </a:spcBef>
@@ -641,7 +648,7 @@
               </a:spcAft>
               <a:buSzPts val="1400"/>
               <a:buNone/>
-              <a:defRPr b="0" i="0" sz="1800" u="none" cap="none" strike="noStrike">
+              <a:defRPr sz="1800" b="0" i="0" u="none" strike="noStrike" cap="none">
                 <a:solidFill>
                   <a:schemeClr val="dk1"/>
                 </a:solidFill>
@@ -651,7 +658,7 @@
                 <a:sym typeface="Calibri"/>
               </a:defRPr>
             </a:lvl8pPr>
-            <a:lvl9pPr lvl="8" marR="0" rtl="0" algn="l">
+            <a:lvl9pPr marR="0" lvl="8" algn="l" rtl="0">
               <a:spcBef>
                 <a:spcPts val="0"/>
               </a:spcBef>
@@ -660,7 +667,7 @@
               </a:spcAft>
               <a:buSzPts val="1400"/>
               <a:buNone/>
-              <a:defRPr b="0" i="0" sz="1800" u="none" cap="none" strike="noStrike">
+              <a:defRPr sz="1800" b="0" i="0" u="none" strike="noStrike" cap="none">
                 <a:solidFill>
                   <a:schemeClr val="dk1"/>
                 </a:solidFill>
@@ -671,15 +678,19 @@
               </a:defRPr>
             </a:lvl9pPr>
           </a:lstStyle>
-          <a:p/>
+          <a:p>
+            <a:endParaRPr/>
+          </a:p>
         </p:txBody>
       </p:sp>
       <p:sp>
         <p:nvSpPr>
           <p:cNvPr id="5" name="Google Shape;5;n"/>
-          <p:cNvSpPr/>
+          <p:cNvSpPr>
+            <a:spLocks noGrp="1" noRot="1" noChangeAspect="1"/>
+          </p:cNvSpPr>
           <p:nvPr>
-            <p:ph idx="3" type="sldImg"/>
+            <p:ph type="sldImg" idx="3"/>
           </p:nvPr>
         </p:nvSpPr>
         <p:spPr>
@@ -688,9 +699,13 @@
             <a:ext cx="5486400" cy="3086100"/>
           </a:xfrm>
           <a:custGeom>
-            <a:rect b="b" l="l" r="r" t="t"/>
+            <a:avLst/>
+            <a:gdLst/>
+            <a:ahLst/>
+            <a:cxnLst/>
+            <a:rect l="l" t="t" r="r" b="b"/>
             <a:pathLst>
-              <a:path extrusionOk="0" h="120000" w="120000">
+              <a:path w="120000" h="120000" extrusionOk="0">
                 <a:moveTo>
                   <a:pt x="0" y="0"/>
                 </a:moveTo>
@@ -708,23 +723,25 @@
             </a:pathLst>
           </a:custGeom>
           <a:noFill/>
-          <a:ln cap="flat" cmpd="sng" w="12700">
+          <a:ln w="12700" cap="flat" cmpd="sng">
             <a:solidFill>
               <a:srgbClr val="000000"/>
             </a:solidFill>
             <a:prstDash val="solid"/>
             <a:round/>
-            <a:headEnd len="sm" w="sm" type="none"/>
-            <a:tailEnd len="sm" w="sm" type="none"/>
+            <a:headEnd type="none" w="sm" len="sm"/>
+            <a:tailEnd type="none" w="sm" len="sm"/>
           </a:ln>
         </p:spPr>
       </p:sp>
       <p:sp>
         <p:nvSpPr>
           <p:cNvPr id="6" name="Google Shape;6;n"/>
-          <p:cNvSpPr txBox="1"/>
+          <p:cNvSpPr txBox="1">
+            <a:spLocks noGrp="1"/>
+          </p:cNvSpPr>
           <p:nvPr>
-            <p:ph idx="1" type="body"/>
+            <p:ph type="body" idx="1"/>
           </p:nvPr>
         </p:nvSpPr>
         <p:spPr>
@@ -741,11 +758,11 @@
           </a:ln>
         </p:spPr>
         <p:txBody>
-          <a:bodyPr anchorCtr="0" anchor="t" bIns="45700" lIns="91425" spcFirstLastPara="1" rIns="91425" wrap="square" tIns="45700">
+          <a:bodyPr spcFirstLastPara="1" wrap="square" lIns="91425" tIns="45700" rIns="91425" bIns="45700" anchor="t" anchorCtr="0">
             <a:noAutofit/>
           </a:bodyPr>
           <a:lstStyle>
-            <a:lvl1pPr indent="-228600" lvl="0" marL="457200" marR="0" rtl="0" algn="l">
+            <a:lvl1pPr marL="457200" marR="0" lvl="0" indent="-228600" algn="l" rtl="0">
               <a:spcBef>
                 <a:spcPts val="0"/>
               </a:spcBef>
@@ -754,7 +771,7 @@
               </a:spcAft>
               <a:buSzPts val="1400"/>
               <a:buNone/>
-              <a:defRPr b="0" i="0" sz="1200" u="none" cap="none" strike="noStrike">
+              <a:defRPr sz="1200" b="0" i="0" u="none" strike="noStrike" cap="none">
                 <a:solidFill>
                   <a:schemeClr val="dk1"/>
                 </a:solidFill>
@@ -764,7 +781,7 @@
                 <a:sym typeface="Calibri"/>
               </a:defRPr>
             </a:lvl1pPr>
-            <a:lvl2pPr indent="-228600" lvl="1" marL="914400" marR="0" rtl="0" algn="l">
+            <a:lvl2pPr marL="914400" marR="0" lvl="1" indent="-228600" algn="l" rtl="0">
               <a:spcBef>
                 <a:spcPts val="0"/>
               </a:spcBef>
@@ -773,7 +790,7 @@
               </a:spcAft>
               <a:buSzPts val="1400"/>
               <a:buNone/>
-              <a:defRPr b="0" i="0" sz="1200" u="none" cap="none" strike="noStrike">
+              <a:defRPr sz="1200" b="0" i="0" u="none" strike="noStrike" cap="none">
                 <a:solidFill>
                   <a:schemeClr val="dk1"/>
                 </a:solidFill>
@@ -783,7 +800,7 @@
                 <a:sym typeface="Calibri"/>
               </a:defRPr>
             </a:lvl2pPr>
-            <a:lvl3pPr indent="-228600" lvl="2" marL="1371600" marR="0" rtl="0" algn="l">
+            <a:lvl3pPr marL="1371600" marR="0" lvl="2" indent="-228600" algn="l" rtl="0">
               <a:spcBef>
                 <a:spcPts val="0"/>
               </a:spcBef>
@@ -792,7 +809,7 @@
               </a:spcAft>
               <a:buSzPts val="1400"/>
               <a:buNone/>
-              <a:defRPr b="0" i="0" sz="1200" u="none" cap="none" strike="noStrike">
+              <a:defRPr sz="1200" b="0" i="0" u="none" strike="noStrike" cap="none">
                 <a:solidFill>
                   <a:schemeClr val="dk1"/>
                 </a:solidFill>
@@ -802,7 +819,7 @@
                 <a:sym typeface="Calibri"/>
               </a:defRPr>
             </a:lvl3pPr>
-            <a:lvl4pPr indent="-228600" lvl="3" marL="1828800" marR="0" rtl="0" algn="l">
+            <a:lvl4pPr marL="1828800" marR="0" lvl="3" indent="-228600" algn="l" rtl="0">
               <a:spcBef>
                 <a:spcPts val="0"/>
               </a:spcBef>
@@ -811,7 +828,7 @@
               </a:spcAft>
               <a:buSzPts val="1400"/>
               <a:buNone/>
-              <a:defRPr b="0" i="0" sz="1200" u="none" cap="none" strike="noStrike">
+              <a:defRPr sz="1200" b="0" i="0" u="none" strike="noStrike" cap="none">
                 <a:solidFill>
                   <a:schemeClr val="dk1"/>
                 </a:solidFill>
@@ -821,7 +838,7 @@
                 <a:sym typeface="Calibri"/>
               </a:defRPr>
             </a:lvl4pPr>
-            <a:lvl5pPr indent="-228600" lvl="4" marL="2286000" marR="0" rtl="0" algn="l">
+            <a:lvl5pPr marL="2286000" marR="0" lvl="4" indent="-228600" algn="l" rtl="0">
               <a:spcBef>
                 <a:spcPts val="0"/>
               </a:spcBef>
@@ -830,7 +847,7 @@
               </a:spcAft>
               <a:buSzPts val="1400"/>
               <a:buNone/>
-              <a:defRPr b="0" i="0" sz="1200" u="none" cap="none" strike="noStrike">
+              <a:defRPr sz="1200" b="0" i="0" u="none" strike="noStrike" cap="none">
                 <a:solidFill>
                   <a:schemeClr val="dk1"/>
                 </a:solidFill>
@@ -840,7 +857,7 @@
                 <a:sym typeface="Calibri"/>
               </a:defRPr>
             </a:lvl5pPr>
-            <a:lvl6pPr indent="-228600" lvl="5" marL="2743200" marR="0" rtl="0" algn="l">
+            <a:lvl6pPr marL="2743200" marR="0" lvl="5" indent="-228600" algn="l" rtl="0">
               <a:spcBef>
                 <a:spcPts val="0"/>
               </a:spcBef>
@@ -849,7 +866,7 @@
               </a:spcAft>
               <a:buSzPts val="1400"/>
               <a:buNone/>
-              <a:defRPr b="0" i="0" sz="1200" u="none" cap="none" strike="noStrike">
+              <a:defRPr sz="1200" b="0" i="0" u="none" strike="noStrike" cap="none">
                 <a:solidFill>
                   <a:schemeClr val="dk1"/>
                 </a:solidFill>
@@ -859,7 +876,7 @@
                 <a:sym typeface="Calibri"/>
               </a:defRPr>
             </a:lvl6pPr>
-            <a:lvl7pPr indent="-228600" lvl="6" marL="3200400" marR="0" rtl="0" algn="l">
+            <a:lvl7pPr marL="3200400" marR="0" lvl="6" indent="-228600" algn="l" rtl="0">
               <a:spcBef>
                 <a:spcPts val="0"/>
               </a:spcBef>
@@ -868,7 +885,7 @@
               </a:spcAft>
               <a:buSzPts val="1400"/>
               <a:buNone/>
-              <a:defRPr b="0" i="0" sz="1200" u="none" cap="none" strike="noStrike">
+              <a:defRPr sz="1200" b="0" i="0" u="none" strike="noStrike" cap="none">
                 <a:solidFill>
                   <a:schemeClr val="dk1"/>
                 </a:solidFill>
@@ -878,7 +895,7 @@
                 <a:sym typeface="Calibri"/>
               </a:defRPr>
             </a:lvl7pPr>
-            <a:lvl8pPr indent="-228600" lvl="7" marL="3657600" marR="0" rtl="0" algn="l">
+            <a:lvl8pPr marL="3657600" marR="0" lvl="7" indent="-228600" algn="l" rtl="0">
               <a:spcBef>
                 <a:spcPts val="0"/>
               </a:spcBef>
@@ -887,7 +904,7 @@
               </a:spcAft>
               <a:buSzPts val="1400"/>
               <a:buNone/>
-              <a:defRPr b="0" i="0" sz="1200" u="none" cap="none" strike="noStrike">
+              <a:defRPr sz="1200" b="0" i="0" u="none" strike="noStrike" cap="none">
                 <a:solidFill>
                   <a:schemeClr val="dk1"/>
                 </a:solidFill>
@@ -897,7 +914,7 @@
                 <a:sym typeface="Calibri"/>
               </a:defRPr>
             </a:lvl8pPr>
-            <a:lvl9pPr indent="-228600" lvl="8" marL="4114800" marR="0" rtl="0" algn="l">
+            <a:lvl9pPr marL="4114800" marR="0" lvl="8" indent="-228600" algn="l" rtl="0">
               <a:spcBef>
                 <a:spcPts val="0"/>
               </a:spcBef>
@@ -906,7 +923,7 @@
               </a:spcAft>
               <a:buSzPts val="1400"/>
               <a:buNone/>
-              <a:defRPr b="0" i="0" sz="1200" u="none" cap="none" strike="noStrike">
+              <a:defRPr sz="1200" b="0" i="0" u="none" strike="noStrike" cap="none">
                 <a:solidFill>
                   <a:schemeClr val="dk1"/>
                 </a:solidFill>
@@ -917,15 +934,19 @@
               </a:defRPr>
             </a:lvl9pPr>
           </a:lstStyle>
-          <a:p/>
+          <a:p>
+            <a:endParaRPr/>
+          </a:p>
         </p:txBody>
       </p:sp>
       <p:sp>
         <p:nvSpPr>
           <p:cNvPr id="7" name="Google Shape;7;n"/>
-          <p:cNvSpPr txBox="1"/>
+          <p:cNvSpPr txBox="1">
+            <a:spLocks noGrp="1"/>
+          </p:cNvSpPr>
           <p:nvPr>
-            <p:ph idx="11" type="ftr"/>
+            <p:ph type="ftr" idx="11"/>
           </p:nvPr>
         </p:nvSpPr>
         <p:spPr>
@@ -942,11 +963,11 @@
           </a:ln>
         </p:spPr>
         <p:txBody>
-          <a:bodyPr anchorCtr="0" anchor="b" bIns="45700" lIns="91425" spcFirstLastPara="1" rIns="91425" wrap="square" tIns="45700">
+          <a:bodyPr spcFirstLastPara="1" wrap="square" lIns="91425" tIns="45700" rIns="91425" bIns="45700" anchor="b" anchorCtr="0">
             <a:noAutofit/>
           </a:bodyPr>
           <a:lstStyle>
-            <a:lvl1pPr lvl="0" marR="0" rtl="0" algn="l">
+            <a:lvl1pPr marR="0" lvl="0" algn="l" rtl="0">
               <a:spcBef>
                 <a:spcPts val="0"/>
               </a:spcBef>
@@ -955,7 +976,7 @@
               </a:spcAft>
               <a:buSzPts val="1400"/>
               <a:buNone/>
-              <a:defRPr b="0" i="0" sz="1200" u="none" cap="none" strike="noStrike">
+              <a:defRPr sz="1200" b="0" i="0" u="none" strike="noStrike" cap="none">
                 <a:solidFill>
                   <a:schemeClr val="dk1"/>
                 </a:solidFill>
@@ -965,7 +986,7 @@
                 <a:sym typeface="Calibri"/>
               </a:defRPr>
             </a:lvl1pPr>
-            <a:lvl2pPr lvl="1" marR="0" rtl="0" algn="l">
+            <a:lvl2pPr marR="0" lvl="1" algn="l" rtl="0">
               <a:spcBef>
                 <a:spcPts val="0"/>
               </a:spcBef>
@@ -974,7 +995,7 @@
               </a:spcAft>
               <a:buSzPts val="1400"/>
               <a:buNone/>
-              <a:defRPr b="0" i="0" sz="1800" u="none" cap="none" strike="noStrike">
+              <a:defRPr sz="1800" b="0" i="0" u="none" strike="noStrike" cap="none">
                 <a:solidFill>
                   <a:schemeClr val="dk1"/>
                 </a:solidFill>
@@ -984,7 +1005,7 @@
                 <a:sym typeface="Calibri"/>
               </a:defRPr>
             </a:lvl2pPr>
-            <a:lvl3pPr lvl="2" marR="0" rtl="0" algn="l">
+            <a:lvl3pPr marR="0" lvl="2" algn="l" rtl="0">
               <a:spcBef>
                 <a:spcPts val="0"/>
               </a:spcBef>
@@ -993,7 +1014,7 @@
               </a:spcAft>
               <a:buSzPts val="1400"/>
               <a:buNone/>
-              <a:defRPr b="0" i="0" sz="1800" u="none" cap="none" strike="noStrike">
+              <a:defRPr sz="1800" b="0" i="0" u="none" strike="noStrike" cap="none">
                 <a:solidFill>
                   <a:schemeClr val="dk1"/>
                 </a:solidFill>
@@ -1003,7 +1024,7 @@
                 <a:sym typeface="Calibri"/>
               </a:defRPr>
             </a:lvl3pPr>
-            <a:lvl4pPr lvl="3" marR="0" rtl="0" algn="l">
+            <a:lvl4pPr marR="0" lvl="3" algn="l" rtl="0">
               <a:spcBef>
                 <a:spcPts val="0"/>
               </a:spcBef>
@@ -1012,7 +1033,7 @@
               </a:spcAft>
               <a:buSzPts val="1400"/>
               <a:buNone/>
-              <a:defRPr b="0" i="0" sz="1800" u="none" cap="none" strike="noStrike">
+              <a:defRPr sz="1800" b="0" i="0" u="none" strike="noStrike" cap="none">
                 <a:solidFill>
                   <a:schemeClr val="dk1"/>
                 </a:solidFill>
@@ -1022,7 +1043,7 @@
                 <a:sym typeface="Calibri"/>
               </a:defRPr>
             </a:lvl4pPr>
-            <a:lvl5pPr lvl="4" marR="0" rtl="0" algn="l">
+            <a:lvl5pPr marR="0" lvl="4" algn="l" rtl="0">
               <a:spcBef>
                 <a:spcPts val="0"/>
               </a:spcBef>
@@ -1031,7 +1052,7 @@
               </a:spcAft>
               <a:buSzPts val="1400"/>
               <a:buNone/>
-              <a:defRPr b="0" i="0" sz="1800" u="none" cap="none" strike="noStrike">
+              <a:defRPr sz="1800" b="0" i="0" u="none" strike="noStrike" cap="none">
                 <a:solidFill>
                   <a:schemeClr val="dk1"/>
                 </a:solidFill>
@@ -1041,7 +1062,7 @@
                 <a:sym typeface="Calibri"/>
               </a:defRPr>
             </a:lvl5pPr>
-            <a:lvl6pPr lvl="5" marR="0" rtl="0" algn="l">
+            <a:lvl6pPr marR="0" lvl="5" algn="l" rtl="0">
               <a:spcBef>
                 <a:spcPts val="0"/>
               </a:spcBef>
@@ -1050,7 +1071,7 @@
               </a:spcAft>
               <a:buSzPts val="1400"/>
               <a:buNone/>
-              <a:defRPr b="0" i="0" sz="1800" u="none" cap="none" strike="noStrike">
+              <a:defRPr sz="1800" b="0" i="0" u="none" strike="noStrike" cap="none">
                 <a:solidFill>
                   <a:schemeClr val="dk1"/>
                 </a:solidFill>
@@ -1060,7 +1081,7 @@
                 <a:sym typeface="Calibri"/>
               </a:defRPr>
             </a:lvl6pPr>
-            <a:lvl7pPr lvl="6" marR="0" rtl="0" algn="l">
+            <a:lvl7pPr marR="0" lvl="6" algn="l" rtl="0">
               <a:spcBef>
                 <a:spcPts val="0"/>
               </a:spcBef>
@@ -1069,7 +1090,7 @@
               </a:spcAft>
               <a:buSzPts val="1400"/>
               <a:buNone/>
-              <a:defRPr b="0" i="0" sz="1800" u="none" cap="none" strike="noStrike">
+              <a:defRPr sz="1800" b="0" i="0" u="none" strike="noStrike" cap="none">
                 <a:solidFill>
                   <a:schemeClr val="dk1"/>
                 </a:solidFill>
@@ -1079,7 +1100,7 @@
                 <a:sym typeface="Calibri"/>
               </a:defRPr>
             </a:lvl7pPr>
-            <a:lvl8pPr lvl="7" marR="0" rtl="0" algn="l">
+            <a:lvl8pPr marR="0" lvl="7" algn="l" rtl="0">
               <a:spcBef>
                 <a:spcPts val="0"/>
               </a:spcBef>
@@ -1088,7 +1109,7 @@
               </a:spcAft>
               <a:buSzPts val="1400"/>
               <a:buNone/>
-              <a:defRPr b="0" i="0" sz="1800" u="none" cap="none" strike="noStrike">
+              <a:defRPr sz="1800" b="0" i="0" u="none" strike="noStrike" cap="none">
                 <a:solidFill>
                   <a:schemeClr val="dk1"/>
                 </a:solidFill>
@@ -1098,7 +1119,7 @@
                 <a:sym typeface="Calibri"/>
               </a:defRPr>
             </a:lvl8pPr>
-            <a:lvl9pPr lvl="8" marR="0" rtl="0" algn="l">
+            <a:lvl9pPr marR="0" lvl="8" algn="l" rtl="0">
               <a:spcBef>
                 <a:spcPts val="0"/>
               </a:spcBef>
@@ -1107,7 +1128,7 @@
               </a:spcAft>
               <a:buSzPts val="1400"/>
               <a:buNone/>
-              <a:defRPr b="0" i="0" sz="1800" u="none" cap="none" strike="noStrike">
+              <a:defRPr sz="1800" b="0" i="0" u="none" strike="noStrike" cap="none">
                 <a:solidFill>
                   <a:schemeClr val="dk1"/>
                 </a:solidFill>
@@ -1118,15 +1139,19 @@
               </a:defRPr>
             </a:lvl9pPr>
           </a:lstStyle>
-          <a:p/>
+          <a:p>
+            <a:endParaRPr/>
+          </a:p>
         </p:txBody>
       </p:sp>
       <p:sp>
         <p:nvSpPr>
           <p:cNvPr id="8" name="Google Shape;8;n"/>
-          <p:cNvSpPr txBox="1"/>
+          <p:cNvSpPr txBox="1">
+            <a:spLocks noGrp="1"/>
+          </p:cNvSpPr>
           <p:nvPr>
-            <p:ph idx="12" type="sldNum"/>
+            <p:ph type="sldNum" idx="12"/>
           </p:nvPr>
         </p:nvSpPr>
         <p:spPr>
@@ -1143,12 +1168,12 @@
           </a:ln>
         </p:spPr>
         <p:txBody>
-          <a:bodyPr anchorCtr="0" anchor="b" bIns="45700" lIns="91425" spcFirstLastPara="1" rIns="91425" wrap="square" tIns="45700">
+          <a:bodyPr spcFirstLastPara="1" wrap="square" lIns="91425" tIns="45700" rIns="91425" bIns="45700" anchor="b" anchorCtr="0">
             <a:noAutofit/>
           </a:bodyPr>
           <a:lstStyle/>
           <a:p>
-            <a:pPr indent="0" lvl="0" marL="0" marR="0" rtl="0" algn="r">
+            <a:pPr marL="0" marR="0" lvl="0" indent="0" algn="r" rtl="0">
               <a:spcBef>
                 <a:spcPts val="0"/>
               </a:spcBef>
@@ -1158,7 +1183,7 @@
               <a:buNone/>
             </a:pPr>
             <a:fld id="{00000000-1234-1234-1234-123412341234}" type="slidenum">
-              <a:rPr b="0" i="0" lang="en-US" sz="1200" u="none" cap="none" strike="noStrike">
+              <a:rPr lang="en-US" sz="1200" b="0" i="0" u="none" strike="noStrike" cap="none">
                 <a:solidFill>
                   <a:schemeClr val="dk1"/>
                 </a:solidFill>
@@ -1167,9 +1192,9 @@
                 <a:cs typeface="Calibri"/>
                 <a:sym typeface="Calibri"/>
               </a:rPr>
-              <a:t>‹#›</a:t>
+              <a:t>‹Nr.›</a:t>
             </a:fld>
-            <a:endParaRPr b="0" i="0" sz="1200" u="none" cap="none" strike="noStrike">
+            <a:endParaRPr sz="1200" b="0" i="0" u="none" strike="noStrike" cap="none">
               <a:solidFill>
                 <a:schemeClr val="dk1"/>
               </a:solidFill>
@@ -1183,9 +1208,9 @@
       </p:sp>
     </p:spTree>
   </p:cSld>
-  <p:clrMap accent1="accent1" accent2="accent2" accent3="accent3" accent4="accent4" accent5="accent5" accent6="accent6" bg1="lt1" bg2="dk2" tx1="dk1" tx2="lt2" folHlink="folHlink" hlink="hlink"/>
+  <p:clrMap bg1="lt1" tx1="dk1" bg2="dk2" tx2="lt2" accent1="accent1" accent2="accent2" accent3="accent3" accent4="accent4" accent5="accent5" accent6="accent6" hlink="hlink" folHlink="folHlink"/>
   <p:notesStyle>
-    <a:defPPr lvl="0" marR="0" rtl="0" algn="l">
+    <a:defPPr marR="0" lvl="0" algn="l" rtl="0">
       <a:lnSpc>
         <a:spcPct val="100000"/>
       </a:lnSpc>
@@ -1196,7 +1221,7 @@
         <a:spcPts val="0"/>
       </a:spcAft>
     </a:defPPr>
-    <a:lvl1pPr lvl="0" marR="0" rtl="0" algn="l">
+    <a:lvl1pPr marR="0" lvl="0" algn="l" rtl="0">
       <a:lnSpc>
         <a:spcPct val="100000"/>
       </a:lnSpc>
@@ -1210,7 +1235,7 @@
         <a:srgbClr val="000000"/>
       </a:buClr>
       <a:buFont typeface="Arial"/>
-      <a:defRPr b="0" i="0" sz="1400" u="none" cap="none" strike="noStrike">
+      <a:defRPr sz="1400" b="0" i="0" u="none" strike="noStrike" cap="none">
         <a:solidFill>
           <a:srgbClr val="000000"/>
         </a:solidFill>
@@ -1220,7 +1245,7 @@
         <a:sym typeface="Arial"/>
       </a:defRPr>
     </a:lvl1pPr>
-    <a:lvl2pPr lvl="1" marR="0" rtl="0" algn="l">
+    <a:lvl2pPr marR="0" lvl="1" algn="l" rtl="0">
       <a:lnSpc>
         <a:spcPct val="100000"/>
       </a:lnSpc>
@@ -1234,7 +1259,7 @@
         <a:srgbClr val="000000"/>
       </a:buClr>
       <a:buFont typeface="Arial"/>
-      <a:defRPr b="0" i="0" sz="1400" u="none" cap="none" strike="noStrike">
+      <a:defRPr sz="1400" b="0" i="0" u="none" strike="noStrike" cap="none">
         <a:solidFill>
           <a:srgbClr val="000000"/>
         </a:solidFill>
@@ -1244,7 +1269,7 @@
         <a:sym typeface="Arial"/>
       </a:defRPr>
     </a:lvl2pPr>
-    <a:lvl3pPr lvl="2" marR="0" rtl="0" algn="l">
+    <a:lvl3pPr marR="0" lvl="2" algn="l" rtl="0">
       <a:lnSpc>
         <a:spcPct val="100000"/>
       </a:lnSpc>
@@ -1258,7 +1283,7 @@
         <a:srgbClr val="000000"/>
       </a:buClr>
       <a:buFont typeface="Arial"/>
-      <a:defRPr b="0" i="0" sz="1400" u="none" cap="none" strike="noStrike">
+      <a:defRPr sz="1400" b="0" i="0" u="none" strike="noStrike" cap="none">
         <a:solidFill>
           <a:srgbClr val="000000"/>
         </a:solidFill>
@@ -1268,7 +1293,7 @@
         <a:sym typeface="Arial"/>
       </a:defRPr>
     </a:lvl3pPr>
-    <a:lvl4pPr lvl="3" marR="0" rtl="0" algn="l">
+    <a:lvl4pPr marR="0" lvl="3" algn="l" rtl="0">
       <a:lnSpc>
         <a:spcPct val="100000"/>
       </a:lnSpc>
@@ -1282,7 +1307,7 @@
         <a:srgbClr val="000000"/>
       </a:buClr>
       <a:buFont typeface="Arial"/>
-      <a:defRPr b="0" i="0" sz="1400" u="none" cap="none" strike="noStrike">
+      <a:defRPr sz="1400" b="0" i="0" u="none" strike="noStrike" cap="none">
         <a:solidFill>
           <a:srgbClr val="000000"/>
         </a:solidFill>
@@ -1292,7 +1317,7 @@
         <a:sym typeface="Arial"/>
       </a:defRPr>
     </a:lvl4pPr>
-    <a:lvl5pPr lvl="4" marR="0" rtl="0" algn="l">
+    <a:lvl5pPr marR="0" lvl="4" algn="l" rtl="0">
       <a:lnSpc>
         <a:spcPct val="100000"/>
       </a:lnSpc>
@@ -1306,7 +1331,7 @@
         <a:srgbClr val="000000"/>
       </a:buClr>
       <a:buFont typeface="Arial"/>
-      <a:defRPr b="0" i="0" sz="1400" u="none" cap="none" strike="noStrike">
+      <a:defRPr sz="1400" b="0" i="0" u="none" strike="noStrike" cap="none">
         <a:solidFill>
           <a:srgbClr val="000000"/>
         </a:solidFill>
@@ -1316,7 +1341,7 @@
         <a:sym typeface="Arial"/>
       </a:defRPr>
     </a:lvl5pPr>
-    <a:lvl6pPr lvl="5" marR="0" rtl="0" algn="l">
+    <a:lvl6pPr marR="0" lvl="5" algn="l" rtl="0">
       <a:lnSpc>
         <a:spcPct val="100000"/>
       </a:lnSpc>
@@ -1330,7 +1355,7 @@
         <a:srgbClr val="000000"/>
       </a:buClr>
       <a:buFont typeface="Arial"/>
-      <a:defRPr b="0" i="0" sz="1400" u="none" cap="none" strike="noStrike">
+      <a:defRPr sz="1400" b="0" i="0" u="none" strike="noStrike" cap="none">
         <a:solidFill>
           <a:srgbClr val="000000"/>
         </a:solidFill>
@@ -1340,7 +1365,7 @@
         <a:sym typeface="Arial"/>
       </a:defRPr>
     </a:lvl6pPr>
-    <a:lvl7pPr lvl="6" marR="0" rtl="0" algn="l">
+    <a:lvl7pPr marR="0" lvl="6" algn="l" rtl="0">
       <a:lnSpc>
         <a:spcPct val="100000"/>
       </a:lnSpc>
@@ -1354,7 +1379,7 @@
         <a:srgbClr val="000000"/>
       </a:buClr>
       <a:buFont typeface="Arial"/>
-      <a:defRPr b="0" i="0" sz="1400" u="none" cap="none" strike="noStrike">
+      <a:defRPr sz="1400" b="0" i="0" u="none" strike="noStrike" cap="none">
         <a:solidFill>
           <a:srgbClr val="000000"/>
         </a:solidFill>
@@ -1364,7 +1389,7 @@
         <a:sym typeface="Arial"/>
       </a:defRPr>
     </a:lvl7pPr>
-    <a:lvl8pPr lvl="7" marR="0" rtl="0" algn="l">
+    <a:lvl8pPr marR="0" lvl="7" algn="l" rtl="0">
       <a:lnSpc>
         <a:spcPct val="100000"/>
       </a:lnSpc>
@@ -1378,7 +1403,7 @@
         <a:srgbClr val="000000"/>
       </a:buClr>
       <a:buFont typeface="Arial"/>
-      <a:defRPr b="0" i="0" sz="1400" u="none" cap="none" strike="noStrike">
+      <a:defRPr sz="1400" b="0" i="0" u="none" strike="noStrike" cap="none">
         <a:solidFill>
           <a:srgbClr val="000000"/>
         </a:solidFill>
@@ -1388,7 +1413,7 @@
         <a:sym typeface="Arial"/>
       </a:defRPr>
     </a:lvl8pPr>
-    <a:lvl9pPr lvl="8" marR="0" rtl="0" algn="l">
+    <a:lvl9pPr marR="0" lvl="8" algn="l" rtl="0">
       <a:lnSpc>
         <a:spcPct val="100000"/>
       </a:lnSpc>
@@ -1402,7 +1427,7 @@
         <a:srgbClr val="000000"/>
       </a:buClr>
       <a:buFont typeface="Arial"/>
-      <a:defRPr b="0" i="0" sz="1400" u="none" cap="none" strike="noStrike">
+      <a:defRPr sz="1400" b="0" i="0" u="none" strike="noStrike" cap="none">
         <a:solidFill>
           <a:srgbClr val="000000"/>
         </a:solidFill>
@@ -1417,11 +1442,11 @@
 </file>
 
 <file path=ppt/notesSlides/notesSlide1.xml><?xml version="1.0" encoding="utf-8"?>
-<p:notes xmlns:a="http://schemas.openxmlformats.org/drawingml/2006/main" xmlns:r="http://schemas.openxmlformats.org/officeDocument/2006/relationships" xmlns:mc="http://schemas.openxmlformats.org/markup-compatibility/2006" xmlns:mv="urn:schemas-microsoft-com:mac:vml" xmlns:p="http://schemas.openxmlformats.org/presentationml/2006/main" xmlns:c="http://schemas.openxmlformats.org/drawingml/2006/chart" xmlns:dgm="http://schemas.openxmlformats.org/drawingml/2006/diagram" xmlns:o="urn:schemas-microsoft-com:office:office" xmlns:v="urn:schemas-microsoft-com:vml" xmlns:pvml="urn:schemas-microsoft-com:office:powerpoint" xmlns:com="http://schemas.openxmlformats.org/drawingml/2006/compatibility" xmlns:p14="http://schemas.microsoft.com/office/powerpoint/2010/main" xmlns:p15="http://schemas.microsoft.com/office/powerpoint/2012/main" xmlns:ahyp="http://schemas.microsoft.com/office/drawing/2018/hyperlinkcolor" showMasterPhAnim="0" showMasterSp="0">
+<p:notes xmlns:a="http://schemas.openxmlformats.org/drawingml/2006/main" xmlns:r="http://schemas.openxmlformats.org/officeDocument/2006/relationships" xmlns:p="http://schemas.openxmlformats.org/presentationml/2006/main" showMasterSp="0" showMasterPhAnim="0">
   <p:cSld>
     <p:spTree>
       <p:nvGrpSpPr>
-        <p:cNvPr id="12" name="Shape 12"/>
+        <p:cNvPr id="1" name="Shape 12"/>
         <p:cNvGrpSpPr/>
         <p:nvPr/>
       </p:nvGrpSpPr>
@@ -1436,9 +1461,11 @@
       <p:sp>
         <p:nvSpPr>
           <p:cNvPr id="13" name="Google Shape;13;p1:notes"/>
-          <p:cNvSpPr/>
+          <p:cNvSpPr>
+            <a:spLocks noGrp="1" noRot="1" noChangeAspect="1"/>
+          </p:cNvSpPr>
           <p:nvPr>
-            <p:ph idx="2" type="sldImg"/>
+            <p:ph type="sldImg" idx="2"/>
           </p:nvPr>
         </p:nvSpPr>
         <p:spPr>
@@ -1447,9 +1474,13 @@
             <a:ext cx="5486400" cy="3086100"/>
           </a:xfrm>
           <a:custGeom>
-            <a:rect b="b" l="l" r="r" t="t"/>
+            <a:avLst/>
+            <a:gdLst/>
+            <a:ahLst/>
+            <a:cxnLst/>
+            <a:rect l="l" t="t" r="r" b="b"/>
             <a:pathLst>
-              <a:path extrusionOk="0" h="120000" w="120000">
+              <a:path w="120000" h="120000" extrusionOk="0">
                 <a:moveTo>
                   <a:pt x="0" y="0"/>
                 </a:moveTo>
@@ -1467,23 +1498,25 @@
             </a:pathLst>
           </a:custGeom>
           <a:noFill/>
-          <a:ln cap="flat" cmpd="sng" w="12700">
+          <a:ln w="12700" cap="flat" cmpd="sng">
             <a:solidFill>
               <a:srgbClr val="000000"/>
             </a:solidFill>
             <a:prstDash val="solid"/>
             <a:round/>
-            <a:headEnd len="sm" w="sm" type="none"/>
-            <a:tailEnd len="sm" w="sm" type="none"/>
+            <a:headEnd type="none" w="sm" len="sm"/>
+            <a:tailEnd type="none" w="sm" len="sm"/>
           </a:ln>
         </p:spPr>
       </p:sp>
       <p:sp>
         <p:nvSpPr>
           <p:cNvPr id="14" name="Google Shape;14;p1:notes"/>
-          <p:cNvSpPr txBox="1"/>
+          <p:cNvSpPr txBox="1">
+            <a:spLocks noGrp="1"/>
+          </p:cNvSpPr>
           <p:nvPr>
-            <p:ph idx="1" type="body"/>
+            <p:ph type="body" idx="1"/>
           </p:nvPr>
         </p:nvSpPr>
         <p:spPr>
@@ -1500,12 +1533,12 @@
           </a:ln>
         </p:spPr>
         <p:txBody>
-          <a:bodyPr anchorCtr="0" anchor="t" bIns="45700" lIns="91425" spcFirstLastPara="1" rIns="91425" wrap="square" tIns="45700">
+          <a:bodyPr spcFirstLastPara="1" wrap="square" lIns="91425" tIns="45700" rIns="91425" bIns="45700" anchor="t" anchorCtr="0">
             <a:noAutofit/>
           </a:bodyPr>
           <a:lstStyle/>
           <a:p>
-            <a:pPr indent="0" lvl="0" marL="0" rtl="0" algn="l">
+            <a:pPr marL="0" lvl="0" indent="0" algn="l" rtl="0">
               <a:spcBef>
                 <a:spcPts val="0"/>
               </a:spcBef>
@@ -1514,9 +1547,6 @@
               </a:spcAft>
               <a:buNone/>
             </a:pPr>
-            <a:r>
-              <a:t/>
-            </a:r>
             <a:endParaRPr/>
           </a:p>
         </p:txBody>
@@ -1524,9 +1554,11 @@
       <p:sp>
         <p:nvSpPr>
           <p:cNvPr id="15" name="Google Shape;15;p1:notes"/>
-          <p:cNvSpPr txBox="1"/>
+          <p:cNvSpPr txBox="1">
+            <a:spLocks noGrp="1"/>
+          </p:cNvSpPr>
           <p:nvPr>
-            <p:ph idx="12" type="sldNum"/>
+            <p:ph type="sldNum" idx="12"/>
           </p:nvPr>
         </p:nvSpPr>
         <p:spPr>
@@ -1543,12 +1575,12 @@
           </a:ln>
         </p:spPr>
         <p:txBody>
-          <a:bodyPr anchorCtr="0" anchor="b" bIns="45700" lIns="91425" spcFirstLastPara="1" rIns="91425" wrap="square" tIns="45700">
+          <a:bodyPr spcFirstLastPara="1" wrap="square" lIns="91425" tIns="45700" rIns="91425" bIns="45700" anchor="b" anchorCtr="0">
             <a:noAutofit/>
           </a:bodyPr>
           <a:lstStyle/>
           <a:p>
-            <a:pPr indent="0" lvl="0" marL="0" rtl="0" algn="r">
+            <a:pPr marL="0" lvl="0" indent="0" algn="r" rtl="0">
               <a:spcBef>
                 <a:spcPts val="0"/>
               </a:spcBef>
@@ -1559,7 +1591,7 @@
             </a:pPr>
             <a:fld id="{00000000-1234-1234-1234-123412341234}" type="slidenum">
               <a:rPr lang="en-US"/>
-              <a:t>‹#›</a:t>
+              <a:t>1</a:t>
             </a:fld>
             <a:endParaRPr/>
           </a:p>
@@ -1574,11 +1606,11 @@
 </file>
 
 <file path=ppt/notesSlides/notesSlide2.xml><?xml version="1.0" encoding="utf-8"?>
-<p:notes xmlns:a="http://schemas.openxmlformats.org/drawingml/2006/main" xmlns:r="http://schemas.openxmlformats.org/officeDocument/2006/relationships" xmlns:mc="http://schemas.openxmlformats.org/markup-compatibility/2006" xmlns:mv="urn:schemas-microsoft-com:mac:vml" xmlns:p="http://schemas.openxmlformats.org/presentationml/2006/main" xmlns:c="http://schemas.openxmlformats.org/drawingml/2006/chart" xmlns:dgm="http://schemas.openxmlformats.org/drawingml/2006/diagram" xmlns:o="urn:schemas-microsoft-com:office:office" xmlns:v="urn:schemas-microsoft-com:vml" xmlns:pvml="urn:schemas-microsoft-com:office:powerpoint" xmlns:com="http://schemas.openxmlformats.org/drawingml/2006/compatibility" xmlns:p14="http://schemas.microsoft.com/office/powerpoint/2010/main" xmlns:p15="http://schemas.microsoft.com/office/powerpoint/2012/main" xmlns:ahyp="http://schemas.microsoft.com/office/drawing/2018/hyperlinkcolor" showMasterPhAnim="0" showMasterSp="0">
+<p:notes xmlns:a="http://schemas.openxmlformats.org/drawingml/2006/main" xmlns:r="http://schemas.openxmlformats.org/officeDocument/2006/relationships" xmlns:p="http://schemas.openxmlformats.org/presentationml/2006/main" showMasterSp="0" showMasterPhAnim="0">
   <p:cSld>
     <p:spTree>
       <p:nvGrpSpPr>
-        <p:cNvPr id="37" name="Shape 37"/>
+        <p:cNvPr id="1" name="Shape 37"/>
         <p:cNvGrpSpPr/>
         <p:nvPr/>
       </p:nvGrpSpPr>
@@ -1593,9 +1625,11 @@
       <p:sp>
         <p:nvSpPr>
           <p:cNvPr id="38" name="Google Shape;38;p2:notes"/>
-          <p:cNvSpPr/>
+          <p:cNvSpPr>
+            <a:spLocks noGrp="1" noRot="1" noChangeAspect="1"/>
+          </p:cNvSpPr>
           <p:nvPr>
-            <p:ph idx="2" type="sldImg"/>
+            <p:ph type="sldImg" idx="2"/>
           </p:nvPr>
         </p:nvSpPr>
         <p:spPr>
@@ -1604,9 +1638,13 @@
             <a:ext cx="5486400" cy="3086100"/>
           </a:xfrm>
           <a:custGeom>
-            <a:rect b="b" l="l" r="r" t="t"/>
+            <a:avLst/>
+            <a:gdLst/>
+            <a:ahLst/>
+            <a:cxnLst/>
+            <a:rect l="l" t="t" r="r" b="b"/>
             <a:pathLst>
-              <a:path extrusionOk="0" h="120000" w="120000">
+              <a:path w="120000" h="120000" extrusionOk="0">
                 <a:moveTo>
                   <a:pt x="0" y="0"/>
                 </a:moveTo>
@@ -1624,23 +1662,25 @@
             </a:pathLst>
           </a:custGeom>
           <a:noFill/>
-          <a:ln cap="flat" cmpd="sng" w="12700">
+          <a:ln w="12700" cap="flat" cmpd="sng">
             <a:solidFill>
               <a:srgbClr val="000000"/>
             </a:solidFill>
             <a:prstDash val="solid"/>
             <a:round/>
-            <a:headEnd len="sm" w="sm" type="none"/>
-            <a:tailEnd len="sm" w="sm" type="none"/>
+            <a:headEnd type="none" w="sm" len="sm"/>
+            <a:tailEnd type="none" w="sm" len="sm"/>
           </a:ln>
         </p:spPr>
       </p:sp>
       <p:sp>
         <p:nvSpPr>
           <p:cNvPr id="39" name="Google Shape;39;p2:notes"/>
-          <p:cNvSpPr txBox="1"/>
+          <p:cNvSpPr txBox="1">
+            <a:spLocks noGrp="1"/>
+          </p:cNvSpPr>
           <p:nvPr>
-            <p:ph idx="1" type="body"/>
+            <p:ph type="body" idx="1"/>
           </p:nvPr>
         </p:nvSpPr>
         <p:spPr>
@@ -1657,12 +1697,12 @@
           </a:ln>
         </p:spPr>
         <p:txBody>
-          <a:bodyPr anchorCtr="0" anchor="t" bIns="45700" lIns="91425" spcFirstLastPara="1" rIns="91425" wrap="square" tIns="45700">
+          <a:bodyPr spcFirstLastPara="1" wrap="square" lIns="91425" tIns="45700" rIns="91425" bIns="45700" anchor="t" anchorCtr="0">
             <a:noAutofit/>
           </a:bodyPr>
           <a:lstStyle/>
           <a:p>
-            <a:pPr indent="0" lvl="0" marL="0" rtl="0" algn="l">
+            <a:pPr marL="0" lvl="0" indent="0" algn="l" rtl="0">
               <a:spcBef>
                 <a:spcPts val="0"/>
               </a:spcBef>
@@ -1671,9 +1711,6 @@
               </a:spcAft>
               <a:buNone/>
             </a:pPr>
-            <a:r>
-              <a:t/>
-            </a:r>
             <a:endParaRPr/>
           </a:p>
         </p:txBody>
@@ -1681,9 +1718,11 @@
       <p:sp>
         <p:nvSpPr>
           <p:cNvPr id="40" name="Google Shape;40;p2:notes"/>
-          <p:cNvSpPr txBox="1"/>
+          <p:cNvSpPr txBox="1">
+            <a:spLocks noGrp="1"/>
+          </p:cNvSpPr>
           <p:nvPr>
-            <p:ph idx="12" type="sldNum"/>
+            <p:ph type="sldNum" idx="12"/>
           </p:nvPr>
         </p:nvSpPr>
         <p:spPr>
@@ -1700,12 +1739,12 @@
           </a:ln>
         </p:spPr>
         <p:txBody>
-          <a:bodyPr anchorCtr="0" anchor="b" bIns="45700" lIns="91425" spcFirstLastPara="1" rIns="91425" wrap="square" tIns="45700">
+          <a:bodyPr spcFirstLastPara="1" wrap="square" lIns="91425" tIns="45700" rIns="91425" bIns="45700" anchor="b" anchorCtr="0">
             <a:noAutofit/>
           </a:bodyPr>
           <a:lstStyle/>
           <a:p>
-            <a:pPr indent="0" lvl="0" marL="0" rtl="0" algn="r">
+            <a:pPr marL="0" lvl="0" indent="0" algn="r" rtl="0">
               <a:spcBef>
                 <a:spcPts val="0"/>
               </a:spcBef>
@@ -1716,7 +1755,7 @@
             </a:pPr>
             <a:fld id="{00000000-1234-1234-1234-123412341234}" type="slidenum">
               <a:rPr lang="en-US"/>
-              <a:t>‹#›</a:t>
+              <a:t>2</a:t>
             </a:fld>
             <a:endParaRPr/>
           </a:p>
@@ -1731,11 +1770,11 @@
 </file>
 
 <file path=ppt/notesSlides/notesSlide3.xml><?xml version="1.0" encoding="utf-8"?>
-<p:notes xmlns:a="http://schemas.openxmlformats.org/drawingml/2006/main" xmlns:r="http://schemas.openxmlformats.org/officeDocument/2006/relationships" xmlns:mc="http://schemas.openxmlformats.org/markup-compatibility/2006" xmlns:mv="urn:schemas-microsoft-com:mac:vml" xmlns:p="http://schemas.openxmlformats.org/presentationml/2006/main" xmlns:c="http://schemas.openxmlformats.org/drawingml/2006/chart" xmlns:dgm="http://schemas.openxmlformats.org/drawingml/2006/diagram" xmlns:o="urn:schemas-microsoft-com:office:office" xmlns:v="urn:schemas-microsoft-com:vml" xmlns:pvml="urn:schemas-microsoft-com:office:powerpoint" xmlns:com="http://schemas.openxmlformats.org/drawingml/2006/compatibility" xmlns:p14="http://schemas.microsoft.com/office/powerpoint/2010/main" xmlns:p15="http://schemas.microsoft.com/office/powerpoint/2012/main" xmlns:ahyp="http://schemas.microsoft.com/office/drawing/2018/hyperlinkcolor" showMasterPhAnim="0" showMasterSp="0">
+<p:notes xmlns:a="http://schemas.openxmlformats.org/drawingml/2006/main" xmlns:r="http://schemas.openxmlformats.org/officeDocument/2006/relationships" xmlns:p="http://schemas.openxmlformats.org/presentationml/2006/main" showMasterSp="0" showMasterPhAnim="0">
   <p:cSld>
     <p:spTree>
       <p:nvGrpSpPr>
-        <p:cNvPr id="81" name="Shape 81"/>
+        <p:cNvPr id="1" name="Shape 81"/>
         <p:cNvGrpSpPr/>
         <p:nvPr/>
       </p:nvGrpSpPr>
@@ -1750,9 +1789,11 @@
       <p:sp>
         <p:nvSpPr>
           <p:cNvPr id="82" name="Google Shape;82;p3:notes"/>
-          <p:cNvSpPr/>
+          <p:cNvSpPr>
+            <a:spLocks noGrp="1" noRot="1" noChangeAspect="1"/>
+          </p:cNvSpPr>
           <p:nvPr>
-            <p:ph idx="2" type="sldImg"/>
+            <p:ph type="sldImg" idx="2"/>
           </p:nvPr>
         </p:nvSpPr>
         <p:spPr>
@@ -1761,9 +1802,13 @@
             <a:ext cx="5486400" cy="3086100"/>
           </a:xfrm>
           <a:custGeom>
-            <a:rect b="b" l="l" r="r" t="t"/>
+            <a:avLst/>
+            <a:gdLst/>
+            <a:ahLst/>
+            <a:cxnLst/>
+            <a:rect l="l" t="t" r="r" b="b"/>
             <a:pathLst>
-              <a:path extrusionOk="0" h="120000" w="120000">
+              <a:path w="120000" h="120000" extrusionOk="0">
                 <a:moveTo>
                   <a:pt x="0" y="0"/>
                 </a:moveTo>
@@ -1781,23 +1826,25 @@
             </a:pathLst>
           </a:custGeom>
           <a:noFill/>
-          <a:ln cap="flat" cmpd="sng" w="12700">
+          <a:ln w="12700" cap="flat" cmpd="sng">
             <a:solidFill>
               <a:srgbClr val="000000"/>
             </a:solidFill>
             <a:prstDash val="solid"/>
             <a:round/>
-            <a:headEnd len="sm" w="sm" type="none"/>
-            <a:tailEnd len="sm" w="sm" type="none"/>
+            <a:headEnd type="none" w="sm" len="sm"/>
+            <a:tailEnd type="none" w="sm" len="sm"/>
           </a:ln>
         </p:spPr>
       </p:sp>
       <p:sp>
         <p:nvSpPr>
           <p:cNvPr id="83" name="Google Shape;83;p3:notes"/>
-          <p:cNvSpPr txBox="1"/>
+          <p:cNvSpPr txBox="1">
+            <a:spLocks noGrp="1"/>
+          </p:cNvSpPr>
           <p:nvPr>
-            <p:ph idx="1" type="body"/>
+            <p:ph type="body" idx="1"/>
           </p:nvPr>
         </p:nvSpPr>
         <p:spPr>
@@ -1814,12 +1861,12 @@
           </a:ln>
         </p:spPr>
         <p:txBody>
-          <a:bodyPr anchorCtr="0" anchor="t" bIns="45700" lIns="91425" spcFirstLastPara="1" rIns="91425" wrap="square" tIns="45700">
+          <a:bodyPr spcFirstLastPara="1" wrap="square" lIns="91425" tIns="45700" rIns="91425" bIns="45700" anchor="t" anchorCtr="0">
             <a:noAutofit/>
           </a:bodyPr>
           <a:lstStyle/>
           <a:p>
-            <a:pPr indent="0" lvl="0" marL="0" rtl="0" algn="l">
+            <a:pPr marL="0" lvl="0" indent="0" algn="l" rtl="0">
               <a:spcBef>
                 <a:spcPts val="0"/>
               </a:spcBef>
@@ -1828,9 +1875,6 @@
               </a:spcAft>
               <a:buNone/>
             </a:pPr>
-            <a:r>
-              <a:t/>
-            </a:r>
             <a:endParaRPr/>
           </a:p>
         </p:txBody>
@@ -1838,9 +1882,11 @@
       <p:sp>
         <p:nvSpPr>
           <p:cNvPr id="84" name="Google Shape;84;p3:notes"/>
-          <p:cNvSpPr txBox="1"/>
+          <p:cNvSpPr txBox="1">
+            <a:spLocks noGrp="1"/>
+          </p:cNvSpPr>
           <p:nvPr>
-            <p:ph idx="12" type="sldNum"/>
+            <p:ph type="sldNum" idx="12"/>
           </p:nvPr>
         </p:nvSpPr>
         <p:spPr>
@@ -1857,12 +1903,12 @@
           </a:ln>
         </p:spPr>
         <p:txBody>
-          <a:bodyPr anchorCtr="0" anchor="b" bIns="45700" lIns="91425" spcFirstLastPara="1" rIns="91425" wrap="square" tIns="45700">
+          <a:bodyPr spcFirstLastPara="1" wrap="square" lIns="91425" tIns="45700" rIns="91425" bIns="45700" anchor="b" anchorCtr="0">
             <a:noAutofit/>
           </a:bodyPr>
           <a:lstStyle/>
           <a:p>
-            <a:pPr indent="0" lvl="0" marL="0" rtl="0" algn="r">
+            <a:pPr marL="0" lvl="0" indent="0" algn="r" rtl="0">
               <a:spcBef>
                 <a:spcPts val="0"/>
               </a:spcBef>
@@ -1873,7 +1919,7 @@
             </a:pPr>
             <a:fld id="{00000000-1234-1234-1234-123412341234}" type="slidenum">
               <a:rPr lang="en-US"/>
-              <a:t>‹#›</a:t>
+              <a:t>3</a:t>
             </a:fld>
             <a:endParaRPr/>
           </a:p>
@@ -1888,11 +1934,11 @@
 </file>
 
 <file path=ppt/notesSlides/notesSlide4.xml><?xml version="1.0" encoding="utf-8"?>
-<p:notes xmlns:a="http://schemas.openxmlformats.org/drawingml/2006/main" xmlns:r="http://schemas.openxmlformats.org/officeDocument/2006/relationships" xmlns:mc="http://schemas.openxmlformats.org/markup-compatibility/2006" xmlns:mv="urn:schemas-microsoft-com:mac:vml" xmlns:p="http://schemas.openxmlformats.org/presentationml/2006/main" xmlns:c="http://schemas.openxmlformats.org/drawingml/2006/chart" xmlns:dgm="http://schemas.openxmlformats.org/drawingml/2006/diagram" xmlns:o="urn:schemas-microsoft-com:office:office" xmlns:v="urn:schemas-microsoft-com:vml" xmlns:pvml="urn:schemas-microsoft-com:office:powerpoint" xmlns:com="http://schemas.openxmlformats.org/drawingml/2006/compatibility" xmlns:p14="http://schemas.microsoft.com/office/powerpoint/2010/main" xmlns:p15="http://schemas.microsoft.com/office/powerpoint/2012/main" xmlns:ahyp="http://schemas.microsoft.com/office/drawing/2018/hyperlinkcolor" showMasterPhAnim="0" showMasterSp="0">
+<p:notes xmlns:a="http://schemas.openxmlformats.org/drawingml/2006/main" xmlns:r="http://schemas.openxmlformats.org/officeDocument/2006/relationships" xmlns:p="http://schemas.openxmlformats.org/presentationml/2006/main" showMasterSp="0" showMasterPhAnim="0">
   <p:cSld>
     <p:spTree>
       <p:nvGrpSpPr>
-        <p:cNvPr id="103" name="Shape 103"/>
+        <p:cNvPr id="1" name="Shape 103"/>
         <p:cNvGrpSpPr/>
         <p:nvPr/>
       </p:nvGrpSpPr>
@@ -1907,9 +1953,11 @@
       <p:sp>
         <p:nvSpPr>
           <p:cNvPr id="104" name="Google Shape;104;p4:notes"/>
-          <p:cNvSpPr/>
+          <p:cNvSpPr>
+            <a:spLocks noGrp="1" noRot="1" noChangeAspect="1"/>
+          </p:cNvSpPr>
           <p:nvPr>
-            <p:ph idx="2" type="sldImg"/>
+            <p:ph type="sldImg" idx="2"/>
           </p:nvPr>
         </p:nvSpPr>
         <p:spPr>
@@ -1918,9 +1966,13 @@
             <a:ext cx="5486400" cy="3086100"/>
           </a:xfrm>
           <a:custGeom>
-            <a:rect b="b" l="l" r="r" t="t"/>
+            <a:avLst/>
+            <a:gdLst/>
+            <a:ahLst/>
+            <a:cxnLst/>
+            <a:rect l="l" t="t" r="r" b="b"/>
             <a:pathLst>
-              <a:path extrusionOk="0" h="120000" w="120000">
+              <a:path w="120000" h="120000" extrusionOk="0">
                 <a:moveTo>
                   <a:pt x="0" y="0"/>
                 </a:moveTo>
@@ -1938,23 +1990,25 @@
             </a:pathLst>
           </a:custGeom>
           <a:noFill/>
-          <a:ln cap="flat" cmpd="sng" w="12700">
+          <a:ln w="12700" cap="flat" cmpd="sng">
             <a:solidFill>
               <a:srgbClr val="000000"/>
             </a:solidFill>
             <a:prstDash val="solid"/>
             <a:round/>
-            <a:headEnd len="sm" w="sm" type="none"/>
-            <a:tailEnd len="sm" w="sm" type="none"/>
+            <a:headEnd type="none" w="sm" len="sm"/>
+            <a:tailEnd type="none" w="sm" len="sm"/>
           </a:ln>
         </p:spPr>
       </p:sp>
       <p:sp>
         <p:nvSpPr>
           <p:cNvPr id="105" name="Google Shape;105;p4:notes"/>
-          <p:cNvSpPr txBox="1"/>
+          <p:cNvSpPr txBox="1">
+            <a:spLocks noGrp="1"/>
+          </p:cNvSpPr>
           <p:nvPr>
-            <p:ph idx="1" type="body"/>
+            <p:ph type="body" idx="1"/>
           </p:nvPr>
         </p:nvSpPr>
         <p:spPr>
@@ -1971,12 +2025,12 @@
           </a:ln>
         </p:spPr>
         <p:txBody>
-          <a:bodyPr anchorCtr="0" anchor="t" bIns="45700" lIns="91425" spcFirstLastPara="1" rIns="91425" wrap="square" tIns="45700">
+          <a:bodyPr spcFirstLastPara="1" wrap="square" lIns="91425" tIns="45700" rIns="91425" bIns="45700" anchor="t" anchorCtr="0">
             <a:noAutofit/>
           </a:bodyPr>
           <a:lstStyle/>
           <a:p>
-            <a:pPr indent="0" lvl="0" marL="0" rtl="0" algn="l">
+            <a:pPr marL="0" lvl="0" indent="0" algn="l" rtl="0">
               <a:spcBef>
                 <a:spcPts val="0"/>
               </a:spcBef>
@@ -1985,9 +2039,6 @@
               </a:spcAft>
               <a:buNone/>
             </a:pPr>
-            <a:r>
-              <a:t/>
-            </a:r>
             <a:endParaRPr/>
           </a:p>
         </p:txBody>
@@ -1995,9 +2046,11 @@
       <p:sp>
         <p:nvSpPr>
           <p:cNvPr id="106" name="Google Shape;106;p4:notes"/>
-          <p:cNvSpPr txBox="1"/>
+          <p:cNvSpPr txBox="1">
+            <a:spLocks noGrp="1"/>
+          </p:cNvSpPr>
           <p:nvPr>
-            <p:ph idx="12" type="sldNum"/>
+            <p:ph type="sldNum" idx="12"/>
           </p:nvPr>
         </p:nvSpPr>
         <p:spPr>
@@ -2014,12 +2067,12 @@
           </a:ln>
         </p:spPr>
         <p:txBody>
-          <a:bodyPr anchorCtr="0" anchor="b" bIns="45700" lIns="91425" spcFirstLastPara="1" rIns="91425" wrap="square" tIns="45700">
+          <a:bodyPr spcFirstLastPara="1" wrap="square" lIns="91425" tIns="45700" rIns="91425" bIns="45700" anchor="b" anchorCtr="0">
             <a:noAutofit/>
           </a:bodyPr>
           <a:lstStyle/>
           <a:p>
-            <a:pPr indent="0" lvl="0" marL="0" rtl="0" algn="r">
+            <a:pPr marL="0" lvl="0" indent="0" algn="r" rtl="0">
               <a:spcBef>
                 <a:spcPts val="0"/>
               </a:spcBef>
@@ -2030,7 +2083,7 @@
             </a:pPr>
             <a:fld id="{00000000-1234-1234-1234-123412341234}" type="slidenum">
               <a:rPr lang="en-US"/>
-              <a:t>‹#›</a:t>
+              <a:t>4</a:t>
             </a:fld>
             <a:endParaRPr/>
           </a:p>
@@ -2045,11 +2098,11 @@
 </file>
 
 <file path=ppt/notesSlides/notesSlide5.xml><?xml version="1.0" encoding="utf-8"?>
-<p:notes xmlns:a="http://schemas.openxmlformats.org/drawingml/2006/main" xmlns:r="http://schemas.openxmlformats.org/officeDocument/2006/relationships" xmlns:mc="http://schemas.openxmlformats.org/markup-compatibility/2006" xmlns:mv="urn:schemas-microsoft-com:mac:vml" xmlns:p="http://schemas.openxmlformats.org/presentationml/2006/main" xmlns:c="http://schemas.openxmlformats.org/drawingml/2006/chart" xmlns:dgm="http://schemas.openxmlformats.org/drawingml/2006/diagram" xmlns:o="urn:schemas-microsoft-com:office:office" xmlns:v="urn:schemas-microsoft-com:vml" xmlns:pvml="urn:schemas-microsoft-com:office:powerpoint" xmlns:com="http://schemas.openxmlformats.org/drawingml/2006/compatibility" xmlns:p14="http://schemas.microsoft.com/office/powerpoint/2010/main" xmlns:p15="http://schemas.microsoft.com/office/powerpoint/2012/main" xmlns:ahyp="http://schemas.microsoft.com/office/drawing/2018/hyperlinkcolor" showMasterPhAnim="0" showMasterSp="0">
+<p:notes xmlns:a="http://schemas.openxmlformats.org/drawingml/2006/main" xmlns:r="http://schemas.openxmlformats.org/officeDocument/2006/relationships" xmlns:p="http://schemas.openxmlformats.org/presentationml/2006/main" showMasterSp="0" showMasterPhAnim="0">
   <p:cSld>
     <p:spTree>
       <p:nvGrpSpPr>
-        <p:cNvPr id="125" name="Shape 125"/>
+        <p:cNvPr id="1" name="Shape 125"/>
         <p:cNvGrpSpPr/>
         <p:nvPr/>
       </p:nvGrpSpPr>
@@ -2064,9 +2117,11 @@
       <p:sp>
         <p:nvSpPr>
           <p:cNvPr id="126" name="Google Shape;126;p5:notes"/>
-          <p:cNvSpPr/>
+          <p:cNvSpPr>
+            <a:spLocks noGrp="1" noRot="1" noChangeAspect="1"/>
+          </p:cNvSpPr>
           <p:nvPr>
-            <p:ph idx="2" type="sldImg"/>
+            <p:ph type="sldImg" idx="2"/>
           </p:nvPr>
         </p:nvSpPr>
         <p:spPr>
@@ -2075,9 +2130,13 @@
             <a:ext cx="5486400" cy="3086100"/>
           </a:xfrm>
           <a:custGeom>
-            <a:rect b="b" l="l" r="r" t="t"/>
+            <a:avLst/>
+            <a:gdLst/>
+            <a:ahLst/>
+            <a:cxnLst/>
+            <a:rect l="l" t="t" r="r" b="b"/>
             <a:pathLst>
-              <a:path extrusionOk="0" h="120000" w="120000">
+              <a:path w="120000" h="120000" extrusionOk="0">
                 <a:moveTo>
                   <a:pt x="0" y="0"/>
                 </a:moveTo>
@@ -2095,23 +2154,25 @@
             </a:pathLst>
           </a:custGeom>
           <a:noFill/>
-          <a:ln cap="flat" cmpd="sng" w="12700">
+          <a:ln w="12700" cap="flat" cmpd="sng">
             <a:solidFill>
               <a:srgbClr val="000000"/>
             </a:solidFill>
             <a:prstDash val="solid"/>
             <a:round/>
-            <a:headEnd len="sm" w="sm" type="none"/>
-            <a:tailEnd len="sm" w="sm" type="none"/>
+            <a:headEnd type="none" w="sm" len="sm"/>
+            <a:tailEnd type="none" w="sm" len="sm"/>
           </a:ln>
         </p:spPr>
       </p:sp>
       <p:sp>
         <p:nvSpPr>
           <p:cNvPr id="127" name="Google Shape;127;p5:notes"/>
-          <p:cNvSpPr txBox="1"/>
+          <p:cNvSpPr txBox="1">
+            <a:spLocks noGrp="1"/>
+          </p:cNvSpPr>
           <p:nvPr>
-            <p:ph idx="1" type="body"/>
+            <p:ph type="body" idx="1"/>
           </p:nvPr>
         </p:nvSpPr>
         <p:spPr>
@@ -2128,12 +2189,12 @@
           </a:ln>
         </p:spPr>
         <p:txBody>
-          <a:bodyPr anchorCtr="0" anchor="t" bIns="45700" lIns="91425" spcFirstLastPara="1" rIns="91425" wrap="square" tIns="45700">
+          <a:bodyPr spcFirstLastPara="1" wrap="square" lIns="91425" tIns="45700" rIns="91425" bIns="45700" anchor="t" anchorCtr="0">
             <a:noAutofit/>
           </a:bodyPr>
           <a:lstStyle/>
           <a:p>
-            <a:pPr indent="0" lvl="0" marL="0" rtl="0" algn="l">
+            <a:pPr marL="0" lvl="0" indent="0" algn="l" rtl="0">
               <a:spcBef>
                 <a:spcPts val="0"/>
               </a:spcBef>
@@ -2142,9 +2203,6 @@
               </a:spcAft>
               <a:buNone/>
             </a:pPr>
-            <a:r>
-              <a:t/>
-            </a:r>
             <a:endParaRPr/>
           </a:p>
         </p:txBody>
@@ -2152,9 +2210,11 @@
       <p:sp>
         <p:nvSpPr>
           <p:cNvPr id="128" name="Google Shape;128;p5:notes"/>
-          <p:cNvSpPr txBox="1"/>
+          <p:cNvSpPr txBox="1">
+            <a:spLocks noGrp="1"/>
+          </p:cNvSpPr>
           <p:nvPr>
-            <p:ph idx="12" type="sldNum"/>
+            <p:ph type="sldNum" idx="12"/>
           </p:nvPr>
         </p:nvSpPr>
         <p:spPr>
@@ -2171,12 +2231,12 @@
           </a:ln>
         </p:spPr>
         <p:txBody>
-          <a:bodyPr anchorCtr="0" anchor="b" bIns="45700" lIns="91425" spcFirstLastPara="1" rIns="91425" wrap="square" tIns="45700">
+          <a:bodyPr spcFirstLastPara="1" wrap="square" lIns="91425" tIns="45700" rIns="91425" bIns="45700" anchor="b" anchorCtr="0">
             <a:noAutofit/>
           </a:bodyPr>
           <a:lstStyle/>
           <a:p>
-            <a:pPr indent="0" lvl="0" marL="0" rtl="0" algn="r">
+            <a:pPr marL="0" lvl="0" indent="0" algn="r" rtl="0">
               <a:spcBef>
                 <a:spcPts val="0"/>
               </a:spcBef>
@@ -2187,7 +2247,7 @@
             </a:pPr>
             <a:fld id="{00000000-1234-1234-1234-123412341234}" type="slidenum">
               <a:rPr lang="en-US"/>
-              <a:t>‹#›</a:t>
+              <a:t>5</a:t>
             </a:fld>
             <a:endParaRPr/>
           </a:p>
@@ -2202,18 +2262,19 @@
 </file>
 
 <file path=ppt/slideLayouts/slideLayout1.xml><?xml version="1.0" encoding="utf-8"?>
-<p:sldLayout xmlns:a="http://schemas.openxmlformats.org/drawingml/2006/main" xmlns:r="http://schemas.openxmlformats.org/officeDocument/2006/relationships" xmlns:mc="http://schemas.openxmlformats.org/markup-compatibility/2006" xmlns:mv="urn:schemas-microsoft-com:mac:vml" xmlns:p="http://schemas.openxmlformats.org/presentationml/2006/main" xmlns:c="http://schemas.openxmlformats.org/drawingml/2006/chart" xmlns:dgm="http://schemas.openxmlformats.org/drawingml/2006/diagram" xmlns:o="urn:schemas-microsoft-com:office:office" xmlns:v="urn:schemas-microsoft-com:vml" xmlns:pvml="urn:schemas-microsoft-com:office:powerpoint" xmlns:com="http://schemas.openxmlformats.org/drawingml/2006/compatibility" xmlns:p14="http://schemas.microsoft.com/office/powerpoint/2010/main" xmlns:p15="http://schemas.microsoft.com/office/powerpoint/2012/main" xmlns:ahyp="http://schemas.microsoft.com/office/drawing/2018/hyperlinkcolor" matchingName="DEFAULT">
+<p:sldLayout xmlns:a="http://schemas.openxmlformats.org/drawingml/2006/main" xmlns:r="http://schemas.openxmlformats.org/officeDocument/2006/relationships" xmlns:p="http://schemas.openxmlformats.org/presentationml/2006/main" matchingName="DEFAULT">
   <p:cSld name="DEFAULT">
     <p:bg>
       <p:bgPr>
         <a:solidFill>
           <a:schemeClr val="lt1"/>
         </a:solidFill>
+        <a:effectLst/>
       </p:bgPr>
     </p:bg>
     <p:spTree>
       <p:nvGrpSpPr>
-        <p:cNvPr id="10" name="Shape 10"/>
+        <p:cNvPr id="1" name="Shape 10"/>
         <p:cNvGrpSpPr/>
         <p:nvPr/>
       </p:nvGrpSpPr>
@@ -2234,18 +2295,19 @@
 </file>
 
 <file path=ppt/slideLayouts/slideLayout2.xml><?xml version="1.0" encoding="utf-8"?>
-<p:sldLayout xmlns:a="http://schemas.openxmlformats.org/drawingml/2006/main" xmlns:r="http://schemas.openxmlformats.org/officeDocument/2006/relationships" xmlns:mc="http://schemas.openxmlformats.org/markup-compatibility/2006" xmlns:mv="urn:schemas-microsoft-com:mac:vml" xmlns:p="http://schemas.openxmlformats.org/presentationml/2006/main" xmlns:c="http://schemas.openxmlformats.org/drawingml/2006/chart" xmlns:dgm="http://schemas.openxmlformats.org/drawingml/2006/diagram" xmlns:o="urn:schemas-microsoft-com:office:office" xmlns:v="urn:schemas-microsoft-com:vml" xmlns:pvml="urn:schemas-microsoft-com:office:powerpoint" xmlns:com="http://schemas.openxmlformats.org/drawingml/2006/compatibility" xmlns:p14="http://schemas.microsoft.com/office/powerpoint/2010/main" xmlns:p15="http://schemas.microsoft.com/office/powerpoint/2012/main" xmlns:ahyp="http://schemas.microsoft.com/office/drawing/2018/hyperlinkcolor" matchingName="BLANK" type="blank">
+<p:sldLayout xmlns:a="http://schemas.openxmlformats.org/drawingml/2006/main" xmlns:r="http://schemas.openxmlformats.org/officeDocument/2006/relationships" xmlns:p="http://schemas.openxmlformats.org/presentationml/2006/main" matchingName="BLANK" type="blank">
   <p:cSld name="BLANK">
     <p:bg>
       <p:bgPr>
         <a:solidFill>
           <a:srgbClr val="FFFFFF"/>
         </a:solidFill>
+        <a:effectLst/>
       </p:bgPr>
     </p:bg>
     <p:spTree>
       <p:nvGrpSpPr>
-        <p:cNvPr id="11" name="Shape 11"/>
+        <p:cNvPr id="1" name="Shape 11"/>
         <p:cNvGrpSpPr/>
         <p:nvPr/>
       </p:nvGrpSpPr>
@@ -2266,11 +2328,16 @@
 </file>
 
 <file path=ppt/slideMasters/slideMaster1.xml><?xml version="1.0" encoding="utf-8"?>
-<p:sldMaster xmlns:a="http://schemas.openxmlformats.org/drawingml/2006/main" xmlns:r="http://schemas.openxmlformats.org/officeDocument/2006/relationships" xmlns:mc="http://schemas.openxmlformats.org/markup-compatibility/2006" xmlns:mv="urn:schemas-microsoft-com:mac:vml" xmlns:p="http://schemas.openxmlformats.org/presentationml/2006/main" xmlns:c="http://schemas.openxmlformats.org/drawingml/2006/chart" xmlns:dgm="http://schemas.openxmlformats.org/drawingml/2006/diagram" xmlns:o="urn:schemas-microsoft-com:office:office" xmlns:v="urn:schemas-microsoft-com:vml" xmlns:pvml="urn:schemas-microsoft-com:office:powerpoint" xmlns:com="http://schemas.openxmlformats.org/drawingml/2006/compatibility" xmlns:p14="http://schemas.microsoft.com/office/powerpoint/2010/main" xmlns:p15="http://schemas.microsoft.com/office/powerpoint/2012/main" xmlns:ahyp="http://schemas.microsoft.com/office/drawing/2018/hyperlinkcolor">
+<p:sldMaster xmlns:a="http://schemas.openxmlformats.org/drawingml/2006/main" xmlns:r="http://schemas.openxmlformats.org/officeDocument/2006/relationships" xmlns:p="http://schemas.openxmlformats.org/presentationml/2006/main">
   <p:cSld>
+    <p:bg>
+      <p:bgRef idx="1001">
+        <a:schemeClr val="bg1"/>
+      </p:bgRef>
+    </p:bg>
     <p:spTree>
       <p:nvGrpSpPr>
-        <p:cNvPr id="9" name="Shape 9"/>
+        <p:cNvPr id="1" name="Shape 9"/>
         <p:cNvGrpSpPr/>
         <p:nvPr/>
       </p:nvGrpSpPr>
@@ -2284,15 +2351,15 @@
       </p:grpSpPr>
     </p:spTree>
   </p:cSld>
-  <p:clrMap accent1="accent1" accent2="accent2" accent3="accent3" accent4="accent4" accent5="accent5" accent6="accent6" bg1="lt1" bg2="dk2" tx1="dk1" tx2="lt2" folHlink="folHlink" hlink="hlink"/>
+  <p:clrMap bg1="lt1" tx1="dk1" bg2="dk2" tx2="lt2" accent1="accent1" accent2="accent2" accent3="accent3" accent4="accent4" accent5="accent5" accent6="accent6" hlink="hlink" folHlink="folHlink"/>
   <p:sldLayoutIdLst>
     <p:sldLayoutId id="2147483648" r:id="rId1"/>
     <p:sldLayoutId id="2147483649" r:id="rId2"/>
   </p:sldLayoutIdLst>
-  <p:hf dt="0" ftr="0" hdr="0" sldNum="0"/>
+  <p:hf sldNum="0" hdr="0" ftr="0" dt="0"/>
   <p:txStyles>
     <p:titleStyle>
-      <a:defPPr lvl="0" marR="0" rtl="0" algn="l">
+      <a:defPPr marR="0" lvl="0" algn="l" rtl="0">
         <a:lnSpc>
           <a:spcPct val="100000"/>
         </a:lnSpc>
@@ -2303,7 +2370,7 @@
           <a:spcPts val="0"/>
         </a:spcAft>
       </a:defPPr>
-      <a:lvl1pPr lvl="0" marR="0" rtl="0" algn="l">
+      <a:lvl1pPr marR="0" lvl="0" algn="l" rtl="0">
         <a:lnSpc>
           <a:spcPct val="100000"/>
         </a:lnSpc>
@@ -2317,7 +2384,7 @@
           <a:srgbClr val="000000"/>
         </a:buClr>
         <a:buFont typeface="Arial"/>
-        <a:defRPr b="0" i="0" sz="1400" u="none" cap="none" strike="noStrike">
+        <a:defRPr sz="1400" b="0" i="0" u="none" strike="noStrike" cap="none">
           <a:solidFill>
             <a:srgbClr val="000000"/>
           </a:solidFill>
@@ -2327,7 +2394,7 @@
           <a:sym typeface="Arial"/>
         </a:defRPr>
       </a:lvl1pPr>
-      <a:lvl2pPr lvl="1" marR="0" rtl="0" algn="l">
+      <a:lvl2pPr marR="0" lvl="1" algn="l" rtl="0">
         <a:lnSpc>
           <a:spcPct val="100000"/>
         </a:lnSpc>
@@ -2341,7 +2408,7 @@
           <a:srgbClr val="000000"/>
         </a:buClr>
         <a:buFont typeface="Arial"/>
-        <a:defRPr b="0" i="0" sz="1400" u="none" cap="none" strike="noStrike">
+        <a:defRPr sz="1400" b="0" i="0" u="none" strike="noStrike" cap="none">
           <a:solidFill>
             <a:srgbClr val="000000"/>
           </a:solidFill>
@@ -2351,7 +2418,7 @@
           <a:sym typeface="Arial"/>
         </a:defRPr>
       </a:lvl2pPr>
-      <a:lvl3pPr lvl="2" marR="0" rtl="0" algn="l">
+      <a:lvl3pPr marR="0" lvl="2" algn="l" rtl="0">
         <a:lnSpc>
           <a:spcPct val="100000"/>
         </a:lnSpc>
@@ -2365,7 +2432,7 @@
           <a:srgbClr val="000000"/>
         </a:buClr>
         <a:buFont typeface="Arial"/>
-        <a:defRPr b="0" i="0" sz="1400" u="none" cap="none" strike="noStrike">
+        <a:defRPr sz="1400" b="0" i="0" u="none" strike="noStrike" cap="none">
           <a:solidFill>
             <a:srgbClr val="000000"/>
           </a:solidFill>
@@ -2375,7 +2442,7 @@
           <a:sym typeface="Arial"/>
         </a:defRPr>
       </a:lvl3pPr>
-      <a:lvl4pPr lvl="3" marR="0" rtl="0" algn="l">
+      <a:lvl4pPr marR="0" lvl="3" algn="l" rtl="0">
         <a:lnSpc>
           <a:spcPct val="100000"/>
         </a:lnSpc>
@@ -2389,7 +2456,7 @@
           <a:srgbClr val="000000"/>
         </a:buClr>
         <a:buFont typeface="Arial"/>
-        <a:defRPr b="0" i="0" sz="1400" u="none" cap="none" strike="noStrike">
+        <a:defRPr sz="1400" b="0" i="0" u="none" strike="noStrike" cap="none">
           <a:solidFill>
             <a:srgbClr val="000000"/>
           </a:solidFill>
@@ -2399,7 +2466,7 @@
           <a:sym typeface="Arial"/>
         </a:defRPr>
       </a:lvl4pPr>
-      <a:lvl5pPr lvl="4" marR="0" rtl="0" algn="l">
+      <a:lvl5pPr marR="0" lvl="4" algn="l" rtl="0">
         <a:lnSpc>
           <a:spcPct val="100000"/>
         </a:lnSpc>
@@ -2413,7 +2480,7 @@
           <a:srgbClr val="000000"/>
         </a:buClr>
         <a:buFont typeface="Arial"/>
-        <a:defRPr b="0" i="0" sz="1400" u="none" cap="none" strike="noStrike">
+        <a:defRPr sz="1400" b="0" i="0" u="none" strike="noStrike" cap="none">
           <a:solidFill>
             <a:srgbClr val="000000"/>
           </a:solidFill>
@@ -2423,7 +2490,7 @@
           <a:sym typeface="Arial"/>
         </a:defRPr>
       </a:lvl5pPr>
-      <a:lvl6pPr lvl="5" marR="0" rtl="0" algn="l">
+      <a:lvl6pPr marR="0" lvl="5" algn="l" rtl="0">
         <a:lnSpc>
           <a:spcPct val="100000"/>
         </a:lnSpc>
@@ -2437,7 +2504,7 @@
           <a:srgbClr val="000000"/>
         </a:buClr>
         <a:buFont typeface="Arial"/>
-        <a:defRPr b="0" i="0" sz="1400" u="none" cap="none" strike="noStrike">
+        <a:defRPr sz="1400" b="0" i="0" u="none" strike="noStrike" cap="none">
           <a:solidFill>
             <a:srgbClr val="000000"/>
           </a:solidFill>
@@ -2447,7 +2514,7 @@
           <a:sym typeface="Arial"/>
         </a:defRPr>
       </a:lvl6pPr>
-      <a:lvl7pPr lvl="6" marR="0" rtl="0" algn="l">
+      <a:lvl7pPr marR="0" lvl="6" algn="l" rtl="0">
         <a:lnSpc>
           <a:spcPct val="100000"/>
         </a:lnSpc>
@@ -2461,7 +2528,7 @@
           <a:srgbClr val="000000"/>
         </a:buClr>
         <a:buFont typeface="Arial"/>
-        <a:defRPr b="0" i="0" sz="1400" u="none" cap="none" strike="noStrike">
+        <a:defRPr sz="1400" b="0" i="0" u="none" strike="noStrike" cap="none">
           <a:solidFill>
             <a:srgbClr val="000000"/>
           </a:solidFill>
@@ -2471,7 +2538,7 @@
           <a:sym typeface="Arial"/>
         </a:defRPr>
       </a:lvl7pPr>
-      <a:lvl8pPr lvl="7" marR="0" rtl="0" algn="l">
+      <a:lvl8pPr marR="0" lvl="7" algn="l" rtl="0">
         <a:lnSpc>
           <a:spcPct val="100000"/>
         </a:lnSpc>
@@ -2485,7 +2552,7 @@
           <a:srgbClr val="000000"/>
         </a:buClr>
         <a:buFont typeface="Arial"/>
-        <a:defRPr b="0" i="0" sz="1400" u="none" cap="none" strike="noStrike">
+        <a:defRPr sz="1400" b="0" i="0" u="none" strike="noStrike" cap="none">
           <a:solidFill>
             <a:srgbClr val="000000"/>
           </a:solidFill>
@@ -2495,7 +2562,7 @@
           <a:sym typeface="Arial"/>
         </a:defRPr>
       </a:lvl8pPr>
-      <a:lvl9pPr lvl="8" marR="0" rtl="0" algn="l">
+      <a:lvl9pPr marR="0" lvl="8" algn="l" rtl="0">
         <a:lnSpc>
           <a:spcPct val="100000"/>
         </a:lnSpc>
@@ -2509,7 +2576,7 @@
           <a:srgbClr val="000000"/>
         </a:buClr>
         <a:buFont typeface="Arial"/>
-        <a:defRPr b="0" i="0" sz="1400" u="none" cap="none" strike="noStrike">
+        <a:defRPr sz="1400" b="0" i="0" u="none" strike="noStrike" cap="none">
           <a:solidFill>
             <a:srgbClr val="000000"/>
           </a:solidFill>
@@ -2521,7 +2588,7 @@
       </a:lvl9pPr>
     </p:titleStyle>
     <p:bodyStyle>
-      <a:defPPr lvl="0" marR="0" rtl="0" algn="l">
+      <a:defPPr marR="0" lvl="0" algn="l" rtl="0">
         <a:lnSpc>
           <a:spcPct val="100000"/>
         </a:lnSpc>
@@ -2532,7 +2599,7 @@
           <a:spcPts val="0"/>
         </a:spcAft>
       </a:defPPr>
-      <a:lvl1pPr lvl="0" marR="0" rtl="0" algn="l">
+      <a:lvl1pPr marR="0" lvl="0" algn="l" rtl="0">
         <a:lnSpc>
           <a:spcPct val="100000"/>
         </a:lnSpc>
@@ -2546,7 +2613,7 @@
           <a:srgbClr val="000000"/>
         </a:buClr>
         <a:buFont typeface="Arial"/>
-        <a:defRPr b="0" i="0" sz="1400" u="none" cap="none" strike="noStrike">
+        <a:defRPr sz="1400" b="0" i="0" u="none" strike="noStrike" cap="none">
           <a:solidFill>
             <a:srgbClr val="000000"/>
           </a:solidFill>
@@ -2556,7 +2623,7 @@
           <a:sym typeface="Arial"/>
         </a:defRPr>
       </a:lvl1pPr>
-      <a:lvl2pPr lvl="1" marR="0" rtl="0" algn="l">
+      <a:lvl2pPr marR="0" lvl="1" algn="l" rtl="0">
         <a:lnSpc>
           <a:spcPct val="100000"/>
         </a:lnSpc>
@@ -2570,7 +2637,7 @@
           <a:srgbClr val="000000"/>
         </a:buClr>
         <a:buFont typeface="Arial"/>
-        <a:defRPr b="0" i="0" sz="1400" u="none" cap="none" strike="noStrike">
+        <a:defRPr sz="1400" b="0" i="0" u="none" strike="noStrike" cap="none">
           <a:solidFill>
             <a:srgbClr val="000000"/>
           </a:solidFill>
@@ -2580,7 +2647,7 @@
           <a:sym typeface="Arial"/>
         </a:defRPr>
       </a:lvl2pPr>
-      <a:lvl3pPr lvl="2" marR="0" rtl="0" algn="l">
+      <a:lvl3pPr marR="0" lvl="2" algn="l" rtl="0">
         <a:lnSpc>
           <a:spcPct val="100000"/>
         </a:lnSpc>
@@ -2594,7 +2661,7 @@
           <a:srgbClr val="000000"/>
         </a:buClr>
         <a:buFont typeface="Arial"/>
-        <a:defRPr b="0" i="0" sz="1400" u="none" cap="none" strike="noStrike">
+        <a:defRPr sz="1400" b="0" i="0" u="none" strike="noStrike" cap="none">
           <a:solidFill>
             <a:srgbClr val="000000"/>
           </a:solidFill>
@@ -2604,7 +2671,7 @@
           <a:sym typeface="Arial"/>
         </a:defRPr>
       </a:lvl3pPr>
-      <a:lvl4pPr lvl="3" marR="0" rtl="0" algn="l">
+      <a:lvl4pPr marR="0" lvl="3" algn="l" rtl="0">
         <a:lnSpc>
           <a:spcPct val="100000"/>
         </a:lnSpc>
@@ -2618,7 +2685,7 @@
           <a:srgbClr val="000000"/>
         </a:buClr>
         <a:buFont typeface="Arial"/>
-        <a:defRPr b="0" i="0" sz="1400" u="none" cap="none" strike="noStrike">
+        <a:defRPr sz="1400" b="0" i="0" u="none" strike="noStrike" cap="none">
           <a:solidFill>
             <a:srgbClr val="000000"/>
           </a:solidFill>
@@ -2628,7 +2695,7 @@
           <a:sym typeface="Arial"/>
         </a:defRPr>
       </a:lvl4pPr>
-      <a:lvl5pPr lvl="4" marR="0" rtl="0" algn="l">
+      <a:lvl5pPr marR="0" lvl="4" algn="l" rtl="0">
         <a:lnSpc>
           <a:spcPct val="100000"/>
         </a:lnSpc>
@@ -2642,7 +2709,7 @@
           <a:srgbClr val="000000"/>
         </a:buClr>
         <a:buFont typeface="Arial"/>
-        <a:defRPr b="0" i="0" sz="1400" u="none" cap="none" strike="noStrike">
+        <a:defRPr sz="1400" b="0" i="0" u="none" strike="noStrike" cap="none">
           <a:solidFill>
             <a:srgbClr val="000000"/>
           </a:solidFill>
@@ -2652,7 +2719,7 @@
           <a:sym typeface="Arial"/>
         </a:defRPr>
       </a:lvl5pPr>
-      <a:lvl6pPr lvl="5" marR="0" rtl="0" algn="l">
+      <a:lvl6pPr marR="0" lvl="5" algn="l" rtl="0">
         <a:lnSpc>
           <a:spcPct val="100000"/>
         </a:lnSpc>
@@ -2666,7 +2733,7 @@
           <a:srgbClr val="000000"/>
         </a:buClr>
         <a:buFont typeface="Arial"/>
-        <a:defRPr b="0" i="0" sz="1400" u="none" cap="none" strike="noStrike">
+        <a:defRPr sz="1400" b="0" i="0" u="none" strike="noStrike" cap="none">
           <a:solidFill>
             <a:srgbClr val="000000"/>
           </a:solidFill>
@@ -2676,7 +2743,7 @@
           <a:sym typeface="Arial"/>
         </a:defRPr>
       </a:lvl6pPr>
-      <a:lvl7pPr lvl="6" marR="0" rtl="0" algn="l">
+      <a:lvl7pPr marR="0" lvl="6" algn="l" rtl="0">
         <a:lnSpc>
           <a:spcPct val="100000"/>
         </a:lnSpc>
@@ -2690,7 +2757,7 @@
           <a:srgbClr val="000000"/>
         </a:buClr>
         <a:buFont typeface="Arial"/>
-        <a:defRPr b="0" i="0" sz="1400" u="none" cap="none" strike="noStrike">
+        <a:defRPr sz="1400" b="0" i="0" u="none" strike="noStrike" cap="none">
           <a:solidFill>
             <a:srgbClr val="000000"/>
           </a:solidFill>
@@ -2700,7 +2767,7 @@
           <a:sym typeface="Arial"/>
         </a:defRPr>
       </a:lvl7pPr>
-      <a:lvl8pPr lvl="7" marR="0" rtl="0" algn="l">
+      <a:lvl8pPr marR="0" lvl="7" algn="l" rtl="0">
         <a:lnSpc>
           <a:spcPct val="100000"/>
         </a:lnSpc>
@@ -2714,7 +2781,7 @@
           <a:srgbClr val="000000"/>
         </a:buClr>
         <a:buFont typeface="Arial"/>
-        <a:defRPr b="0" i="0" sz="1400" u="none" cap="none" strike="noStrike">
+        <a:defRPr sz="1400" b="0" i="0" u="none" strike="noStrike" cap="none">
           <a:solidFill>
             <a:srgbClr val="000000"/>
           </a:solidFill>
@@ -2724,7 +2791,7 @@
           <a:sym typeface="Arial"/>
         </a:defRPr>
       </a:lvl8pPr>
-      <a:lvl9pPr lvl="8" marR="0" rtl="0" algn="l">
+      <a:lvl9pPr marR="0" lvl="8" algn="l" rtl="0">
         <a:lnSpc>
           <a:spcPct val="100000"/>
         </a:lnSpc>
@@ -2738,7 +2805,7 @@
           <a:srgbClr val="000000"/>
         </a:buClr>
         <a:buFont typeface="Arial"/>
-        <a:defRPr b="0" i="0" sz="1400" u="none" cap="none" strike="noStrike">
+        <a:defRPr sz="1400" b="0" i="0" u="none" strike="noStrike" cap="none">
           <a:solidFill>
             <a:srgbClr val="000000"/>
           </a:solidFill>
@@ -2750,7 +2817,7 @@
       </a:lvl9pPr>
     </p:bodyStyle>
     <p:otherStyle>
-      <a:defPPr lvl="0" marR="0" rtl="0" algn="l">
+      <a:defPPr marR="0" lvl="0" algn="l" rtl="0">
         <a:lnSpc>
           <a:spcPct val="100000"/>
         </a:lnSpc>
@@ -2761,7 +2828,7 @@
           <a:spcPts val="0"/>
         </a:spcAft>
       </a:defPPr>
-      <a:lvl1pPr lvl="0" marR="0" rtl="0" algn="l">
+      <a:lvl1pPr marR="0" lvl="0" algn="l" rtl="0">
         <a:lnSpc>
           <a:spcPct val="100000"/>
         </a:lnSpc>
@@ -2775,7 +2842,7 @@
           <a:srgbClr val="000000"/>
         </a:buClr>
         <a:buFont typeface="Arial"/>
-        <a:defRPr b="0" i="0" sz="1400" u="none" cap="none" strike="noStrike">
+        <a:defRPr sz="1400" b="0" i="0" u="none" strike="noStrike" cap="none">
           <a:solidFill>
             <a:srgbClr val="000000"/>
           </a:solidFill>
@@ -2785,7 +2852,7 @@
           <a:sym typeface="Arial"/>
         </a:defRPr>
       </a:lvl1pPr>
-      <a:lvl2pPr lvl="1" marR="0" rtl="0" algn="l">
+      <a:lvl2pPr marR="0" lvl="1" algn="l" rtl="0">
         <a:lnSpc>
           <a:spcPct val="100000"/>
         </a:lnSpc>
@@ -2799,7 +2866,7 @@
           <a:srgbClr val="000000"/>
         </a:buClr>
         <a:buFont typeface="Arial"/>
-        <a:defRPr b="0" i="0" sz="1400" u="none" cap="none" strike="noStrike">
+        <a:defRPr sz="1400" b="0" i="0" u="none" strike="noStrike" cap="none">
           <a:solidFill>
             <a:srgbClr val="000000"/>
           </a:solidFill>
@@ -2809,7 +2876,7 @@
           <a:sym typeface="Arial"/>
         </a:defRPr>
       </a:lvl2pPr>
-      <a:lvl3pPr lvl="2" marR="0" rtl="0" algn="l">
+      <a:lvl3pPr marR="0" lvl="2" algn="l" rtl="0">
         <a:lnSpc>
           <a:spcPct val="100000"/>
         </a:lnSpc>
@@ -2823,7 +2890,7 @@
           <a:srgbClr val="000000"/>
         </a:buClr>
         <a:buFont typeface="Arial"/>
-        <a:defRPr b="0" i="0" sz="1400" u="none" cap="none" strike="noStrike">
+        <a:defRPr sz="1400" b="0" i="0" u="none" strike="noStrike" cap="none">
           <a:solidFill>
             <a:srgbClr val="000000"/>
           </a:solidFill>
@@ -2833,7 +2900,7 @@
           <a:sym typeface="Arial"/>
         </a:defRPr>
       </a:lvl3pPr>
-      <a:lvl4pPr lvl="3" marR="0" rtl="0" algn="l">
+      <a:lvl4pPr marR="0" lvl="3" algn="l" rtl="0">
         <a:lnSpc>
           <a:spcPct val="100000"/>
         </a:lnSpc>
@@ -2847,7 +2914,7 @@
           <a:srgbClr val="000000"/>
         </a:buClr>
         <a:buFont typeface="Arial"/>
-        <a:defRPr b="0" i="0" sz="1400" u="none" cap="none" strike="noStrike">
+        <a:defRPr sz="1400" b="0" i="0" u="none" strike="noStrike" cap="none">
           <a:solidFill>
             <a:srgbClr val="000000"/>
           </a:solidFill>
@@ -2857,7 +2924,7 @@
           <a:sym typeface="Arial"/>
         </a:defRPr>
       </a:lvl4pPr>
-      <a:lvl5pPr lvl="4" marR="0" rtl="0" algn="l">
+      <a:lvl5pPr marR="0" lvl="4" algn="l" rtl="0">
         <a:lnSpc>
           <a:spcPct val="100000"/>
         </a:lnSpc>
@@ -2871,7 +2938,7 @@
           <a:srgbClr val="000000"/>
         </a:buClr>
         <a:buFont typeface="Arial"/>
-        <a:defRPr b="0" i="0" sz="1400" u="none" cap="none" strike="noStrike">
+        <a:defRPr sz="1400" b="0" i="0" u="none" strike="noStrike" cap="none">
           <a:solidFill>
             <a:srgbClr val="000000"/>
           </a:solidFill>
@@ -2881,7 +2948,7 @@
           <a:sym typeface="Arial"/>
         </a:defRPr>
       </a:lvl5pPr>
-      <a:lvl6pPr lvl="5" marR="0" rtl="0" algn="l">
+      <a:lvl6pPr marR="0" lvl="5" algn="l" rtl="0">
         <a:lnSpc>
           <a:spcPct val="100000"/>
         </a:lnSpc>
@@ -2895,7 +2962,7 @@
           <a:srgbClr val="000000"/>
         </a:buClr>
         <a:buFont typeface="Arial"/>
-        <a:defRPr b="0" i="0" sz="1400" u="none" cap="none" strike="noStrike">
+        <a:defRPr sz="1400" b="0" i="0" u="none" strike="noStrike" cap="none">
           <a:solidFill>
             <a:srgbClr val="000000"/>
           </a:solidFill>
@@ -2905,7 +2972,7 @@
           <a:sym typeface="Arial"/>
         </a:defRPr>
       </a:lvl6pPr>
-      <a:lvl7pPr lvl="6" marR="0" rtl="0" algn="l">
+      <a:lvl7pPr marR="0" lvl="6" algn="l" rtl="0">
         <a:lnSpc>
           <a:spcPct val="100000"/>
         </a:lnSpc>
@@ -2919,7 +2986,7 @@
           <a:srgbClr val="000000"/>
         </a:buClr>
         <a:buFont typeface="Arial"/>
-        <a:defRPr b="0" i="0" sz="1400" u="none" cap="none" strike="noStrike">
+        <a:defRPr sz="1400" b="0" i="0" u="none" strike="noStrike" cap="none">
           <a:solidFill>
             <a:srgbClr val="000000"/>
           </a:solidFill>
@@ -2929,7 +2996,7 @@
           <a:sym typeface="Arial"/>
         </a:defRPr>
       </a:lvl7pPr>
-      <a:lvl8pPr lvl="7" marR="0" rtl="0" algn="l">
+      <a:lvl8pPr marR="0" lvl="7" algn="l" rtl="0">
         <a:lnSpc>
           <a:spcPct val="100000"/>
         </a:lnSpc>
@@ -2943,7 +3010,7 @@
           <a:srgbClr val="000000"/>
         </a:buClr>
         <a:buFont typeface="Arial"/>
-        <a:defRPr b="0" i="0" sz="1400" u="none" cap="none" strike="noStrike">
+        <a:defRPr sz="1400" b="0" i="0" u="none" strike="noStrike" cap="none">
           <a:solidFill>
             <a:srgbClr val="000000"/>
           </a:solidFill>
@@ -2953,7 +3020,7 @@
           <a:sym typeface="Arial"/>
         </a:defRPr>
       </a:lvl8pPr>
-      <a:lvl9pPr lvl="8" marR="0" rtl="0" algn="l">
+      <a:lvl9pPr marR="0" lvl="8" algn="l" rtl="0">
         <a:lnSpc>
           <a:spcPct val="100000"/>
         </a:lnSpc>
@@ -2967,7 +3034,7 @@
           <a:srgbClr val="000000"/>
         </a:buClr>
         <a:buFont typeface="Arial"/>
-        <a:defRPr b="0" i="0" sz="1400" u="none" cap="none" strike="noStrike">
+        <a:defRPr sz="1400" b="0" i="0" u="none" strike="noStrike" cap="none">
           <a:solidFill>
             <a:srgbClr val="000000"/>
           </a:solidFill>
@@ -2983,18 +3050,19 @@
 </file>
 
 <file path=ppt/slides/slide1.xml><?xml version="1.0" encoding="utf-8"?>
-<p:sld xmlns:a="http://schemas.openxmlformats.org/drawingml/2006/main" xmlns:r="http://schemas.openxmlformats.org/officeDocument/2006/relationships" xmlns:mc="http://schemas.openxmlformats.org/markup-compatibility/2006" xmlns:mv="urn:schemas-microsoft-com:mac:vml" xmlns:p="http://schemas.openxmlformats.org/presentationml/2006/main" xmlns:c="http://schemas.openxmlformats.org/drawingml/2006/chart" xmlns:dgm="http://schemas.openxmlformats.org/drawingml/2006/diagram" xmlns:o="urn:schemas-microsoft-com:office:office" xmlns:v="urn:schemas-microsoft-com:vml" xmlns:pvml="urn:schemas-microsoft-com:office:powerpoint" xmlns:com="http://schemas.openxmlformats.org/drawingml/2006/compatibility" xmlns:p14="http://schemas.microsoft.com/office/powerpoint/2010/main" xmlns:p15="http://schemas.microsoft.com/office/powerpoint/2012/main" xmlns:ahyp="http://schemas.microsoft.com/office/drawing/2018/hyperlinkcolor">
+<p:sld xmlns:a="http://schemas.openxmlformats.org/drawingml/2006/main" xmlns:r="http://schemas.openxmlformats.org/officeDocument/2006/relationships" xmlns:p="http://schemas.openxmlformats.org/presentationml/2006/main">
   <p:cSld>
     <p:bg>
       <p:bgPr>
         <a:solidFill>
           <a:srgbClr val="16234A"/>
         </a:solidFill>
+        <a:effectLst/>
       </p:bgPr>
     </p:bg>
     <p:spTree>
       <p:nvGrpSpPr>
-        <p:cNvPr id="16" name="Shape 16"/>
+        <p:cNvPr id="1" name="Shape 16"/>
         <p:cNvGrpSpPr/>
         <p:nvPr/>
       </p:nvGrpSpPr>
@@ -3028,12 +3096,12 @@
           </a:ln>
         </p:spPr>
         <p:txBody>
-          <a:bodyPr anchorCtr="0" anchor="ctr" bIns="91425" lIns="91425" spcFirstLastPara="1" rIns="91425" wrap="square" tIns="91425">
+          <a:bodyPr spcFirstLastPara="1" wrap="square" lIns="91425" tIns="91425" rIns="91425" bIns="91425" anchor="ctr" anchorCtr="0">
             <a:noAutofit/>
           </a:bodyPr>
           <a:lstStyle/>
           <a:p>
-            <a:pPr indent="0" lvl="0" marL="0" rtl="0" algn="l">
+            <a:pPr marL="0" lvl="0" indent="0" algn="l" rtl="0">
               <a:spcBef>
                 <a:spcPts val="0"/>
               </a:spcBef>
@@ -3042,9 +3110,6 @@
               </a:spcAft>
               <a:buNone/>
             </a:pPr>
-            <a:r>
-              <a:t/>
-            </a:r>
             <a:endParaRPr/>
           </a:p>
         </p:txBody>
@@ -3071,12 +3136,12 @@
           </a:ln>
         </p:spPr>
         <p:txBody>
-          <a:bodyPr anchorCtr="0" anchor="ctr" bIns="91425" lIns="91425" spcFirstLastPara="1" rIns="91425" wrap="square" tIns="91425">
+          <a:bodyPr spcFirstLastPara="1" wrap="square" lIns="91425" tIns="91425" rIns="91425" bIns="91425" anchor="ctr" anchorCtr="0">
             <a:noAutofit/>
           </a:bodyPr>
           <a:lstStyle/>
           <a:p>
-            <a:pPr indent="0" lvl="0" marL="0" rtl="0" algn="l">
+            <a:pPr marL="0" lvl="0" indent="0" algn="l" rtl="0">
               <a:spcBef>
                 <a:spcPts val="0"/>
               </a:spcBef>
@@ -3085,9 +3150,6 @@
               </a:spcAft>
               <a:buNone/>
             </a:pPr>
-            <a:r>
-              <a:t/>
-            </a:r>
             <a:endParaRPr/>
           </a:p>
         </p:txBody>
@@ -3114,12 +3176,12 @@
           </a:ln>
         </p:spPr>
         <p:txBody>
-          <a:bodyPr anchorCtr="0" anchor="ctr" bIns="91425" lIns="91425" spcFirstLastPara="1" rIns="91425" wrap="square" tIns="91425">
+          <a:bodyPr spcFirstLastPara="1" wrap="square" lIns="91425" tIns="91425" rIns="91425" bIns="91425" anchor="ctr" anchorCtr="0">
             <a:noAutofit/>
           </a:bodyPr>
           <a:lstStyle/>
           <a:p>
-            <a:pPr indent="0" lvl="0" marL="0" rtl="0" algn="l">
+            <a:pPr marL="0" lvl="0" indent="0" algn="l" rtl="0">
               <a:spcBef>
                 <a:spcPts val="0"/>
               </a:spcBef>
@@ -3128,16 +3190,13 @@
               </a:spcAft>
               <a:buNone/>
             </a:pPr>
-            <a:r>
-              <a:t/>
-            </a:r>
             <a:endParaRPr/>
           </a:p>
         </p:txBody>
       </p:sp>
       <p:pic>
         <p:nvPicPr>
-          <p:cNvPr descr="/home/claude/images/icon_zap.png" id="20" name="Google Shape;20;p4"/>
+          <p:cNvPr id="20" name="Google Shape;20;p4" descr="/home/claude/images/icon_zap.png"/>
           <p:cNvPicPr preferRelativeResize="0"/>
           <p:nvPr/>
         </p:nvPicPr>
@@ -3145,7 +3204,7 @@
           <a:blip r:embed="rId3">
             <a:alphaModFix/>
           </a:blip>
-          <a:srcRect b="0" l="0" r="0" t="0"/>
+          <a:srcRect/>
           <a:stretch/>
         </p:blipFill>
         <p:spPr>
@@ -3182,12 +3241,12 @@
           </a:ln>
         </p:spPr>
         <p:txBody>
-          <a:bodyPr anchorCtr="0" anchor="ctr" bIns="0" lIns="0" spcFirstLastPara="1" rIns="0" wrap="square" tIns="0">
+          <a:bodyPr spcFirstLastPara="1" wrap="square" lIns="0" tIns="0" rIns="0" bIns="0" anchor="ctr" anchorCtr="0">
             <a:noAutofit/>
           </a:bodyPr>
           <a:lstStyle/>
           <a:p>
-            <a:pPr indent="0" lvl="0" marL="0" marR="0" rtl="0" algn="l">
+            <a:pPr marL="0" marR="0" lvl="0" indent="0" algn="l" rtl="0">
               <a:spcBef>
                 <a:spcPts val="0"/>
               </a:spcBef>
@@ -3202,7 +3261,7 @@
               <a:buNone/>
             </a:pPr>
             <a:r>
-              <a:rPr b="1" i="0" lang="en-US" sz="1500" u="none" cap="none" strike="noStrike">
+              <a:rPr lang="en-US" sz="1500" b="1" i="0" u="none" strike="noStrike" cap="none">
                 <a:solidFill>
                   <a:srgbClr val="0FB5C9"/>
                 </a:solidFill>
@@ -3213,7 +3272,7 @@
               </a:rPr>
               <a:t>KEŞİFSEL VERİ ANALİZİ</a:t>
             </a:r>
-            <a:endParaRPr b="0" i="0" sz="1500" u="none" cap="none" strike="noStrike">
+            <a:endParaRPr sz="1500" b="0" i="0" u="none" strike="noStrike" cap="none">
               <a:solidFill>
                 <a:schemeClr val="dk1"/>
               </a:solidFill>
@@ -3245,12 +3304,12 @@
           </a:ln>
         </p:spPr>
         <p:txBody>
-          <a:bodyPr anchorCtr="0" anchor="ctr" bIns="0" lIns="0" spcFirstLastPara="1" rIns="0" wrap="square" tIns="0">
+          <a:bodyPr spcFirstLastPara="1" wrap="square" lIns="0" tIns="0" rIns="0" bIns="0" anchor="ctr" anchorCtr="0">
             <a:noAutofit/>
           </a:bodyPr>
           <a:lstStyle/>
           <a:p>
-            <a:pPr indent="0" lvl="0" marL="0" marR="0" rtl="0" algn="l">
+            <a:pPr marL="0" marR="0" lvl="0" indent="0" algn="l" rtl="0">
               <a:spcBef>
                 <a:spcPts val="0"/>
               </a:spcBef>
@@ -3265,7 +3324,7 @@
               <a:buNone/>
             </a:pPr>
             <a:r>
-              <a:rPr b="1" i="0" lang="en-US" sz="4800" u="none" cap="none" strike="noStrike">
+              <a:rPr lang="en-US" sz="4800" b="1" i="0" u="none" strike="noStrike" cap="none" dirty="0" err="1">
                 <a:solidFill>
                   <a:srgbClr val="FFFFFF"/>
                 </a:solidFill>
@@ -3274,9 +3333,33 @@
                 <a:cs typeface="Cambria"/>
                 <a:sym typeface="Cambria"/>
               </a:rPr>
-              <a:t>Elektrikli Araçlar (EV)</a:t>
-            </a:r>
-            <a:endParaRPr b="0" i="0" sz="4800" u="none" cap="none" strike="noStrike">
+              <a:t>Elektrikli</a:t>
+            </a:r>
+            <a:r>
+              <a:rPr lang="en-US" sz="4800" b="1" i="0" u="none" strike="noStrike" cap="none" dirty="0">
+                <a:solidFill>
+                  <a:srgbClr val="FFFFFF"/>
+                </a:solidFill>
+                <a:latin typeface="Cambria"/>
+                <a:ea typeface="Cambria"/>
+                <a:cs typeface="Cambria"/>
+                <a:sym typeface="Cambria"/>
+              </a:rPr>
+              <a:t> </a:t>
+            </a:r>
+            <a:r>
+              <a:rPr lang="en-US" sz="4800" b="1" i="0" u="none" strike="noStrike" cap="none" dirty="0" err="1">
+                <a:solidFill>
+                  <a:srgbClr val="FFFFFF"/>
+                </a:solidFill>
+                <a:latin typeface="Cambria"/>
+                <a:ea typeface="Cambria"/>
+                <a:cs typeface="Cambria"/>
+                <a:sym typeface="Cambria"/>
+              </a:rPr>
+              <a:t>Araçlar</a:t>
+            </a:r>
+            <a:endParaRPr sz="4800" b="0" i="0" u="none" strike="noStrike" cap="none" dirty="0">
               <a:solidFill>
                 <a:schemeClr val="dk1"/>
               </a:solidFill>
@@ -3308,12 +3391,12 @@
           </a:ln>
         </p:spPr>
         <p:txBody>
-          <a:bodyPr anchorCtr="0" anchor="ctr" bIns="0" lIns="0" spcFirstLastPara="1" rIns="0" wrap="square" tIns="0">
+          <a:bodyPr spcFirstLastPara="1" wrap="square" lIns="0" tIns="0" rIns="0" bIns="0" anchor="ctr" anchorCtr="0">
             <a:noAutofit/>
           </a:bodyPr>
           <a:lstStyle/>
           <a:p>
-            <a:pPr indent="0" lvl="0" marL="0" marR="0" rtl="0" algn="l">
+            <a:pPr marL="0" marR="0" lvl="0" indent="0" algn="l" rtl="0">
               <a:spcBef>
                 <a:spcPts val="0"/>
               </a:spcBef>
@@ -3328,7 +3411,7 @@
               <a:buNone/>
             </a:pPr>
             <a:r>
-              <a:rPr b="0" i="0" lang="en-US" sz="1700" u="none" cap="none" strike="noStrike">
+              <a:rPr lang="en-US" sz="1700" b="0" i="0" u="none" strike="noStrike" cap="none" dirty="0" err="1">
                 <a:solidFill>
                   <a:srgbClr val="AFC3E8"/>
                 </a:solidFill>
@@ -3337,9 +3420,189 @@
                 <a:cs typeface="Calibri"/>
                 <a:sym typeface="Calibri"/>
               </a:rPr>
-              <a:t>EV modellerinin teknik ve ticari performans verileri · 2020 – 2026</a:t>
-            </a:r>
-            <a:endParaRPr b="0" i="0" sz="1700" u="none" cap="none" strike="noStrike">
+              <a:t>Elektrikli</a:t>
+            </a:r>
+            <a:r>
+              <a:rPr lang="en-US" sz="1700" b="0" i="0" u="none" strike="noStrike" cap="none" dirty="0">
+                <a:solidFill>
+                  <a:srgbClr val="AFC3E8"/>
+                </a:solidFill>
+                <a:latin typeface="Calibri"/>
+                <a:ea typeface="Calibri"/>
+                <a:cs typeface="Calibri"/>
+                <a:sym typeface="Calibri"/>
+              </a:rPr>
+              <a:t> </a:t>
+            </a:r>
+            <a:r>
+              <a:rPr lang="en-US" sz="1700" b="0" i="0" u="none" strike="noStrike" cap="none" dirty="0" err="1">
+                <a:solidFill>
+                  <a:srgbClr val="AFC3E8"/>
+                </a:solidFill>
+                <a:latin typeface="Calibri"/>
+                <a:ea typeface="Calibri"/>
+                <a:cs typeface="Calibri"/>
+                <a:sym typeface="Calibri"/>
+              </a:rPr>
+              <a:t>araç</a:t>
+            </a:r>
+            <a:r>
+              <a:rPr lang="en-US" sz="1700" b="0" i="0" u="none" strike="noStrike" cap="none" dirty="0">
+                <a:solidFill>
+                  <a:srgbClr val="AFC3E8"/>
+                </a:solidFill>
+                <a:latin typeface="Calibri"/>
+                <a:ea typeface="Calibri"/>
+                <a:cs typeface="Calibri"/>
+                <a:sym typeface="Calibri"/>
+              </a:rPr>
+              <a:t> </a:t>
+            </a:r>
+            <a:r>
+              <a:rPr lang="en-US" sz="1700" b="0" i="0" u="none" strike="noStrike" cap="none" dirty="0" err="1">
+                <a:solidFill>
+                  <a:srgbClr val="AFC3E8"/>
+                </a:solidFill>
+                <a:latin typeface="Calibri"/>
+                <a:ea typeface="Calibri"/>
+                <a:cs typeface="Calibri"/>
+                <a:sym typeface="Calibri"/>
+              </a:rPr>
+              <a:t>modellerinin</a:t>
+            </a:r>
+            <a:r>
+              <a:rPr lang="en-US" sz="1700" b="0" i="0" u="none" strike="noStrike" cap="none" dirty="0">
+                <a:solidFill>
+                  <a:srgbClr val="AFC3E8"/>
+                </a:solidFill>
+                <a:latin typeface="Calibri"/>
+                <a:ea typeface="Calibri"/>
+                <a:cs typeface="Calibri"/>
+                <a:sym typeface="Calibri"/>
+              </a:rPr>
+              <a:t> </a:t>
+            </a:r>
+            <a:r>
+              <a:rPr lang="en-US" sz="1700" b="0" i="0" u="none" strike="noStrike" cap="none" dirty="0" err="1">
+                <a:solidFill>
+                  <a:srgbClr val="AFC3E8"/>
+                </a:solidFill>
+                <a:latin typeface="Calibri"/>
+                <a:ea typeface="Calibri"/>
+                <a:cs typeface="Calibri"/>
+                <a:sym typeface="Calibri"/>
+              </a:rPr>
+              <a:t>teknik</a:t>
+            </a:r>
+            <a:r>
+              <a:rPr lang="en-US" sz="1700" b="0" i="0" u="none" strike="noStrike" cap="none" dirty="0">
+                <a:solidFill>
+                  <a:srgbClr val="AFC3E8"/>
+                </a:solidFill>
+                <a:latin typeface="Calibri"/>
+                <a:ea typeface="Calibri"/>
+                <a:cs typeface="Calibri"/>
+                <a:sym typeface="Calibri"/>
+              </a:rPr>
+              <a:t> </a:t>
+            </a:r>
+            <a:r>
+              <a:rPr lang="en-US" sz="1700" b="0" i="0" u="none" strike="noStrike" cap="none" dirty="0" err="1">
+                <a:solidFill>
+                  <a:srgbClr val="AFC3E8"/>
+                </a:solidFill>
+                <a:latin typeface="Calibri"/>
+                <a:ea typeface="Calibri"/>
+                <a:cs typeface="Calibri"/>
+                <a:sym typeface="Calibri"/>
+              </a:rPr>
+              <a:t>ve</a:t>
+            </a:r>
+            <a:r>
+              <a:rPr lang="en-US" sz="1700" b="0" i="0" u="none" strike="noStrike" cap="none" dirty="0">
+                <a:solidFill>
+                  <a:srgbClr val="AFC3E8"/>
+                </a:solidFill>
+                <a:latin typeface="Calibri"/>
+                <a:ea typeface="Calibri"/>
+                <a:cs typeface="Calibri"/>
+                <a:sym typeface="Calibri"/>
+              </a:rPr>
+              <a:t> </a:t>
+            </a:r>
+            <a:r>
+              <a:rPr lang="en-US" sz="1700" b="0" i="0" u="none" strike="noStrike" cap="none" dirty="0" err="1">
+                <a:solidFill>
+                  <a:srgbClr val="AFC3E8"/>
+                </a:solidFill>
+                <a:latin typeface="Calibri"/>
+                <a:ea typeface="Calibri"/>
+                <a:cs typeface="Calibri"/>
+                <a:sym typeface="Calibri"/>
+              </a:rPr>
+              <a:t>ticari</a:t>
+            </a:r>
+            <a:r>
+              <a:rPr lang="en-US" sz="1700" b="0" i="0" u="none" strike="noStrike" cap="none" dirty="0">
+                <a:solidFill>
+                  <a:srgbClr val="AFC3E8"/>
+                </a:solidFill>
+                <a:latin typeface="Calibri"/>
+                <a:ea typeface="Calibri"/>
+                <a:cs typeface="Calibri"/>
+                <a:sym typeface="Calibri"/>
+              </a:rPr>
+              <a:t> </a:t>
+            </a:r>
+            <a:r>
+              <a:rPr lang="en-US" sz="1700" b="0" i="0" u="none" strike="noStrike" cap="none" dirty="0" err="1">
+                <a:solidFill>
+                  <a:srgbClr val="AFC3E8"/>
+                </a:solidFill>
+                <a:latin typeface="Calibri"/>
+                <a:ea typeface="Calibri"/>
+                <a:cs typeface="Calibri"/>
+                <a:sym typeface="Calibri"/>
+              </a:rPr>
+              <a:t>performans</a:t>
+            </a:r>
+            <a:r>
+              <a:rPr lang="en-US" sz="1700" b="0" i="0" u="none" strike="noStrike" cap="none" dirty="0">
+                <a:solidFill>
+                  <a:srgbClr val="AFC3E8"/>
+                </a:solidFill>
+                <a:latin typeface="Calibri"/>
+                <a:ea typeface="Calibri"/>
+                <a:cs typeface="Calibri"/>
+                <a:sym typeface="Calibri"/>
+              </a:rPr>
+              <a:t> </a:t>
+            </a:r>
+            <a:r>
+              <a:rPr lang="en-US" sz="1700" b="0" i="0" u="none" strike="noStrike" cap="none" dirty="0" err="1">
+                <a:solidFill>
+                  <a:srgbClr val="AFC3E8"/>
+                </a:solidFill>
+                <a:latin typeface="Calibri"/>
+                <a:ea typeface="Calibri"/>
+                <a:cs typeface="Calibri"/>
+                <a:sym typeface="Calibri"/>
+              </a:rPr>
+              <a:t>verileri</a:t>
+            </a:r>
+            <a:r>
+              <a:rPr lang="en-US" sz="1700" b="0" i="0" u="none" strike="noStrike" cap="none" dirty="0">
+                <a:solidFill>
+                  <a:srgbClr val="AFC3E8"/>
+                </a:solidFill>
+                <a:latin typeface="Calibri"/>
+                <a:ea typeface="Calibri"/>
+                <a:cs typeface="Calibri"/>
+                <a:sym typeface="Calibri"/>
+              </a:rPr>
+              <a:t> · 2020 – 2026</a:t>
+            </a:r>
+            <a:endParaRPr sz="1700" b="0" i="0" u="none" strike="noStrike" cap="none" dirty="0">
               <a:solidFill>
                 <a:schemeClr val="dk1"/>
               </a:solidFill>
@@ -3364,7 +3627,7 @@
           </a:xfrm>
           <a:prstGeom prst="roundRect">
             <a:avLst>
-              <a:gd fmla="val 7273" name="adj"/>
+              <a:gd name="adj" fmla="val 7273"/>
             </a:avLst>
           </a:prstGeom>
           <a:solidFill>
@@ -3375,12 +3638,12 @@
           </a:ln>
         </p:spPr>
         <p:txBody>
-          <a:bodyPr anchorCtr="0" anchor="ctr" bIns="91425" lIns="91425" spcFirstLastPara="1" rIns="91425" wrap="square" tIns="91425">
+          <a:bodyPr spcFirstLastPara="1" wrap="square" lIns="91425" tIns="91425" rIns="91425" bIns="91425" anchor="ctr" anchorCtr="0">
             <a:noAutofit/>
           </a:bodyPr>
           <a:lstStyle/>
           <a:p>
-            <a:pPr indent="0" lvl="0" marL="0" rtl="0" algn="l">
+            <a:pPr marL="0" lvl="0" indent="0" algn="l" rtl="0">
               <a:spcBef>
                 <a:spcPts val="0"/>
               </a:spcBef>
@@ -3389,9 +3652,6 @@
               </a:spcAft>
               <a:buNone/>
             </a:pPr>
-            <a:r>
-              <a:t/>
-            </a:r>
             <a:endParaRPr/>
           </a:p>
         </p:txBody>
@@ -3416,12 +3676,12 @@
           </a:ln>
         </p:spPr>
         <p:txBody>
-          <a:bodyPr anchorCtr="0" anchor="ctr" bIns="0" lIns="0" spcFirstLastPara="1" rIns="0" wrap="square" tIns="0">
+          <a:bodyPr spcFirstLastPara="1" wrap="square" lIns="0" tIns="0" rIns="0" bIns="0" anchor="ctr" anchorCtr="0">
             <a:noAutofit/>
           </a:bodyPr>
           <a:lstStyle/>
           <a:p>
-            <a:pPr indent="0" lvl="0" marL="0" marR="0" rtl="0" algn="ctr">
+            <a:pPr marL="0" marR="0" lvl="0" indent="0" algn="ctr" rtl="0">
               <a:spcBef>
                 <a:spcPts val="0"/>
               </a:spcBef>
@@ -3436,7 +3696,7 @@
               <a:buNone/>
             </a:pPr>
             <a:r>
-              <a:rPr b="1" i="0" lang="en-US" sz="2600" u="none" cap="none" strike="noStrike">
+              <a:rPr lang="en-US" sz="2600" b="1" i="0" u="none" strike="noStrike" cap="none">
                 <a:solidFill>
                   <a:srgbClr val="FFFFFF"/>
                 </a:solidFill>
@@ -3447,7 +3707,7 @@
               </a:rPr>
               <a:t>2.000</a:t>
             </a:r>
-            <a:endParaRPr b="0" i="0" sz="2600" u="none" cap="none" strike="noStrike">
+            <a:endParaRPr sz="2600" b="0" i="0" u="none" strike="noStrike" cap="none">
               <a:solidFill>
                 <a:schemeClr val="dk1"/>
               </a:solidFill>
@@ -3479,12 +3739,12 @@
           </a:ln>
         </p:spPr>
         <p:txBody>
-          <a:bodyPr anchorCtr="0" anchor="ctr" bIns="0" lIns="0" spcFirstLastPara="1" rIns="0" wrap="square" tIns="0">
+          <a:bodyPr spcFirstLastPara="1" wrap="square" lIns="0" tIns="0" rIns="0" bIns="0" anchor="ctr" anchorCtr="0">
             <a:noAutofit/>
           </a:bodyPr>
           <a:lstStyle/>
           <a:p>
-            <a:pPr indent="0" lvl="0" marL="0" marR="0" rtl="0" algn="ctr">
+            <a:pPr marL="0" marR="0" lvl="0" indent="0" algn="ctr" rtl="0">
               <a:spcBef>
                 <a:spcPts val="0"/>
               </a:spcBef>
@@ -3499,7 +3759,7 @@
               <a:buNone/>
             </a:pPr>
             <a:r>
-              <a:rPr b="0" i="0" lang="en-US" sz="1100" u="none" cap="none" strike="noStrike">
+              <a:rPr lang="en-US" sz="1100" b="0" i="0" u="none" strike="noStrike" cap="none">
                 <a:solidFill>
                   <a:srgbClr val="AFC3E8"/>
                 </a:solidFill>
@@ -3510,7 +3770,7 @@
               </a:rPr>
               <a:t>Gözlem</a:t>
             </a:r>
-            <a:endParaRPr b="0" i="0" sz="1100" u="none" cap="none" strike="noStrike">
+            <a:endParaRPr sz="1100" b="0" i="0" u="none" strike="noStrike" cap="none">
               <a:solidFill>
                 <a:schemeClr val="dk1"/>
               </a:solidFill>
@@ -3535,7 +3795,7 @@
           </a:xfrm>
           <a:prstGeom prst="roundRect">
             <a:avLst>
-              <a:gd fmla="val 7273" name="adj"/>
+              <a:gd name="adj" fmla="val 7273"/>
             </a:avLst>
           </a:prstGeom>
           <a:solidFill>
@@ -3546,12 +3806,12 @@
           </a:ln>
         </p:spPr>
         <p:txBody>
-          <a:bodyPr anchorCtr="0" anchor="ctr" bIns="91425" lIns="91425" spcFirstLastPara="1" rIns="91425" wrap="square" tIns="91425">
+          <a:bodyPr spcFirstLastPara="1" wrap="square" lIns="91425" tIns="91425" rIns="91425" bIns="91425" anchor="ctr" anchorCtr="0">
             <a:noAutofit/>
           </a:bodyPr>
           <a:lstStyle/>
           <a:p>
-            <a:pPr indent="0" lvl="0" marL="0" rtl="0" algn="l">
+            <a:pPr marL="0" lvl="0" indent="0" algn="l" rtl="0">
               <a:spcBef>
                 <a:spcPts val="0"/>
               </a:spcBef>
@@ -3560,9 +3820,6 @@
               </a:spcAft>
               <a:buNone/>
             </a:pPr>
-            <a:r>
-              <a:t/>
-            </a:r>
             <a:endParaRPr/>
           </a:p>
         </p:txBody>
@@ -3587,12 +3844,12 @@
           </a:ln>
         </p:spPr>
         <p:txBody>
-          <a:bodyPr anchorCtr="0" anchor="ctr" bIns="0" lIns="0" spcFirstLastPara="1" rIns="0" wrap="square" tIns="0">
+          <a:bodyPr spcFirstLastPara="1" wrap="square" lIns="0" tIns="0" rIns="0" bIns="0" anchor="ctr" anchorCtr="0">
             <a:noAutofit/>
           </a:bodyPr>
           <a:lstStyle/>
           <a:p>
-            <a:pPr indent="0" lvl="0" marL="0" marR="0" rtl="0" algn="ctr">
+            <a:pPr marL="0" marR="0" lvl="0" indent="0" algn="ctr" rtl="0">
               <a:spcBef>
                 <a:spcPts val="0"/>
               </a:spcBef>
@@ -3607,7 +3864,7 @@
               <a:buNone/>
             </a:pPr>
             <a:r>
-              <a:rPr b="1" i="0" lang="en-US" sz="2600" u="none" cap="none" strike="noStrike">
+              <a:rPr lang="en-US" sz="2600" b="1" i="0" u="none" strike="noStrike" cap="none">
                 <a:solidFill>
                   <a:srgbClr val="FFFFFF"/>
                 </a:solidFill>
@@ -3618,7 +3875,7 @@
               </a:rPr>
               <a:t>24</a:t>
             </a:r>
-            <a:endParaRPr b="0" i="0" sz="2600" u="none" cap="none" strike="noStrike">
+            <a:endParaRPr sz="2600" b="0" i="0" u="none" strike="noStrike" cap="none">
               <a:solidFill>
                 <a:schemeClr val="dk1"/>
               </a:solidFill>
@@ -3650,12 +3907,12 @@
           </a:ln>
         </p:spPr>
         <p:txBody>
-          <a:bodyPr anchorCtr="0" anchor="ctr" bIns="0" lIns="0" spcFirstLastPara="1" rIns="0" wrap="square" tIns="0">
+          <a:bodyPr spcFirstLastPara="1" wrap="square" lIns="0" tIns="0" rIns="0" bIns="0" anchor="ctr" anchorCtr="0">
             <a:noAutofit/>
           </a:bodyPr>
           <a:lstStyle/>
           <a:p>
-            <a:pPr indent="0" lvl="0" marL="0" marR="0" rtl="0" algn="ctr">
+            <a:pPr marL="0" marR="0" lvl="0" indent="0" algn="ctr" rtl="0">
               <a:spcBef>
                 <a:spcPts val="0"/>
               </a:spcBef>
@@ -3670,7 +3927,7 @@
               <a:buNone/>
             </a:pPr>
             <a:r>
-              <a:rPr b="0" i="0" lang="en-US" sz="1100" u="none" cap="none" strike="noStrike">
+              <a:rPr lang="en-US" sz="1100" b="0" i="0" u="none" strike="noStrike" cap="none">
                 <a:solidFill>
                   <a:srgbClr val="AFC3E8"/>
                 </a:solidFill>
@@ -3681,7 +3938,7 @@
               </a:rPr>
               <a:t>Sütun</a:t>
             </a:r>
-            <a:endParaRPr b="0" i="0" sz="1100" u="none" cap="none" strike="noStrike">
+            <a:endParaRPr sz="1100" b="0" i="0" u="none" strike="noStrike" cap="none">
               <a:solidFill>
                 <a:schemeClr val="dk1"/>
               </a:solidFill>
@@ -3706,7 +3963,7 @@
           </a:xfrm>
           <a:prstGeom prst="roundRect">
             <a:avLst>
-              <a:gd fmla="val 7273" name="adj"/>
+              <a:gd name="adj" fmla="val 7273"/>
             </a:avLst>
           </a:prstGeom>
           <a:solidFill>
@@ -3717,12 +3974,12 @@
           </a:ln>
         </p:spPr>
         <p:txBody>
-          <a:bodyPr anchorCtr="0" anchor="ctr" bIns="91425" lIns="91425" spcFirstLastPara="1" rIns="91425" wrap="square" tIns="91425">
+          <a:bodyPr spcFirstLastPara="1" wrap="square" lIns="91425" tIns="91425" rIns="91425" bIns="91425" anchor="ctr" anchorCtr="0">
             <a:noAutofit/>
           </a:bodyPr>
           <a:lstStyle/>
           <a:p>
-            <a:pPr indent="0" lvl="0" marL="0" rtl="0" algn="l">
+            <a:pPr marL="0" lvl="0" indent="0" algn="l" rtl="0">
               <a:spcBef>
                 <a:spcPts val="0"/>
               </a:spcBef>
@@ -3731,9 +3988,6 @@
               </a:spcAft>
               <a:buNone/>
             </a:pPr>
-            <a:r>
-              <a:t/>
-            </a:r>
             <a:endParaRPr/>
           </a:p>
         </p:txBody>
@@ -3758,12 +4012,12 @@
           </a:ln>
         </p:spPr>
         <p:txBody>
-          <a:bodyPr anchorCtr="0" anchor="ctr" bIns="0" lIns="0" spcFirstLastPara="1" rIns="0" wrap="square" tIns="0">
+          <a:bodyPr spcFirstLastPara="1" wrap="square" lIns="0" tIns="0" rIns="0" bIns="0" anchor="ctr" anchorCtr="0">
             <a:noAutofit/>
           </a:bodyPr>
           <a:lstStyle/>
           <a:p>
-            <a:pPr indent="0" lvl="0" marL="0" marR="0" rtl="0" algn="ctr">
+            <a:pPr marL="0" marR="0" lvl="0" indent="0" algn="ctr" rtl="0">
               <a:spcBef>
                 <a:spcPts val="0"/>
               </a:spcBef>
@@ -3778,7 +4032,7 @@
               <a:buNone/>
             </a:pPr>
             <a:r>
-              <a:rPr b="1" i="0" lang="en-US" sz="2600" u="none" cap="none" strike="noStrike">
+              <a:rPr lang="en-US" sz="2600" b="1" i="0" u="none" strike="noStrike" cap="none">
                 <a:solidFill>
                   <a:srgbClr val="FFFFFF"/>
                 </a:solidFill>
@@ -3789,7 +4043,7 @@
               </a:rPr>
               <a:t>20</a:t>
             </a:r>
-            <a:endParaRPr b="0" i="0" sz="2600" u="none" cap="none" strike="noStrike">
+            <a:endParaRPr sz="2600" b="0" i="0" u="none" strike="noStrike" cap="none">
               <a:solidFill>
                 <a:schemeClr val="dk1"/>
               </a:solidFill>
@@ -3821,12 +4075,12 @@
           </a:ln>
         </p:spPr>
         <p:txBody>
-          <a:bodyPr anchorCtr="0" anchor="ctr" bIns="0" lIns="0" spcFirstLastPara="1" rIns="0" wrap="square" tIns="0">
+          <a:bodyPr spcFirstLastPara="1" wrap="square" lIns="0" tIns="0" rIns="0" bIns="0" anchor="ctr" anchorCtr="0">
             <a:noAutofit/>
           </a:bodyPr>
           <a:lstStyle/>
           <a:p>
-            <a:pPr indent="0" lvl="0" marL="0" marR="0" rtl="0" algn="ctr">
+            <a:pPr marL="0" marR="0" lvl="0" indent="0" algn="ctr" rtl="0">
               <a:spcBef>
                 <a:spcPts val="0"/>
               </a:spcBef>
@@ -3841,7 +4095,7 @@
               <a:buNone/>
             </a:pPr>
             <a:r>
-              <a:rPr b="0" i="0" lang="en-US" sz="1100" u="none" cap="none" strike="noStrike">
+              <a:rPr lang="en-US" sz="1100" b="0" i="0" u="none" strike="noStrike" cap="none">
                 <a:solidFill>
                   <a:srgbClr val="AFC3E8"/>
                 </a:solidFill>
@@ -3852,7 +4106,7 @@
               </a:rPr>
               <a:t>Marka</a:t>
             </a:r>
-            <a:endParaRPr b="0" i="0" sz="1100" u="none" cap="none" strike="noStrike">
+            <a:endParaRPr sz="1100" b="0" i="0" u="none" strike="noStrike" cap="none">
               <a:solidFill>
                 <a:schemeClr val="dk1"/>
               </a:solidFill>
@@ -3877,7 +4131,7 @@
           </a:xfrm>
           <a:prstGeom prst="roundRect">
             <a:avLst>
-              <a:gd fmla="val 7273" name="adj"/>
+              <a:gd name="adj" fmla="val 7273"/>
             </a:avLst>
           </a:prstGeom>
           <a:solidFill>
@@ -3888,12 +4142,12 @@
           </a:ln>
         </p:spPr>
         <p:txBody>
-          <a:bodyPr anchorCtr="0" anchor="ctr" bIns="91425" lIns="91425" spcFirstLastPara="1" rIns="91425" wrap="square" tIns="91425">
+          <a:bodyPr spcFirstLastPara="1" wrap="square" lIns="91425" tIns="91425" rIns="91425" bIns="91425" anchor="ctr" anchorCtr="0">
             <a:noAutofit/>
           </a:bodyPr>
           <a:lstStyle/>
           <a:p>
-            <a:pPr indent="0" lvl="0" marL="0" rtl="0" algn="l">
+            <a:pPr marL="0" lvl="0" indent="0" algn="l" rtl="0">
               <a:spcBef>
                 <a:spcPts val="0"/>
               </a:spcBef>
@@ -3902,9 +4156,6 @@
               </a:spcAft>
               <a:buNone/>
             </a:pPr>
-            <a:r>
-              <a:t/>
-            </a:r>
             <a:endParaRPr/>
           </a:p>
         </p:txBody>
@@ -3929,12 +4180,12 @@
           </a:ln>
         </p:spPr>
         <p:txBody>
-          <a:bodyPr anchorCtr="0" anchor="ctr" bIns="0" lIns="0" spcFirstLastPara="1" rIns="0" wrap="square" tIns="0">
+          <a:bodyPr spcFirstLastPara="1" wrap="square" lIns="0" tIns="0" rIns="0" bIns="0" anchor="ctr" anchorCtr="0">
             <a:noAutofit/>
           </a:bodyPr>
           <a:lstStyle/>
           <a:p>
-            <a:pPr indent="0" lvl="0" marL="0" marR="0" rtl="0" algn="ctr">
+            <a:pPr marL="0" marR="0" lvl="0" indent="0" algn="ctr" rtl="0">
               <a:spcBef>
                 <a:spcPts val="0"/>
               </a:spcBef>
@@ -3949,7 +4200,7 @@
               <a:buNone/>
             </a:pPr>
             <a:r>
-              <a:rPr b="1" i="0" lang="en-US" sz="2600" u="none" cap="none" strike="noStrike">
+              <a:rPr lang="en-US" sz="2600" b="1" i="0" u="none" strike="noStrike" cap="none">
                 <a:solidFill>
                   <a:srgbClr val="FFFFFF"/>
                 </a:solidFill>
@@ -3960,7 +4211,7 @@
               </a:rPr>
               <a:t>6</a:t>
             </a:r>
-            <a:endParaRPr b="0" i="0" sz="2600" u="none" cap="none" strike="noStrike">
+            <a:endParaRPr sz="2600" b="0" i="0" u="none" strike="noStrike" cap="none">
               <a:solidFill>
                 <a:schemeClr val="dk1"/>
               </a:solidFill>
@@ -3992,12 +4243,12 @@
           </a:ln>
         </p:spPr>
         <p:txBody>
-          <a:bodyPr anchorCtr="0" anchor="ctr" bIns="0" lIns="0" spcFirstLastPara="1" rIns="0" wrap="square" tIns="0">
+          <a:bodyPr spcFirstLastPara="1" wrap="square" lIns="0" tIns="0" rIns="0" bIns="0" anchor="ctr" anchorCtr="0">
             <a:noAutofit/>
           </a:bodyPr>
           <a:lstStyle/>
           <a:p>
-            <a:pPr indent="0" lvl="0" marL="0" marR="0" rtl="0" algn="ctr">
+            <a:pPr marL="0" marR="0" lvl="0" indent="0" algn="ctr" rtl="0">
               <a:spcBef>
                 <a:spcPts val="0"/>
               </a:spcBef>
@@ -4012,7 +4263,7 @@
               <a:buNone/>
             </a:pPr>
             <a:r>
-              <a:rPr b="0" i="0" lang="en-US" sz="1100" u="none" cap="none" strike="noStrike">
+              <a:rPr lang="en-US" sz="1100" b="0" i="0" u="none" strike="noStrike" cap="none">
                 <a:solidFill>
                   <a:srgbClr val="AFC3E8"/>
                 </a:solidFill>
@@ -4023,7 +4274,7 @@
               </a:rPr>
               <a:t>Menşei Ülke</a:t>
             </a:r>
-            <a:endParaRPr b="0" i="0" sz="1100" u="none" cap="none" strike="noStrike">
+            <a:endParaRPr sz="1100" b="0" i="0" u="none" strike="noStrike" cap="none">
               <a:solidFill>
                 <a:schemeClr val="dk1"/>
               </a:solidFill>
@@ -4055,12 +4306,12 @@
           </a:ln>
         </p:spPr>
         <p:txBody>
-          <a:bodyPr anchorCtr="0" anchor="ctr" bIns="0" lIns="0" spcFirstLastPara="1" rIns="0" wrap="square" tIns="0">
+          <a:bodyPr spcFirstLastPara="1" wrap="square" lIns="0" tIns="0" rIns="0" bIns="0" anchor="ctr" anchorCtr="0">
             <a:noAutofit/>
           </a:bodyPr>
           <a:lstStyle/>
           <a:p>
-            <a:pPr indent="0" lvl="0" marL="0" marR="0" rtl="0" algn="l">
+            <a:pPr marL="0" marR="0" lvl="0" indent="0" algn="l" rtl="0">
               <a:spcBef>
                 <a:spcPts val="0"/>
               </a:spcBef>
@@ -4075,7 +4326,7 @@
               <a:buNone/>
             </a:pPr>
             <a:r>
-              <a:rPr b="1" i="0" lang="en-US" sz="1300" u="none" cap="none" strike="noStrike">
+              <a:rPr lang="en-US" sz="1300" b="1" i="0" u="none" strike="noStrike" cap="none">
                 <a:solidFill>
                   <a:srgbClr val="FFFFFF"/>
                 </a:solidFill>
@@ -4086,7 +4337,7 @@
               </a:rPr>
               <a:t>Hazırlayan:  Süha Çağrı Özbakışlar</a:t>
             </a:r>
-            <a:endParaRPr b="0" i="0" sz="1300" u="none" cap="none" strike="noStrike">
+            <a:endParaRPr sz="1300" b="0" i="0" u="none" strike="noStrike" cap="none">
               <a:solidFill>
                 <a:schemeClr val="dk1"/>
               </a:solidFill>
@@ -4107,11 +4358,11 @@
 </file>
 
 <file path=ppt/slides/slide2.xml><?xml version="1.0" encoding="utf-8"?>
-<p:sld xmlns:a="http://schemas.openxmlformats.org/drawingml/2006/main" xmlns:r="http://schemas.openxmlformats.org/officeDocument/2006/relationships" xmlns:mc="http://schemas.openxmlformats.org/markup-compatibility/2006" xmlns:mv="urn:schemas-microsoft-com:mac:vml" xmlns:p="http://schemas.openxmlformats.org/presentationml/2006/main" xmlns:c="http://schemas.openxmlformats.org/drawingml/2006/chart" xmlns:dgm="http://schemas.openxmlformats.org/drawingml/2006/diagram" xmlns:o="urn:schemas-microsoft-com:office:office" xmlns:v="urn:schemas-microsoft-com:vml" xmlns:pvml="urn:schemas-microsoft-com:office:powerpoint" xmlns:com="http://schemas.openxmlformats.org/drawingml/2006/compatibility" xmlns:p14="http://schemas.microsoft.com/office/powerpoint/2010/main" xmlns:p15="http://schemas.microsoft.com/office/powerpoint/2012/main" xmlns:ahyp="http://schemas.microsoft.com/office/drawing/2018/hyperlinkcolor">
+<p:sld xmlns:a="http://schemas.openxmlformats.org/drawingml/2006/main" xmlns:r="http://schemas.openxmlformats.org/officeDocument/2006/relationships" xmlns:p="http://schemas.openxmlformats.org/presentationml/2006/main">
   <p:cSld>
     <p:spTree>
       <p:nvGrpSpPr>
-        <p:cNvPr id="41" name="Shape 41"/>
+        <p:cNvPr id="1" name="Shape 41"/>
         <p:cNvGrpSpPr/>
         <p:nvPr/>
       </p:nvGrpSpPr>
@@ -4145,12 +4396,12 @@
           </a:ln>
         </p:spPr>
         <p:txBody>
-          <a:bodyPr anchorCtr="0" anchor="ctr" bIns="91425" lIns="91425" spcFirstLastPara="1" rIns="91425" wrap="square" tIns="91425">
+          <a:bodyPr spcFirstLastPara="1" wrap="square" lIns="91425" tIns="91425" rIns="91425" bIns="91425" anchor="ctr" anchorCtr="0">
             <a:noAutofit/>
           </a:bodyPr>
           <a:lstStyle/>
           <a:p>
-            <a:pPr indent="0" lvl="0" marL="0" rtl="0" algn="l">
+            <a:pPr marL="0" lvl="0" indent="0" algn="l" rtl="0">
               <a:spcBef>
                 <a:spcPts val="0"/>
               </a:spcBef>
@@ -4159,16 +4410,13 @@
               </a:spcAft>
               <a:buNone/>
             </a:pPr>
-            <a:r>
-              <a:t/>
-            </a:r>
             <a:endParaRPr/>
           </a:p>
         </p:txBody>
       </p:sp>
       <p:pic>
         <p:nvPicPr>
-          <p:cNvPr descr="/home/claude/images/icon_database.png" id="43" name="Google Shape;43;p5"/>
+          <p:cNvPr id="43" name="Google Shape;43;p5" descr="/home/claude/images/icon_database.png"/>
           <p:cNvPicPr preferRelativeResize="0"/>
           <p:nvPr/>
         </p:nvPicPr>
@@ -4176,7 +4424,7 @@
           <a:blip r:embed="rId3">
             <a:alphaModFix/>
           </a:blip>
-          <a:srcRect b="0" l="0" r="0" t="0"/>
+          <a:srcRect/>
           <a:stretch/>
         </p:blipFill>
         <p:spPr>
@@ -4213,12 +4461,12 @@
           </a:ln>
         </p:spPr>
         <p:txBody>
-          <a:bodyPr anchorCtr="0" anchor="ctr" bIns="0" lIns="0" spcFirstLastPara="1" rIns="0" wrap="square" tIns="0">
+          <a:bodyPr spcFirstLastPara="1" wrap="square" lIns="0" tIns="0" rIns="0" bIns="0" anchor="ctr" anchorCtr="0">
             <a:noAutofit/>
           </a:bodyPr>
           <a:lstStyle/>
           <a:p>
-            <a:pPr indent="0" lvl="0" marL="0" marR="0" rtl="0" algn="l">
+            <a:pPr marL="0" marR="0" lvl="0" indent="0" algn="l" rtl="0">
               <a:spcBef>
                 <a:spcPts val="0"/>
               </a:spcBef>
@@ -4233,7 +4481,7 @@
               <a:buNone/>
             </a:pPr>
             <a:r>
-              <a:rPr b="1" i="0" lang="en-US" sz="1200" u="none" cap="none" strike="noStrike">
+              <a:rPr lang="en-US" sz="1200" b="1" i="0" u="none" strike="noStrike" cap="none">
                 <a:solidFill>
                   <a:srgbClr val="2F6FED"/>
                 </a:solidFill>
@@ -4244,7 +4492,7 @@
               </a:rPr>
               <a:t>VERİ SETİ</a:t>
             </a:r>
-            <a:endParaRPr b="0" i="0" sz="1200" u="none" cap="none" strike="noStrike">
+            <a:endParaRPr sz="1200" b="0" i="0" u="none" strike="noStrike" cap="none">
               <a:solidFill>
                 <a:schemeClr val="dk1"/>
               </a:solidFill>
@@ -4276,12 +4524,12 @@
           </a:ln>
         </p:spPr>
         <p:txBody>
-          <a:bodyPr anchorCtr="0" anchor="ctr" bIns="0" lIns="0" spcFirstLastPara="1" rIns="0" wrap="square" tIns="0">
+          <a:bodyPr spcFirstLastPara="1" wrap="square" lIns="0" tIns="0" rIns="0" bIns="0" anchor="ctr" anchorCtr="0">
             <a:noAutofit/>
           </a:bodyPr>
           <a:lstStyle/>
           <a:p>
-            <a:pPr indent="0" lvl="0" marL="0" marR="0" rtl="0" algn="l">
+            <a:pPr marL="0" marR="0" lvl="0" indent="0" algn="l" rtl="0">
               <a:spcBef>
                 <a:spcPts val="0"/>
               </a:spcBef>
@@ -4296,7 +4544,7 @@
               <a:buNone/>
             </a:pPr>
             <a:r>
-              <a:rPr b="1" i="0" lang="en-US" sz="2500" u="none" cap="none" strike="noStrike">
+              <a:rPr lang="en-US" sz="2500" b="1" i="0" u="none" strike="noStrike" cap="none" dirty="0">
                 <a:solidFill>
                   <a:srgbClr val="16234A"/>
                 </a:solidFill>
@@ -4305,9 +4553,105 @@
                 <a:cs typeface="Cambria"/>
                 <a:sym typeface="Cambria"/>
               </a:rPr>
-              <a:t>Veri Seti Genel Bakışı &amp; Veri Kalitesi</a:t>
-            </a:r>
-            <a:endParaRPr b="0" i="0" sz="2500" u="none" cap="none" strike="noStrike">
+              <a:t>Veri </a:t>
+            </a:r>
+            <a:r>
+              <a:rPr lang="en-US" sz="2500" b="1" i="0" u="none" strike="noStrike" cap="none" dirty="0" err="1">
+                <a:solidFill>
+                  <a:srgbClr val="16234A"/>
+                </a:solidFill>
+                <a:latin typeface="Cambria"/>
+                <a:ea typeface="Cambria"/>
+                <a:cs typeface="Cambria"/>
+                <a:sym typeface="Cambria"/>
+              </a:rPr>
+              <a:t>Seti</a:t>
+            </a:r>
+            <a:r>
+              <a:rPr lang="en-US" sz="2500" b="1" dirty="0" err="1">
+                <a:solidFill>
+                  <a:srgbClr val="16234A"/>
+                </a:solidFill>
+                <a:latin typeface="Cambria"/>
+                <a:ea typeface="Cambria"/>
+                <a:cs typeface="Cambria"/>
+                <a:sym typeface="Cambria"/>
+              </a:rPr>
+              <a:t>ne</a:t>
+            </a:r>
+            <a:r>
+              <a:rPr lang="en-US" sz="2500" b="1" i="0" u="none" strike="noStrike" cap="none" dirty="0">
+                <a:solidFill>
+                  <a:srgbClr val="16234A"/>
+                </a:solidFill>
+                <a:latin typeface="Cambria"/>
+                <a:ea typeface="Cambria"/>
+                <a:cs typeface="Cambria"/>
+                <a:sym typeface="Cambria"/>
+              </a:rPr>
+              <a:t> </a:t>
+            </a:r>
+            <a:r>
+              <a:rPr lang="en-US" sz="2500" b="1" i="0" u="none" strike="noStrike" cap="none" dirty="0" err="1">
+                <a:solidFill>
+                  <a:srgbClr val="16234A"/>
+                </a:solidFill>
+                <a:latin typeface="Cambria"/>
+                <a:ea typeface="Cambria"/>
+                <a:cs typeface="Cambria"/>
+                <a:sym typeface="Cambria"/>
+              </a:rPr>
+              <a:t>Genel</a:t>
+            </a:r>
+            <a:r>
+              <a:rPr lang="en-US" sz="2500" b="1" i="0" u="none" strike="noStrike" cap="none" dirty="0">
+                <a:solidFill>
+                  <a:srgbClr val="16234A"/>
+                </a:solidFill>
+                <a:latin typeface="Cambria"/>
+                <a:ea typeface="Cambria"/>
+                <a:cs typeface="Cambria"/>
+                <a:sym typeface="Cambria"/>
+              </a:rPr>
+              <a:t> </a:t>
+            </a:r>
+            <a:r>
+              <a:rPr lang="en-US" sz="2500" b="1" i="0" u="none" strike="noStrike" cap="none" dirty="0" err="1">
+                <a:solidFill>
+                  <a:srgbClr val="16234A"/>
+                </a:solidFill>
+                <a:latin typeface="Cambria"/>
+                <a:ea typeface="Cambria"/>
+                <a:cs typeface="Cambria"/>
+                <a:sym typeface="Cambria"/>
+              </a:rPr>
+              <a:t>Bakış</a:t>
+            </a:r>
+            <a:r>
+              <a:rPr lang="en-US" sz="2500" b="1" i="0" u="none" strike="noStrike" cap="none" dirty="0">
+                <a:solidFill>
+                  <a:srgbClr val="16234A"/>
+                </a:solidFill>
+                <a:latin typeface="Cambria"/>
+                <a:ea typeface="Cambria"/>
+                <a:cs typeface="Cambria"/>
+                <a:sym typeface="Cambria"/>
+              </a:rPr>
+              <a:t> &amp; Veri </a:t>
+            </a:r>
+            <a:r>
+              <a:rPr lang="en-US" sz="2500" b="1" i="0" u="none" strike="noStrike" cap="none" dirty="0" err="1">
+                <a:solidFill>
+                  <a:srgbClr val="16234A"/>
+                </a:solidFill>
+                <a:latin typeface="Cambria"/>
+                <a:ea typeface="Cambria"/>
+                <a:cs typeface="Cambria"/>
+                <a:sym typeface="Cambria"/>
+              </a:rPr>
+              <a:t>Kalitesi</a:t>
+            </a:r>
+            <a:endParaRPr sz="2500" b="0" i="0" u="none" strike="noStrike" cap="none" dirty="0">
               <a:solidFill>
                 <a:schemeClr val="dk1"/>
               </a:solidFill>
@@ -4332,7 +4676,7 @@
           </a:xfrm>
           <a:prstGeom prst="roundRect">
             <a:avLst>
-              <a:gd fmla="val 8333" name="adj"/>
+              <a:gd name="adj" fmla="val 8333"/>
             </a:avLst>
           </a:prstGeom>
           <a:solidFill>
@@ -4343,12 +4687,12 @@
           </a:ln>
         </p:spPr>
         <p:txBody>
-          <a:bodyPr anchorCtr="0" anchor="ctr" bIns="91425" lIns="91425" spcFirstLastPara="1" rIns="91425" wrap="square" tIns="91425">
+          <a:bodyPr spcFirstLastPara="1" wrap="square" lIns="91425" tIns="91425" rIns="91425" bIns="91425" anchor="ctr" anchorCtr="0">
             <a:noAutofit/>
           </a:bodyPr>
           <a:lstStyle/>
           <a:p>
-            <a:pPr indent="0" lvl="0" marL="0" rtl="0" algn="l">
+            <a:pPr marL="0" lvl="0" indent="0" algn="l" rtl="0">
               <a:spcBef>
                 <a:spcPts val="0"/>
               </a:spcBef>
@@ -4357,9 +4701,6 @@
               </a:spcAft>
               <a:buNone/>
             </a:pPr>
-            <a:r>
-              <a:t/>
-            </a:r>
             <a:endParaRPr/>
           </a:p>
         </p:txBody>
@@ -4384,12 +4725,12 @@
           </a:ln>
         </p:spPr>
         <p:txBody>
-          <a:bodyPr anchorCtr="0" anchor="b" bIns="0" lIns="0" spcFirstLastPara="1" rIns="0" wrap="square" tIns="0">
+          <a:bodyPr spcFirstLastPara="1" wrap="square" lIns="0" tIns="0" rIns="0" bIns="0" anchor="b" anchorCtr="0">
             <a:noAutofit/>
           </a:bodyPr>
           <a:lstStyle/>
           <a:p>
-            <a:pPr indent="0" lvl="0" marL="0" marR="0" rtl="0" algn="l">
+            <a:pPr marL="0" marR="0" lvl="0" indent="0" algn="l" rtl="0">
               <a:spcBef>
                 <a:spcPts val="0"/>
               </a:spcBef>
@@ -4404,7 +4745,7 @@
               <a:buNone/>
             </a:pPr>
             <a:r>
-              <a:rPr b="1" i="0" lang="en-US" sz="3000" u="none" cap="none" strike="noStrike">
+              <a:rPr lang="en-US" sz="3000" b="1" i="0" u="none" strike="noStrike" cap="none">
                 <a:solidFill>
                   <a:srgbClr val="0FB5C9"/>
                 </a:solidFill>
@@ -4415,7 +4756,7 @@
               </a:rPr>
               <a:t>2.000</a:t>
             </a:r>
-            <a:endParaRPr b="0" i="0" sz="3000" u="none" cap="none" strike="noStrike">
+            <a:endParaRPr sz="3000" b="0" i="0" u="none" strike="noStrike" cap="none">
               <a:solidFill>
                 <a:schemeClr val="dk1"/>
               </a:solidFill>
@@ -4447,12 +4788,12 @@
           </a:ln>
         </p:spPr>
         <p:txBody>
-          <a:bodyPr anchorCtr="0" anchor="t" bIns="0" lIns="0" spcFirstLastPara="1" rIns="0" wrap="square" tIns="0">
+          <a:bodyPr spcFirstLastPara="1" wrap="square" lIns="0" tIns="0" rIns="0" bIns="0" anchor="t" anchorCtr="0">
             <a:noAutofit/>
           </a:bodyPr>
           <a:lstStyle/>
           <a:p>
-            <a:pPr indent="0" lvl="0" marL="0" marR="0" rtl="0" algn="l">
+            <a:pPr marL="0" marR="0" lvl="0" indent="0" algn="l" rtl="0">
               <a:lnSpc>
                 <a:spcPct val="110000"/>
               </a:lnSpc>
@@ -4470,7 +4811,7 @@
               <a:buNone/>
             </a:pPr>
             <a:r>
-              <a:rPr b="0" i="0" lang="en-US" sz="1050" u="none" cap="none" strike="noStrike">
+              <a:rPr lang="en-US" sz="1050" b="0" i="0" u="none" strike="noStrike" cap="none">
                 <a:solidFill>
                   <a:srgbClr val="FFFFFF"/>
                 </a:solidFill>
@@ -4481,7 +4822,7 @@
               </a:rPr>
               <a:t>Gözlem</a:t>
             </a:r>
-            <a:endParaRPr b="0" i="0" sz="1050" u="none" cap="none" strike="noStrike">
+            <a:endParaRPr sz="1050" b="0" i="0" u="none" strike="noStrike" cap="none">
               <a:solidFill>
                 <a:schemeClr val="dk1"/>
               </a:solidFill>
@@ -4506,7 +4847,7 @@
           </a:xfrm>
           <a:prstGeom prst="roundRect">
             <a:avLst>
-              <a:gd fmla="val 8333" name="adj"/>
+              <a:gd name="adj" fmla="val 8333"/>
             </a:avLst>
           </a:prstGeom>
           <a:solidFill>
@@ -4517,12 +4858,12 @@
           </a:ln>
         </p:spPr>
         <p:txBody>
-          <a:bodyPr anchorCtr="0" anchor="ctr" bIns="91425" lIns="91425" spcFirstLastPara="1" rIns="91425" wrap="square" tIns="91425">
+          <a:bodyPr spcFirstLastPara="1" wrap="square" lIns="91425" tIns="91425" rIns="91425" bIns="91425" anchor="ctr" anchorCtr="0">
             <a:noAutofit/>
           </a:bodyPr>
           <a:lstStyle/>
           <a:p>
-            <a:pPr indent="0" lvl="0" marL="0" rtl="0" algn="l">
+            <a:pPr marL="0" lvl="0" indent="0" algn="l" rtl="0">
               <a:spcBef>
                 <a:spcPts val="0"/>
               </a:spcBef>
@@ -4531,9 +4872,6 @@
               </a:spcAft>
               <a:buNone/>
             </a:pPr>
-            <a:r>
-              <a:t/>
-            </a:r>
             <a:endParaRPr/>
           </a:p>
         </p:txBody>
@@ -4558,12 +4896,12 @@
           </a:ln>
         </p:spPr>
         <p:txBody>
-          <a:bodyPr anchorCtr="0" anchor="b" bIns="0" lIns="0" spcFirstLastPara="1" rIns="0" wrap="square" tIns="0">
+          <a:bodyPr spcFirstLastPara="1" wrap="square" lIns="0" tIns="0" rIns="0" bIns="0" anchor="b" anchorCtr="0">
             <a:noAutofit/>
           </a:bodyPr>
           <a:lstStyle/>
           <a:p>
-            <a:pPr indent="0" lvl="0" marL="0" marR="0" rtl="0" algn="l">
+            <a:pPr marL="0" marR="0" lvl="0" indent="0" algn="l" rtl="0">
               <a:spcBef>
                 <a:spcPts val="0"/>
               </a:spcBef>
@@ -4578,7 +4916,7 @@
               <a:buNone/>
             </a:pPr>
             <a:r>
-              <a:rPr b="1" i="0" lang="en-US" sz="3000" u="none" cap="none" strike="noStrike">
+              <a:rPr lang="en-US" sz="3000" b="1" i="0" u="none" strike="noStrike" cap="none">
                 <a:solidFill>
                   <a:srgbClr val="0FB5C9"/>
                 </a:solidFill>
@@ -4589,7 +4927,7 @@
               </a:rPr>
               <a:t>24</a:t>
             </a:r>
-            <a:endParaRPr b="0" i="0" sz="3000" u="none" cap="none" strike="noStrike">
+            <a:endParaRPr sz="3000" b="0" i="0" u="none" strike="noStrike" cap="none">
               <a:solidFill>
                 <a:schemeClr val="dk1"/>
               </a:solidFill>
@@ -4621,12 +4959,12 @@
           </a:ln>
         </p:spPr>
         <p:txBody>
-          <a:bodyPr anchorCtr="0" anchor="t" bIns="0" lIns="0" spcFirstLastPara="1" rIns="0" wrap="square" tIns="0">
+          <a:bodyPr spcFirstLastPara="1" wrap="square" lIns="0" tIns="0" rIns="0" bIns="0" anchor="t" anchorCtr="0">
             <a:noAutofit/>
           </a:bodyPr>
           <a:lstStyle/>
           <a:p>
-            <a:pPr indent="0" lvl="0" marL="0" marR="0" rtl="0" algn="l">
+            <a:pPr marL="0" marR="0" lvl="0" indent="0" algn="l" rtl="0">
               <a:lnSpc>
                 <a:spcPct val="110000"/>
               </a:lnSpc>
@@ -4644,7 +4982,7 @@
               <a:buNone/>
             </a:pPr>
             <a:r>
-              <a:rPr b="0" i="0" lang="en-US" sz="1050" u="none" cap="none" strike="noStrike">
+              <a:rPr lang="en-US" sz="1050" b="0" i="0" u="none" strike="noStrike" cap="none">
                 <a:solidFill>
                   <a:srgbClr val="FFFFFF"/>
                 </a:solidFill>
@@ -4655,7 +4993,7 @@
               </a:rPr>
               <a:t>Sütun</a:t>
             </a:r>
-            <a:endParaRPr b="0" i="0" sz="1050" u="none" cap="none" strike="noStrike">
+            <a:endParaRPr sz="1050" b="0" i="0" u="none" strike="noStrike" cap="none">
               <a:solidFill>
                 <a:schemeClr val="dk1"/>
               </a:solidFill>
@@ -4680,7 +5018,7 @@
           </a:xfrm>
           <a:prstGeom prst="roundRect">
             <a:avLst>
-              <a:gd fmla="val 8333" name="adj"/>
+              <a:gd name="adj" fmla="val 8333"/>
             </a:avLst>
           </a:prstGeom>
           <a:solidFill>
@@ -4691,12 +5029,12 @@
           </a:ln>
         </p:spPr>
         <p:txBody>
-          <a:bodyPr anchorCtr="0" anchor="ctr" bIns="91425" lIns="91425" spcFirstLastPara="1" rIns="91425" wrap="square" tIns="91425">
+          <a:bodyPr spcFirstLastPara="1" wrap="square" lIns="91425" tIns="91425" rIns="91425" bIns="91425" anchor="ctr" anchorCtr="0">
             <a:noAutofit/>
           </a:bodyPr>
           <a:lstStyle/>
           <a:p>
-            <a:pPr indent="0" lvl="0" marL="0" rtl="0" algn="l">
+            <a:pPr marL="0" lvl="0" indent="0" algn="l" rtl="0">
               <a:spcBef>
                 <a:spcPts val="0"/>
               </a:spcBef>
@@ -4705,9 +5043,6 @@
               </a:spcAft>
               <a:buNone/>
             </a:pPr>
-            <a:r>
-              <a:t/>
-            </a:r>
             <a:endParaRPr/>
           </a:p>
         </p:txBody>
@@ -4732,12 +5067,12 @@
           </a:ln>
         </p:spPr>
         <p:txBody>
-          <a:bodyPr anchorCtr="0" anchor="b" bIns="0" lIns="0" spcFirstLastPara="1" rIns="0" wrap="square" tIns="0">
+          <a:bodyPr spcFirstLastPara="1" wrap="square" lIns="0" tIns="0" rIns="0" bIns="0" anchor="b" anchorCtr="0">
             <a:noAutofit/>
           </a:bodyPr>
           <a:lstStyle/>
           <a:p>
-            <a:pPr indent="0" lvl="0" marL="0" marR="0" rtl="0" algn="l">
+            <a:pPr marL="0" marR="0" lvl="0" indent="0" algn="l" rtl="0">
               <a:spcBef>
                 <a:spcPts val="0"/>
               </a:spcBef>
@@ -4752,7 +5087,7 @@
               <a:buNone/>
             </a:pPr>
             <a:r>
-              <a:rPr b="1" i="0" lang="en-US" sz="3000" u="none" cap="none" strike="noStrike">
+              <a:rPr lang="en-US" sz="3000" b="1" i="0" u="none" strike="noStrike" cap="none">
                 <a:solidFill>
                   <a:srgbClr val="0FB5C9"/>
                 </a:solidFill>
@@ -4763,7 +5098,7 @@
               </a:rPr>
               <a:t>20</a:t>
             </a:r>
-            <a:endParaRPr b="0" i="0" sz="3000" u="none" cap="none" strike="noStrike">
+            <a:endParaRPr sz="3000" b="0" i="0" u="none" strike="noStrike" cap="none">
               <a:solidFill>
                 <a:schemeClr val="dk1"/>
               </a:solidFill>
@@ -4795,12 +5130,12 @@
           </a:ln>
         </p:spPr>
         <p:txBody>
-          <a:bodyPr anchorCtr="0" anchor="t" bIns="0" lIns="0" spcFirstLastPara="1" rIns="0" wrap="square" tIns="0">
+          <a:bodyPr spcFirstLastPara="1" wrap="square" lIns="0" tIns="0" rIns="0" bIns="0" anchor="t" anchorCtr="0">
             <a:noAutofit/>
           </a:bodyPr>
           <a:lstStyle/>
           <a:p>
-            <a:pPr indent="0" lvl="0" marL="0" marR="0" rtl="0" algn="l">
+            <a:pPr marL="0" marR="0" lvl="0" indent="0" algn="l" rtl="0">
               <a:lnSpc>
                 <a:spcPct val="110000"/>
               </a:lnSpc>
@@ -4818,7 +5153,7 @@
               <a:buNone/>
             </a:pPr>
             <a:r>
-              <a:rPr b="0" i="0" lang="en-US" sz="1050" u="none" cap="none" strike="noStrike">
+              <a:rPr lang="en-US" sz="1050" b="0" i="0" u="none" strike="noStrike" cap="none">
                 <a:solidFill>
                   <a:srgbClr val="FFFFFF"/>
                 </a:solidFill>
@@ -4829,7 +5164,7 @@
               </a:rPr>
               <a:t>Marka</a:t>
             </a:r>
-            <a:endParaRPr b="0" i="0" sz="1050" u="none" cap="none" strike="noStrike">
+            <a:endParaRPr sz="1050" b="0" i="0" u="none" strike="noStrike" cap="none">
               <a:solidFill>
                 <a:schemeClr val="dk1"/>
               </a:solidFill>
@@ -4854,7 +5189,7 @@
           </a:xfrm>
           <a:prstGeom prst="roundRect">
             <a:avLst>
-              <a:gd fmla="val 8333" name="adj"/>
+              <a:gd name="adj" fmla="val 8333"/>
             </a:avLst>
           </a:prstGeom>
           <a:solidFill>
@@ -4865,12 +5200,12 @@
           </a:ln>
         </p:spPr>
         <p:txBody>
-          <a:bodyPr anchorCtr="0" anchor="ctr" bIns="91425" lIns="91425" spcFirstLastPara="1" rIns="91425" wrap="square" tIns="91425">
+          <a:bodyPr spcFirstLastPara="1" wrap="square" lIns="91425" tIns="91425" rIns="91425" bIns="91425" anchor="ctr" anchorCtr="0">
             <a:noAutofit/>
           </a:bodyPr>
           <a:lstStyle/>
           <a:p>
-            <a:pPr indent="0" lvl="0" marL="0" rtl="0" algn="l">
+            <a:pPr marL="0" lvl="0" indent="0" algn="l" rtl="0">
               <a:spcBef>
                 <a:spcPts val="0"/>
               </a:spcBef>
@@ -4879,9 +5214,6 @@
               </a:spcAft>
               <a:buNone/>
             </a:pPr>
-            <a:r>
-              <a:t/>
-            </a:r>
             <a:endParaRPr/>
           </a:p>
         </p:txBody>
@@ -4906,12 +5238,12 @@
           </a:ln>
         </p:spPr>
         <p:txBody>
-          <a:bodyPr anchorCtr="0" anchor="b" bIns="0" lIns="0" spcFirstLastPara="1" rIns="0" wrap="square" tIns="0">
+          <a:bodyPr spcFirstLastPara="1" wrap="square" lIns="0" tIns="0" rIns="0" bIns="0" anchor="b" anchorCtr="0">
             <a:noAutofit/>
           </a:bodyPr>
           <a:lstStyle/>
           <a:p>
-            <a:pPr indent="0" lvl="0" marL="0" marR="0" rtl="0" algn="l">
+            <a:pPr marL="0" marR="0" lvl="0" indent="0" algn="l" rtl="0">
               <a:spcBef>
                 <a:spcPts val="0"/>
               </a:spcBef>
@@ -4926,7 +5258,7 @@
               <a:buNone/>
             </a:pPr>
             <a:r>
-              <a:rPr b="1" i="0" lang="en-US" sz="3000" u="none" cap="none" strike="noStrike">
+              <a:rPr lang="en-US" sz="3000" b="1" i="0" u="none" strike="noStrike" cap="none">
                 <a:solidFill>
                   <a:srgbClr val="0FB5C9"/>
                 </a:solidFill>
@@ -4937,7 +5269,7 @@
               </a:rPr>
               <a:t>0</a:t>
             </a:r>
-            <a:endParaRPr b="0" i="0" sz="3000" u="none" cap="none" strike="noStrike">
+            <a:endParaRPr sz="3000" b="0" i="0" u="none" strike="noStrike" cap="none">
               <a:solidFill>
                 <a:schemeClr val="dk1"/>
               </a:solidFill>
@@ -4969,12 +5301,12 @@
           </a:ln>
         </p:spPr>
         <p:txBody>
-          <a:bodyPr anchorCtr="0" anchor="t" bIns="0" lIns="0" spcFirstLastPara="1" rIns="0" wrap="square" tIns="0">
+          <a:bodyPr spcFirstLastPara="1" wrap="square" lIns="0" tIns="0" rIns="0" bIns="0" anchor="t" anchorCtr="0">
             <a:noAutofit/>
           </a:bodyPr>
           <a:lstStyle/>
           <a:p>
-            <a:pPr indent="0" lvl="0" marL="0" marR="0" rtl="0" algn="l">
+            <a:pPr marL="0" marR="0" lvl="0" indent="0" algn="l" rtl="0">
               <a:lnSpc>
                 <a:spcPct val="110000"/>
               </a:lnSpc>
@@ -4992,7 +5324,7 @@
               <a:buNone/>
             </a:pPr>
             <a:r>
-              <a:rPr b="0" i="0" lang="en-US" sz="1050" u="none" cap="none" strike="noStrike">
+              <a:rPr lang="en-US" sz="1050" b="0" i="0" u="none" strike="noStrike" cap="none">
                 <a:solidFill>
                   <a:srgbClr val="FFFFFF"/>
                 </a:solidFill>
@@ -5003,7 +5335,7 @@
               </a:rPr>
               <a:t>Eksik Değer / Tekrar Eden Kayıt</a:t>
             </a:r>
-            <a:endParaRPr b="0" i="0" sz="1050" u="none" cap="none" strike="noStrike">
+            <a:endParaRPr sz="1050" b="0" i="0" u="none" strike="noStrike" cap="none">
               <a:solidFill>
                 <a:schemeClr val="dk1"/>
               </a:solidFill>
@@ -5035,12 +5367,12 @@
           </a:ln>
         </p:spPr>
         <p:txBody>
-          <a:bodyPr anchorCtr="0" anchor="ctr" bIns="0" lIns="0" spcFirstLastPara="1" rIns="0" wrap="square" tIns="0">
+          <a:bodyPr spcFirstLastPara="1" wrap="square" lIns="0" tIns="0" rIns="0" bIns="0" anchor="ctr" anchorCtr="0">
             <a:noAutofit/>
           </a:bodyPr>
           <a:lstStyle/>
           <a:p>
-            <a:pPr indent="0" lvl="0" marL="0" marR="0" rtl="0" algn="l">
+            <a:pPr marL="0" marR="0" lvl="0" indent="0" algn="l" rtl="0">
               <a:spcBef>
                 <a:spcPts val="0"/>
               </a:spcBef>
@@ -5055,7 +5387,7 @@
               <a:buNone/>
             </a:pPr>
             <a:r>
-              <a:rPr b="1" i="0" lang="en-US" sz="1350" u="none" cap="none" strike="noStrike">
+              <a:rPr lang="en-US" sz="1350" b="1" i="0" u="none" strike="noStrike" cap="none">
                 <a:solidFill>
                   <a:srgbClr val="16234A"/>
                 </a:solidFill>
@@ -5066,7 +5398,7 @@
               </a:rPr>
               <a:t>Markaların Menşei Ülkeleri</a:t>
             </a:r>
-            <a:endParaRPr b="0" i="0" sz="1350" u="none" cap="none" strike="noStrike">
+            <a:endParaRPr sz="1350" b="0" i="0" u="none" strike="noStrike" cap="none">
               <a:solidFill>
                 <a:schemeClr val="dk1"/>
               </a:solidFill>
@@ -5091,7 +5423,7 @@
           </a:xfrm>
           <a:prstGeom prst="roundRect">
             <a:avLst>
-              <a:gd fmla="val 14815" name="adj"/>
+              <a:gd name="adj" fmla="val 14815"/>
             </a:avLst>
           </a:prstGeom>
           <a:solidFill>
@@ -5102,12 +5434,12 @@
           </a:ln>
         </p:spPr>
         <p:txBody>
-          <a:bodyPr anchorCtr="0" anchor="ctr" bIns="91425" lIns="91425" spcFirstLastPara="1" rIns="91425" wrap="square" tIns="91425">
+          <a:bodyPr spcFirstLastPara="1" wrap="square" lIns="91425" tIns="91425" rIns="91425" bIns="91425" anchor="ctr" anchorCtr="0">
             <a:noAutofit/>
           </a:bodyPr>
           <a:lstStyle/>
           <a:p>
-            <a:pPr indent="0" lvl="0" marL="0" rtl="0" algn="l">
+            <a:pPr marL="0" lvl="0" indent="0" algn="l" rtl="0">
               <a:spcBef>
                 <a:spcPts val="0"/>
               </a:spcBef>
@@ -5116,9 +5448,6 @@
               </a:spcAft>
               <a:buNone/>
             </a:pPr>
-            <a:r>
-              <a:t/>
-            </a:r>
             <a:endParaRPr/>
           </a:p>
         </p:txBody>
@@ -5143,12 +5472,12 @@
           </a:ln>
         </p:spPr>
         <p:txBody>
-          <a:bodyPr anchorCtr="0" anchor="ctr" bIns="0" lIns="0" spcFirstLastPara="1" rIns="0" wrap="square" tIns="0">
+          <a:bodyPr spcFirstLastPara="1" wrap="square" lIns="0" tIns="0" rIns="0" bIns="0" anchor="ctr" anchorCtr="0">
             <a:noAutofit/>
           </a:bodyPr>
           <a:lstStyle/>
           <a:p>
-            <a:pPr indent="0" lvl="0" marL="0" marR="0" rtl="0" algn="l">
+            <a:pPr marL="0" marR="0" lvl="0" indent="0" algn="l" rtl="0">
               <a:spcBef>
                 <a:spcPts val="0"/>
               </a:spcBef>
@@ -5163,7 +5492,7 @@
               <a:buNone/>
             </a:pPr>
             <a:r>
-              <a:rPr b="1" i="0" lang="en-US" sz="1150" u="none" cap="none" strike="noStrike">
+              <a:rPr lang="en-US" sz="1150" b="1" i="0" u="none" strike="noStrike" cap="none">
                 <a:solidFill>
                   <a:srgbClr val="2F6FED"/>
                 </a:solidFill>
@@ -5174,7 +5503,7 @@
               </a:rPr>
               <a:t>Almanya</a:t>
             </a:r>
-            <a:endParaRPr b="0" i="0" sz="1150" u="none" cap="none" strike="noStrike">
+            <a:endParaRPr sz="1150" b="0" i="0" u="none" strike="noStrike" cap="none">
               <a:solidFill>
                 <a:schemeClr val="dk1"/>
               </a:solidFill>
@@ -5206,12 +5535,12 @@
           </a:ln>
         </p:spPr>
         <p:txBody>
-          <a:bodyPr anchorCtr="0" anchor="ctr" bIns="0" lIns="0" spcFirstLastPara="1" rIns="0" wrap="square" tIns="0">
+          <a:bodyPr spcFirstLastPara="1" wrap="square" lIns="0" tIns="0" rIns="0" bIns="0" anchor="ctr" anchorCtr="0">
             <a:noAutofit/>
           </a:bodyPr>
           <a:lstStyle/>
           <a:p>
-            <a:pPr indent="0" lvl="0" marL="0" marR="0" rtl="0" algn="l">
+            <a:pPr marL="0" marR="0" lvl="0" indent="0" algn="l" rtl="0">
               <a:spcBef>
                 <a:spcPts val="0"/>
               </a:spcBef>
@@ -5226,7 +5555,7 @@
               <a:buNone/>
             </a:pPr>
             <a:r>
-              <a:rPr b="0" i="0" lang="en-US" sz="1050" u="none" cap="none" strike="noStrike">
+              <a:rPr lang="en-US" sz="1050" b="0" i="0" u="none" strike="noStrike" cap="none">
                 <a:solidFill>
                   <a:srgbClr val="16234A"/>
                 </a:solidFill>
@@ -5237,7 +5566,7 @@
               </a:rPr>
               <a:t>Audi, BMW, Mercedes, Porsche, Volkswagen</a:t>
             </a:r>
-            <a:endParaRPr b="0" i="0" sz="1050" u="none" cap="none" strike="noStrike">
+            <a:endParaRPr sz="1050" b="0" i="0" u="none" strike="noStrike" cap="none">
               <a:solidFill>
                 <a:schemeClr val="dk1"/>
               </a:solidFill>
@@ -5262,7 +5591,7 @@
           </a:xfrm>
           <a:prstGeom prst="roundRect">
             <a:avLst>
-              <a:gd fmla="val 14815" name="adj"/>
+              <a:gd name="adj" fmla="val 14815"/>
             </a:avLst>
           </a:prstGeom>
           <a:solidFill>
@@ -5273,12 +5602,12 @@
           </a:ln>
         </p:spPr>
         <p:txBody>
-          <a:bodyPr anchorCtr="0" anchor="ctr" bIns="91425" lIns="91425" spcFirstLastPara="1" rIns="91425" wrap="square" tIns="91425">
+          <a:bodyPr spcFirstLastPara="1" wrap="square" lIns="91425" tIns="91425" rIns="91425" bIns="91425" anchor="ctr" anchorCtr="0">
             <a:noAutofit/>
           </a:bodyPr>
           <a:lstStyle/>
           <a:p>
-            <a:pPr indent="0" lvl="0" marL="0" rtl="0" algn="l">
+            <a:pPr marL="0" lvl="0" indent="0" algn="l" rtl="0">
               <a:spcBef>
                 <a:spcPts val="0"/>
               </a:spcBef>
@@ -5287,9 +5616,6 @@
               </a:spcAft>
               <a:buNone/>
             </a:pPr>
-            <a:r>
-              <a:t/>
-            </a:r>
             <a:endParaRPr/>
           </a:p>
         </p:txBody>
@@ -5314,12 +5640,12 @@
           </a:ln>
         </p:spPr>
         <p:txBody>
-          <a:bodyPr anchorCtr="0" anchor="ctr" bIns="0" lIns="0" spcFirstLastPara="1" rIns="0" wrap="square" tIns="0">
+          <a:bodyPr spcFirstLastPara="1" wrap="square" lIns="0" tIns="0" rIns="0" bIns="0" anchor="ctr" anchorCtr="0">
             <a:noAutofit/>
           </a:bodyPr>
           <a:lstStyle/>
           <a:p>
-            <a:pPr indent="0" lvl="0" marL="0" marR="0" rtl="0" algn="l">
+            <a:pPr marL="0" marR="0" lvl="0" indent="0" algn="l" rtl="0">
               <a:spcBef>
                 <a:spcPts val="0"/>
               </a:spcBef>
@@ -5334,7 +5660,7 @@
               <a:buNone/>
             </a:pPr>
             <a:r>
-              <a:rPr b="1" i="0" lang="en-US" sz="1150" u="none" cap="none" strike="noStrike">
+              <a:rPr lang="en-US" sz="1150" b="1" i="0" u="none" strike="noStrike" cap="none">
                 <a:solidFill>
                   <a:srgbClr val="2F6FED"/>
                 </a:solidFill>
@@ -5345,7 +5671,7 @@
               </a:rPr>
               <a:t>ABD</a:t>
             </a:r>
-            <a:endParaRPr b="0" i="0" sz="1150" u="none" cap="none" strike="noStrike">
+            <a:endParaRPr sz="1150" b="0" i="0" u="none" strike="noStrike" cap="none">
               <a:solidFill>
                 <a:schemeClr val="dk1"/>
               </a:solidFill>
@@ -5377,12 +5703,12 @@
           </a:ln>
         </p:spPr>
         <p:txBody>
-          <a:bodyPr anchorCtr="0" anchor="ctr" bIns="0" lIns="0" spcFirstLastPara="1" rIns="0" wrap="square" tIns="0">
+          <a:bodyPr spcFirstLastPara="1" wrap="square" lIns="0" tIns="0" rIns="0" bIns="0" anchor="ctr" anchorCtr="0">
             <a:noAutofit/>
           </a:bodyPr>
           <a:lstStyle/>
           <a:p>
-            <a:pPr indent="0" lvl="0" marL="0" marR="0" rtl="0" algn="l">
+            <a:pPr marL="0" marR="0" lvl="0" indent="0" algn="l" rtl="0">
               <a:spcBef>
                 <a:spcPts val="0"/>
               </a:spcBef>
@@ -5397,7 +5723,7 @@
               <a:buNone/>
             </a:pPr>
             <a:r>
-              <a:rPr b="0" i="0" lang="en-US" sz="1050" u="none" cap="none" strike="noStrike">
+              <a:rPr lang="en-US" sz="1050" b="0" i="0" u="none" strike="noStrike" cap="none">
                 <a:solidFill>
                   <a:srgbClr val="16234A"/>
                 </a:solidFill>
@@ -5408,7 +5734,7 @@
               </a:rPr>
               <a:t>Fisker, Ford, GM/Chevrolet, Lucid, Rivian, Tesla</a:t>
             </a:r>
-            <a:endParaRPr b="0" i="0" sz="1050" u="none" cap="none" strike="noStrike">
+            <a:endParaRPr sz="1050" b="0" i="0" u="none" strike="noStrike" cap="none">
               <a:solidFill>
                 <a:schemeClr val="dk1"/>
               </a:solidFill>
@@ -5433,7 +5759,7 @@
           </a:xfrm>
           <a:prstGeom prst="roundRect">
             <a:avLst>
-              <a:gd fmla="val 14815" name="adj"/>
+              <a:gd name="adj" fmla="val 14815"/>
             </a:avLst>
           </a:prstGeom>
           <a:solidFill>
@@ -5444,12 +5770,12 @@
           </a:ln>
         </p:spPr>
         <p:txBody>
-          <a:bodyPr anchorCtr="0" anchor="ctr" bIns="91425" lIns="91425" spcFirstLastPara="1" rIns="91425" wrap="square" tIns="91425">
+          <a:bodyPr spcFirstLastPara="1" wrap="square" lIns="91425" tIns="91425" rIns="91425" bIns="91425" anchor="ctr" anchorCtr="0">
             <a:noAutofit/>
           </a:bodyPr>
           <a:lstStyle/>
           <a:p>
-            <a:pPr indent="0" lvl="0" marL="0" rtl="0" algn="l">
+            <a:pPr marL="0" lvl="0" indent="0" algn="l" rtl="0">
               <a:spcBef>
                 <a:spcPts val="0"/>
               </a:spcBef>
@@ -5458,9 +5784,6 @@
               </a:spcAft>
               <a:buNone/>
             </a:pPr>
-            <a:r>
-              <a:t/>
-            </a:r>
             <a:endParaRPr/>
           </a:p>
         </p:txBody>
@@ -5485,12 +5808,12 @@
           </a:ln>
         </p:spPr>
         <p:txBody>
-          <a:bodyPr anchorCtr="0" anchor="ctr" bIns="0" lIns="0" spcFirstLastPara="1" rIns="0" wrap="square" tIns="0">
+          <a:bodyPr spcFirstLastPara="1" wrap="square" lIns="0" tIns="0" rIns="0" bIns="0" anchor="ctr" anchorCtr="0">
             <a:noAutofit/>
           </a:bodyPr>
           <a:lstStyle/>
           <a:p>
-            <a:pPr indent="0" lvl="0" marL="0" marR="0" rtl="0" algn="l">
+            <a:pPr marL="0" marR="0" lvl="0" indent="0" algn="l" rtl="0">
               <a:spcBef>
                 <a:spcPts val="0"/>
               </a:spcBef>
@@ -5505,7 +5828,7 @@
               <a:buNone/>
             </a:pPr>
             <a:r>
-              <a:rPr b="1" i="0" lang="en-US" sz="1150" u="none" cap="none" strike="noStrike">
+              <a:rPr lang="en-US" sz="1150" b="1" i="0" u="none" strike="noStrike" cap="none">
                 <a:solidFill>
                   <a:srgbClr val="2F6FED"/>
                 </a:solidFill>
@@ -5516,7 +5839,7 @@
               </a:rPr>
               <a:t>Japonya</a:t>
             </a:r>
-            <a:endParaRPr b="0" i="0" sz="1150" u="none" cap="none" strike="noStrike">
+            <a:endParaRPr sz="1150" b="0" i="0" u="none" strike="noStrike" cap="none">
               <a:solidFill>
                 <a:schemeClr val="dk1"/>
               </a:solidFill>
@@ -5548,12 +5871,12 @@
           </a:ln>
         </p:spPr>
         <p:txBody>
-          <a:bodyPr anchorCtr="0" anchor="ctr" bIns="0" lIns="0" spcFirstLastPara="1" rIns="0" wrap="square" tIns="0">
+          <a:bodyPr spcFirstLastPara="1" wrap="square" lIns="0" tIns="0" rIns="0" bIns="0" anchor="ctr" anchorCtr="0">
             <a:noAutofit/>
           </a:bodyPr>
           <a:lstStyle/>
           <a:p>
-            <a:pPr indent="0" lvl="0" marL="0" marR="0" rtl="0" algn="l">
+            <a:pPr marL="0" marR="0" lvl="0" indent="0" algn="l" rtl="0">
               <a:spcBef>
                 <a:spcPts val="0"/>
               </a:spcBef>
@@ -5568,7 +5891,7 @@
               <a:buNone/>
             </a:pPr>
             <a:r>
-              <a:rPr b="0" i="0" lang="en-US" sz="1050" u="none" cap="none" strike="noStrike">
+              <a:rPr lang="en-US" sz="1050" b="0" i="0" u="none" strike="noStrike" cap="none">
                 <a:solidFill>
                   <a:srgbClr val="16234A"/>
                 </a:solidFill>
@@ -5579,7 +5902,7 @@
               </a:rPr>
               <a:t>Honda, Toyota</a:t>
             </a:r>
-            <a:endParaRPr b="0" i="0" sz="1050" u="none" cap="none" strike="noStrike">
+            <a:endParaRPr sz="1050" b="0" i="0" u="none" strike="noStrike" cap="none">
               <a:solidFill>
                 <a:schemeClr val="dk1"/>
               </a:solidFill>
@@ -5604,7 +5927,7 @@
           </a:xfrm>
           <a:prstGeom prst="roundRect">
             <a:avLst>
-              <a:gd fmla="val 14815" name="adj"/>
+              <a:gd name="adj" fmla="val 14815"/>
             </a:avLst>
           </a:prstGeom>
           <a:solidFill>
@@ -5615,12 +5938,12 @@
           </a:ln>
         </p:spPr>
         <p:txBody>
-          <a:bodyPr anchorCtr="0" anchor="ctr" bIns="91425" lIns="91425" spcFirstLastPara="1" rIns="91425" wrap="square" tIns="91425">
+          <a:bodyPr spcFirstLastPara="1" wrap="square" lIns="91425" tIns="91425" rIns="91425" bIns="91425" anchor="ctr" anchorCtr="0">
             <a:noAutofit/>
           </a:bodyPr>
           <a:lstStyle/>
           <a:p>
-            <a:pPr indent="0" lvl="0" marL="0" rtl="0" algn="l">
+            <a:pPr marL="0" lvl="0" indent="0" algn="l" rtl="0">
               <a:spcBef>
                 <a:spcPts val="0"/>
               </a:spcBef>
@@ -5629,9 +5952,6 @@
               </a:spcAft>
               <a:buNone/>
             </a:pPr>
-            <a:r>
-              <a:t/>
-            </a:r>
             <a:endParaRPr/>
           </a:p>
         </p:txBody>
@@ -5656,12 +5976,12 @@
           </a:ln>
         </p:spPr>
         <p:txBody>
-          <a:bodyPr anchorCtr="0" anchor="ctr" bIns="0" lIns="0" spcFirstLastPara="1" rIns="0" wrap="square" tIns="0">
+          <a:bodyPr spcFirstLastPara="1" wrap="square" lIns="0" tIns="0" rIns="0" bIns="0" anchor="ctr" anchorCtr="0">
             <a:noAutofit/>
           </a:bodyPr>
           <a:lstStyle/>
           <a:p>
-            <a:pPr indent="0" lvl="0" marL="0" marR="0" rtl="0" algn="l">
+            <a:pPr marL="0" marR="0" lvl="0" indent="0" algn="l" rtl="0">
               <a:spcBef>
                 <a:spcPts val="0"/>
               </a:spcBef>
@@ -5676,7 +5996,7 @@
               <a:buNone/>
             </a:pPr>
             <a:r>
-              <a:rPr b="1" i="0" lang="en-US" sz="1150" u="none" cap="none" strike="noStrike">
+              <a:rPr lang="en-US" sz="1150" b="1" i="0" u="none" strike="noStrike" cap="none">
                 <a:solidFill>
                   <a:srgbClr val="2F6FED"/>
                 </a:solidFill>
@@ -5687,7 +6007,7 @@
               </a:rPr>
               <a:t>Güney Kore</a:t>
             </a:r>
-            <a:endParaRPr b="0" i="0" sz="1150" u="none" cap="none" strike="noStrike">
+            <a:endParaRPr sz="1150" b="0" i="0" u="none" strike="noStrike" cap="none">
               <a:solidFill>
                 <a:schemeClr val="dk1"/>
               </a:solidFill>
@@ -5719,12 +6039,12 @@
           </a:ln>
         </p:spPr>
         <p:txBody>
-          <a:bodyPr anchorCtr="0" anchor="ctr" bIns="0" lIns="0" spcFirstLastPara="1" rIns="0" wrap="square" tIns="0">
+          <a:bodyPr spcFirstLastPara="1" wrap="square" lIns="0" tIns="0" rIns="0" bIns="0" anchor="ctr" anchorCtr="0">
             <a:noAutofit/>
           </a:bodyPr>
           <a:lstStyle/>
           <a:p>
-            <a:pPr indent="0" lvl="0" marL="0" marR="0" rtl="0" algn="l">
+            <a:pPr marL="0" marR="0" lvl="0" indent="0" algn="l" rtl="0">
               <a:spcBef>
                 <a:spcPts val="0"/>
               </a:spcBef>
@@ -5739,7 +6059,7 @@
               <a:buNone/>
             </a:pPr>
             <a:r>
-              <a:rPr b="0" i="0" lang="en-US" sz="1050" u="none" cap="none" strike="noStrike">
+              <a:rPr lang="en-US" sz="1050" b="0" i="0" u="none" strike="noStrike" cap="none">
                 <a:solidFill>
                   <a:srgbClr val="16234A"/>
                 </a:solidFill>
@@ -5750,7 +6070,7 @@
               </a:rPr>
               <a:t>Hyundai, Kia</a:t>
             </a:r>
-            <a:endParaRPr b="0" i="0" sz="1050" u="none" cap="none" strike="noStrike">
+            <a:endParaRPr sz="1050" b="0" i="0" u="none" strike="noStrike" cap="none">
               <a:solidFill>
                 <a:schemeClr val="dk1"/>
               </a:solidFill>
@@ -5775,7 +6095,7 @@
           </a:xfrm>
           <a:prstGeom prst="roundRect">
             <a:avLst>
-              <a:gd fmla="val 14815" name="adj"/>
+              <a:gd name="adj" fmla="val 14815"/>
             </a:avLst>
           </a:prstGeom>
           <a:solidFill>
@@ -5786,12 +6106,12 @@
           </a:ln>
         </p:spPr>
         <p:txBody>
-          <a:bodyPr anchorCtr="0" anchor="ctr" bIns="91425" lIns="91425" spcFirstLastPara="1" rIns="91425" wrap="square" tIns="91425">
+          <a:bodyPr spcFirstLastPara="1" wrap="square" lIns="91425" tIns="91425" rIns="91425" bIns="91425" anchor="ctr" anchorCtr="0">
             <a:noAutofit/>
           </a:bodyPr>
           <a:lstStyle/>
           <a:p>
-            <a:pPr indent="0" lvl="0" marL="0" rtl="0" algn="l">
+            <a:pPr marL="0" lvl="0" indent="0" algn="l" rtl="0">
               <a:spcBef>
                 <a:spcPts val="0"/>
               </a:spcBef>
@@ -5800,9 +6120,6 @@
               </a:spcAft>
               <a:buNone/>
             </a:pPr>
-            <a:r>
-              <a:t/>
-            </a:r>
             <a:endParaRPr/>
           </a:p>
         </p:txBody>
@@ -5827,12 +6144,12 @@
           </a:ln>
         </p:spPr>
         <p:txBody>
-          <a:bodyPr anchorCtr="0" anchor="ctr" bIns="0" lIns="0" spcFirstLastPara="1" rIns="0" wrap="square" tIns="0">
+          <a:bodyPr spcFirstLastPara="1" wrap="square" lIns="0" tIns="0" rIns="0" bIns="0" anchor="ctr" anchorCtr="0">
             <a:noAutofit/>
           </a:bodyPr>
           <a:lstStyle/>
           <a:p>
-            <a:pPr indent="0" lvl="0" marL="0" marR="0" rtl="0" algn="l">
+            <a:pPr marL="0" marR="0" lvl="0" indent="0" algn="l" rtl="0">
               <a:spcBef>
                 <a:spcPts val="0"/>
               </a:spcBef>
@@ -5847,7 +6164,7 @@
               <a:buNone/>
             </a:pPr>
             <a:r>
-              <a:rPr b="1" i="0" lang="en-US" sz="1150" u="none" cap="none" strike="noStrike">
+              <a:rPr lang="en-US" sz="1150" b="1" i="0" u="none" strike="noStrike" cap="none">
                 <a:solidFill>
                   <a:srgbClr val="2F6FED"/>
                 </a:solidFill>
@@ -5858,7 +6175,7 @@
               </a:rPr>
               <a:t>Çin</a:t>
             </a:r>
-            <a:endParaRPr b="0" i="0" sz="1150" u="none" cap="none" strike="noStrike">
+            <a:endParaRPr sz="1150" b="0" i="0" u="none" strike="noStrike" cap="none">
               <a:solidFill>
                 <a:schemeClr val="dk1"/>
               </a:solidFill>
@@ -5890,12 +6207,12 @@
           </a:ln>
         </p:spPr>
         <p:txBody>
-          <a:bodyPr anchorCtr="0" anchor="ctr" bIns="0" lIns="0" spcFirstLastPara="1" rIns="0" wrap="square" tIns="0">
+          <a:bodyPr spcFirstLastPara="1" wrap="square" lIns="0" tIns="0" rIns="0" bIns="0" anchor="ctr" anchorCtr="0">
             <a:noAutofit/>
           </a:bodyPr>
           <a:lstStyle/>
           <a:p>
-            <a:pPr indent="0" lvl="0" marL="0" marR="0" rtl="0" algn="l">
+            <a:pPr marL="0" marR="0" lvl="0" indent="0" algn="l" rtl="0">
               <a:spcBef>
                 <a:spcPts val="0"/>
               </a:spcBef>
@@ -5910,7 +6227,7 @@
               <a:buNone/>
             </a:pPr>
             <a:r>
-              <a:rPr b="0" i="0" lang="en-US" sz="1050" u="none" cap="none" strike="noStrike">
+              <a:rPr lang="en-US" sz="1050" b="0" i="0" u="none" strike="noStrike" cap="none">
                 <a:solidFill>
                   <a:srgbClr val="16234A"/>
                 </a:solidFill>
@@ -5921,7 +6238,7 @@
               </a:rPr>
               <a:t>BYD, NIO, Xiaomi</a:t>
             </a:r>
-            <a:endParaRPr b="0" i="0" sz="1050" u="none" cap="none" strike="noStrike">
+            <a:endParaRPr sz="1050" b="0" i="0" u="none" strike="noStrike" cap="none">
               <a:solidFill>
                 <a:schemeClr val="dk1"/>
               </a:solidFill>
@@ -5946,7 +6263,7 @@
           </a:xfrm>
           <a:prstGeom prst="roundRect">
             <a:avLst>
-              <a:gd fmla="val 14815" name="adj"/>
+              <a:gd name="adj" fmla="val 14815"/>
             </a:avLst>
           </a:prstGeom>
           <a:solidFill>
@@ -5957,12 +6274,12 @@
           </a:ln>
         </p:spPr>
         <p:txBody>
-          <a:bodyPr anchorCtr="0" anchor="ctr" bIns="91425" lIns="91425" spcFirstLastPara="1" rIns="91425" wrap="square" tIns="91425">
+          <a:bodyPr spcFirstLastPara="1" wrap="square" lIns="91425" tIns="91425" rIns="91425" bIns="91425" anchor="ctr" anchorCtr="0">
             <a:noAutofit/>
           </a:bodyPr>
           <a:lstStyle/>
           <a:p>
-            <a:pPr indent="0" lvl="0" marL="0" rtl="0" algn="l">
+            <a:pPr marL="0" lvl="0" indent="0" algn="l" rtl="0">
               <a:spcBef>
                 <a:spcPts val="0"/>
               </a:spcBef>
@@ -5971,9 +6288,6 @@
               </a:spcAft>
               <a:buNone/>
             </a:pPr>
-            <a:r>
-              <a:t/>
-            </a:r>
             <a:endParaRPr/>
           </a:p>
         </p:txBody>
@@ -5998,12 +6312,12 @@
           </a:ln>
         </p:spPr>
         <p:txBody>
-          <a:bodyPr anchorCtr="0" anchor="ctr" bIns="0" lIns="0" spcFirstLastPara="1" rIns="0" wrap="square" tIns="0">
+          <a:bodyPr spcFirstLastPara="1" wrap="square" lIns="0" tIns="0" rIns="0" bIns="0" anchor="ctr" anchorCtr="0">
             <a:noAutofit/>
           </a:bodyPr>
           <a:lstStyle/>
           <a:p>
-            <a:pPr indent="0" lvl="0" marL="0" marR="0" rtl="0" algn="l">
+            <a:pPr marL="0" marR="0" lvl="0" indent="0" algn="l" rtl="0">
               <a:spcBef>
                 <a:spcPts val="0"/>
               </a:spcBef>
@@ -6018,7 +6332,7 @@
               <a:buNone/>
             </a:pPr>
             <a:r>
-              <a:rPr b="1" i="0" lang="en-US" sz="1150" u="none" cap="none" strike="noStrike">
+              <a:rPr lang="en-US" sz="1150" b="1" i="0" u="none" strike="noStrike" cap="none">
                 <a:solidFill>
                   <a:srgbClr val="2F6FED"/>
                 </a:solidFill>
@@ -6029,7 +6343,7 @@
               </a:rPr>
               <a:t>İsveç</a:t>
             </a:r>
-            <a:endParaRPr b="0" i="0" sz="1150" u="none" cap="none" strike="noStrike">
+            <a:endParaRPr sz="1150" b="0" i="0" u="none" strike="noStrike" cap="none">
               <a:solidFill>
                 <a:schemeClr val="dk1"/>
               </a:solidFill>
@@ -6061,12 +6375,12 @@
           </a:ln>
         </p:spPr>
         <p:txBody>
-          <a:bodyPr anchorCtr="0" anchor="ctr" bIns="0" lIns="0" spcFirstLastPara="1" rIns="0" wrap="square" tIns="0">
+          <a:bodyPr spcFirstLastPara="1" wrap="square" lIns="0" tIns="0" rIns="0" bIns="0" anchor="ctr" anchorCtr="0">
             <a:noAutofit/>
           </a:bodyPr>
           <a:lstStyle/>
           <a:p>
-            <a:pPr indent="0" lvl="0" marL="0" marR="0" rtl="0" algn="l">
+            <a:pPr marL="0" marR="0" lvl="0" indent="0" algn="l" rtl="0">
               <a:spcBef>
                 <a:spcPts val="0"/>
               </a:spcBef>
@@ -6081,7 +6395,7 @@
               <a:buNone/>
             </a:pPr>
             <a:r>
-              <a:rPr b="0" i="0" lang="en-US" sz="1050" u="none" cap="none" strike="noStrike">
+              <a:rPr lang="en-US" sz="1050" b="0" i="0" u="none" strike="noStrike" cap="none">
                 <a:solidFill>
                   <a:srgbClr val="16234A"/>
                 </a:solidFill>
@@ -6092,7 +6406,7 @@
               </a:rPr>
               <a:t>Polestar, Volvo</a:t>
             </a:r>
-            <a:endParaRPr b="0" i="0" sz="1050" u="none" cap="none" strike="noStrike">
+            <a:endParaRPr sz="1050" b="0" i="0" u="none" strike="noStrike" cap="none">
               <a:solidFill>
                 <a:schemeClr val="dk1"/>
               </a:solidFill>
@@ -6117,7 +6431,7 @@
           </a:xfrm>
           <a:prstGeom prst="roundRect">
             <a:avLst>
-              <a:gd fmla="val 2545" name="adj"/>
+              <a:gd name="adj" fmla="val 2545"/>
             </a:avLst>
           </a:prstGeom>
           <a:solidFill>
@@ -6127,7 +6441,7 @@
             <a:noFill/>
           </a:ln>
           <a:effectLst>
-            <a:outerShdw blurRad="76200" rotWithShape="0" algn="bl" dir="5400000" dist="25400">
+            <a:outerShdw blurRad="76200" dist="25400" dir="5400000" algn="bl" rotWithShape="0">
               <a:srgbClr val="16234A">
                 <a:alpha val="12157"/>
               </a:srgbClr>
@@ -6135,12 +6449,12 @@
           </a:effectLst>
         </p:spPr>
         <p:txBody>
-          <a:bodyPr anchorCtr="0" anchor="ctr" bIns="91425" lIns="91425" spcFirstLastPara="1" rIns="91425" wrap="square" tIns="91425">
+          <a:bodyPr spcFirstLastPara="1" wrap="square" lIns="91425" tIns="91425" rIns="91425" bIns="91425" anchor="ctr" anchorCtr="0">
             <a:noAutofit/>
           </a:bodyPr>
           <a:lstStyle/>
           <a:p>
-            <a:pPr indent="0" lvl="0" marL="0" rtl="0" algn="l">
+            <a:pPr marL="0" lvl="0" indent="0" algn="l" rtl="0">
               <a:spcBef>
                 <a:spcPts val="0"/>
               </a:spcBef>
@@ -6149,9 +6463,6 @@
               </a:spcAft>
               <a:buNone/>
             </a:pPr>
-            <a:r>
-              <a:t/>
-            </a:r>
             <a:endParaRPr/>
           </a:p>
         </p:txBody>
@@ -6176,12 +6487,12 @@
           </a:ln>
         </p:spPr>
         <p:txBody>
-          <a:bodyPr anchorCtr="0" anchor="t" bIns="0" lIns="0" spcFirstLastPara="1" rIns="0" wrap="square" tIns="0">
+          <a:bodyPr spcFirstLastPara="1" wrap="square" lIns="0" tIns="0" rIns="0" bIns="0" anchor="t" anchorCtr="0">
             <a:noAutofit/>
           </a:bodyPr>
           <a:lstStyle/>
           <a:p>
-            <a:pPr indent="-177800" lvl="0" marL="177800" marR="0" rtl="0" algn="l">
+            <a:pPr marL="177800" marR="0" lvl="0" indent="-177800" algn="l" rtl="0">
               <a:lnSpc>
                 <a:spcPct val="105000"/>
               </a:lnSpc>
@@ -6199,18 +6510,306 @@
               <a:buChar char="●"/>
             </a:pPr>
             <a:r>
-              <a:rPr b="0" i="0" lang="en-US" sz="1250" u="none" cap="none" strike="noStrike">
-                <a:solidFill>
-                  <a:srgbClr val="16234A"/>
-                </a:solidFill>
-                <a:latin typeface="Calibri"/>
-                <a:ea typeface="Calibri"/>
-                <a:cs typeface="Calibri"/>
-                <a:sym typeface="Calibri"/>
-              </a:rPr>
-              <a:t>Her satır, belirli bir markanın belirli bir yıl ve varyanttaki modelini temsil eder (base, standard, long range, premium, performance).</a:t>
-            </a:r>
-            <a:endParaRPr b="0" i="0" sz="1250" u="none" cap="none" strike="noStrike">
+              <a:rPr lang="en-US" sz="1250" b="0" i="0" u="none" strike="noStrike" cap="none" dirty="0">
+                <a:solidFill>
+                  <a:srgbClr val="16234A"/>
+                </a:solidFill>
+                <a:latin typeface="Calibri"/>
+                <a:ea typeface="Calibri"/>
+                <a:cs typeface="Calibri"/>
+                <a:sym typeface="Calibri"/>
+              </a:rPr>
+              <a:t>Her </a:t>
+            </a:r>
+            <a:r>
+              <a:rPr lang="en-US" sz="1250" b="0" i="0" u="none" strike="noStrike" cap="none" dirty="0" err="1">
+                <a:solidFill>
+                  <a:srgbClr val="16234A"/>
+                </a:solidFill>
+                <a:latin typeface="Calibri"/>
+                <a:ea typeface="Calibri"/>
+                <a:cs typeface="Calibri"/>
+                <a:sym typeface="Calibri"/>
+              </a:rPr>
+              <a:t>satır</a:t>
+            </a:r>
+            <a:r>
+              <a:rPr lang="en-US" sz="1250" b="0" i="0" u="none" strike="noStrike" cap="none" dirty="0">
+                <a:solidFill>
+                  <a:srgbClr val="16234A"/>
+                </a:solidFill>
+                <a:latin typeface="Calibri"/>
+                <a:ea typeface="Calibri"/>
+                <a:cs typeface="Calibri"/>
+                <a:sym typeface="Calibri"/>
+              </a:rPr>
+              <a:t>, </a:t>
+            </a:r>
+            <a:r>
+              <a:rPr lang="en-US" sz="1250" b="0" i="0" u="none" strike="noStrike" cap="none" dirty="0" err="1">
+                <a:solidFill>
+                  <a:srgbClr val="16234A"/>
+                </a:solidFill>
+                <a:latin typeface="Calibri"/>
+                <a:ea typeface="Calibri"/>
+                <a:cs typeface="Calibri"/>
+                <a:sym typeface="Calibri"/>
+              </a:rPr>
+              <a:t>belirli</a:t>
+            </a:r>
+            <a:r>
+              <a:rPr lang="en-US" sz="1250" b="0" i="0" u="none" strike="noStrike" cap="none" dirty="0">
+                <a:solidFill>
+                  <a:srgbClr val="16234A"/>
+                </a:solidFill>
+                <a:latin typeface="Calibri"/>
+                <a:ea typeface="Calibri"/>
+                <a:cs typeface="Calibri"/>
+                <a:sym typeface="Calibri"/>
+              </a:rPr>
+              <a:t> </a:t>
+            </a:r>
+            <a:r>
+              <a:rPr lang="en-US" sz="1250" b="0" i="0" u="none" strike="noStrike" cap="none" dirty="0" err="1">
+                <a:solidFill>
+                  <a:srgbClr val="16234A"/>
+                </a:solidFill>
+                <a:latin typeface="Calibri"/>
+                <a:ea typeface="Calibri"/>
+                <a:cs typeface="Calibri"/>
+                <a:sym typeface="Calibri"/>
+              </a:rPr>
+              <a:t>bir</a:t>
+            </a:r>
+            <a:r>
+              <a:rPr lang="en-US" sz="1250" b="0" i="0" u="none" strike="noStrike" cap="none" dirty="0">
+                <a:solidFill>
+                  <a:srgbClr val="16234A"/>
+                </a:solidFill>
+                <a:latin typeface="Calibri"/>
+                <a:ea typeface="Calibri"/>
+                <a:cs typeface="Calibri"/>
+                <a:sym typeface="Calibri"/>
+              </a:rPr>
+              <a:t> </a:t>
+            </a:r>
+            <a:r>
+              <a:rPr lang="en-US" sz="1250" b="0" i="0" u="none" strike="noStrike" cap="none" dirty="0" err="1">
+                <a:solidFill>
+                  <a:srgbClr val="16234A"/>
+                </a:solidFill>
+                <a:latin typeface="Calibri"/>
+                <a:ea typeface="Calibri"/>
+                <a:cs typeface="Calibri"/>
+                <a:sym typeface="Calibri"/>
+              </a:rPr>
+              <a:t>markanın</a:t>
+            </a:r>
+            <a:r>
+              <a:rPr lang="en-US" sz="1250" b="0" i="0" u="none" strike="noStrike" cap="none" dirty="0">
+                <a:solidFill>
+                  <a:srgbClr val="16234A"/>
+                </a:solidFill>
+                <a:latin typeface="Calibri"/>
+                <a:ea typeface="Calibri"/>
+                <a:cs typeface="Calibri"/>
+                <a:sym typeface="Calibri"/>
+              </a:rPr>
+              <a:t> </a:t>
+            </a:r>
+            <a:r>
+              <a:rPr lang="en-US" sz="1250" b="0" i="0" u="none" strike="noStrike" cap="none" dirty="0" err="1">
+                <a:solidFill>
+                  <a:srgbClr val="16234A"/>
+                </a:solidFill>
+                <a:latin typeface="Calibri"/>
+                <a:ea typeface="Calibri"/>
+                <a:cs typeface="Calibri"/>
+                <a:sym typeface="Calibri"/>
+              </a:rPr>
+              <a:t>belirli</a:t>
+            </a:r>
+            <a:r>
+              <a:rPr lang="en-US" sz="1250" b="0" i="0" u="none" strike="noStrike" cap="none" dirty="0">
+                <a:solidFill>
+                  <a:srgbClr val="16234A"/>
+                </a:solidFill>
+                <a:latin typeface="Calibri"/>
+                <a:ea typeface="Calibri"/>
+                <a:cs typeface="Calibri"/>
+                <a:sym typeface="Calibri"/>
+              </a:rPr>
+              <a:t> </a:t>
+            </a:r>
+            <a:r>
+              <a:rPr lang="en-US" sz="1250" b="0" i="0" u="none" strike="noStrike" cap="none" dirty="0" err="1">
+                <a:solidFill>
+                  <a:srgbClr val="16234A"/>
+                </a:solidFill>
+                <a:latin typeface="Calibri"/>
+                <a:ea typeface="Calibri"/>
+                <a:cs typeface="Calibri"/>
+                <a:sym typeface="Calibri"/>
+              </a:rPr>
+              <a:t>bir</a:t>
+            </a:r>
+            <a:r>
+              <a:rPr lang="en-US" sz="1250" b="0" i="0" u="none" strike="noStrike" cap="none" dirty="0">
+                <a:solidFill>
+                  <a:srgbClr val="16234A"/>
+                </a:solidFill>
+                <a:latin typeface="Calibri"/>
+                <a:ea typeface="Calibri"/>
+                <a:cs typeface="Calibri"/>
+                <a:sym typeface="Calibri"/>
+              </a:rPr>
+              <a:t> </a:t>
+            </a:r>
+            <a:r>
+              <a:rPr lang="en-US" sz="1250" b="0" i="0" u="none" strike="noStrike" cap="none" dirty="0" err="1">
+                <a:solidFill>
+                  <a:srgbClr val="16234A"/>
+                </a:solidFill>
+                <a:latin typeface="Calibri"/>
+                <a:ea typeface="Calibri"/>
+                <a:cs typeface="Calibri"/>
+                <a:sym typeface="Calibri"/>
+              </a:rPr>
+              <a:t>yıl</a:t>
+            </a:r>
+            <a:r>
+              <a:rPr lang="en-US" sz="1250" b="0" i="0" u="none" strike="noStrike" cap="none" dirty="0">
+                <a:solidFill>
+                  <a:srgbClr val="16234A"/>
+                </a:solidFill>
+                <a:latin typeface="Calibri"/>
+                <a:ea typeface="Calibri"/>
+                <a:cs typeface="Calibri"/>
+                <a:sym typeface="Calibri"/>
+              </a:rPr>
+              <a:t> </a:t>
+            </a:r>
+            <a:r>
+              <a:rPr lang="en-US" sz="1250" b="0" i="0" u="none" strike="noStrike" cap="none" dirty="0" err="1">
+                <a:solidFill>
+                  <a:srgbClr val="16234A"/>
+                </a:solidFill>
+                <a:latin typeface="Calibri"/>
+                <a:ea typeface="Calibri"/>
+                <a:cs typeface="Calibri"/>
+                <a:sym typeface="Calibri"/>
+              </a:rPr>
+              <a:t>ve</a:t>
+            </a:r>
+            <a:r>
+              <a:rPr lang="en-US" sz="1250" b="0" i="0" u="none" strike="noStrike" cap="none" dirty="0">
+                <a:solidFill>
+                  <a:srgbClr val="16234A"/>
+                </a:solidFill>
+                <a:latin typeface="Calibri"/>
+                <a:ea typeface="Calibri"/>
+                <a:cs typeface="Calibri"/>
+                <a:sym typeface="Calibri"/>
+              </a:rPr>
+              <a:t> </a:t>
+            </a:r>
+            <a:r>
+              <a:rPr lang="en-US" sz="1250" b="0" i="0" u="none" strike="noStrike" cap="none" dirty="0" err="1">
+                <a:solidFill>
+                  <a:srgbClr val="16234A"/>
+                </a:solidFill>
+                <a:latin typeface="Calibri"/>
+                <a:ea typeface="Calibri"/>
+                <a:cs typeface="Calibri"/>
+                <a:sym typeface="Calibri"/>
+              </a:rPr>
+              <a:t>varyanttaki</a:t>
+            </a:r>
+            <a:r>
+              <a:rPr lang="en-US" sz="1250" b="0" i="0" u="none" strike="noStrike" cap="none" dirty="0">
+                <a:solidFill>
+                  <a:srgbClr val="16234A"/>
+                </a:solidFill>
+                <a:latin typeface="Calibri"/>
+                <a:ea typeface="Calibri"/>
+                <a:cs typeface="Calibri"/>
+                <a:sym typeface="Calibri"/>
+              </a:rPr>
+              <a:t> </a:t>
+            </a:r>
+            <a:r>
+              <a:rPr lang="en-US" sz="1250" b="0" i="0" u="none" strike="noStrike" cap="none" dirty="0" err="1">
+                <a:solidFill>
+                  <a:srgbClr val="16234A"/>
+                </a:solidFill>
+                <a:latin typeface="Calibri"/>
+                <a:ea typeface="Calibri"/>
+                <a:cs typeface="Calibri"/>
+                <a:sym typeface="Calibri"/>
+              </a:rPr>
+              <a:t>modelini</a:t>
+            </a:r>
+            <a:r>
+              <a:rPr lang="en-US" sz="1250" b="0" i="0" u="none" strike="noStrike" cap="none" dirty="0">
+                <a:solidFill>
+                  <a:srgbClr val="16234A"/>
+                </a:solidFill>
+                <a:latin typeface="Calibri"/>
+                <a:ea typeface="Calibri"/>
+                <a:cs typeface="Calibri"/>
+                <a:sym typeface="Calibri"/>
+              </a:rPr>
+              <a:t> </a:t>
+            </a:r>
+            <a:r>
+              <a:rPr lang="en-US" sz="1250" b="0" i="0" u="none" strike="noStrike" cap="none" dirty="0" err="1">
+                <a:solidFill>
+                  <a:srgbClr val="16234A"/>
+                </a:solidFill>
+                <a:latin typeface="Calibri"/>
+                <a:ea typeface="Calibri"/>
+                <a:cs typeface="Calibri"/>
+                <a:sym typeface="Calibri"/>
+              </a:rPr>
+              <a:t>temsil</a:t>
+            </a:r>
+            <a:r>
+              <a:rPr lang="en-US" sz="1250" b="0" i="0" u="none" strike="noStrike" cap="none" dirty="0">
+                <a:solidFill>
+                  <a:srgbClr val="16234A"/>
+                </a:solidFill>
+                <a:latin typeface="Calibri"/>
+                <a:ea typeface="Calibri"/>
+                <a:cs typeface="Calibri"/>
+                <a:sym typeface="Calibri"/>
+              </a:rPr>
+              <a:t> </a:t>
+            </a:r>
+            <a:r>
+              <a:rPr lang="en-US" sz="1250" b="0" i="0" u="none" strike="noStrike" cap="none" dirty="0" err="1">
+                <a:solidFill>
+                  <a:srgbClr val="16234A"/>
+                </a:solidFill>
+                <a:latin typeface="Calibri"/>
+                <a:ea typeface="Calibri"/>
+                <a:cs typeface="Calibri"/>
+                <a:sym typeface="Calibri"/>
+              </a:rPr>
+              <a:t>eder</a:t>
+            </a:r>
+            <a:r>
+              <a:rPr lang="en-US" sz="1250" b="0" i="0" u="none" strike="noStrike" cap="none" dirty="0">
+                <a:solidFill>
+                  <a:srgbClr val="16234A"/>
+                </a:solidFill>
+                <a:latin typeface="Calibri"/>
+                <a:ea typeface="Calibri"/>
+                <a:cs typeface="Calibri"/>
+                <a:sym typeface="Calibri"/>
+              </a:rPr>
+              <a:t> (base, standard, long range, premium, performance).</a:t>
+            </a:r>
+            <a:endParaRPr sz="1250" b="0" i="0" u="none" strike="noStrike" cap="none" dirty="0">
               <a:solidFill>
                 <a:schemeClr val="dk1"/>
               </a:solidFill>
@@ -6221,7 +6820,7 @@
             </a:endParaRPr>
           </a:p>
           <a:p>
-            <a:pPr indent="-177800" lvl="0" marL="177800" marR="0" rtl="0" algn="l">
+            <a:pPr marL="177800" marR="0" lvl="0" indent="-177800" algn="l" rtl="0">
               <a:lnSpc>
                 <a:spcPct val="105000"/>
               </a:lnSpc>
@@ -6239,18 +6838,402 @@
               <a:buChar char="●"/>
             </a:pPr>
             <a:r>
-              <a:rPr b="0" i="0" lang="en-US" sz="1250" u="none" cap="none" strike="noStrike">
-                <a:solidFill>
-                  <a:srgbClr val="16234A"/>
-                </a:solidFill>
-                <a:latin typeface="Calibri"/>
-                <a:ea typeface="Calibri"/>
-                <a:cs typeface="Calibri"/>
-                <a:sym typeface="Calibri"/>
-              </a:rPr>
-              <a:t>13 sayısal ve 7 kategorik değişken; teknik özellikleri (batarya, menzil, güç) ve ticari göstergeleri (fiyat, satış, puan) kapsar.</a:t>
-            </a:r>
-            <a:endParaRPr b="0" i="0" sz="1250" u="none" cap="none" strike="noStrike">
+              <a:rPr lang="en-US" sz="1250" b="0" i="0" u="none" strike="noStrike" cap="none" dirty="0">
+                <a:solidFill>
+                  <a:srgbClr val="16234A"/>
+                </a:solidFill>
+                <a:latin typeface="Calibri"/>
+                <a:ea typeface="Calibri"/>
+                <a:cs typeface="Calibri"/>
+                <a:sym typeface="Calibri"/>
+              </a:rPr>
+              <a:t>13 </a:t>
+            </a:r>
+            <a:r>
+              <a:rPr lang="en-US" sz="1250" b="0" i="0" u="none" strike="noStrike" cap="none" dirty="0" err="1">
+                <a:solidFill>
+                  <a:srgbClr val="16234A"/>
+                </a:solidFill>
+                <a:latin typeface="Calibri"/>
+                <a:ea typeface="Calibri"/>
+                <a:cs typeface="Calibri"/>
+                <a:sym typeface="Calibri"/>
+              </a:rPr>
+              <a:t>sayısal</a:t>
+            </a:r>
+            <a:r>
+              <a:rPr lang="en-US" sz="1250" b="0" i="0" u="none" strike="noStrike" cap="none" dirty="0">
+                <a:solidFill>
+                  <a:srgbClr val="16234A"/>
+                </a:solidFill>
+                <a:latin typeface="Calibri"/>
+                <a:ea typeface="Calibri"/>
+                <a:cs typeface="Calibri"/>
+                <a:sym typeface="Calibri"/>
+              </a:rPr>
+              <a:t> </a:t>
+            </a:r>
+            <a:r>
+              <a:rPr lang="en-US" sz="1250" b="0" i="0" u="none" strike="noStrike" cap="none" dirty="0" err="1">
+                <a:solidFill>
+                  <a:srgbClr val="16234A"/>
+                </a:solidFill>
+                <a:latin typeface="Calibri"/>
+                <a:ea typeface="Calibri"/>
+                <a:cs typeface="Calibri"/>
+                <a:sym typeface="Calibri"/>
+              </a:rPr>
+              <a:t>ve</a:t>
+            </a:r>
+            <a:r>
+              <a:rPr lang="en-US" sz="1250" b="0" i="0" u="none" strike="noStrike" cap="none" dirty="0">
+                <a:solidFill>
+                  <a:srgbClr val="16234A"/>
+                </a:solidFill>
+                <a:latin typeface="Calibri"/>
+                <a:ea typeface="Calibri"/>
+                <a:cs typeface="Calibri"/>
+                <a:sym typeface="Calibri"/>
+              </a:rPr>
+              <a:t> 7 </a:t>
+            </a:r>
+            <a:r>
+              <a:rPr lang="en-US" sz="1250" b="0" i="0" u="none" strike="noStrike" cap="none" dirty="0" err="1">
+                <a:solidFill>
+                  <a:srgbClr val="16234A"/>
+                </a:solidFill>
+                <a:latin typeface="Calibri"/>
+                <a:ea typeface="Calibri"/>
+                <a:cs typeface="Calibri"/>
+                <a:sym typeface="Calibri"/>
+              </a:rPr>
+              <a:t>kategorik</a:t>
+            </a:r>
+            <a:r>
+              <a:rPr lang="en-US" sz="1250" b="0" i="0" u="none" strike="noStrike" cap="none" dirty="0">
+                <a:solidFill>
+                  <a:srgbClr val="16234A"/>
+                </a:solidFill>
+                <a:latin typeface="Calibri"/>
+                <a:ea typeface="Calibri"/>
+                <a:cs typeface="Calibri"/>
+                <a:sym typeface="Calibri"/>
+              </a:rPr>
+              <a:t> </a:t>
+            </a:r>
+            <a:r>
+              <a:rPr lang="en-US" sz="1250" b="0" i="0" u="none" strike="noStrike" cap="none" dirty="0" err="1">
+                <a:solidFill>
+                  <a:srgbClr val="16234A"/>
+                </a:solidFill>
+                <a:latin typeface="Calibri"/>
+                <a:ea typeface="Calibri"/>
+                <a:cs typeface="Calibri"/>
+                <a:sym typeface="Calibri"/>
+              </a:rPr>
+              <a:t>değişken</a:t>
+            </a:r>
+            <a:r>
+              <a:rPr lang="en-US" sz="1250" b="0" i="0" u="none" strike="noStrike" cap="none" dirty="0">
+                <a:solidFill>
+                  <a:srgbClr val="16234A"/>
+                </a:solidFill>
+                <a:latin typeface="Calibri"/>
+                <a:ea typeface="Calibri"/>
+                <a:cs typeface="Calibri"/>
+                <a:sym typeface="Calibri"/>
+              </a:rPr>
+              <a:t>; </a:t>
+            </a:r>
+            <a:r>
+              <a:rPr lang="en-US" sz="1250" b="0" i="0" u="none" strike="noStrike" cap="none" dirty="0" err="1">
+                <a:solidFill>
+                  <a:srgbClr val="16234A"/>
+                </a:solidFill>
+                <a:latin typeface="Calibri"/>
+                <a:ea typeface="Calibri"/>
+                <a:cs typeface="Calibri"/>
+                <a:sym typeface="Calibri"/>
+              </a:rPr>
+              <a:t>teknik</a:t>
+            </a:r>
+            <a:r>
+              <a:rPr lang="en-US" sz="1250" b="0" i="0" u="none" strike="noStrike" cap="none" dirty="0">
+                <a:solidFill>
+                  <a:srgbClr val="16234A"/>
+                </a:solidFill>
+                <a:latin typeface="Calibri"/>
+                <a:ea typeface="Calibri"/>
+                <a:cs typeface="Calibri"/>
+                <a:sym typeface="Calibri"/>
+              </a:rPr>
+              <a:t> </a:t>
+            </a:r>
+            <a:r>
+              <a:rPr lang="en-US" sz="1250" b="0" i="0" u="none" strike="noStrike" cap="none" dirty="0" err="1">
+                <a:solidFill>
+                  <a:srgbClr val="16234A"/>
+                </a:solidFill>
+                <a:latin typeface="Calibri"/>
+                <a:ea typeface="Calibri"/>
+                <a:cs typeface="Calibri"/>
+                <a:sym typeface="Calibri"/>
+              </a:rPr>
+              <a:t>özellikleri</a:t>
+            </a:r>
+            <a:r>
+              <a:rPr lang="en-US" sz="1250" b="0" i="0" u="none" strike="noStrike" cap="none" dirty="0">
+                <a:solidFill>
+                  <a:srgbClr val="16234A"/>
+                </a:solidFill>
+                <a:latin typeface="Calibri"/>
+                <a:ea typeface="Calibri"/>
+                <a:cs typeface="Calibri"/>
+                <a:sym typeface="Calibri"/>
+              </a:rPr>
+              <a:t> (</a:t>
+            </a:r>
+            <a:r>
+              <a:rPr lang="en-US" sz="1250" b="0" i="0" u="none" strike="noStrike" cap="none" dirty="0" err="1">
+                <a:solidFill>
+                  <a:srgbClr val="16234A"/>
+                </a:solidFill>
+                <a:latin typeface="Calibri"/>
+                <a:ea typeface="Calibri"/>
+                <a:cs typeface="Calibri"/>
+                <a:sym typeface="Calibri"/>
+              </a:rPr>
+              <a:t>batarya</a:t>
+            </a:r>
+            <a:r>
+              <a:rPr lang="en-US" sz="1250" b="0" i="0" u="none" strike="noStrike" cap="none" dirty="0">
+                <a:solidFill>
+                  <a:srgbClr val="16234A"/>
+                </a:solidFill>
+                <a:latin typeface="Calibri"/>
+                <a:ea typeface="Calibri"/>
+                <a:cs typeface="Calibri"/>
+                <a:sym typeface="Calibri"/>
+              </a:rPr>
+              <a:t>, </a:t>
+            </a:r>
+            <a:r>
+              <a:rPr lang="en-US" sz="1250" b="0" i="0" u="none" strike="noStrike" cap="none" dirty="0" err="1">
+                <a:solidFill>
+                  <a:srgbClr val="16234A"/>
+                </a:solidFill>
+                <a:latin typeface="Calibri"/>
+                <a:ea typeface="Calibri"/>
+                <a:cs typeface="Calibri"/>
+                <a:sym typeface="Calibri"/>
+              </a:rPr>
+              <a:t>menzil</a:t>
+            </a:r>
+            <a:r>
+              <a:rPr lang="en-US" sz="1250" b="0" i="0" u="none" strike="noStrike" cap="none" dirty="0">
+                <a:solidFill>
+                  <a:srgbClr val="16234A"/>
+                </a:solidFill>
+                <a:latin typeface="Calibri"/>
+                <a:ea typeface="Calibri"/>
+                <a:cs typeface="Calibri"/>
+                <a:sym typeface="Calibri"/>
+              </a:rPr>
+              <a:t>, </a:t>
+            </a:r>
+            <a:r>
+              <a:rPr lang="en-US" sz="1250" b="0" i="0" u="none" strike="noStrike" cap="none" dirty="0" err="1">
+                <a:solidFill>
+                  <a:srgbClr val="16234A"/>
+                </a:solidFill>
+                <a:latin typeface="Calibri"/>
+                <a:ea typeface="Calibri"/>
+                <a:cs typeface="Calibri"/>
+                <a:sym typeface="Calibri"/>
+              </a:rPr>
+              <a:t>güç</a:t>
+            </a:r>
+            <a:r>
+              <a:rPr lang="en-US" sz="1250" b="0" i="0" u="none" strike="noStrike" cap="none" dirty="0">
+                <a:solidFill>
+                  <a:srgbClr val="16234A"/>
+                </a:solidFill>
+                <a:latin typeface="Calibri"/>
+                <a:ea typeface="Calibri"/>
+                <a:cs typeface="Calibri"/>
+                <a:sym typeface="Calibri"/>
+              </a:rPr>
+              <a:t>) </a:t>
+            </a:r>
+            <a:r>
+              <a:rPr lang="en-US" sz="1250" b="0" i="0" u="none" strike="noStrike" cap="none" dirty="0" err="1">
+                <a:solidFill>
+                  <a:srgbClr val="16234A"/>
+                </a:solidFill>
+                <a:latin typeface="Calibri"/>
+                <a:ea typeface="Calibri"/>
+                <a:cs typeface="Calibri"/>
+                <a:sym typeface="Calibri"/>
+              </a:rPr>
+              <a:t>ve</a:t>
+            </a:r>
+            <a:r>
+              <a:rPr lang="en-US" sz="1250" b="0" i="0" u="none" strike="noStrike" cap="none" dirty="0">
+                <a:solidFill>
+                  <a:srgbClr val="16234A"/>
+                </a:solidFill>
+                <a:latin typeface="Calibri"/>
+                <a:ea typeface="Calibri"/>
+                <a:cs typeface="Calibri"/>
+                <a:sym typeface="Calibri"/>
+              </a:rPr>
+              <a:t> </a:t>
+            </a:r>
+            <a:r>
+              <a:rPr lang="en-US" sz="1250" b="0" i="0" u="none" strike="noStrike" cap="none" dirty="0" err="1">
+                <a:solidFill>
+                  <a:srgbClr val="16234A"/>
+                </a:solidFill>
+                <a:latin typeface="Calibri"/>
+                <a:ea typeface="Calibri"/>
+                <a:cs typeface="Calibri"/>
+                <a:sym typeface="Calibri"/>
+              </a:rPr>
+              <a:t>ticari</a:t>
+            </a:r>
+            <a:r>
+              <a:rPr lang="en-US" sz="1250" b="0" i="0" u="none" strike="noStrike" cap="none" dirty="0">
+                <a:solidFill>
+                  <a:srgbClr val="16234A"/>
+                </a:solidFill>
+                <a:latin typeface="Calibri"/>
+                <a:ea typeface="Calibri"/>
+                <a:cs typeface="Calibri"/>
+                <a:sym typeface="Calibri"/>
+              </a:rPr>
+              <a:t> </a:t>
+            </a:r>
+            <a:r>
+              <a:rPr lang="en-US" sz="1250" b="0" i="0" u="none" strike="noStrike" cap="none" dirty="0" err="1">
+                <a:solidFill>
+                  <a:srgbClr val="16234A"/>
+                </a:solidFill>
+                <a:latin typeface="Calibri"/>
+                <a:ea typeface="Calibri"/>
+                <a:cs typeface="Calibri"/>
+                <a:sym typeface="Calibri"/>
+              </a:rPr>
+              <a:t>göstergeleri</a:t>
+            </a:r>
+            <a:r>
+              <a:rPr lang="en-US" sz="1250" b="0" i="0" u="none" strike="noStrike" cap="none" dirty="0">
+                <a:solidFill>
+                  <a:srgbClr val="16234A"/>
+                </a:solidFill>
+                <a:latin typeface="Calibri"/>
+                <a:ea typeface="Calibri"/>
+                <a:cs typeface="Calibri"/>
+                <a:sym typeface="Calibri"/>
+              </a:rPr>
+              <a:t> (</a:t>
+            </a:r>
+            <a:r>
+              <a:rPr lang="en-US" sz="1250" b="0" i="0" u="none" strike="noStrike" cap="none" dirty="0" err="1">
+                <a:solidFill>
+                  <a:srgbClr val="16234A"/>
+                </a:solidFill>
+                <a:latin typeface="Calibri"/>
+                <a:ea typeface="Calibri"/>
+                <a:cs typeface="Calibri"/>
+                <a:sym typeface="Calibri"/>
+              </a:rPr>
+              <a:t>fiyat</a:t>
+            </a:r>
+            <a:r>
+              <a:rPr lang="en-US" sz="1250" b="0" i="0" u="none" strike="noStrike" cap="none" dirty="0">
+                <a:solidFill>
+                  <a:srgbClr val="16234A"/>
+                </a:solidFill>
+                <a:latin typeface="Calibri"/>
+                <a:ea typeface="Calibri"/>
+                <a:cs typeface="Calibri"/>
+                <a:sym typeface="Calibri"/>
+              </a:rPr>
+              <a:t>, </a:t>
+            </a:r>
+            <a:r>
+              <a:rPr lang="en-US" sz="1250" b="0" i="0" u="none" strike="noStrike" cap="none" dirty="0" err="1">
+                <a:solidFill>
+                  <a:srgbClr val="16234A"/>
+                </a:solidFill>
+                <a:latin typeface="Calibri"/>
+                <a:ea typeface="Calibri"/>
+                <a:cs typeface="Calibri"/>
+                <a:sym typeface="Calibri"/>
+              </a:rPr>
+              <a:t>satış</a:t>
+            </a:r>
+            <a:r>
+              <a:rPr lang="en-US" sz="1250" b="0" i="0" u="none" strike="noStrike" cap="none" dirty="0">
+                <a:solidFill>
+                  <a:srgbClr val="16234A"/>
+                </a:solidFill>
+                <a:latin typeface="Calibri"/>
+                <a:ea typeface="Calibri"/>
+                <a:cs typeface="Calibri"/>
+                <a:sym typeface="Calibri"/>
+              </a:rPr>
+              <a:t>, </a:t>
+            </a:r>
+            <a:r>
+              <a:rPr lang="en-US" sz="1250" b="0" i="0" u="none" strike="noStrike" cap="none" dirty="0" err="1">
+                <a:solidFill>
+                  <a:srgbClr val="16234A"/>
+                </a:solidFill>
+                <a:latin typeface="Calibri"/>
+                <a:ea typeface="Calibri"/>
+                <a:cs typeface="Calibri"/>
+                <a:sym typeface="Calibri"/>
+              </a:rPr>
+              <a:t>puan</a:t>
+            </a:r>
+            <a:r>
+              <a:rPr lang="en-US" sz="1250" b="0" i="0" u="none" strike="noStrike" cap="none" dirty="0">
+                <a:solidFill>
+                  <a:srgbClr val="16234A"/>
+                </a:solidFill>
+                <a:latin typeface="Calibri"/>
+                <a:ea typeface="Calibri"/>
+                <a:cs typeface="Calibri"/>
+                <a:sym typeface="Calibri"/>
+              </a:rPr>
+              <a:t>) </a:t>
+            </a:r>
+            <a:r>
+              <a:rPr lang="en-US" sz="1250" b="0" i="0" u="none" strike="noStrike" cap="none" dirty="0" err="1">
+                <a:solidFill>
+                  <a:srgbClr val="16234A"/>
+                </a:solidFill>
+                <a:latin typeface="Calibri"/>
+                <a:ea typeface="Calibri"/>
+                <a:cs typeface="Calibri"/>
+                <a:sym typeface="Calibri"/>
+              </a:rPr>
+              <a:t>kapsar</a:t>
+            </a:r>
+            <a:r>
+              <a:rPr lang="en-US" sz="1250" b="0" i="0" u="none" strike="noStrike" cap="none" dirty="0">
+                <a:solidFill>
+                  <a:srgbClr val="16234A"/>
+                </a:solidFill>
+                <a:latin typeface="Calibri"/>
+                <a:ea typeface="Calibri"/>
+                <a:cs typeface="Calibri"/>
+                <a:sym typeface="Calibri"/>
+              </a:rPr>
+              <a:t>.</a:t>
+            </a:r>
+            <a:endParaRPr sz="1250" b="0" i="0" u="none" strike="noStrike" cap="none" dirty="0">
               <a:solidFill>
                 <a:schemeClr val="dk1"/>
               </a:solidFill>
@@ -6261,7 +7244,7 @@
             </a:endParaRPr>
           </a:p>
           <a:p>
-            <a:pPr indent="-177800" lvl="0" marL="177800" marR="0" rtl="0" algn="l">
+            <a:pPr marL="177800" marR="0" lvl="0" indent="-177800" algn="l" rtl="0">
               <a:lnSpc>
                 <a:spcPct val="105000"/>
               </a:lnSpc>
@@ -6279,18 +7262,318 @@
               <a:buChar char="●"/>
             </a:pPr>
             <a:r>
-              <a:rPr b="0" i="0" lang="en-US" sz="1250" u="none" cap="none" strike="noStrike">
-                <a:solidFill>
-                  <a:srgbClr val="16234A"/>
-                </a:solidFill>
-                <a:latin typeface="Calibri"/>
-                <a:ea typeface="Calibri"/>
-                <a:cs typeface="Calibri"/>
-                <a:sym typeface="Calibri"/>
-              </a:rPr>
-              <a:t>Tüm 24 sütunda eksik değer ve tekrar eden kayıt yok — eksiksiz, tutarlı bir veri seti.</a:t>
-            </a:r>
-            <a:endParaRPr b="0" i="0" sz="1250" u="none" cap="none" strike="noStrike">
+              <a:rPr lang="en-US" sz="1250" b="0" i="0" u="none" strike="noStrike" cap="none" dirty="0" err="1">
+                <a:solidFill>
+                  <a:srgbClr val="16234A"/>
+                </a:solidFill>
+                <a:latin typeface="Calibri"/>
+                <a:ea typeface="Calibri"/>
+                <a:cs typeface="Calibri"/>
+                <a:sym typeface="Calibri"/>
+              </a:rPr>
+              <a:t>Tüm</a:t>
+            </a:r>
+            <a:r>
+              <a:rPr lang="en-US" sz="1250" b="0" i="0" u="none" strike="noStrike" cap="none" dirty="0">
+                <a:solidFill>
+                  <a:srgbClr val="16234A"/>
+                </a:solidFill>
+                <a:latin typeface="Calibri"/>
+                <a:ea typeface="Calibri"/>
+                <a:cs typeface="Calibri"/>
+                <a:sym typeface="Calibri"/>
+              </a:rPr>
+              <a:t> 24 </a:t>
+            </a:r>
+            <a:r>
+              <a:rPr lang="en-US" sz="1250" b="0" i="0" u="none" strike="noStrike" cap="none" dirty="0" err="1">
+                <a:solidFill>
+                  <a:srgbClr val="16234A"/>
+                </a:solidFill>
+                <a:latin typeface="Calibri"/>
+                <a:ea typeface="Calibri"/>
+                <a:cs typeface="Calibri"/>
+                <a:sym typeface="Calibri"/>
+              </a:rPr>
+              <a:t>sütunda</a:t>
+            </a:r>
+            <a:r>
+              <a:rPr lang="en-US" sz="1250" b="0" i="0" u="none" strike="noStrike" cap="none" dirty="0">
+                <a:solidFill>
+                  <a:srgbClr val="16234A"/>
+                </a:solidFill>
+                <a:latin typeface="Calibri"/>
+                <a:ea typeface="Calibri"/>
+                <a:cs typeface="Calibri"/>
+                <a:sym typeface="Calibri"/>
+              </a:rPr>
+              <a:t> </a:t>
+            </a:r>
+            <a:r>
+              <a:rPr lang="en-US" sz="1250" b="0" i="0" u="none" strike="noStrike" cap="none" dirty="0" err="1">
+                <a:solidFill>
+                  <a:srgbClr val="16234A"/>
+                </a:solidFill>
+                <a:latin typeface="Calibri"/>
+                <a:ea typeface="Calibri"/>
+                <a:cs typeface="Calibri"/>
+                <a:sym typeface="Calibri"/>
+              </a:rPr>
+              <a:t>eksik</a:t>
+            </a:r>
+            <a:r>
+              <a:rPr lang="en-US" sz="1250" b="0" i="0" u="none" strike="noStrike" cap="none" dirty="0">
+                <a:solidFill>
+                  <a:srgbClr val="16234A"/>
+                </a:solidFill>
+                <a:latin typeface="Calibri"/>
+                <a:ea typeface="Calibri"/>
+                <a:cs typeface="Calibri"/>
+                <a:sym typeface="Calibri"/>
+              </a:rPr>
+              <a:t> </a:t>
+            </a:r>
+            <a:r>
+              <a:rPr lang="en-US" sz="1250" b="0" i="0" u="none" strike="noStrike" cap="none" dirty="0" err="1">
+                <a:solidFill>
+                  <a:srgbClr val="16234A"/>
+                </a:solidFill>
+                <a:latin typeface="Calibri"/>
+                <a:ea typeface="Calibri"/>
+                <a:cs typeface="Calibri"/>
+                <a:sym typeface="Calibri"/>
+              </a:rPr>
+              <a:t>değer</a:t>
+            </a:r>
+            <a:r>
+              <a:rPr lang="en-US" sz="1250" b="0" i="0" u="none" strike="noStrike" cap="none" dirty="0">
+                <a:solidFill>
+                  <a:srgbClr val="16234A"/>
+                </a:solidFill>
+                <a:latin typeface="Calibri"/>
+                <a:ea typeface="Calibri"/>
+                <a:cs typeface="Calibri"/>
+                <a:sym typeface="Calibri"/>
+              </a:rPr>
+              <a:t> </a:t>
+            </a:r>
+            <a:r>
+              <a:rPr lang="en-US" sz="1250" b="0" i="0" u="none" strike="noStrike" cap="none" dirty="0" err="1">
+                <a:solidFill>
+                  <a:srgbClr val="16234A"/>
+                </a:solidFill>
+                <a:latin typeface="Calibri"/>
+                <a:ea typeface="Calibri"/>
+                <a:cs typeface="Calibri"/>
+                <a:sym typeface="Calibri"/>
+              </a:rPr>
+              <a:t>ve</a:t>
+            </a:r>
+            <a:r>
+              <a:rPr lang="en-US" sz="1250" b="0" i="0" u="none" strike="noStrike" cap="none" dirty="0">
+                <a:solidFill>
+                  <a:srgbClr val="16234A"/>
+                </a:solidFill>
+                <a:latin typeface="Calibri"/>
+                <a:ea typeface="Calibri"/>
+                <a:cs typeface="Calibri"/>
+                <a:sym typeface="Calibri"/>
+              </a:rPr>
+              <a:t> </a:t>
+            </a:r>
+            <a:r>
+              <a:rPr lang="en-US" sz="1250" b="0" i="0" u="none" strike="noStrike" cap="none" dirty="0" err="1">
+                <a:solidFill>
+                  <a:srgbClr val="16234A"/>
+                </a:solidFill>
+                <a:latin typeface="Calibri"/>
+                <a:ea typeface="Calibri"/>
+                <a:cs typeface="Calibri"/>
+                <a:sym typeface="Calibri"/>
+              </a:rPr>
+              <a:t>tekrar</a:t>
+            </a:r>
+            <a:r>
+              <a:rPr lang="en-US" sz="1250" b="0" i="0" u="none" strike="noStrike" cap="none" dirty="0">
+                <a:solidFill>
+                  <a:srgbClr val="16234A"/>
+                </a:solidFill>
+                <a:latin typeface="Calibri"/>
+                <a:ea typeface="Calibri"/>
+                <a:cs typeface="Calibri"/>
+                <a:sym typeface="Calibri"/>
+              </a:rPr>
+              <a:t> </a:t>
+            </a:r>
+            <a:r>
+              <a:rPr lang="en-US" sz="1250" b="0" i="0" u="none" strike="noStrike" cap="none" dirty="0" err="1">
+                <a:solidFill>
+                  <a:srgbClr val="16234A"/>
+                </a:solidFill>
+                <a:latin typeface="Calibri"/>
+                <a:ea typeface="Calibri"/>
+                <a:cs typeface="Calibri"/>
+                <a:sym typeface="Calibri"/>
+              </a:rPr>
+              <a:t>eden</a:t>
+            </a:r>
+            <a:r>
+              <a:rPr lang="en-US" sz="1250" b="0" i="0" u="none" strike="noStrike" cap="none" dirty="0">
+                <a:solidFill>
+                  <a:srgbClr val="16234A"/>
+                </a:solidFill>
+                <a:latin typeface="Calibri"/>
+                <a:ea typeface="Calibri"/>
+                <a:cs typeface="Calibri"/>
+                <a:sym typeface="Calibri"/>
+              </a:rPr>
+              <a:t> </a:t>
+            </a:r>
+            <a:r>
+              <a:rPr lang="en-US" sz="1250" b="0" i="0" u="none" strike="noStrike" cap="none" dirty="0" err="1">
+                <a:solidFill>
+                  <a:srgbClr val="16234A"/>
+                </a:solidFill>
+                <a:latin typeface="Calibri"/>
+                <a:ea typeface="Calibri"/>
+                <a:cs typeface="Calibri"/>
+                <a:sym typeface="Calibri"/>
+              </a:rPr>
+              <a:t>kayıt</a:t>
+            </a:r>
+            <a:r>
+              <a:rPr lang="en-US" sz="1250" b="0" i="0" u="none" strike="noStrike" cap="none" dirty="0">
+                <a:solidFill>
+                  <a:srgbClr val="16234A"/>
+                </a:solidFill>
+                <a:latin typeface="Calibri"/>
+                <a:ea typeface="Calibri"/>
+                <a:cs typeface="Calibri"/>
+                <a:sym typeface="Calibri"/>
+              </a:rPr>
+              <a:t> yok — </a:t>
+            </a:r>
+            <a:r>
+              <a:rPr lang="en-US" sz="1250" b="0" i="0" u="none" strike="noStrike" cap="none" dirty="0" err="1">
+                <a:solidFill>
+                  <a:srgbClr val="16234A"/>
+                </a:solidFill>
+                <a:latin typeface="Calibri"/>
+                <a:ea typeface="Calibri"/>
+                <a:cs typeface="Calibri"/>
+                <a:sym typeface="Calibri"/>
+              </a:rPr>
+              <a:t>eksiksiz</a:t>
+            </a:r>
+            <a:r>
+              <a:rPr lang="en-US" sz="1250" b="0" i="0" u="none" strike="noStrike" cap="none" dirty="0">
+                <a:solidFill>
+                  <a:srgbClr val="16234A"/>
+                </a:solidFill>
+                <a:latin typeface="Calibri"/>
+                <a:ea typeface="Calibri"/>
+                <a:cs typeface="Calibri"/>
+                <a:sym typeface="Calibri"/>
+              </a:rPr>
+              <a:t>, </a:t>
+            </a:r>
+            <a:r>
+              <a:rPr lang="en-US" sz="1250" b="0" i="0" u="none" strike="noStrike" cap="none" dirty="0" err="1">
+                <a:solidFill>
+                  <a:srgbClr val="16234A"/>
+                </a:solidFill>
+                <a:latin typeface="Calibri"/>
+                <a:ea typeface="Calibri"/>
+                <a:cs typeface="Calibri"/>
+                <a:sym typeface="Calibri"/>
+              </a:rPr>
+              <a:t>tutarlı</a:t>
+            </a:r>
+            <a:r>
+              <a:rPr lang="en-US" sz="1250" b="0" i="0" u="none" strike="noStrike" cap="none" dirty="0">
+                <a:solidFill>
+                  <a:srgbClr val="16234A"/>
+                </a:solidFill>
+                <a:latin typeface="Calibri"/>
+                <a:ea typeface="Calibri"/>
+                <a:cs typeface="Calibri"/>
+                <a:sym typeface="Calibri"/>
+              </a:rPr>
+              <a:t> </a:t>
+            </a:r>
+            <a:r>
+              <a:rPr lang="en-US" sz="1250" b="0" i="0" u="none" strike="noStrike" cap="none" dirty="0" err="1">
+                <a:solidFill>
+                  <a:srgbClr val="16234A"/>
+                </a:solidFill>
+                <a:latin typeface="Calibri"/>
+                <a:ea typeface="Calibri"/>
+                <a:cs typeface="Calibri"/>
+                <a:sym typeface="Calibri"/>
+              </a:rPr>
+              <a:t>bir</a:t>
+            </a:r>
+            <a:r>
+              <a:rPr lang="en-US" sz="1250" b="0" i="0" u="none" strike="noStrike" cap="none" dirty="0">
+                <a:solidFill>
+                  <a:srgbClr val="16234A"/>
+                </a:solidFill>
+                <a:latin typeface="Calibri"/>
+                <a:ea typeface="Calibri"/>
+                <a:cs typeface="Calibri"/>
+                <a:sym typeface="Calibri"/>
+              </a:rPr>
+              <a:t> </a:t>
+            </a:r>
+            <a:r>
+              <a:rPr lang="en-US" sz="1250" b="0" i="0" u="none" strike="noStrike" cap="none" dirty="0" err="1">
+                <a:solidFill>
+                  <a:srgbClr val="16234A"/>
+                </a:solidFill>
+                <a:latin typeface="Calibri"/>
+                <a:ea typeface="Calibri"/>
+                <a:cs typeface="Calibri"/>
+                <a:sym typeface="Calibri"/>
+              </a:rPr>
+              <a:t>veri</a:t>
+            </a:r>
+            <a:r>
+              <a:rPr lang="en-US" sz="1250" b="0" i="0" u="none" strike="noStrike" cap="none" dirty="0">
+                <a:solidFill>
+                  <a:srgbClr val="16234A"/>
+                </a:solidFill>
+                <a:latin typeface="Calibri"/>
+                <a:ea typeface="Calibri"/>
+                <a:cs typeface="Calibri"/>
+                <a:sym typeface="Calibri"/>
+              </a:rPr>
+              <a:t> </a:t>
+            </a:r>
+            <a:r>
+              <a:rPr lang="en-US" sz="1250" b="0" i="0" u="none" strike="noStrike" cap="none" dirty="0" err="1">
+                <a:solidFill>
+                  <a:srgbClr val="16234A"/>
+                </a:solidFill>
+                <a:latin typeface="Calibri"/>
+                <a:ea typeface="Calibri"/>
+                <a:cs typeface="Calibri"/>
+                <a:sym typeface="Calibri"/>
+              </a:rPr>
+              <a:t>seti</a:t>
+            </a:r>
+            <a:r>
+              <a:rPr lang="en-US" sz="1250" b="0" i="0" u="none" strike="noStrike" cap="none" dirty="0">
+                <a:solidFill>
+                  <a:srgbClr val="16234A"/>
+                </a:solidFill>
+                <a:latin typeface="Calibri"/>
+                <a:ea typeface="Calibri"/>
+                <a:cs typeface="Calibri"/>
+                <a:sym typeface="Calibri"/>
+              </a:rPr>
+              <a:t>.</a:t>
+            </a:r>
+            <a:endParaRPr sz="1250" b="0" i="0" u="none" strike="noStrike" cap="none" dirty="0">
               <a:solidFill>
                 <a:schemeClr val="dk1"/>
               </a:solidFill>
@@ -6301,7 +7584,7 @@
             </a:endParaRPr>
           </a:p>
           <a:p>
-            <a:pPr indent="-177800" lvl="0" marL="177800" marR="0" rtl="0" algn="l">
+            <a:pPr marL="177800" marR="0" lvl="0" indent="-177800" algn="l" rtl="0">
               <a:lnSpc>
                 <a:spcPct val="105000"/>
               </a:lnSpc>
@@ -6319,18 +7602,258 @@
               <a:buChar char="●"/>
             </a:pPr>
             <a:r>
-              <a:rPr b="0" i="0" lang="en-US" sz="1250" u="none" cap="none" strike="noStrike">
-                <a:solidFill>
-                  <a:srgbClr val="16234A"/>
-                </a:solidFill>
-                <a:latin typeface="Calibri"/>
-                <a:ea typeface="Calibri"/>
-                <a:cs typeface="Calibri"/>
-                <a:sym typeface="Calibri"/>
-              </a:rPr>
-              <a:t>Küresel EV pazarının keşifsel analizi için sağlam bir temel.</a:t>
-            </a:r>
-            <a:endParaRPr b="0" i="0" sz="1250" u="none" cap="none" strike="noStrike">
+              <a:rPr lang="en-US" sz="1250" b="0" i="0" u="none" strike="noStrike" cap="none" dirty="0" err="1">
+                <a:solidFill>
+                  <a:srgbClr val="16234A"/>
+                </a:solidFill>
+                <a:latin typeface="Calibri"/>
+                <a:ea typeface="Calibri"/>
+                <a:cs typeface="Calibri"/>
+                <a:sym typeface="Calibri"/>
+              </a:rPr>
+              <a:t>Küresel</a:t>
+            </a:r>
+            <a:r>
+              <a:rPr lang="en-US" sz="1250" b="0" i="0" u="none" strike="noStrike" cap="none" dirty="0">
+                <a:solidFill>
+                  <a:srgbClr val="16234A"/>
+                </a:solidFill>
+                <a:latin typeface="Calibri"/>
+                <a:ea typeface="Calibri"/>
+                <a:cs typeface="Calibri"/>
+                <a:sym typeface="Calibri"/>
+              </a:rPr>
+              <a:t> </a:t>
+            </a:r>
+            <a:r>
+              <a:rPr lang="en-US" sz="1250" dirty="0" err="1">
+                <a:solidFill>
+                  <a:srgbClr val="16234A"/>
+                </a:solidFill>
+                <a:latin typeface="Calibri"/>
+                <a:ea typeface="Calibri"/>
+                <a:cs typeface="Calibri"/>
+                <a:sym typeface="Calibri"/>
+              </a:rPr>
+              <a:t>e</a:t>
+            </a:r>
+            <a:r>
+              <a:rPr lang="en-US" sz="1250" b="0" i="0" u="none" strike="noStrike" cap="none" dirty="0" err="1">
+                <a:solidFill>
+                  <a:srgbClr val="16234A"/>
+                </a:solidFill>
+                <a:latin typeface="Calibri"/>
+                <a:ea typeface="Calibri"/>
+                <a:cs typeface="Calibri"/>
+                <a:sym typeface="Calibri"/>
+              </a:rPr>
+              <a:t>lektrikli</a:t>
+            </a:r>
+            <a:r>
+              <a:rPr lang="en-US" sz="1250" b="0" i="0" u="none" strike="noStrike" cap="none" dirty="0">
+                <a:solidFill>
+                  <a:srgbClr val="16234A"/>
+                </a:solidFill>
+                <a:latin typeface="Calibri"/>
+                <a:ea typeface="Calibri"/>
+                <a:cs typeface="Calibri"/>
+                <a:sym typeface="Calibri"/>
+              </a:rPr>
+              <a:t> </a:t>
+            </a:r>
+            <a:r>
+              <a:rPr lang="en-US" sz="1250" b="0" i="0" u="none" strike="noStrike" cap="none" dirty="0" err="1">
+                <a:solidFill>
+                  <a:srgbClr val="16234A"/>
+                </a:solidFill>
+                <a:latin typeface="Calibri"/>
+                <a:ea typeface="Calibri"/>
+                <a:cs typeface="Calibri"/>
+                <a:sym typeface="Calibri"/>
+              </a:rPr>
+              <a:t>araç</a:t>
+            </a:r>
+            <a:r>
+              <a:rPr lang="en-US" sz="1250" b="0" i="0" u="none" strike="noStrike" cap="none" dirty="0">
+                <a:solidFill>
+                  <a:srgbClr val="16234A"/>
+                </a:solidFill>
+                <a:latin typeface="Calibri"/>
+                <a:ea typeface="Calibri"/>
+                <a:cs typeface="Calibri"/>
+                <a:sym typeface="Calibri"/>
+              </a:rPr>
+              <a:t> </a:t>
+            </a:r>
+            <a:r>
+              <a:rPr lang="en-US" sz="1250" b="0" i="0" u="none" strike="noStrike" cap="none" dirty="0" err="1">
+                <a:solidFill>
+                  <a:srgbClr val="16234A"/>
+                </a:solidFill>
+                <a:latin typeface="Calibri"/>
+                <a:ea typeface="Calibri"/>
+                <a:cs typeface="Calibri"/>
+                <a:sym typeface="Calibri"/>
+              </a:rPr>
+              <a:t>pazarının</a:t>
+            </a:r>
+            <a:r>
+              <a:rPr lang="en-US" sz="1250" b="0" i="0" u="none" strike="noStrike" cap="none" dirty="0">
+                <a:solidFill>
+                  <a:srgbClr val="16234A"/>
+                </a:solidFill>
+                <a:latin typeface="Calibri"/>
+                <a:ea typeface="Calibri"/>
+                <a:cs typeface="Calibri"/>
+                <a:sym typeface="Calibri"/>
+              </a:rPr>
+              <a:t> </a:t>
+            </a:r>
+            <a:r>
+              <a:rPr lang="en-US" sz="1250" b="0" i="0" u="none" strike="noStrike" cap="none" dirty="0" err="1">
+                <a:solidFill>
+                  <a:srgbClr val="16234A"/>
+                </a:solidFill>
+                <a:latin typeface="Calibri"/>
+                <a:ea typeface="Calibri"/>
+                <a:cs typeface="Calibri"/>
+                <a:sym typeface="Calibri"/>
+              </a:rPr>
+              <a:t>keşifsel</a:t>
+            </a:r>
+            <a:r>
+              <a:rPr lang="en-US" sz="1250" b="0" i="0" u="none" strike="noStrike" cap="none" dirty="0">
+                <a:solidFill>
+                  <a:srgbClr val="16234A"/>
+                </a:solidFill>
+                <a:latin typeface="Calibri"/>
+                <a:ea typeface="Calibri"/>
+                <a:cs typeface="Calibri"/>
+                <a:sym typeface="Calibri"/>
+              </a:rPr>
+              <a:t> </a:t>
+            </a:r>
+            <a:r>
+              <a:rPr lang="en-US" sz="1250" b="0" i="0" u="none" strike="noStrike" cap="none" dirty="0" err="1">
+                <a:solidFill>
+                  <a:srgbClr val="16234A"/>
+                </a:solidFill>
+                <a:latin typeface="Calibri"/>
+                <a:ea typeface="Calibri"/>
+                <a:cs typeface="Calibri"/>
+                <a:sym typeface="Calibri"/>
+              </a:rPr>
+              <a:t>analizi</a:t>
+            </a:r>
+            <a:r>
+              <a:rPr lang="en-US" sz="1250" b="0" i="0" u="none" strike="noStrike" cap="none" dirty="0">
+                <a:solidFill>
+                  <a:srgbClr val="16234A"/>
+                </a:solidFill>
+                <a:latin typeface="Calibri"/>
+                <a:ea typeface="Calibri"/>
+                <a:cs typeface="Calibri"/>
+                <a:sym typeface="Calibri"/>
+              </a:rPr>
+              <a:t> </a:t>
+            </a:r>
+            <a:r>
+              <a:rPr lang="en-US" sz="1250" b="0" i="0" u="none" strike="noStrike" cap="none" dirty="0" err="1">
+                <a:solidFill>
+                  <a:srgbClr val="16234A"/>
+                </a:solidFill>
+                <a:latin typeface="Calibri"/>
+                <a:ea typeface="Calibri"/>
+                <a:cs typeface="Calibri"/>
+                <a:sym typeface="Calibri"/>
+              </a:rPr>
+              <a:t>için</a:t>
+            </a:r>
+            <a:r>
+              <a:rPr lang="en-US" sz="1250" b="0" i="0" u="none" strike="noStrike" cap="none" dirty="0">
+                <a:solidFill>
+                  <a:srgbClr val="16234A"/>
+                </a:solidFill>
+                <a:latin typeface="Calibri"/>
+                <a:ea typeface="Calibri"/>
+                <a:cs typeface="Calibri"/>
+                <a:sym typeface="Calibri"/>
+              </a:rPr>
+              <a:t> </a:t>
+            </a:r>
+            <a:r>
+              <a:rPr lang="en-US" sz="1250" b="0" i="0" u="none" strike="noStrike" cap="none" dirty="0" err="1">
+                <a:solidFill>
+                  <a:srgbClr val="16234A"/>
+                </a:solidFill>
+                <a:latin typeface="Calibri"/>
+                <a:ea typeface="Calibri"/>
+                <a:cs typeface="Calibri"/>
+                <a:sym typeface="Calibri"/>
+              </a:rPr>
+              <a:t>sağlam</a:t>
+            </a:r>
+            <a:r>
+              <a:rPr lang="en-US" sz="1250" b="0" i="0" u="none" strike="noStrike" cap="none" dirty="0">
+                <a:solidFill>
+                  <a:srgbClr val="16234A"/>
+                </a:solidFill>
+                <a:latin typeface="Calibri"/>
+                <a:ea typeface="Calibri"/>
+                <a:cs typeface="Calibri"/>
+                <a:sym typeface="Calibri"/>
+              </a:rPr>
+              <a:t> </a:t>
+            </a:r>
+            <a:r>
+              <a:rPr lang="en-US" sz="1250" b="0" i="0" u="none" strike="noStrike" cap="none" dirty="0" err="1">
+                <a:solidFill>
+                  <a:srgbClr val="16234A"/>
+                </a:solidFill>
+                <a:latin typeface="Calibri"/>
+                <a:ea typeface="Calibri"/>
+                <a:cs typeface="Calibri"/>
+                <a:sym typeface="Calibri"/>
+              </a:rPr>
+              <a:t>bir</a:t>
+            </a:r>
+            <a:r>
+              <a:rPr lang="en-US" sz="1250" b="0" i="0" u="none" strike="noStrike" cap="none" dirty="0">
+                <a:solidFill>
+                  <a:srgbClr val="16234A"/>
+                </a:solidFill>
+                <a:latin typeface="Calibri"/>
+                <a:ea typeface="Calibri"/>
+                <a:cs typeface="Calibri"/>
+                <a:sym typeface="Calibri"/>
+              </a:rPr>
+              <a:t> </a:t>
+            </a:r>
+            <a:r>
+              <a:rPr lang="en-US" sz="1250" b="0" i="0" u="none" strike="noStrike" cap="none" dirty="0" err="1">
+                <a:solidFill>
+                  <a:srgbClr val="16234A"/>
+                </a:solidFill>
+                <a:latin typeface="Calibri"/>
+                <a:ea typeface="Calibri"/>
+                <a:cs typeface="Calibri"/>
+                <a:sym typeface="Calibri"/>
+              </a:rPr>
+              <a:t>temel</a:t>
+            </a:r>
+            <a:r>
+              <a:rPr lang="en-US" sz="1250" b="0" i="0" u="none" strike="noStrike" cap="none" dirty="0">
+                <a:solidFill>
+                  <a:srgbClr val="16234A"/>
+                </a:solidFill>
+                <a:latin typeface="Calibri"/>
+                <a:ea typeface="Calibri"/>
+                <a:cs typeface="Calibri"/>
+                <a:sym typeface="Calibri"/>
+              </a:rPr>
+              <a:t>.</a:t>
+            </a:r>
+            <a:endParaRPr sz="1250" b="0" i="0" u="none" strike="noStrike" cap="none" dirty="0">
               <a:solidFill>
                 <a:schemeClr val="dk1"/>
               </a:solidFill>
@@ -6362,12 +7885,12 @@
           </a:ln>
         </p:spPr>
         <p:txBody>
-          <a:bodyPr anchorCtr="0" anchor="ctr" bIns="0" lIns="0" spcFirstLastPara="1" rIns="0" wrap="square" tIns="0">
+          <a:bodyPr spcFirstLastPara="1" wrap="square" lIns="0" tIns="0" rIns="0" bIns="0" anchor="ctr" anchorCtr="0">
             <a:noAutofit/>
           </a:bodyPr>
           <a:lstStyle/>
           <a:p>
-            <a:pPr indent="0" lvl="0" marL="0" marR="0" rtl="0" algn="l">
+            <a:pPr marL="0" marR="0" lvl="0" indent="0" algn="l" rtl="0">
               <a:spcBef>
                 <a:spcPts val="0"/>
               </a:spcBef>
@@ -6382,7 +7905,7 @@
               <a:buNone/>
             </a:pPr>
             <a:r>
-              <a:rPr b="0" i="0" lang="en-US" sz="900" u="none" cap="none" strike="noStrike">
+              <a:rPr lang="en-US" sz="900" b="0" i="0" u="none" strike="noStrike" cap="none">
                 <a:solidFill>
                   <a:srgbClr val="5B6B8C"/>
                 </a:solidFill>
@@ -6393,7 +7916,7 @@
               </a:rPr>
               <a:t>Süha Çağrı Özbakışlar  ·  Elektrikli Araç Pazar Analizi (EDA)</a:t>
             </a:r>
-            <a:endParaRPr b="0" i="0" sz="900" u="none" cap="none" strike="noStrike">
+            <a:endParaRPr sz="900" b="0" i="0" u="none" strike="noStrike" cap="none">
               <a:solidFill>
                 <a:schemeClr val="dk1"/>
               </a:solidFill>
@@ -6425,12 +7948,12 @@
           </a:ln>
         </p:spPr>
         <p:txBody>
-          <a:bodyPr anchorCtr="0" anchor="ctr" bIns="0" lIns="0" spcFirstLastPara="1" rIns="0" wrap="square" tIns="0">
+          <a:bodyPr spcFirstLastPara="1" wrap="square" lIns="0" tIns="0" rIns="0" bIns="0" anchor="ctr" anchorCtr="0">
             <a:noAutofit/>
           </a:bodyPr>
           <a:lstStyle/>
           <a:p>
-            <a:pPr indent="0" lvl="0" marL="0" marR="0" rtl="0" algn="r">
+            <a:pPr marL="0" marR="0" lvl="0" indent="0" algn="r" rtl="0">
               <a:spcBef>
                 <a:spcPts val="0"/>
               </a:spcBef>
@@ -6445,7 +7968,7 @@
               <a:buNone/>
             </a:pPr>
             <a:r>
-              <a:rPr b="0" i="0" lang="en-US" sz="900" u="none" cap="none" strike="noStrike">
+              <a:rPr lang="en-US" sz="900" b="0" i="0" u="none" strike="noStrike" cap="none">
                 <a:solidFill>
                   <a:srgbClr val="5B6B8C"/>
                 </a:solidFill>
@@ -6456,7 +7979,7 @@
               </a:rPr>
               <a:t>2</a:t>
             </a:r>
-            <a:endParaRPr b="0" i="0" sz="900" u="none" cap="none" strike="noStrike">
+            <a:endParaRPr sz="900" b="0" i="0" u="none" strike="noStrike" cap="none">
               <a:solidFill>
                 <a:schemeClr val="dk1"/>
               </a:solidFill>
@@ -6477,11 +8000,11 @@
 </file>
 
 <file path=ppt/slides/slide3.xml><?xml version="1.0" encoding="utf-8"?>
-<p:sld xmlns:a="http://schemas.openxmlformats.org/drawingml/2006/main" xmlns:r="http://schemas.openxmlformats.org/officeDocument/2006/relationships" xmlns:mc="http://schemas.openxmlformats.org/markup-compatibility/2006" xmlns:mv="urn:schemas-microsoft-com:mac:vml" xmlns:p="http://schemas.openxmlformats.org/presentationml/2006/main" xmlns:c="http://schemas.openxmlformats.org/drawingml/2006/chart" xmlns:dgm="http://schemas.openxmlformats.org/drawingml/2006/diagram" xmlns:o="urn:schemas-microsoft-com:office:office" xmlns:v="urn:schemas-microsoft-com:vml" xmlns:pvml="urn:schemas-microsoft-com:office:powerpoint" xmlns:com="http://schemas.openxmlformats.org/drawingml/2006/compatibility" xmlns:p14="http://schemas.microsoft.com/office/powerpoint/2010/main" xmlns:p15="http://schemas.microsoft.com/office/powerpoint/2012/main" xmlns:ahyp="http://schemas.microsoft.com/office/drawing/2018/hyperlinkcolor">
+<p:sld xmlns:a="http://schemas.openxmlformats.org/drawingml/2006/main" xmlns:r="http://schemas.openxmlformats.org/officeDocument/2006/relationships" xmlns:p="http://schemas.openxmlformats.org/presentationml/2006/main">
   <p:cSld>
     <p:spTree>
       <p:nvGrpSpPr>
-        <p:cNvPr id="85" name="Shape 85"/>
+        <p:cNvPr id="1" name="Shape 85"/>
         <p:cNvGrpSpPr/>
         <p:nvPr/>
       </p:nvGrpSpPr>
@@ -6515,12 +8038,12 @@
           </a:ln>
         </p:spPr>
         <p:txBody>
-          <a:bodyPr anchorCtr="0" anchor="ctr" bIns="91425" lIns="91425" spcFirstLastPara="1" rIns="91425" wrap="square" tIns="91425">
+          <a:bodyPr spcFirstLastPara="1" wrap="square" lIns="91425" tIns="91425" rIns="91425" bIns="91425" anchor="ctr" anchorCtr="0">
             <a:noAutofit/>
           </a:bodyPr>
           <a:lstStyle/>
           <a:p>
-            <a:pPr indent="0" lvl="0" marL="0" rtl="0" algn="l">
+            <a:pPr marL="0" lvl="0" indent="0" algn="l" rtl="0">
               <a:spcBef>
                 <a:spcPts val="0"/>
               </a:spcBef>
@@ -6529,16 +8052,13 @@
               </a:spcAft>
               <a:buNone/>
             </a:pPr>
-            <a:r>
-              <a:t/>
-            </a:r>
             <a:endParaRPr/>
           </a:p>
         </p:txBody>
       </p:sp>
       <p:pic>
         <p:nvPicPr>
-          <p:cNvPr descr="/home/claude/images/icon_barchart.png" id="87" name="Google Shape;87;p6"/>
+          <p:cNvPr id="87" name="Google Shape;87;p6" descr="/home/claude/images/icon_barchart.png"/>
           <p:cNvPicPr preferRelativeResize="0"/>
           <p:nvPr/>
         </p:nvPicPr>
@@ -6546,7 +8066,7 @@
           <a:blip r:embed="rId3">
             <a:alphaModFix/>
           </a:blip>
-          <a:srcRect b="0" l="0" r="0" t="0"/>
+          <a:srcRect/>
           <a:stretch/>
         </p:blipFill>
         <p:spPr>
@@ -6583,12 +8103,12 @@
           </a:ln>
         </p:spPr>
         <p:txBody>
-          <a:bodyPr anchorCtr="0" anchor="ctr" bIns="0" lIns="0" spcFirstLastPara="1" rIns="0" wrap="square" tIns="0">
+          <a:bodyPr spcFirstLastPara="1" wrap="square" lIns="0" tIns="0" rIns="0" bIns="0" anchor="ctr" anchorCtr="0">
             <a:noAutofit/>
           </a:bodyPr>
           <a:lstStyle/>
           <a:p>
-            <a:pPr indent="0" lvl="0" marL="0" marR="0" rtl="0" algn="l">
+            <a:pPr marL="0" marR="0" lvl="0" indent="0" algn="l" rtl="0">
               <a:spcBef>
                 <a:spcPts val="0"/>
               </a:spcBef>
@@ -6603,7 +8123,7 @@
               <a:buNone/>
             </a:pPr>
             <a:r>
-              <a:rPr b="1" i="0" lang="en-US" sz="1200" u="none" cap="none" strike="noStrike">
+              <a:rPr lang="en-US" sz="1200" b="1" i="0" u="none" strike="noStrike" cap="none">
                 <a:solidFill>
                   <a:srgbClr val="2F6FED"/>
                 </a:solidFill>
@@ -6614,7 +8134,7 @@
               </a:rPr>
               <a:t>SAYISAL &amp; KATEGORİK DEĞİŞKENLER</a:t>
             </a:r>
-            <a:endParaRPr b="0" i="0" sz="1200" u="none" cap="none" strike="noStrike">
+            <a:endParaRPr sz="1200" b="0" i="0" u="none" strike="noStrike" cap="none">
               <a:solidFill>
                 <a:schemeClr val="dk1"/>
               </a:solidFill>
@@ -6646,12 +8166,12 @@
           </a:ln>
         </p:spPr>
         <p:txBody>
-          <a:bodyPr anchorCtr="0" anchor="ctr" bIns="0" lIns="0" spcFirstLastPara="1" rIns="0" wrap="square" tIns="0">
+          <a:bodyPr spcFirstLastPara="1" wrap="square" lIns="0" tIns="0" rIns="0" bIns="0" anchor="ctr" anchorCtr="0">
             <a:noAutofit/>
           </a:bodyPr>
           <a:lstStyle/>
           <a:p>
-            <a:pPr indent="0" lvl="0" marL="0" marR="0" rtl="0" algn="l">
+            <a:pPr marL="0" marR="0" lvl="0" indent="0" algn="l" rtl="0">
               <a:spcBef>
                 <a:spcPts val="0"/>
               </a:spcBef>
@@ -6666,7 +8186,7 @@
               <a:buNone/>
             </a:pPr>
             <a:r>
-              <a:rPr b="1" i="0" lang="en-US" sz="2500" u="none" cap="none" strike="noStrike">
+              <a:rPr lang="en-US" sz="2500" b="1" i="0" u="none" strike="noStrike" cap="none">
                 <a:solidFill>
                   <a:srgbClr val="16234A"/>
                 </a:solidFill>
@@ -6677,7 +8197,7 @@
               </a:rPr>
               <a:t>En Önemli Dağılımlar</a:t>
             </a:r>
-            <a:endParaRPr b="0" i="0" sz="2500" u="none" cap="none" strike="noStrike">
+            <a:endParaRPr sz="2500" b="0" i="0" u="none" strike="noStrike" cap="none">
               <a:solidFill>
                 <a:schemeClr val="dk1"/>
               </a:solidFill>
@@ -6709,12 +8229,12 @@
           </a:ln>
         </p:spPr>
         <p:txBody>
-          <a:bodyPr anchorCtr="0" anchor="ctr" bIns="0" lIns="0" spcFirstLastPara="1" rIns="0" wrap="square" tIns="0">
+          <a:bodyPr spcFirstLastPara="1" wrap="square" lIns="0" tIns="0" rIns="0" bIns="0" anchor="ctr" anchorCtr="0">
             <a:noAutofit/>
           </a:bodyPr>
           <a:lstStyle/>
           <a:p>
-            <a:pPr indent="0" lvl="0" marL="0" marR="0" rtl="0" algn="l">
+            <a:pPr marL="0" marR="0" lvl="0" indent="0" algn="l" rtl="0">
               <a:spcBef>
                 <a:spcPts val="0"/>
               </a:spcBef>
@@ -6729,7 +8249,7 @@
               <a:buNone/>
             </a:pPr>
             <a:r>
-              <a:rPr b="1" i="0" lang="en-US" sz="1150" u="none" cap="none" strike="noStrike">
+              <a:rPr lang="en-US" sz="1150" b="1" i="0" u="none" strike="noStrike" cap="none">
                 <a:solidFill>
                   <a:srgbClr val="2F6FED"/>
                 </a:solidFill>
@@ -6740,7 +8260,7 @@
               </a:rPr>
               <a:t>Araç Fiyatı (price_usd)</a:t>
             </a:r>
-            <a:endParaRPr b="0" i="0" sz="1150" u="none" cap="none" strike="noStrike">
+            <a:endParaRPr sz="1150" b="0" i="0" u="none" strike="noStrike" cap="none">
               <a:solidFill>
                 <a:schemeClr val="dk1"/>
               </a:solidFill>
@@ -6765,23 +8285,23 @@
           </a:xfrm>
           <a:prstGeom prst="roundRect">
             <a:avLst>
-              <a:gd fmla="val 2597" name="adj"/>
+              <a:gd name="adj" fmla="val 2597"/>
             </a:avLst>
           </a:prstGeom>
           <a:solidFill>
             <a:srgbClr val="FFFFFF"/>
           </a:solidFill>
-          <a:ln cap="flat" cmpd="sng" w="12700">
+          <a:ln w="12700" cap="flat" cmpd="sng">
             <a:solidFill>
               <a:srgbClr val="D9E2F0"/>
             </a:solidFill>
             <a:prstDash val="solid"/>
             <a:round/>
-            <a:headEnd len="sm" w="sm" type="none"/>
-            <a:tailEnd len="sm" w="sm" type="none"/>
+            <a:headEnd type="none" w="sm" len="sm"/>
+            <a:tailEnd type="none" w="sm" len="sm"/>
           </a:ln>
           <a:effectLst>
-            <a:outerShdw blurRad="76200" rotWithShape="0" algn="bl" dir="5400000" dist="25400">
+            <a:outerShdw blurRad="76200" dist="25400" dir="5400000" algn="bl" rotWithShape="0">
               <a:srgbClr val="16234A">
                 <a:alpha val="12157"/>
               </a:srgbClr>
@@ -6789,12 +8309,12 @@
           </a:effectLst>
         </p:spPr>
         <p:txBody>
-          <a:bodyPr anchorCtr="0" anchor="ctr" bIns="91425" lIns="91425" spcFirstLastPara="1" rIns="91425" wrap="square" tIns="91425">
+          <a:bodyPr spcFirstLastPara="1" wrap="square" lIns="91425" tIns="91425" rIns="91425" bIns="91425" anchor="ctr" anchorCtr="0">
             <a:noAutofit/>
           </a:bodyPr>
           <a:lstStyle/>
           <a:p>
-            <a:pPr indent="0" lvl="0" marL="0" rtl="0" algn="l">
+            <a:pPr marL="0" lvl="0" indent="0" algn="l" rtl="0">
               <a:spcBef>
                 <a:spcPts val="0"/>
               </a:spcBef>
@@ -6803,16 +8323,13 @@
               </a:spcAft>
               <a:buNone/>
             </a:pPr>
-            <a:r>
-              <a:t/>
-            </a:r>
             <a:endParaRPr/>
           </a:p>
         </p:txBody>
       </p:sp>
       <p:pic>
         <p:nvPicPr>
-          <p:cNvPr descr="/home/claude/images/cell18_0.png" id="92" name="Google Shape;92;p6"/>
+          <p:cNvPr id="92" name="Google Shape;92;p6" descr="/home/claude/images/cell18_0.png"/>
           <p:cNvPicPr preferRelativeResize="0"/>
           <p:nvPr/>
         </p:nvPicPr>
@@ -6820,7 +8337,7 @@
           <a:blip r:embed="rId4">
             <a:alphaModFix/>
           </a:blip>
-          <a:srcRect b="0" l="0" r="0" t="0"/>
+          <a:srcRect/>
           <a:stretch/>
         </p:blipFill>
         <p:spPr>
@@ -6857,12 +8374,12 @@
           </a:ln>
         </p:spPr>
         <p:txBody>
-          <a:bodyPr anchorCtr="0" anchor="ctr" bIns="0" lIns="0" spcFirstLastPara="1" rIns="0" wrap="square" tIns="0">
+          <a:bodyPr spcFirstLastPara="1" wrap="square" lIns="0" tIns="0" rIns="0" bIns="0" anchor="ctr" anchorCtr="0">
             <a:noAutofit/>
           </a:bodyPr>
           <a:lstStyle/>
           <a:p>
-            <a:pPr indent="0" lvl="0" marL="0" marR="0" rtl="0" algn="l">
+            <a:pPr marL="0" marR="0" lvl="0" indent="0" algn="l" rtl="0">
               <a:spcBef>
                 <a:spcPts val="0"/>
               </a:spcBef>
@@ -6877,7 +8394,7 @@
               <a:buNone/>
             </a:pPr>
             <a:r>
-              <a:rPr b="1" i="0" lang="en-US" sz="1150" u="none" cap="none" strike="noStrike">
+              <a:rPr lang="en-US" sz="1150" b="1" i="0" u="none" strike="noStrike" cap="none">
                 <a:solidFill>
                   <a:srgbClr val="2F6FED"/>
                 </a:solidFill>
@@ -6888,7 +8405,7 @@
               </a:rPr>
               <a:t>Marka (brand)</a:t>
             </a:r>
-            <a:endParaRPr b="0" i="0" sz="1150" u="none" cap="none" strike="noStrike">
+            <a:endParaRPr sz="1150" b="0" i="0" u="none" strike="noStrike" cap="none">
               <a:solidFill>
                 <a:schemeClr val="dk1"/>
               </a:solidFill>
@@ -6913,23 +8430,23 @@
           </a:xfrm>
           <a:prstGeom prst="roundRect">
             <a:avLst>
-              <a:gd fmla="val 2597" name="adj"/>
+              <a:gd name="adj" fmla="val 2597"/>
             </a:avLst>
           </a:prstGeom>
           <a:solidFill>
             <a:srgbClr val="FFFFFF"/>
           </a:solidFill>
-          <a:ln cap="flat" cmpd="sng" w="12700">
+          <a:ln w="12700" cap="flat" cmpd="sng">
             <a:solidFill>
               <a:srgbClr val="D9E2F0"/>
             </a:solidFill>
             <a:prstDash val="solid"/>
             <a:round/>
-            <a:headEnd len="sm" w="sm" type="none"/>
-            <a:tailEnd len="sm" w="sm" type="none"/>
+            <a:headEnd type="none" w="sm" len="sm"/>
+            <a:tailEnd type="none" w="sm" len="sm"/>
           </a:ln>
           <a:effectLst>
-            <a:outerShdw blurRad="76200" rotWithShape="0" algn="bl" dir="5400000" dist="25400">
+            <a:outerShdw blurRad="76200" dist="25400" dir="5400000" algn="bl" rotWithShape="0">
               <a:srgbClr val="16234A">
                 <a:alpha val="12157"/>
               </a:srgbClr>
@@ -6937,12 +8454,12 @@
           </a:effectLst>
         </p:spPr>
         <p:txBody>
-          <a:bodyPr anchorCtr="0" anchor="ctr" bIns="91425" lIns="91425" spcFirstLastPara="1" rIns="91425" wrap="square" tIns="91425">
+          <a:bodyPr spcFirstLastPara="1" wrap="square" lIns="91425" tIns="91425" rIns="91425" bIns="91425" anchor="ctr" anchorCtr="0">
             <a:noAutofit/>
           </a:bodyPr>
           <a:lstStyle/>
           <a:p>
-            <a:pPr indent="0" lvl="0" marL="0" rtl="0" algn="l">
+            <a:pPr marL="0" lvl="0" indent="0" algn="l" rtl="0">
               <a:spcBef>
                 <a:spcPts val="0"/>
               </a:spcBef>
@@ -6951,16 +8468,13 @@
               </a:spcAft>
               <a:buNone/>
             </a:pPr>
-            <a:r>
-              <a:t/>
-            </a:r>
             <a:endParaRPr/>
           </a:p>
         </p:txBody>
       </p:sp>
       <p:pic>
         <p:nvPicPr>
-          <p:cNvPr descr="/home/claude/images/cell46_0.png" id="95" name="Google Shape;95;p6"/>
+          <p:cNvPr id="95" name="Google Shape;95;p6" descr="/home/claude/images/cell46_0.png"/>
           <p:cNvPicPr preferRelativeResize="0"/>
           <p:nvPr/>
         </p:nvPicPr>
@@ -6968,7 +8482,7 @@
           <a:blip r:embed="rId5">
             <a:alphaModFix/>
           </a:blip>
-          <a:srcRect b="0" l="0" r="0" t="0"/>
+          <a:srcRect/>
           <a:stretch/>
         </p:blipFill>
         <p:spPr>
@@ -7005,12 +8519,12 @@
           </a:ln>
         </p:spPr>
         <p:txBody>
-          <a:bodyPr anchorCtr="0" anchor="ctr" bIns="0" lIns="0" spcFirstLastPara="1" rIns="0" wrap="square" tIns="0">
+          <a:bodyPr spcFirstLastPara="1" wrap="square" lIns="0" tIns="0" rIns="0" bIns="0" anchor="ctr" anchorCtr="0">
             <a:noAutofit/>
           </a:bodyPr>
           <a:lstStyle/>
           <a:p>
-            <a:pPr indent="0" lvl="0" marL="0" marR="0" rtl="0" algn="l">
+            <a:pPr marL="0" marR="0" lvl="0" indent="0" algn="l" rtl="0">
               <a:spcBef>
                 <a:spcPts val="0"/>
               </a:spcBef>
@@ -7025,7 +8539,7 @@
               <a:buNone/>
             </a:pPr>
             <a:r>
-              <a:rPr b="1" i="0" lang="en-US" sz="1150" u="none" cap="none" strike="noStrike">
+              <a:rPr lang="en-US" sz="1150" b="1" i="0" u="none" strike="noStrike" cap="none">
                 <a:solidFill>
                   <a:srgbClr val="2F6FED"/>
                 </a:solidFill>
@@ -7036,7 +8550,7 @@
               </a:rPr>
               <a:t>Pazar Segmenti (market_segment)</a:t>
             </a:r>
-            <a:endParaRPr b="0" i="0" sz="1150" u="none" cap="none" strike="noStrike">
+            <a:endParaRPr sz="1150" b="0" i="0" u="none" strike="noStrike" cap="none">
               <a:solidFill>
                 <a:schemeClr val="dk1"/>
               </a:solidFill>
@@ -7061,23 +8575,23 @@
           </a:xfrm>
           <a:prstGeom prst="roundRect">
             <a:avLst>
-              <a:gd fmla="val 2597" name="adj"/>
+              <a:gd name="adj" fmla="val 2597"/>
             </a:avLst>
           </a:prstGeom>
           <a:solidFill>
             <a:srgbClr val="FFFFFF"/>
           </a:solidFill>
-          <a:ln cap="flat" cmpd="sng" w="12700">
+          <a:ln w="12700" cap="flat" cmpd="sng">
             <a:solidFill>
               <a:srgbClr val="D9E2F0"/>
             </a:solidFill>
             <a:prstDash val="solid"/>
             <a:round/>
-            <a:headEnd len="sm" w="sm" type="none"/>
-            <a:tailEnd len="sm" w="sm" type="none"/>
+            <a:headEnd type="none" w="sm" len="sm"/>
+            <a:tailEnd type="none" w="sm" len="sm"/>
           </a:ln>
           <a:effectLst>
-            <a:outerShdw blurRad="76200" rotWithShape="0" algn="bl" dir="5400000" dist="25400">
+            <a:outerShdw blurRad="76200" dist="25400" dir="5400000" algn="bl" rotWithShape="0">
               <a:srgbClr val="16234A">
                 <a:alpha val="12157"/>
               </a:srgbClr>
@@ -7085,12 +8599,12 @@
           </a:effectLst>
         </p:spPr>
         <p:txBody>
-          <a:bodyPr anchorCtr="0" anchor="ctr" bIns="91425" lIns="91425" spcFirstLastPara="1" rIns="91425" wrap="square" tIns="91425">
+          <a:bodyPr spcFirstLastPara="1" wrap="square" lIns="91425" tIns="91425" rIns="91425" bIns="91425" anchor="ctr" anchorCtr="0">
             <a:noAutofit/>
           </a:bodyPr>
           <a:lstStyle/>
           <a:p>
-            <a:pPr indent="0" lvl="0" marL="0" rtl="0" algn="l">
+            <a:pPr marL="0" lvl="0" indent="0" algn="l" rtl="0">
               <a:spcBef>
                 <a:spcPts val="0"/>
               </a:spcBef>
@@ -7099,16 +8613,13 @@
               </a:spcAft>
               <a:buNone/>
             </a:pPr>
-            <a:r>
-              <a:t/>
-            </a:r>
             <a:endParaRPr/>
           </a:p>
         </p:txBody>
       </p:sp>
       <p:pic>
         <p:nvPicPr>
-          <p:cNvPr descr="/home/claude/images/cell58_0.png" id="98" name="Google Shape;98;p6"/>
+          <p:cNvPr id="98" name="Google Shape;98;p6" descr="/home/claude/images/cell58_0.png"/>
           <p:cNvPicPr preferRelativeResize="0"/>
           <p:nvPr/>
         </p:nvPicPr>
@@ -7116,7 +8627,7 @@
           <a:blip r:embed="rId6">
             <a:alphaModFix/>
           </a:blip>
-          <a:srcRect b="0" l="0" r="0" t="0"/>
+          <a:srcRect/>
           <a:stretch/>
         </p:blipFill>
         <p:spPr>
@@ -7146,7 +8657,7 @@
           </a:xfrm>
           <a:prstGeom prst="roundRect">
             <a:avLst>
-              <a:gd fmla="val 5556" name="adj"/>
+              <a:gd name="adj" fmla="val 5556"/>
             </a:avLst>
           </a:prstGeom>
           <a:solidFill>
@@ -7156,7 +8667,7 @@
             <a:noFill/>
           </a:ln>
           <a:effectLst>
-            <a:outerShdw blurRad="76200" rotWithShape="0" algn="bl" dir="5400000" dist="25400">
+            <a:outerShdw blurRad="76200" dist="25400" dir="5400000" algn="bl" rotWithShape="0">
               <a:srgbClr val="16234A">
                 <a:alpha val="12157"/>
               </a:srgbClr>
@@ -7164,12 +8675,12 @@
           </a:effectLst>
         </p:spPr>
         <p:txBody>
-          <a:bodyPr anchorCtr="0" anchor="ctr" bIns="91425" lIns="91425" spcFirstLastPara="1" rIns="91425" wrap="square" tIns="91425">
+          <a:bodyPr spcFirstLastPara="1" wrap="square" lIns="91425" tIns="91425" rIns="91425" bIns="91425" anchor="ctr" anchorCtr="0">
             <a:noAutofit/>
           </a:bodyPr>
           <a:lstStyle/>
           <a:p>
-            <a:pPr indent="0" lvl="0" marL="0" rtl="0" algn="l">
+            <a:pPr marL="0" lvl="0" indent="0" algn="l" rtl="0">
               <a:spcBef>
                 <a:spcPts val="0"/>
               </a:spcBef>
@@ -7178,9 +8689,6 @@
               </a:spcAft>
               <a:buNone/>
             </a:pPr>
-            <a:r>
-              <a:t/>
-            </a:r>
             <a:endParaRPr/>
           </a:p>
         </p:txBody>
@@ -7205,12 +8713,12 @@
           </a:ln>
         </p:spPr>
         <p:txBody>
-          <a:bodyPr anchorCtr="0" anchor="t" bIns="0" lIns="0" spcFirstLastPara="1" rIns="0" wrap="square" tIns="0">
+          <a:bodyPr spcFirstLastPara="1" wrap="square" lIns="0" tIns="0" rIns="0" bIns="0" anchor="t" anchorCtr="0">
             <a:noAutofit/>
           </a:bodyPr>
           <a:lstStyle/>
           <a:p>
-            <a:pPr indent="-177800" lvl="0" marL="177800" marR="0" rtl="0" algn="l">
+            <a:pPr marL="177800" marR="0" lvl="0" indent="-177800" algn="l" rtl="0">
               <a:lnSpc>
                 <a:spcPct val="105000"/>
               </a:lnSpc>
@@ -7228,18 +8736,222 @@
               <a:buChar char="●"/>
             </a:pPr>
             <a:r>
-              <a:rPr b="0" i="0" lang="en-US" sz="1200" u="none" cap="none" strike="noStrike">
-                <a:solidFill>
-                  <a:srgbClr val="16234A"/>
-                </a:solidFill>
-                <a:latin typeface="Calibri"/>
-                <a:ea typeface="Calibri"/>
-                <a:cs typeface="Calibri"/>
-                <a:sym typeface="Calibri"/>
-              </a:rPr>
-              <a:t>Araç fiyatları sağa çarpık dağılmaktadır (Ø 78.874 $, medyan 73.013 $) ve 50.000–100.000 $ aralığında yoğunlaşmaktadır.</a:t>
-            </a:r>
-            <a:endParaRPr b="0" i="0" sz="1200" u="none" cap="none" strike="noStrike">
+              <a:rPr lang="en-US" sz="1200" b="0" i="0" u="none" strike="noStrike" cap="none" dirty="0" err="1">
+                <a:solidFill>
+                  <a:srgbClr val="16234A"/>
+                </a:solidFill>
+                <a:latin typeface="Calibri"/>
+                <a:ea typeface="Calibri"/>
+                <a:cs typeface="Calibri"/>
+                <a:sym typeface="Calibri"/>
+              </a:rPr>
+              <a:t>Araç</a:t>
+            </a:r>
+            <a:r>
+              <a:rPr lang="en-US" sz="1200" b="0" i="0" u="none" strike="noStrike" cap="none" dirty="0">
+                <a:solidFill>
+                  <a:srgbClr val="16234A"/>
+                </a:solidFill>
+                <a:latin typeface="Calibri"/>
+                <a:ea typeface="Calibri"/>
+                <a:cs typeface="Calibri"/>
+                <a:sym typeface="Calibri"/>
+              </a:rPr>
+              <a:t> </a:t>
+            </a:r>
+            <a:r>
+              <a:rPr lang="en-US" sz="1200" b="0" i="0" u="none" strike="noStrike" cap="none" dirty="0" err="1">
+                <a:solidFill>
+                  <a:srgbClr val="16234A"/>
+                </a:solidFill>
+                <a:latin typeface="Calibri"/>
+                <a:ea typeface="Calibri"/>
+                <a:cs typeface="Calibri"/>
+                <a:sym typeface="Calibri"/>
+              </a:rPr>
+              <a:t>fiyatları</a:t>
+            </a:r>
+            <a:r>
+              <a:rPr lang="en-US" sz="1200" b="0" i="0" u="none" strike="noStrike" cap="none" dirty="0">
+                <a:solidFill>
+                  <a:srgbClr val="16234A"/>
+                </a:solidFill>
+                <a:latin typeface="Calibri"/>
+                <a:ea typeface="Calibri"/>
+                <a:cs typeface="Calibri"/>
+                <a:sym typeface="Calibri"/>
+              </a:rPr>
+              <a:t> </a:t>
+            </a:r>
+            <a:r>
+              <a:rPr lang="en-US" sz="1200" b="0" i="0" u="none" strike="noStrike" cap="none" dirty="0" err="1">
+                <a:solidFill>
+                  <a:srgbClr val="16234A"/>
+                </a:solidFill>
+                <a:latin typeface="Calibri"/>
+                <a:ea typeface="Calibri"/>
+                <a:cs typeface="Calibri"/>
+                <a:sym typeface="Calibri"/>
+              </a:rPr>
+              <a:t>sağa</a:t>
+            </a:r>
+            <a:r>
+              <a:rPr lang="en-US" sz="1200" b="0" i="0" u="none" strike="noStrike" cap="none" dirty="0">
+                <a:solidFill>
+                  <a:srgbClr val="16234A"/>
+                </a:solidFill>
+                <a:latin typeface="Calibri"/>
+                <a:ea typeface="Calibri"/>
+                <a:cs typeface="Calibri"/>
+                <a:sym typeface="Calibri"/>
+              </a:rPr>
+              <a:t> </a:t>
+            </a:r>
+            <a:r>
+              <a:rPr lang="en-US" sz="1200" b="0" i="0" u="none" strike="noStrike" cap="none" dirty="0" err="1">
+                <a:solidFill>
+                  <a:srgbClr val="16234A"/>
+                </a:solidFill>
+                <a:latin typeface="Calibri"/>
+                <a:ea typeface="Calibri"/>
+                <a:cs typeface="Calibri"/>
+                <a:sym typeface="Calibri"/>
+              </a:rPr>
+              <a:t>çarpık</a:t>
+            </a:r>
+            <a:r>
+              <a:rPr lang="en-US" sz="1200" b="0" i="0" u="none" strike="noStrike" cap="none" dirty="0">
+                <a:solidFill>
+                  <a:srgbClr val="16234A"/>
+                </a:solidFill>
+                <a:latin typeface="Calibri"/>
+                <a:ea typeface="Calibri"/>
+                <a:cs typeface="Calibri"/>
+                <a:sym typeface="Calibri"/>
+              </a:rPr>
+              <a:t> </a:t>
+            </a:r>
+            <a:r>
+              <a:rPr lang="en-US" sz="1200" b="0" i="0" u="none" strike="noStrike" cap="none" dirty="0" err="1">
+                <a:solidFill>
+                  <a:srgbClr val="16234A"/>
+                </a:solidFill>
+                <a:latin typeface="Calibri"/>
+                <a:ea typeface="Calibri"/>
+                <a:cs typeface="Calibri"/>
+                <a:sym typeface="Calibri"/>
+              </a:rPr>
+              <a:t>dağılmaktadır</a:t>
+            </a:r>
+            <a:r>
+              <a:rPr lang="en-US" sz="1200" b="0" i="0" u="none" strike="noStrike" cap="none" dirty="0">
+                <a:solidFill>
+                  <a:srgbClr val="16234A"/>
+                </a:solidFill>
+                <a:latin typeface="Calibri"/>
+                <a:ea typeface="Calibri"/>
+                <a:cs typeface="Calibri"/>
+                <a:sym typeface="Calibri"/>
+              </a:rPr>
+              <a:t> (Ø 78.874 $, </a:t>
+            </a:r>
+            <a:r>
+              <a:rPr lang="en-US" sz="1200" b="0" i="0" u="none" strike="noStrike" cap="none" dirty="0" err="1">
+                <a:solidFill>
+                  <a:srgbClr val="16234A"/>
+                </a:solidFill>
+                <a:latin typeface="Calibri"/>
+                <a:ea typeface="Calibri"/>
+                <a:cs typeface="Calibri"/>
+                <a:sym typeface="Calibri"/>
+              </a:rPr>
+              <a:t>medyan</a:t>
+            </a:r>
+            <a:r>
+              <a:rPr lang="en-US" sz="1200" b="0" i="0" u="none" strike="noStrike" cap="none" dirty="0">
+                <a:solidFill>
+                  <a:srgbClr val="16234A"/>
+                </a:solidFill>
+                <a:latin typeface="Calibri"/>
+                <a:ea typeface="Calibri"/>
+                <a:cs typeface="Calibri"/>
+                <a:sym typeface="Calibri"/>
+              </a:rPr>
+              <a:t> 73.013 $) </a:t>
+            </a:r>
+            <a:r>
+              <a:rPr lang="en-US" sz="1200" b="0" i="0" u="none" strike="noStrike" cap="none" dirty="0" err="1">
+                <a:solidFill>
+                  <a:srgbClr val="16234A"/>
+                </a:solidFill>
+                <a:latin typeface="Calibri"/>
+                <a:ea typeface="Calibri"/>
+                <a:cs typeface="Calibri"/>
+                <a:sym typeface="Calibri"/>
+              </a:rPr>
+              <a:t>ve</a:t>
+            </a:r>
+            <a:r>
+              <a:rPr lang="en-US" sz="1200" b="0" i="0" u="none" strike="noStrike" cap="none" dirty="0">
+                <a:solidFill>
+                  <a:srgbClr val="16234A"/>
+                </a:solidFill>
+                <a:latin typeface="Calibri"/>
+                <a:ea typeface="Calibri"/>
+                <a:cs typeface="Calibri"/>
+                <a:sym typeface="Calibri"/>
+              </a:rPr>
+              <a:t> 50.000–100.000 $ </a:t>
+            </a:r>
+            <a:r>
+              <a:rPr lang="en-US" sz="1200" b="0" i="0" u="none" strike="noStrike" cap="none" dirty="0" err="1">
+                <a:solidFill>
+                  <a:srgbClr val="16234A"/>
+                </a:solidFill>
+                <a:latin typeface="Calibri"/>
+                <a:ea typeface="Calibri"/>
+                <a:cs typeface="Calibri"/>
+                <a:sym typeface="Calibri"/>
+              </a:rPr>
+              <a:t>aralığında</a:t>
+            </a:r>
+            <a:r>
+              <a:rPr lang="en-US" sz="1200" b="0" i="0" u="none" strike="noStrike" cap="none" dirty="0">
+                <a:solidFill>
+                  <a:srgbClr val="16234A"/>
+                </a:solidFill>
+                <a:latin typeface="Calibri"/>
+                <a:ea typeface="Calibri"/>
+                <a:cs typeface="Calibri"/>
+                <a:sym typeface="Calibri"/>
+              </a:rPr>
+              <a:t> </a:t>
+            </a:r>
+            <a:r>
+              <a:rPr lang="en-US" sz="1200" b="0" i="0" u="none" strike="noStrike" cap="none" dirty="0" err="1">
+                <a:solidFill>
+                  <a:srgbClr val="16234A"/>
+                </a:solidFill>
+                <a:latin typeface="Calibri"/>
+                <a:ea typeface="Calibri"/>
+                <a:cs typeface="Calibri"/>
+                <a:sym typeface="Calibri"/>
+              </a:rPr>
+              <a:t>yoğunlaşmaktadır</a:t>
+            </a:r>
+            <a:r>
+              <a:rPr lang="en-US" sz="1200" b="0" i="0" u="none" strike="noStrike" cap="none" dirty="0">
+                <a:solidFill>
+                  <a:srgbClr val="16234A"/>
+                </a:solidFill>
+                <a:latin typeface="Calibri"/>
+                <a:ea typeface="Calibri"/>
+                <a:cs typeface="Calibri"/>
+                <a:sym typeface="Calibri"/>
+              </a:rPr>
+              <a:t>.</a:t>
+            </a:r>
+            <a:endParaRPr sz="1200" b="0" i="0" u="none" strike="noStrike" cap="none" dirty="0">
               <a:solidFill>
                 <a:schemeClr val="dk1"/>
               </a:solidFill>
@@ -7250,7 +8962,7 @@
             </a:endParaRPr>
           </a:p>
           <a:p>
-            <a:pPr indent="-177800" lvl="0" marL="177800" marR="0" rtl="0" algn="l">
+            <a:pPr marL="177800" marR="0" lvl="0" indent="-177800" algn="l" rtl="0">
               <a:lnSpc>
                 <a:spcPct val="105000"/>
               </a:lnSpc>
@@ -7268,18 +8980,282 @@
               <a:buChar char="●"/>
             </a:pPr>
             <a:r>
-              <a:rPr b="0" i="0" lang="en-US" sz="1200" u="none" cap="none" strike="noStrike">
-                <a:solidFill>
-                  <a:srgbClr val="16234A"/>
-                </a:solidFill>
-                <a:latin typeface="Calibri"/>
-                <a:ea typeface="Calibri"/>
-                <a:cs typeface="Calibri"/>
-                <a:sym typeface="Calibri"/>
-              </a:rPr>
-              <a:t>Tesla 434 araçla en baskın marka; onu BYD (282) ve Volkswagen (194) izliyor — veri setinde toplam 20 marka var.</a:t>
-            </a:r>
-            <a:endParaRPr b="0" i="0" sz="1200" u="none" cap="none" strike="noStrike">
+              <a:rPr lang="en-US" sz="1200" b="0" i="0" u="none" strike="noStrike" cap="none" dirty="0">
+                <a:solidFill>
+                  <a:srgbClr val="16234A"/>
+                </a:solidFill>
+                <a:latin typeface="Calibri"/>
+                <a:ea typeface="Calibri"/>
+                <a:cs typeface="Calibri"/>
+                <a:sym typeface="Calibri"/>
+              </a:rPr>
+              <a:t>Tesla 434 </a:t>
+            </a:r>
+            <a:r>
+              <a:rPr lang="en-US" sz="1200" b="0" i="0" u="none" strike="noStrike" cap="none" dirty="0" err="1">
+                <a:solidFill>
+                  <a:srgbClr val="16234A"/>
+                </a:solidFill>
+                <a:latin typeface="Calibri"/>
+                <a:ea typeface="Calibri"/>
+                <a:cs typeface="Calibri"/>
+                <a:sym typeface="Calibri"/>
+              </a:rPr>
+              <a:t>araçla</a:t>
+            </a:r>
+            <a:r>
+              <a:rPr lang="en-US" sz="1200" b="0" i="0" u="none" strike="noStrike" cap="none" dirty="0">
+                <a:solidFill>
+                  <a:srgbClr val="16234A"/>
+                </a:solidFill>
+                <a:latin typeface="Calibri"/>
+                <a:ea typeface="Calibri"/>
+                <a:cs typeface="Calibri"/>
+                <a:sym typeface="Calibri"/>
+              </a:rPr>
+              <a:t> </a:t>
+            </a:r>
+            <a:r>
+              <a:rPr lang="en-US" sz="1200" b="0" i="0" u="none" strike="noStrike" cap="none" dirty="0" err="1">
+                <a:solidFill>
+                  <a:srgbClr val="16234A"/>
+                </a:solidFill>
+                <a:latin typeface="Calibri"/>
+                <a:ea typeface="Calibri"/>
+                <a:cs typeface="Calibri"/>
+                <a:sym typeface="Calibri"/>
+              </a:rPr>
+              <a:t>en</a:t>
+            </a:r>
+            <a:r>
+              <a:rPr lang="en-US" sz="1200" b="0" i="0" u="none" strike="noStrike" cap="none" dirty="0">
+                <a:solidFill>
+                  <a:srgbClr val="16234A"/>
+                </a:solidFill>
+                <a:latin typeface="Calibri"/>
+                <a:ea typeface="Calibri"/>
+                <a:cs typeface="Calibri"/>
+                <a:sym typeface="Calibri"/>
+              </a:rPr>
+              <a:t> </a:t>
+            </a:r>
+            <a:r>
+              <a:rPr lang="en-US" sz="1200" b="0" i="0" u="none" strike="noStrike" cap="none" dirty="0" err="1">
+                <a:solidFill>
+                  <a:srgbClr val="16234A"/>
+                </a:solidFill>
+                <a:latin typeface="Calibri"/>
+                <a:ea typeface="Calibri"/>
+                <a:cs typeface="Calibri"/>
+                <a:sym typeface="Calibri"/>
+              </a:rPr>
+              <a:t>baskın</a:t>
+            </a:r>
+            <a:r>
+              <a:rPr lang="en-US" sz="1200" b="0" i="0" u="none" strike="noStrike" cap="none" dirty="0">
+                <a:solidFill>
+                  <a:srgbClr val="16234A"/>
+                </a:solidFill>
+                <a:latin typeface="Calibri"/>
+                <a:ea typeface="Calibri"/>
+                <a:cs typeface="Calibri"/>
+                <a:sym typeface="Calibri"/>
+              </a:rPr>
+              <a:t> </a:t>
+            </a:r>
+            <a:r>
+              <a:rPr lang="en-US" sz="1200" b="0" i="0" u="none" strike="noStrike" cap="none" dirty="0" err="1">
+                <a:solidFill>
+                  <a:srgbClr val="16234A"/>
+                </a:solidFill>
+                <a:latin typeface="Calibri"/>
+                <a:ea typeface="Calibri"/>
+                <a:cs typeface="Calibri"/>
+                <a:sym typeface="Calibri"/>
+              </a:rPr>
+              <a:t>marka</a:t>
+            </a:r>
+            <a:r>
+              <a:rPr lang="en-US" sz="1200" b="0" i="0" u="none" strike="noStrike" cap="none" dirty="0">
+                <a:solidFill>
+                  <a:srgbClr val="16234A"/>
+                </a:solidFill>
+                <a:latin typeface="Calibri"/>
+                <a:ea typeface="Calibri"/>
+                <a:cs typeface="Calibri"/>
+                <a:sym typeface="Calibri"/>
+              </a:rPr>
+              <a:t>; </a:t>
+            </a:r>
+            <a:r>
+              <a:rPr lang="en-US" sz="1200" b="0" i="0" u="none" strike="noStrike" cap="none" dirty="0" err="1">
+                <a:solidFill>
+                  <a:srgbClr val="16234A"/>
+                </a:solidFill>
+                <a:latin typeface="Calibri"/>
+                <a:ea typeface="Calibri"/>
+                <a:cs typeface="Calibri"/>
+                <a:sym typeface="Calibri"/>
+              </a:rPr>
+              <a:t>onu</a:t>
+            </a:r>
+            <a:r>
+              <a:rPr lang="en-US" sz="1200" b="0" i="0" u="none" strike="noStrike" cap="none" dirty="0">
+                <a:solidFill>
+                  <a:srgbClr val="16234A"/>
+                </a:solidFill>
+                <a:latin typeface="Calibri"/>
+                <a:ea typeface="Calibri"/>
+                <a:cs typeface="Calibri"/>
+                <a:sym typeface="Calibri"/>
+              </a:rPr>
+              <a:t> BYD (282) </a:t>
+            </a:r>
+            <a:r>
+              <a:rPr lang="en-US" sz="1200" b="0" i="0" u="none" strike="noStrike" cap="none" dirty="0" err="1">
+                <a:solidFill>
+                  <a:srgbClr val="16234A"/>
+                </a:solidFill>
+                <a:latin typeface="Calibri"/>
+                <a:ea typeface="Calibri"/>
+                <a:cs typeface="Calibri"/>
+                <a:sym typeface="Calibri"/>
+              </a:rPr>
+              <a:t>ve</a:t>
+            </a:r>
+            <a:r>
+              <a:rPr lang="en-US" sz="1200" b="0" i="0" u="none" strike="noStrike" cap="none" dirty="0">
+                <a:solidFill>
+                  <a:srgbClr val="16234A"/>
+                </a:solidFill>
+                <a:latin typeface="Calibri"/>
+                <a:ea typeface="Calibri"/>
+                <a:cs typeface="Calibri"/>
+                <a:sym typeface="Calibri"/>
+              </a:rPr>
+              <a:t> Volkswagen (194) </a:t>
+            </a:r>
+            <a:r>
+              <a:rPr lang="en-US" sz="1200" b="0" i="0" u="none" strike="noStrike" cap="none" dirty="0" err="1">
+                <a:solidFill>
+                  <a:srgbClr val="16234A"/>
+                </a:solidFill>
+                <a:latin typeface="Calibri"/>
+                <a:ea typeface="Calibri"/>
+                <a:cs typeface="Calibri"/>
+                <a:sym typeface="Calibri"/>
+              </a:rPr>
+              <a:t>izliyor</a:t>
+            </a:r>
+            <a:r>
+              <a:rPr lang="en-US" sz="1200" b="0" i="0" u="none" strike="noStrike" cap="none" dirty="0">
+                <a:solidFill>
+                  <a:srgbClr val="16234A"/>
+                </a:solidFill>
+                <a:latin typeface="Calibri"/>
+                <a:ea typeface="Calibri"/>
+                <a:cs typeface="Calibri"/>
+                <a:sym typeface="Calibri"/>
+              </a:rPr>
+              <a:t> — </a:t>
+            </a:r>
+            <a:r>
+              <a:rPr lang="en-US" sz="1200" b="0" i="0" u="none" strike="noStrike" cap="none" dirty="0" err="1">
+                <a:solidFill>
+                  <a:srgbClr val="16234A"/>
+                </a:solidFill>
+                <a:latin typeface="Calibri"/>
+                <a:ea typeface="Calibri"/>
+                <a:cs typeface="Calibri"/>
+                <a:sym typeface="Calibri"/>
+              </a:rPr>
+              <a:t>veri</a:t>
+            </a:r>
+            <a:r>
+              <a:rPr lang="en-US" sz="1200" b="0" i="0" u="none" strike="noStrike" cap="none" dirty="0">
+                <a:solidFill>
+                  <a:srgbClr val="16234A"/>
+                </a:solidFill>
+                <a:latin typeface="Calibri"/>
+                <a:ea typeface="Calibri"/>
+                <a:cs typeface="Calibri"/>
+                <a:sym typeface="Calibri"/>
+              </a:rPr>
+              <a:t> </a:t>
+            </a:r>
+            <a:r>
+              <a:rPr lang="en-US" sz="1200" b="0" i="0" u="none" strike="noStrike" cap="none" dirty="0" err="1">
+                <a:solidFill>
+                  <a:srgbClr val="16234A"/>
+                </a:solidFill>
+                <a:latin typeface="Calibri"/>
+                <a:ea typeface="Calibri"/>
+                <a:cs typeface="Calibri"/>
+                <a:sym typeface="Calibri"/>
+              </a:rPr>
+              <a:t>setinde</a:t>
+            </a:r>
+            <a:r>
+              <a:rPr lang="en-US" sz="1200" b="0" i="0" u="none" strike="noStrike" cap="none" dirty="0">
+                <a:solidFill>
+                  <a:srgbClr val="16234A"/>
+                </a:solidFill>
+                <a:latin typeface="Calibri"/>
+                <a:ea typeface="Calibri"/>
+                <a:cs typeface="Calibri"/>
+                <a:sym typeface="Calibri"/>
+              </a:rPr>
+              <a:t> </a:t>
+            </a:r>
+            <a:r>
+              <a:rPr lang="en-US" sz="1200" b="0" i="0" u="none" strike="noStrike" cap="none" dirty="0" err="1">
+                <a:solidFill>
+                  <a:srgbClr val="16234A"/>
+                </a:solidFill>
+                <a:latin typeface="Calibri"/>
+                <a:ea typeface="Calibri"/>
+                <a:cs typeface="Calibri"/>
+                <a:sym typeface="Calibri"/>
+              </a:rPr>
+              <a:t>toplam</a:t>
+            </a:r>
+            <a:r>
+              <a:rPr lang="en-US" sz="1200" b="0" i="0" u="none" strike="noStrike" cap="none" dirty="0">
+                <a:solidFill>
+                  <a:srgbClr val="16234A"/>
+                </a:solidFill>
+                <a:latin typeface="Calibri"/>
+                <a:ea typeface="Calibri"/>
+                <a:cs typeface="Calibri"/>
+                <a:sym typeface="Calibri"/>
+              </a:rPr>
+              <a:t> 20 </a:t>
+            </a:r>
+            <a:r>
+              <a:rPr lang="en-US" sz="1200" b="0" i="0" u="none" strike="noStrike" cap="none" dirty="0" err="1">
+                <a:solidFill>
+                  <a:srgbClr val="16234A"/>
+                </a:solidFill>
+                <a:latin typeface="Calibri"/>
+                <a:ea typeface="Calibri"/>
+                <a:cs typeface="Calibri"/>
+                <a:sym typeface="Calibri"/>
+              </a:rPr>
+              <a:t>marka</a:t>
+            </a:r>
+            <a:r>
+              <a:rPr lang="en-US" sz="1200" b="0" i="0" u="none" strike="noStrike" cap="none" dirty="0">
+                <a:solidFill>
+                  <a:srgbClr val="16234A"/>
+                </a:solidFill>
+                <a:latin typeface="Calibri"/>
+                <a:ea typeface="Calibri"/>
+                <a:cs typeface="Calibri"/>
+                <a:sym typeface="Calibri"/>
+              </a:rPr>
+              <a:t> var.</a:t>
+            </a:r>
+            <a:endParaRPr sz="1200" b="0" i="0" u="none" strike="noStrike" cap="none" dirty="0">
               <a:solidFill>
                 <a:schemeClr val="dk1"/>
               </a:solidFill>
@@ -7290,7 +9266,7 @@
             </a:endParaRPr>
           </a:p>
           <a:p>
-            <a:pPr indent="-177800" lvl="0" marL="177800" marR="0" rtl="0" algn="l">
+            <a:pPr marL="177800" marR="0" lvl="0" indent="-177800" algn="l" rtl="0">
               <a:lnSpc>
                 <a:spcPct val="105000"/>
               </a:lnSpc>
@@ -7308,18 +9284,258 @@
               <a:buChar char="●"/>
             </a:pPr>
             <a:r>
-              <a:rPr b="0" i="0" lang="en-US" sz="1200" u="none" cap="none" strike="noStrike">
-                <a:solidFill>
-                  <a:srgbClr val="16234A"/>
-                </a:solidFill>
-                <a:latin typeface="Calibri"/>
-                <a:ea typeface="Calibri"/>
-                <a:cs typeface="Calibri"/>
-                <a:sym typeface="Calibri"/>
-              </a:rPr>
-              <a:t>Veri seti Premium (712) ve Mid-range (642) segmentlerinde yoğunlaşıyor; Budget segmenti 151 araçla en zayıf temsil edilen segment.</a:t>
-            </a:r>
-            <a:endParaRPr b="0" i="0" sz="1200" u="none" cap="none" strike="noStrike">
+              <a:rPr lang="en-US" sz="1200" b="0" i="0" u="none" strike="noStrike" cap="none" dirty="0">
+                <a:solidFill>
+                  <a:srgbClr val="16234A"/>
+                </a:solidFill>
+                <a:latin typeface="Calibri"/>
+                <a:ea typeface="Calibri"/>
+                <a:cs typeface="Calibri"/>
+                <a:sym typeface="Calibri"/>
+              </a:rPr>
+              <a:t>Veri </a:t>
+            </a:r>
+            <a:r>
+              <a:rPr lang="en-US" sz="1200" b="0" i="0" u="none" strike="noStrike" cap="none" dirty="0" err="1">
+                <a:solidFill>
+                  <a:srgbClr val="16234A"/>
+                </a:solidFill>
+                <a:latin typeface="Calibri"/>
+                <a:ea typeface="Calibri"/>
+                <a:cs typeface="Calibri"/>
+                <a:sym typeface="Calibri"/>
+              </a:rPr>
+              <a:t>seti</a:t>
+            </a:r>
+            <a:r>
+              <a:rPr lang="en-US" sz="1200" b="0" i="0" u="none" strike="noStrike" cap="none" dirty="0">
+                <a:solidFill>
+                  <a:srgbClr val="16234A"/>
+                </a:solidFill>
+                <a:latin typeface="Calibri"/>
+                <a:ea typeface="Calibri"/>
+                <a:cs typeface="Calibri"/>
+                <a:sym typeface="Calibri"/>
+              </a:rPr>
+              <a:t> premium (712) </a:t>
+            </a:r>
+            <a:r>
+              <a:rPr lang="en-US" sz="1200" b="0" i="0" u="none" strike="noStrike" cap="none" dirty="0" err="1">
+                <a:solidFill>
+                  <a:srgbClr val="16234A"/>
+                </a:solidFill>
+                <a:latin typeface="Calibri"/>
+                <a:ea typeface="Calibri"/>
+                <a:cs typeface="Calibri"/>
+                <a:sym typeface="Calibri"/>
+              </a:rPr>
+              <a:t>ve</a:t>
+            </a:r>
+            <a:r>
+              <a:rPr lang="en-US" sz="1200" b="0" i="0" u="none" strike="noStrike" cap="none" dirty="0">
+                <a:solidFill>
+                  <a:srgbClr val="16234A"/>
+                </a:solidFill>
+                <a:latin typeface="Calibri"/>
+                <a:ea typeface="Calibri"/>
+                <a:cs typeface="Calibri"/>
+                <a:sym typeface="Calibri"/>
+              </a:rPr>
+              <a:t> mid-range (642) </a:t>
+            </a:r>
+            <a:r>
+              <a:rPr lang="en-US" sz="1200" b="0" i="0" u="none" strike="noStrike" cap="none" dirty="0" err="1">
+                <a:solidFill>
+                  <a:srgbClr val="16234A"/>
+                </a:solidFill>
+                <a:latin typeface="Calibri"/>
+                <a:ea typeface="Calibri"/>
+                <a:cs typeface="Calibri"/>
+                <a:sym typeface="Calibri"/>
+              </a:rPr>
+              <a:t>segmentlerinde</a:t>
+            </a:r>
+            <a:r>
+              <a:rPr lang="en-US" sz="1200" b="0" i="0" u="none" strike="noStrike" cap="none" dirty="0">
+                <a:solidFill>
+                  <a:srgbClr val="16234A"/>
+                </a:solidFill>
+                <a:latin typeface="Calibri"/>
+                <a:ea typeface="Calibri"/>
+                <a:cs typeface="Calibri"/>
+                <a:sym typeface="Calibri"/>
+              </a:rPr>
+              <a:t> </a:t>
+            </a:r>
+            <a:r>
+              <a:rPr lang="en-US" sz="1200" b="0" i="0" u="none" strike="noStrike" cap="none" dirty="0" err="1">
+                <a:solidFill>
+                  <a:srgbClr val="16234A"/>
+                </a:solidFill>
+                <a:latin typeface="Calibri"/>
+                <a:ea typeface="Calibri"/>
+                <a:cs typeface="Calibri"/>
+                <a:sym typeface="Calibri"/>
+              </a:rPr>
+              <a:t>yoğunlaşıyor</a:t>
+            </a:r>
+            <a:r>
+              <a:rPr lang="en-US" sz="1200" b="0" i="0" u="none" strike="noStrike" cap="none" dirty="0">
+                <a:solidFill>
+                  <a:srgbClr val="16234A"/>
+                </a:solidFill>
+                <a:latin typeface="Calibri"/>
+                <a:ea typeface="Calibri"/>
+                <a:cs typeface="Calibri"/>
+                <a:sym typeface="Calibri"/>
+              </a:rPr>
+              <a:t>; budget </a:t>
+            </a:r>
+            <a:r>
+              <a:rPr lang="en-US" sz="1200" b="0" i="0" u="none" strike="noStrike" cap="none" dirty="0" err="1">
+                <a:solidFill>
+                  <a:srgbClr val="16234A"/>
+                </a:solidFill>
+                <a:latin typeface="Calibri"/>
+                <a:ea typeface="Calibri"/>
+                <a:cs typeface="Calibri"/>
+                <a:sym typeface="Calibri"/>
+              </a:rPr>
+              <a:t>segmenti</a:t>
+            </a:r>
+            <a:r>
+              <a:rPr lang="en-US" sz="1200" b="0" i="0" u="none" strike="noStrike" cap="none" dirty="0">
+                <a:solidFill>
+                  <a:srgbClr val="16234A"/>
+                </a:solidFill>
+                <a:latin typeface="Calibri"/>
+                <a:ea typeface="Calibri"/>
+                <a:cs typeface="Calibri"/>
+                <a:sym typeface="Calibri"/>
+              </a:rPr>
+              <a:t> 151 </a:t>
+            </a:r>
+            <a:r>
+              <a:rPr lang="en-US" sz="1200" b="0" i="0" u="none" strike="noStrike" cap="none" dirty="0" err="1">
+                <a:solidFill>
+                  <a:srgbClr val="16234A"/>
+                </a:solidFill>
+                <a:latin typeface="Calibri"/>
+                <a:ea typeface="Calibri"/>
+                <a:cs typeface="Calibri"/>
+                <a:sym typeface="Calibri"/>
+              </a:rPr>
+              <a:t>araçla</a:t>
+            </a:r>
+            <a:r>
+              <a:rPr lang="en-US" sz="1200" b="0" i="0" u="none" strike="noStrike" cap="none" dirty="0">
+                <a:solidFill>
+                  <a:srgbClr val="16234A"/>
+                </a:solidFill>
+                <a:latin typeface="Calibri"/>
+                <a:ea typeface="Calibri"/>
+                <a:cs typeface="Calibri"/>
+                <a:sym typeface="Calibri"/>
+              </a:rPr>
+              <a:t> </a:t>
+            </a:r>
+            <a:r>
+              <a:rPr lang="en-US" sz="1200" b="0" i="0" u="none" strike="noStrike" cap="none" dirty="0" err="1">
+                <a:solidFill>
+                  <a:srgbClr val="16234A"/>
+                </a:solidFill>
+                <a:latin typeface="Calibri"/>
+                <a:ea typeface="Calibri"/>
+                <a:cs typeface="Calibri"/>
+                <a:sym typeface="Calibri"/>
+              </a:rPr>
+              <a:t>en</a:t>
+            </a:r>
+            <a:r>
+              <a:rPr lang="en-US" sz="1200" b="0" i="0" u="none" strike="noStrike" cap="none" dirty="0">
+                <a:solidFill>
+                  <a:srgbClr val="16234A"/>
+                </a:solidFill>
+                <a:latin typeface="Calibri"/>
+                <a:ea typeface="Calibri"/>
+                <a:cs typeface="Calibri"/>
+                <a:sym typeface="Calibri"/>
+              </a:rPr>
+              <a:t> </a:t>
+            </a:r>
+            <a:r>
+              <a:rPr lang="en-US" sz="1200" b="0" i="0" u="none" strike="noStrike" cap="none" dirty="0" err="1">
+                <a:solidFill>
+                  <a:srgbClr val="16234A"/>
+                </a:solidFill>
+                <a:latin typeface="Calibri"/>
+                <a:ea typeface="Calibri"/>
+                <a:cs typeface="Calibri"/>
+                <a:sym typeface="Calibri"/>
+              </a:rPr>
+              <a:t>zayıf</a:t>
+            </a:r>
+            <a:r>
+              <a:rPr lang="en-US" sz="1200" b="0" i="0" u="none" strike="noStrike" cap="none" dirty="0">
+                <a:solidFill>
+                  <a:srgbClr val="16234A"/>
+                </a:solidFill>
+                <a:latin typeface="Calibri"/>
+                <a:ea typeface="Calibri"/>
+                <a:cs typeface="Calibri"/>
+                <a:sym typeface="Calibri"/>
+              </a:rPr>
+              <a:t> </a:t>
+            </a:r>
+            <a:r>
+              <a:rPr lang="en-US" sz="1200" b="0" i="0" u="none" strike="noStrike" cap="none" dirty="0" err="1">
+                <a:solidFill>
+                  <a:srgbClr val="16234A"/>
+                </a:solidFill>
+                <a:latin typeface="Calibri"/>
+                <a:ea typeface="Calibri"/>
+                <a:cs typeface="Calibri"/>
+                <a:sym typeface="Calibri"/>
+              </a:rPr>
+              <a:t>temsil</a:t>
+            </a:r>
+            <a:r>
+              <a:rPr lang="en-US" sz="1200" b="0" i="0" u="none" strike="noStrike" cap="none" dirty="0">
+                <a:solidFill>
+                  <a:srgbClr val="16234A"/>
+                </a:solidFill>
+                <a:latin typeface="Calibri"/>
+                <a:ea typeface="Calibri"/>
+                <a:cs typeface="Calibri"/>
+                <a:sym typeface="Calibri"/>
+              </a:rPr>
+              <a:t> </a:t>
+            </a:r>
+            <a:r>
+              <a:rPr lang="en-US" sz="1200" b="0" i="0" u="none" strike="noStrike" cap="none" dirty="0" err="1">
+                <a:solidFill>
+                  <a:srgbClr val="16234A"/>
+                </a:solidFill>
+                <a:latin typeface="Calibri"/>
+                <a:ea typeface="Calibri"/>
+                <a:cs typeface="Calibri"/>
+                <a:sym typeface="Calibri"/>
+              </a:rPr>
+              <a:t>edilen</a:t>
+            </a:r>
+            <a:r>
+              <a:rPr lang="en-US" sz="1200" b="0" i="0" u="none" strike="noStrike" cap="none" dirty="0">
+                <a:solidFill>
+                  <a:srgbClr val="16234A"/>
+                </a:solidFill>
+                <a:latin typeface="Calibri"/>
+                <a:ea typeface="Calibri"/>
+                <a:cs typeface="Calibri"/>
+                <a:sym typeface="Calibri"/>
+              </a:rPr>
+              <a:t> segment.</a:t>
+            </a:r>
+            <a:endParaRPr sz="1200" b="0" i="0" u="none" strike="noStrike" cap="none" dirty="0">
               <a:solidFill>
                 <a:schemeClr val="dk1"/>
               </a:solidFill>
@@ -7351,12 +9567,12 @@
           </a:ln>
         </p:spPr>
         <p:txBody>
-          <a:bodyPr anchorCtr="0" anchor="ctr" bIns="0" lIns="0" spcFirstLastPara="1" rIns="0" wrap="square" tIns="0">
+          <a:bodyPr spcFirstLastPara="1" wrap="square" lIns="0" tIns="0" rIns="0" bIns="0" anchor="ctr" anchorCtr="0">
             <a:noAutofit/>
           </a:bodyPr>
           <a:lstStyle/>
           <a:p>
-            <a:pPr indent="0" lvl="0" marL="0" marR="0" rtl="0" algn="l">
+            <a:pPr marL="0" marR="0" lvl="0" indent="0" algn="l" rtl="0">
               <a:spcBef>
                 <a:spcPts val="0"/>
               </a:spcBef>
@@ -7371,7 +9587,7 @@
               <a:buNone/>
             </a:pPr>
             <a:r>
-              <a:rPr b="0" i="0" lang="en-US" sz="900" u="none" cap="none" strike="noStrike">
+              <a:rPr lang="en-US" sz="900" b="0" i="0" u="none" strike="noStrike" cap="none">
                 <a:solidFill>
                   <a:srgbClr val="5B6B8C"/>
                 </a:solidFill>
@@ -7382,7 +9598,7 @@
               </a:rPr>
               <a:t>Süha Çağrı Özbakışlar  ·  Elektrikli Araç Pazar Analizi (EDA)</a:t>
             </a:r>
-            <a:endParaRPr b="0" i="0" sz="900" u="none" cap="none" strike="noStrike">
+            <a:endParaRPr sz="900" b="0" i="0" u="none" strike="noStrike" cap="none">
               <a:solidFill>
                 <a:schemeClr val="dk1"/>
               </a:solidFill>
@@ -7414,12 +9630,12 @@
           </a:ln>
         </p:spPr>
         <p:txBody>
-          <a:bodyPr anchorCtr="0" anchor="ctr" bIns="0" lIns="0" spcFirstLastPara="1" rIns="0" wrap="square" tIns="0">
+          <a:bodyPr spcFirstLastPara="1" wrap="square" lIns="0" tIns="0" rIns="0" bIns="0" anchor="ctr" anchorCtr="0">
             <a:noAutofit/>
           </a:bodyPr>
           <a:lstStyle/>
           <a:p>
-            <a:pPr indent="0" lvl="0" marL="0" marR="0" rtl="0" algn="r">
+            <a:pPr marL="0" marR="0" lvl="0" indent="0" algn="r" rtl="0">
               <a:spcBef>
                 <a:spcPts val="0"/>
               </a:spcBef>
@@ -7434,7 +9650,7 @@
               <a:buNone/>
             </a:pPr>
             <a:r>
-              <a:rPr b="0" i="0" lang="en-US" sz="900" u="none" cap="none" strike="noStrike">
+              <a:rPr lang="en-US" sz="900" b="0" i="0" u="none" strike="noStrike" cap="none">
                 <a:solidFill>
                   <a:srgbClr val="5B6B8C"/>
                 </a:solidFill>
@@ -7445,7 +9661,7 @@
               </a:rPr>
               <a:t>3</a:t>
             </a:r>
-            <a:endParaRPr b="0" i="0" sz="900" u="none" cap="none" strike="noStrike">
+            <a:endParaRPr sz="900" b="0" i="0" u="none" strike="noStrike" cap="none">
               <a:solidFill>
                 <a:schemeClr val="dk1"/>
               </a:solidFill>
@@ -7466,11 +9682,11 @@
 </file>
 
 <file path=ppt/slides/slide4.xml><?xml version="1.0" encoding="utf-8"?>
-<p:sld xmlns:a="http://schemas.openxmlformats.org/drawingml/2006/main" xmlns:r="http://schemas.openxmlformats.org/officeDocument/2006/relationships" xmlns:mc="http://schemas.openxmlformats.org/markup-compatibility/2006" xmlns:mv="urn:schemas-microsoft-com:mac:vml" xmlns:p="http://schemas.openxmlformats.org/presentationml/2006/main" xmlns:c="http://schemas.openxmlformats.org/drawingml/2006/chart" xmlns:dgm="http://schemas.openxmlformats.org/drawingml/2006/diagram" xmlns:o="urn:schemas-microsoft-com:office:office" xmlns:v="urn:schemas-microsoft-com:vml" xmlns:pvml="urn:schemas-microsoft-com:office:powerpoint" xmlns:com="http://schemas.openxmlformats.org/drawingml/2006/compatibility" xmlns:p14="http://schemas.microsoft.com/office/powerpoint/2010/main" xmlns:p15="http://schemas.microsoft.com/office/powerpoint/2012/main" xmlns:ahyp="http://schemas.microsoft.com/office/drawing/2018/hyperlinkcolor">
+<p:sld xmlns:a="http://schemas.openxmlformats.org/drawingml/2006/main" xmlns:r="http://schemas.openxmlformats.org/officeDocument/2006/relationships" xmlns:p="http://schemas.openxmlformats.org/presentationml/2006/main">
   <p:cSld>
     <p:spTree>
       <p:nvGrpSpPr>
-        <p:cNvPr id="107" name="Shape 107"/>
+        <p:cNvPr id="1" name="Shape 107"/>
         <p:cNvGrpSpPr/>
         <p:nvPr/>
       </p:nvGrpSpPr>
@@ -7504,12 +9720,12 @@
           </a:ln>
         </p:spPr>
         <p:txBody>
-          <a:bodyPr anchorCtr="0" anchor="ctr" bIns="91425" lIns="91425" spcFirstLastPara="1" rIns="91425" wrap="square" tIns="91425">
+          <a:bodyPr spcFirstLastPara="1" wrap="square" lIns="91425" tIns="91425" rIns="91425" bIns="91425" anchor="ctr" anchorCtr="0">
             <a:noAutofit/>
           </a:bodyPr>
           <a:lstStyle/>
           <a:p>
-            <a:pPr indent="0" lvl="0" marL="0" rtl="0" algn="l">
+            <a:pPr marL="0" lvl="0" indent="0" algn="l" rtl="0">
               <a:spcBef>
                 <a:spcPts val="0"/>
               </a:spcBef>
@@ -7518,16 +9734,13 @@
               </a:spcAft>
               <a:buNone/>
             </a:pPr>
-            <a:r>
-              <a:t/>
-            </a:r>
             <a:endParaRPr/>
           </a:p>
         </p:txBody>
       </p:sp>
       <p:pic>
         <p:nvPicPr>
-          <p:cNvPr descr="/home/claude/images/icon_trending.png" id="109" name="Google Shape;109;p7"/>
+          <p:cNvPr id="109" name="Google Shape;109;p7" descr="/home/claude/images/icon_trending.png"/>
           <p:cNvPicPr preferRelativeResize="0"/>
           <p:nvPr/>
         </p:nvPicPr>
@@ -7535,7 +9748,7 @@
           <a:blip r:embed="rId3">
             <a:alphaModFix/>
           </a:blip>
-          <a:srcRect b="0" l="0" r="0" t="0"/>
+          <a:srcRect/>
           <a:stretch/>
         </p:blipFill>
         <p:spPr>
@@ -7572,12 +9785,12 @@
           </a:ln>
         </p:spPr>
         <p:txBody>
-          <a:bodyPr anchorCtr="0" anchor="ctr" bIns="0" lIns="0" spcFirstLastPara="1" rIns="0" wrap="square" tIns="0">
+          <a:bodyPr spcFirstLastPara="1" wrap="square" lIns="0" tIns="0" rIns="0" bIns="0" anchor="ctr" anchorCtr="0">
             <a:noAutofit/>
           </a:bodyPr>
           <a:lstStyle/>
           <a:p>
-            <a:pPr indent="0" lvl="0" marL="0" marR="0" rtl="0" algn="l">
+            <a:pPr marL="0" marR="0" lvl="0" indent="0" algn="l" rtl="0">
               <a:spcBef>
                 <a:spcPts val="0"/>
               </a:spcBef>
@@ -7592,7 +9805,7 @@
               <a:buNone/>
             </a:pPr>
             <a:r>
-              <a:rPr b="1" i="0" lang="en-US" sz="1200" u="none" cap="none" strike="noStrike">
+              <a:rPr lang="en-US" sz="1200" b="1" i="0" u="none" strike="noStrike" cap="none">
                 <a:solidFill>
                   <a:srgbClr val="2F6FED"/>
                 </a:solidFill>
@@ -7603,7 +9816,7 @@
               </a:rPr>
               <a:t>İKİLİ DEĞİŞKEN ANALİZİ</a:t>
             </a:r>
-            <a:endParaRPr b="0" i="0" sz="1200" u="none" cap="none" strike="noStrike">
+            <a:endParaRPr sz="1200" b="0" i="0" u="none" strike="noStrike" cap="none">
               <a:solidFill>
                 <a:schemeClr val="dk1"/>
               </a:solidFill>
@@ -7635,12 +9848,12 @@
           </a:ln>
         </p:spPr>
         <p:txBody>
-          <a:bodyPr anchorCtr="0" anchor="ctr" bIns="0" lIns="0" spcFirstLastPara="1" rIns="0" wrap="square" tIns="0">
+          <a:bodyPr spcFirstLastPara="1" wrap="square" lIns="0" tIns="0" rIns="0" bIns="0" anchor="ctr" anchorCtr="0">
             <a:noAutofit/>
           </a:bodyPr>
           <a:lstStyle/>
           <a:p>
-            <a:pPr indent="0" lvl="0" marL="0" marR="0" rtl="0" algn="l">
+            <a:pPr marL="0" marR="0" lvl="0" indent="0" algn="l" rtl="0">
               <a:spcBef>
                 <a:spcPts val="0"/>
               </a:spcBef>
@@ -7655,7 +9868,7 @@
               <a:buNone/>
             </a:pPr>
             <a:r>
-              <a:rPr b="1" i="0" lang="en-US" sz="2500" u="none" cap="none" strike="noStrike">
+              <a:rPr lang="en-US" sz="2500" b="1" i="0" u="none" strike="noStrike" cap="none">
                 <a:solidFill>
                   <a:srgbClr val="16234A"/>
                 </a:solidFill>
@@ -7666,7 +9879,7 @@
               </a:rPr>
               <a:t>İlişkiler &amp; Korelasyonlar</a:t>
             </a:r>
-            <a:endParaRPr b="0" i="0" sz="2500" u="none" cap="none" strike="noStrike">
+            <a:endParaRPr sz="2500" b="0" i="0" u="none" strike="noStrike" cap="none">
               <a:solidFill>
                 <a:schemeClr val="dk1"/>
               </a:solidFill>
@@ -7691,23 +9904,23 @@
           </a:xfrm>
           <a:prstGeom prst="roundRect">
             <a:avLst>
-              <a:gd fmla="val 1509" name="adj"/>
+              <a:gd name="adj" fmla="val 1509"/>
             </a:avLst>
           </a:prstGeom>
           <a:solidFill>
             <a:srgbClr val="FFFFFF"/>
           </a:solidFill>
-          <a:ln cap="flat" cmpd="sng" w="12700">
+          <a:ln w="12700" cap="flat" cmpd="sng">
             <a:solidFill>
               <a:srgbClr val="D9E2F0"/>
             </a:solidFill>
             <a:prstDash val="solid"/>
             <a:round/>
-            <a:headEnd len="sm" w="sm" type="none"/>
-            <a:tailEnd len="sm" w="sm" type="none"/>
+            <a:headEnd type="none" w="sm" len="sm"/>
+            <a:tailEnd type="none" w="sm" len="sm"/>
           </a:ln>
           <a:effectLst>
-            <a:outerShdw blurRad="76200" rotWithShape="0" algn="bl" dir="5400000" dist="25400">
+            <a:outerShdw blurRad="76200" dist="25400" dir="5400000" algn="bl" rotWithShape="0">
               <a:srgbClr val="16234A">
                 <a:alpha val="12157"/>
               </a:srgbClr>
@@ -7715,12 +9928,12 @@
           </a:effectLst>
         </p:spPr>
         <p:txBody>
-          <a:bodyPr anchorCtr="0" anchor="ctr" bIns="91425" lIns="91425" spcFirstLastPara="1" rIns="91425" wrap="square" tIns="91425">
+          <a:bodyPr spcFirstLastPara="1" wrap="square" lIns="91425" tIns="91425" rIns="91425" bIns="91425" anchor="ctr" anchorCtr="0">
             <a:noAutofit/>
           </a:bodyPr>
           <a:lstStyle/>
           <a:p>
-            <a:pPr indent="0" lvl="0" marL="0" rtl="0" algn="l">
+            <a:pPr marL="0" lvl="0" indent="0" algn="l" rtl="0">
               <a:spcBef>
                 <a:spcPts val="0"/>
               </a:spcBef>
@@ -7729,16 +9942,13 @@
               </a:spcAft>
               <a:buNone/>
             </a:pPr>
-            <a:r>
-              <a:t/>
-            </a:r>
             <a:endParaRPr/>
           </a:p>
         </p:txBody>
       </p:sp>
       <p:pic>
         <p:nvPicPr>
-          <p:cNvPr descr="/home/claude/images/cell61_0.png" id="113" name="Google Shape;113;p7"/>
+          <p:cNvPr id="113" name="Google Shape;113;p7" descr="/home/claude/images/cell61_0.png"/>
           <p:cNvPicPr preferRelativeResize="0"/>
           <p:nvPr/>
         </p:nvPicPr>
@@ -7746,7 +9956,7 @@
           <a:blip r:embed="rId4">
             <a:alphaModFix/>
           </a:blip>
-          <a:srcRect b="0" l="0" r="0" t="0"/>
+          <a:srcRect/>
           <a:stretch/>
         </p:blipFill>
         <p:spPr>
@@ -7776,7 +9986,7 @@
           </a:xfrm>
           <a:prstGeom prst="roundRect">
             <a:avLst>
-              <a:gd fmla="val 6250" name="adj"/>
+              <a:gd name="adj" fmla="val 6250"/>
             </a:avLst>
           </a:prstGeom>
           <a:solidFill>
@@ -7787,12 +9997,12 @@
           </a:ln>
         </p:spPr>
         <p:txBody>
-          <a:bodyPr anchorCtr="0" anchor="ctr" bIns="91425" lIns="91425" spcFirstLastPara="1" rIns="91425" wrap="square" tIns="91425">
+          <a:bodyPr spcFirstLastPara="1" wrap="square" lIns="91425" tIns="91425" rIns="91425" bIns="91425" anchor="ctr" anchorCtr="0">
             <a:noAutofit/>
           </a:bodyPr>
           <a:lstStyle/>
           <a:p>
-            <a:pPr indent="0" lvl="0" marL="0" rtl="0" algn="l">
+            <a:pPr marL="0" lvl="0" indent="0" algn="l" rtl="0">
               <a:spcBef>
                 <a:spcPts val="0"/>
               </a:spcBef>
@@ -7801,9 +10011,6 @@
               </a:spcAft>
               <a:buNone/>
             </a:pPr>
-            <a:r>
-              <a:t/>
-            </a:r>
             <a:endParaRPr/>
           </a:p>
         </p:txBody>
@@ -7828,12 +10035,12 @@
           </a:ln>
         </p:spPr>
         <p:txBody>
-          <a:bodyPr anchorCtr="0" anchor="b" bIns="0" lIns="0" spcFirstLastPara="1" rIns="0" wrap="square" tIns="0">
+          <a:bodyPr spcFirstLastPara="1" wrap="square" lIns="0" tIns="0" rIns="0" bIns="0" anchor="b" anchorCtr="0">
             <a:noAutofit/>
           </a:bodyPr>
           <a:lstStyle/>
           <a:p>
-            <a:pPr indent="0" lvl="0" marL="0" marR="0" rtl="0" algn="l">
+            <a:pPr marL="0" marR="0" lvl="0" indent="0" algn="l" rtl="0">
               <a:spcBef>
                 <a:spcPts val="0"/>
               </a:spcBef>
@@ -7848,7 +10055,7 @@
               <a:buNone/>
             </a:pPr>
             <a:r>
-              <a:rPr b="1" i="0" lang="en-US" sz="2400" u="none" cap="none" strike="noStrike">
+              <a:rPr lang="en-US" sz="2400" b="1" i="0" u="none" strike="noStrike" cap="none">
                 <a:solidFill>
                   <a:srgbClr val="0FB5C9"/>
                 </a:solidFill>
@@ -7859,7 +10066,7 @@
               </a:rPr>
               <a:t>r = 0,978</a:t>
             </a:r>
-            <a:endParaRPr b="0" i="0" sz="2400" u="none" cap="none" strike="noStrike">
+            <a:endParaRPr sz="2400" b="0" i="0" u="none" strike="noStrike" cap="none">
               <a:solidFill>
                 <a:schemeClr val="dk1"/>
               </a:solidFill>
@@ -7891,12 +10098,12 @@
           </a:ln>
         </p:spPr>
         <p:txBody>
-          <a:bodyPr anchorCtr="0" anchor="t" bIns="0" lIns="0" spcFirstLastPara="1" rIns="0" wrap="square" tIns="0">
+          <a:bodyPr spcFirstLastPara="1" wrap="square" lIns="0" tIns="0" rIns="0" bIns="0" anchor="t" anchorCtr="0">
             <a:noAutofit/>
           </a:bodyPr>
           <a:lstStyle/>
           <a:p>
-            <a:pPr indent="0" lvl="0" marL="0" marR="0" rtl="0" algn="l">
+            <a:pPr marL="0" marR="0" lvl="0" indent="0" algn="l" rtl="0">
               <a:lnSpc>
                 <a:spcPct val="110000"/>
               </a:lnSpc>
@@ -7914,7 +10121,7 @@
               <a:buNone/>
             </a:pPr>
             <a:r>
-              <a:rPr b="0" i="0" lang="en-US" sz="1100" u="none" cap="none" strike="noStrike">
+              <a:rPr lang="en-US" sz="1100" b="0" i="0" u="none" strike="noStrike" cap="none">
                 <a:solidFill>
                   <a:srgbClr val="FFFFFF"/>
                 </a:solidFill>
@@ -7925,7 +10132,7 @@
               </a:rPr>
               <a:t>Batarya kapasitesi ↔ menzil (çok güçlü) — daha büyük batarya, daha fazla menzil.</a:t>
             </a:r>
-            <a:endParaRPr b="0" i="0" sz="1100" u="none" cap="none" strike="noStrike">
+            <a:endParaRPr sz="1100" b="0" i="0" u="none" strike="noStrike" cap="none">
               <a:solidFill>
                 <a:schemeClr val="dk1"/>
               </a:solidFill>
@@ -7950,7 +10157,7 @@
           </a:xfrm>
           <a:prstGeom prst="roundRect">
             <a:avLst>
-              <a:gd fmla="val 6250" name="adj"/>
+              <a:gd name="adj" fmla="val 6250"/>
             </a:avLst>
           </a:prstGeom>
           <a:solidFill>
@@ -7961,12 +10168,12 @@
           </a:ln>
         </p:spPr>
         <p:txBody>
-          <a:bodyPr anchorCtr="0" anchor="ctr" bIns="91425" lIns="91425" spcFirstLastPara="1" rIns="91425" wrap="square" tIns="91425">
+          <a:bodyPr spcFirstLastPara="1" wrap="square" lIns="91425" tIns="91425" rIns="91425" bIns="91425" anchor="ctr" anchorCtr="0">
             <a:noAutofit/>
           </a:bodyPr>
           <a:lstStyle/>
           <a:p>
-            <a:pPr indent="0" lvl="0" marL="0" rtl="0" algn="l">
+            <a:pPr marL="0" lvl="0" indent="0" algn="l" rtl="0">
               <a:spcBef>
                 <a:spcPts val="0"/>
               </a:spcBef>
@@ -7975,9 +10182,6 @@
               </a:spcAft>
               <a:buNone/>
             </a:pPr>
-            <a:r>
-              <a:t/>
-            </a:r>
             <a:endParaRPr/>
           </a:p>
         </p:txBody>
@@ -8002,12 +10206,12 @@
           </a:ln>
         </p:spPr>
         <p:txBody>
-          <a:bodyPr anchorCtr="0" anchor="b" bIns="0" lIns="0" spcFirstLastPara="1" rIns="0" wrap="square" tIns="0">
+          <a:bodyPr spcFirstLastPara="1" wrap="square" lIns="0" tIns="0" rIns="0" bIns="0" anchor="b" anchorCtr="0">
             <a:noAutofit/>
           </a:bodyPr>
           <a:lstStyle/>
           <a:p>
-            <a:pPr indent="0" lvl="0" marL="0" marR="0" rtl="0" algn="l">
+            <a:pPr marL="0" marR="0" lvl="0" indent="0" algn="l" rtl="0">
               <a:spcBef>
                 <a:spcPts val="0"/>
               </a:spcBef>
@@ -8022,7 +10226,7 @@
               <a:buNone/>
             </a:pPr>
             <a:r>
-              <a:rPr b="1" i="0" lang="en-US" sz="2400" u="none" cap="none" strike="noStrike">
+              <a:rPr lang="en-US" sz="2400" b="1" i="0" u="none" strike="noStrike" cap="none">
                 <a:solidFill>
                   <a:srgbClr val="0FB5C9"/>
                 </a:solidFill>
@@ -8033,7 +10237,7 @@
               </a:rPr>
               <a:t>r = 0,765</a:t>
             </a:r>
-            <a:endParaRPr b="0" i="0" sz="2400" u="none" cap="none" strike="noStrike">
+            <a:endParaRPr sz="2400" b="0" i="0" u="none" strike="noStrike" cap="none">
               <a:solidFill>
                 <a:schemeClr val="dk1"/>
               </a:solidFill>
@@ -8065,12 +10269,12 @@
           </a:ln>
         </p:spPr>
         <p:txBody>
-          <a:bodyPr anchorCtr="0" anchor="t" bIns="0" lIns="0" spcFirstLastPara="1" rIns="0" wrap="square" tIns="0">
+          <a:bodyPr spcFirstLastPara="1" wrap="square" lIns="0" tIns="0" rIns="0" bIns="0" anchor="t" anchorCtr="0">
             <a:noAutofit/>
           </a:bodyPr>
           <a:lstStyle/>
           <a:p>
-            <a:pPr indent="0" lvl="0" marL="0" marR="0" rtl="0" algn="l">
+            <a:pPr marL="0" marR="0" lvl="0" indent="0" algn="l" rtl="0">
               <a:lnSpc>
                 <a:spcPct val="110000"/>
               </a:lnSpc>
@@ -8088,7 +10292,7 @@
               <a:buNone/>
             </a:pPr>
             <a:r>
-              <a:rPr b="0" i="0" lang="en-US" sz="1100" u="none" cap="none" strike="noStrike">
+              <a:rPr lang="en-US" sz="1100" b="0" i="0" u="none" strike="noStrike" cap="none">
                 <a:solidFill>
                   <a:srgbClr val="FFFFFF"/>
                 </a:solidFill>
@@ -8099,7 +10303,7 @@
               </a:rPr>
               <a:t>Motor gücü ↔ fiyat (güçlü) — fiyat yalnızca güçle açıklanamaz.</a:t>
             </a:r>
-            <a:endParaRPr b="0" i="0" sz="1100" u="none" cap="none" strike="noStrike">
+            <a:endParaRPr sz="1100" b="0" i="0" u="none" strike="noStrike" cap="none">
               <a:solidFill>
                 <a:schemeClr val="dk1"/>
               </a:solidFill>
@@ -8124,7 +10328,7 @@
           </a:xfrm>
           <a:prstGeom prst="roundRect">
             <a:avLst>
-              <a:gd fmla="val 6250" name="adj"/>
+              <a:gd name="adj" fmla="val 6250"/>
             </a:avLst>
           </a:prstGeom>
           <a:solidFill>
@@ -8135,12 +10339,12 @@
           </a:ln>
         </p:spPr>
         <p:txBody>
-          <a:bodyPr anchorCtr="0" anchor="ctr" bIns="91425" lIns="91425" spcFirstLastPara="1" rIns="91425" wrap="square" tIns="91425">
+          <a:bodyPr spcFirstLastPara="1" wrap="square" lIns="91425" tIns="91425" rIns="91425" bIns="91425" anchor="ctr" anchorCtr="0">
             <a:noAutofit/>
           </a:bodyPr>
           <a:lstStyle/>
           <a:p>
-            <a:pPr indent="0" lvl="0" marL="0" rtl="0" algn="l">
+            <a:pPr marL="0" lvl="0" indent="0" algn="l" rtl="0">
               <a:spcBef>
                 <a:spcPts val="0"/>
               </a:spcBef>
@@ -8149,9 +10353,6 @@
               </a:spcAft>
               <a:buNone/>
             </a:pPr>
-            <a:r>
-              <a:t/>
-            </a:r>
             <a:endParaRPr/>
           </a:p>
         </p:txBody>
@@ -8176,12 +10377,12 @@
           </a:ln>
         </p:spPr>
         <p:txBody>
-          <a:bodyPr anchorCtr="0" anchor="b" bIns="0" lIns="0" spcFirstLastPara="1" rIns="0" wrap="square" tIns="0">
+          <a:bodyPr spcFirstLastPara="1" wrap="square" lIns="0" tIns="0" rIns="0" bIns="0" anchor="b" anchorCtr="0">
             <a:noAutofit/>
           </a:bodyPr>
           <a:lstStyle/>
           <a:p>
-            <a:pPr indent="0" lvl="0" marL="0" marR="0" rtl="0" algn="l">
+            <a:pPr marL="0" marR="0" lvl="0" indent="0" algn="l" rtl="0">
               <a:spcBef>
                 <a:spcPts val="0"/>
               </a:spcBef>
@@ -8196,7 +10397,7 @@
               <a:buNone/>
             </a:pPr>
             <a:r>
-              <a:rPr b="1" i="0" lang="en-US" sz="2400" u="none" cap="none" strike="noStrike">
+              <a:rPr lang="en-US" sz="2400" b="1" i="0" u="none" strike="noStrike" cap="none">
                 <a:solidFill>
                   <a:srgbClr val="0FB5C9"/>
                 </a:solidFill>
@@ -8207,7 +10408,7 @@
               </a:rPr>
               <a:t>r = 0,668</a:t>
             </a:r>
-            <a:endParaRPr b="0" i="0" sz="2400" u="none" cap="none" strike="noStrike">
+            <a:endParaRPr sz="2400" b="0" i="0" u="none" strike="noStrike" cap="none">
               <a:solidFill>
                 <a:schemeClr val="dk1"/>
               </a:solidFill>
@@ -8239,12 +10440,12 @@
           </a:ln>
         </p:spPr>
         <p:txBody>
-          <a:bodyPr anchorCtr="0" anchor="t" bIns="0" lIns="0" spcFirstLastPara="1" rIns="0" wrap="square" tIns="0">
+          <a:bodyPr spcFirstLastPara="1" wrap="square" lIns="0" tIns="0" rIns="0" bIns="0" anchor="t" anchorCtr="0">
             <a:noAutofit/>
           </a:bodyPr>
           <a:lstStyle/>
           <a:p>
-            <a:pPr indent="0" lvl="0" marL="0" marR="0" rtl="0" algn="l">
+            <a:pPr marL="0" marR="0" lvl="0" indent="0" algn="l" rtl="0">
               <a:lnSpc>
                 <a:spcPct val="110000"/>
               </a:lnSpc>
@@ -8262,7 +10463,7 @@
               <a:buNone/>
             </a:pPr>
             <a:r>
-              <a:rPr b="0" i="0" lang="en-US" sz="1100" u="none" cap="none" strike="noStrike">
+              <a:rPr lang="en-US" sz="1100" b="0" i="0" u="none" strike="noStrike" cap="none">
                 <a:solidFill>
                   <a:srgbClr val="FFFFFF"/>
                 </a:solidFill>
@@ -8273,7 +10474,7 @@
               </a:rPr>
               <a:t>Menzil ↔ müşteri puanı (orta güçlü) — daha fazla menzil, daha yüksek memnuniyet.</a:t>
             </a:r>
-            <a:endParaRPr b="0" i="0" sz="1100" u="none" cap="none" strike="noStrike">
+            <a:endParaRPr sz="1100" b="0" i="0" u="none" strike="noStrike" cap="none">
               <a:solidFill>
                 <a:schemeClr val="dk1"/>
               </a:solidFill>
@@ -8305,12 +10506,12 @@
           </a:ln>
         </p:spPr>
         <p:txBody>
-          <a:bodyPr anchorCtr="0" anchor="ctr" bIns="0" lIns="0" spcFirstLastPara="1" rIns="0" wrap="square" tIns="0">
+          <a:bodyPr spcFirstLastPara="1" wrap="square" lIns="0" tIns="0" rIns="0" bIns="0" anchor="ctr" anchorCtr="0">
             <a:noAutofit/>
           </a:bodyPr>
           <a:lstStyle/>
           <a:p>
-            <a:pPr indent="0" lvl="0" marL="0" marR="0" rtl="0" algn="l">
+            <a:pPr marL="0" marR="0" lvl="0" indent="0" algn="l" rtl="0">
               <a:spcBef>
                 <a:spcPts val="0"/>
               </a:spcBef>
@@ -8325,7 +10526,7 @@
               <a:buNone/>
             </a:pPr>
             <a:r>
-              <a:rPr b="0" i="0" lang="en-US" sz="900" u="none" cap="none" strike="noStrike">
+              <a:rPr lang="en-US" sz="900" b="0" i="0" u="none" strike="noStrike" cap="none">
                 <a:solidFill>
                   <a:srgbClr val="5B6B8C"/>
                 </a:solidFill>
@@ -8336,7 +10537,7 @@
               </a:rPr>
               <a:t>Süha Çağrı Özbakışlar  ·  Elektrikli Araç Pazar Analizi (EDA)</a:t>
             </a:r>
-            <a:endParaRPr b="0" i="0" sz="900" u="none" cap="none" strike="noStrike">
+            <a:endParaRPr sz="900" b="0" i="0" u="none" strike="noStrike" cap="none">
               <a:solidFill>
                 <a:schemeClr val="dk1"/>
               </a:solidFill>
@@ -8368,12 +10569,12 @@
           </a:ln>
         </p:spPr>
         <p:txBody>
-          <a:bodyPr anchorCtr="0" anchor="ctr" bIns="0" lIns="0" spcFirstLastPara="1" rIns="0" wrap="square" tIns="0">
+          <a:bodyPr spcFirstLastPara="1" wrap="square" lIns="0" tIns="0" rIns="0" bIns="0" anchor="ctr" anchorCtr="0">
             <a:noAutofit/>
           </a:bodyPr>
           <a:lstStyle/>
           <a:p>
-            <a:pPr indent="0" lvl="0" marL="0" marR="0" rtl="0" algn="r">
+            <a:pPr marL="0" marR="0" lvl="0" indent="0" algn="r" rtl="0">
               <a:spcBef>
                 <a:spcPts val="0"/>
               </a:spcBef>
@@ -8388,7 +10589,7 @@
               <a:buNone/>
             </a:pPr>
             <a:r>
-              <a:rPr b="0" i="0" lang="en-US" sz="900" u="none" cap="none" strike="noStrike">
+              <a:rPr lang="en-US" sz="900" b="0" i="0" u="none" strike="noStrike" cap="none">
                 <a:solidFill>
                   <a:srgbClr val="5B6B8C"/>
                 </a:solidFill>
@@ -8399,7 +10600,7 @@
               </a:rPr>
               <a:t>4</a:t>
             </a:r>
-            <a:endParaRPr b="0" i="0" sz="900" u="none" cap="none" strike="noStrike">
+            <a:endParaRPr sz="900" b="0" i="0" u="none" strike="noStrike" cap="none">
               <a:solidFill>
                 <a:schemeClr val="dk1"/>
               </a:solidFill>
@@ -8420,18 +10621,19 @@
 </file>
 
 <file path=ppt/slides/slide5.xml><?xml version="1.0" encoding="utf-8"?>
-<p:sld xmlns:a="http://schemas.openxmlformats.org/drawingml/2006/main" xmlns:r="http://schemas.openxmlformats.org/officeDocument/2006/relationships" xmlns:mc="http://schemas.openxmlformats.org/markup-compatibility/2006" xmlns:mv="urn:schemas-microsoft-com:mac:vml" xmlns:p="http://schemas.openxmlformats.org/presentationml/2006/main" xmlns:c="http://schemas.openxmlformats.org/drawingml/2006/chart" xmlns:dgm="http://schemas.openxmlformats.org/drawingml/2006/diagram" xmlns:o="urn:schemas-microsoft-com:office:office" xmlns:v="urn:schemas-microsoft-com:vml" xmlns:pvml="urn:schemas-microsoft-com:office:powerpoint" xmlns:com="http://schemas.openxmlformats.org/drawingml/2006/compatibility" xmlns:p14="http://schemas.microsoft.com/office/powerpoint/2010/main" xmlns:p15="http://schemas.microsoft.com/office/powerpoint/2012/main" xmlns:ahyp="http://schemas.microsoft.com/office/drawing/2018/hyperlinkcolor">
+<p:sld xmlns:a="http://schemas.openxmlformats.org/drawingml/2006/main" xmlns:r="http://schemas.openxmlformats.org/officeDocument/2006/relationships" xmlns:p="http://schemas.openxmlformats.org/presentationml/2006/main">
   <p:cSld>
     <p:bg>
       <p:bgPr>
         <a:solidFill>
           <a:srgbClr val="16234A"/>
         </a:solidFill>
+        <a:effectLst/>
       </p:bgPr>
     </p:bg>
     <p:spTree>
       <p:nvGrpSpPr>
-        <p:cNvPr id="129" name="Shape 129"/>
+        <p:cNvPr id="1" name="Shape 129"/>
         <p:cNvGrpSpPr/>
         <p:nvPr/>
       </p:nvGrpSpPr>
@@ -8465,12 +10667,12 @@
           </a:ln>
         </p:spPr>
         <p:txBody>
-          <a:bodyPr anchorCtr="0" anchor="ctr" bIns="91425" lIns="91425" spcFirstLastPara="1" rIns="91425" wrap="square" tIns="91425">
+          <a:bodyPr spcFirstLastPara="1" wrap="square" lIns="91425" tIns="91425" rIns="91425" bIns="91425" anchor="ctr" anchorCtr="0">
             <a:noAutofit/>
           </a:bodyPr>
           <a:lstStyle/>
           <a:p>
-            <a:pPr indent="0" lvl="0" marL="0" rtl="0" algn="l">
+            <a:pPr marL="0" lvl="0" indent="0" algn="l" rtl="0">
               <a:spcBef>
                 <a:spcPts val="0"/>
               </a:spcBef>
@@ -8479,9 +10681,6 @@
               </a:spcAft>
               <a:buNone/>
             </a:pPr>
-            <a:r>
-              <a:t/>
-            </a:r>
             <a:endParaRPr/>
           </a:p>
         </p:txBody>
@@ -8508,12 +10707,12 @@
           </a:ln>
         </p:spPr>
         <p:txBody>
-          <a:bodyPr anchorCtr="0" anchor="ctr" bIns="91425" lIns="91425" spcFirstLastPara="1" rIns="91425" wrap="square" tIns="91425">
+          <a:bodyPr spcFirstLastPara="1" wrap="square" lIns="91425" tIns="91425" rIns="91425" bIns="91425" anchor="ctr" anchorCtr="0">
             <a:noAutofit/>
           </a:bodyPr>
           <a:lstStyle/>
           <a:p>
-            <a:pPr indent="0" lvl="0" marL="0" rtl="0" algn="l">
+            <a:pPr marL="0" lvl="0" indent="0" algn="l" rtl="0">
               <a:spcBef>
                 <a:spcPts val="0"/>
               </a:spcBef>
@@ -8522,16 +10721,13 @@
               </a:spcAft>
               <a:buNone/>
             </a:pPr>
-            <a:r>
-              <a:t/>
-            </a:r>
             <a:endParaRPr/>
           </a:p>
         </p:txBody>
       </p:sp>
       <p:pic>
         <p:nvPicPr>
-          <p:cNvPr descr="/home/claude/images/icon_award.png" id="132" name="Google Shape;132;p8"/>
+          <p:cNvPr id="132" name="Google Shape;132;p8" descr="/home/claude/images/icon_award.png"/>
           <p:cNvPicPr preferRelativeResize="0"/>
           <p:nvPr/>
         </p:nvPicPr>
@@ -8539,7 +10735,7 @@
           <a:blip r:embed="rId3">
             <a:alphaModFix/>
           </a:blip>
-          <a:srcRect b="0" l="0" r="0" t="0"/>
+          <a:srcRect/>
           <a:stretch/>
         </p:blipFill>
         <p:spPr>
@@ -8576,12 +10772,12 @@
           </a:ln>
         </p:spPr>
         <p:txBody>
-          <a:bodyPr anchorCtr="0" anchor="ctr" bIns="0" lIns="0" spcFirstLastPara="1" rIns="0" wrap="square" tIns="0">
+          <a:bodyPr spcFirstLastPara="1" wrap="square" lIns="0" tIns="0" rIns="0" bIns="0" anchor="ctr" anchorCtr="0">
             <a:noAutofit/>
           </a:bodyPr>
           <a:lstStyle/>
           <a:p>
-            <a:pPr indent="0" lvl="0" marL="0" marR="0" rtl="0" algn="l">
+            <a:pPr marL="0" marR="0" lvl="0" indent="0" algn="l" rtl="0">
               <a:spcBef>
                 <a:spcPts val="0"/>
               </a:spcBef>
@@ -8596,7 +10792,7 @@
               <a:buNone/>
             </a:pPr>
             <a:r>
-              <a:rPr b="1" i="0" lang="en-US" sz="2500" u="none" cap="none" strike="noStrike">
+              <a:rPr lang="en-US" sz="2500" b="1" i="0" u="none" strike="noStrike" cap="none">
                 <a:solidFill>
                   <a:srgbClr val="FFFFFF"/>
                 </a:solidFill>
@@ -8607,7 +10803,7 @@
               </a:rPr>
               <a:t>İş İçgörüleri &amp; Sonuç</a:t>
             </a:r>
-            <a:endParaRPr b="0" i="0" sz="2500" u="none" cap="none" strike="noStrike">
+            <a:endParaRPr sz="2500" b="0" i="0" u="none" strike="noStrike" cap="none">
               <a:solidFill>
                 <a:schemeClr val="dk1"/>
               </a:solidFill>
@@ -8632,7 +10828,7 @@
           </a:xfrm>
           <a:prstGeom prst="roundRect">
             <a:avLst>
-              <a:gd fmla="val 8421" name="adj"/>
+              <a:gd name="adj" fmla="val 8421"/>
             </a:avLst>
           </a:prstGeom>
           <a:solidFill>
@@ -8643,12 +10839,12 @@
           </a:ln>
         </p:spPr>
         <p:txBody>
-          <a:bodyPr anchorCtr="0" anchor="ctr" bIns="91425" lIns="91425" spcFirstLastPara="1" rIns="91425" wrap="square" tIns="91425">
+          <a:bodyPr spcFirstLastPara="1" wrap="square" lIns="91425" tIns="91425" rIns="91425" bIns="91425" anchor="ctr" anchorCtr="0">
             <a:noAutofit/>
           </a:bodyPr>
           <a:lstStyle/>
           <a:p>
-            <a:pPr indent="0" lvl="0" marL="0" rtl="0" algn="l">
+            <a:pPr marL="0" lvl="0" indent="0" algn="l" rtl="0">
               <a:spcBef>
                 <a:spcPts val="0"/>
               </a:spcBef>
@@ -8657,9 +10853,6 @@
               </a:spcAft>
               <a:buNone/>
             </a:pPr>
-            <a:r>
-              <a:t/>
-            </a:r>
             <a:endParaRPr/>
           </a:p>
         </p:txBody>
@@ -8686,12 +10879,12 @@
           </a:ln>
         </p:spPr>
         <p:txBody>
-          <a:bodyPr anchorCtr="0" anchor="ctr" bIns="91425" lIns="91425" spcFirstLastPara="1" rIns="91425" wrap="square" tIns="91425">
+          <a:bodyPr spcFirstLastPara="1" wrap="square" lIns="91425" tIns="91425" rIns="91425" bIns="91425" anchor="ctr" anchorCtr="0">
             <a:noAutofit/>
           </a:bodyPr>
           <a:lstStyle/>
           <a:p>
-            <a:pPr indent="0" lvl="0" marL="0" rtl="0" algn="l">
+            <a:pPr marL="0" lvl="0" indent="0" algn="l" rtl="0">
               <a:spcBef>
                 <a:spcPts val="0"/>
               </a:spcBef>
@@ -8700,16 +10893,13 @@
               </a:spcAft>
               <a:buNone/>
             </a:pPr>
-            <a:r>
-              <a:t/>
-            </a:r>
             <a:endParaRPr/>
           </a:p>
         </p:txBody>
       </p:sp>
       <p:pic>
         <p:nvPicPr>
-          <p:cNvPr descr="/home/claude/images/icon_zap.png" id="136" name="Google Shape;136;p8"/>
+          <p:cNvPr id="136" name="Google Shape;136;p8" descr="/home/claude/images/icon_zap.png"/>
           <p:cNvPicPr preferRelativeResize="0"/>
           <p:nvPr/>
         </p:nvPicPr>
@@ -8717,7 +10907,7 @@
           <a:blip r:embed="rId4">
             <a:alphaModFix/>
           </a:blip>
-          <a:srcRect b="0" l="0" r="0" t="0"/>
+          <a:srcRect/>
           <a:stretch/>
         </p:blipFill>
         <p:spPr>
@@ -8754,12 +10944,12 @@
           </a:ln>
         </p:spPr>
         <p:txBody>
-          <a:bodyPr anchorCtr="0" anchor="t" bIns="0" lIns="0" spcFirstLastPara="1" rIns="0" wrap="square" tIns="0">
+          <a:bodyPr spcFirstLastPara="1" wrap="square" lIns="0" tIns="0" rIns="0" bIns="0" anchor="t" anchorCtr="0">
             <a:noAutofit/>
           </a:bodyPr>
           <a:lstStyle/>
           <a:p>
-            <a:pPr indent="0" lvl="0" marL="0" marR="0" rtl="0" algn="l">
+            <a:pPr marL="0" marR="0" lvl="0" indent="0" algn="l" rtl="0">
               <a:spcBef>
                 <a:spcPts val="0"/>
               </a:spcBef>
@@ -8774,7 +10964,7 @@
               <a:buNone/>
             </a:pPr>
             <a:r>
-              <a:rPr b="1" i="0" lang="en-US" sz="1350" u="none" cap="none" strike="noStrike">
+              <a:rPr lang="en-US" sz="1350" b="1" i="0" u="none" strike="noStrike" cap="none">
                 <a:solidFill>
                   <a:srgbClr val="FFFFFF"/>
                 </a:solidFill>
@@ -8785,7 +10975,7 @@
               </a:rPr>
               <a:t>Menzilin En Güçlü Belirleyicisi: Batarya Kapasitesi</a:t>
             </a:r>
-            <a:endParaRPr b="0" i="0" sz="1350" u="none" cap="none" strike="noStrike">
+            <a:endParaRPr sz="1350" b="0" i="0" u="none" strike="noStrike" cap="none">
               <a:solidFill>
                 <a:schemeClr val="dk1"/>
               </a:solidFill>
@@ -8817,12 +11007,12 @@
           </a:ln>
         </p:spPr>
         <p:txBody>
-          <a:bodyPr anchorCtr="0" anchor="t" bIns="0" lIns="0" spcFirstLastPara="1" rIns="0" wrap="square" tIns="0">
+          <a:bodyPr spcFirstLastPara="1" wrap="square" lIns="0" tIns="0" rIns="0" bIns="0" anchor="t" anchorCtr="0">
             <a:noAutofit/>
           </a:bodyPr>
           <a:lstStyle/>
           <a:p>
-            <a:pPr indent="0" lvl="0" marL="0" marR="0" rtl="0" algn="l">
+            <a:pPr marL="0" marR="0" lvl="0" indent="0" algn="l" rtl="0">
               <a:lnSpc>
                 <a:spcPct val="105000"/>
               </a:lnSpc>
@@ -8840,7 +11030,7 @@
               <a:buNone/>
             </a:pPr>
             <a:r>
-              <a:rPr b="0" i="0" lang="en-US" sz="1080" u="none" cap="none" strike="noStrike">
+              <a:rPr lang="en-US" sz="1080" b="0" i="0" u="none" strike="noStrike" cap="none">
                 <a:solidFill>
                   <a:srgbClr val="AFC3E8"/>
                 </a:solidFill>
@@ -8851,7 +11041,7 @@
               </a:rPr>
               <a:t>Çok güçlü bir ilişki (r = 0,978) — daha büyük batarya paketleri belirgin şekilde daha fazla menzil sağlar.</a:t>
             </a:r>
-            <a:endParaRPr b="0" i="0" sz="1080" u="none" cap="none" strike="noStrike">
+            <a:endParaRPr sz="1080" b="0" i="0" u="none" strike="noStrike" cap="none">
               <a:solidFill>
                 <a:schemeClr val="dk1"/>
               </a:solidFill>
@@ -8876,7 +11066,7 @@
           </a:xfrm>
           <a:prstGeom prst="roundRect">
             <a:avLst>
-              <a:gd fmla="val 8421" name="adj"/>
+              <a:gd name="adj" fmla="val 8421"/>
             </a:avLst>
           </a:prstGeom>
           <a:solidFill>
@@ -8887,12 +11077,12 @@
           </a:ln>
         </p:spPr>
         <p:txBody>
-          <a:bodyPr anchorCtr="0" anchor="ctr" bIns="91425" lIns="91425" spcFirstLastPara="1" rIns="91425" wrap="square" tIns="91425">
+          <a:bodyPr spcFirstLastPara="1" wrap="square" lIns="91425" tIns="91425" rIns="91425" bIns="91425" anchor="ctr" anchorCtr="0">
             <a:noAutofit/>
           </a:bodyPr>
           <a:lstStyle/>
           <a:p>
-            <a:pPr indent="0" lvl="0" marL="0" rtl="0" algn="l">
+            <a:pPr marL="0" lvl="0" indent="0" algn="l" rtl="0">
               <a:spcBef>
                 <a:spcPts val="0"/>
               </a:spcBef>
@@ -8901,9 +11091,6 @@
               </a:spcAft>
               <a:buNone/>
             </a:pPr>
-            <a:r>
-              <a:t/>
-            </a:r>
             <a:endParaRPr/>
           </a:p>
         </p:txBody>
@@ -8930,12 +11117,12 @@
           </a:ln>
         </p:spPr>
         <p:txBody>
-          <a:bodyPr anchorCtr="0" anchor="ctr" bIns="91425" lIns="91425" spcFirstLastPara="1" rIns="91425" wrap="square" tIns="91425">
+          <a:bodyPr spcFirstLastPara="1" wrap="square" lIns="91425" tIns="91425" rIns="91425" bIns="91425" anchor="ctr" anchorCtr="0">
             <a:noAutofit/>
           </a:bodyPr>
           <a:lstStyle/>
           <a:p>
-            <a:pPr indent="0" lvl="0" marL="0" rtl="0" algn="l">
+            <a:pPr marL="0" lvl="0" indent="0" algn="l" rtl="0">
               <a:spcBef>
                 <a:spcPts val="0"/>
               </a:spcBef>
@@ -8944,16 +11131,13 @@
               </a:spcAft>
               <a:buNone/>
             </a:pPr>
-            <a:r>
-              <a:t/>
-            </a:r>
             <a:endParaRPr/>
           </a:p>
         </p:txBody>
       </p:sp>
       <p:pic>
         <p:nvPicPr>
-          <p:cNvPr descr="/home/claude/images/icon_dollar.png" id="141" name="Google Shape;141;p8"/>
+          <p:cNvPr id="141" name="Google Shape;141;p8" descr="/home/claude/images/icon_dollar.png"/>
           <p:cNvPicPr preferRelativeResize="0"/>
           <p:nvPr/>
         </p:nvPicPr>
@@ -8961,7 +11145,7 @@
           <a:blip r:embed="rId5">
             <a:alphaModFix/>
           </a:blip>
-          <a:srcRect b="0" l="0" r="0" t="0"/>
+          <a:srcRect/>
           <a:stretch/>
         </p:blipFill>
         <p:spPr>
@@ -8998,12 +11182,12 @@
           </a:ln>
         </p:spPr>
         <p:txBody>
-          <a:bodyPr anchorCtr="0" anchor="t" bIns="0" lIns="0" spcFirstLastPara="1" rIns="0" wrap="square" tIns="0">
+          <a:bodyPr spcFirstLastPara="1" wrap="square" lIns="0" tIns="0" rIns="0" bIns="0" anchor="t" anchorCtr="0">
             <a:noAutofit/>
           </a:bodyPr>
           <a:lstStyle/>
           <a:p>
-            <a:pPr indent="0" lvl="0" marL="0" marR="0" rtl="0" algn="l">
+            <a:pPr marL="0" marR="0" lvl="0" indent="0" algn="l" rtl="0">
               <a:spcBef>
                 <a:spcPts val="0"/>
               </a:spcBef>
@@ -9018,7 +11202,7 @@
               <a:buNone/>
             </a:pPr>
             <a:r>
-              <a:rPr b="1" i="0" lang="en-US" sz="1350" u="none" cap="none" strike="noStrike">
+              <a:rPr lang="en-US" sz="1350" b="1" i="0" u="none" strike="noStrike" cap="none">
                 <a:solidFill>
                   <a:srgbClr val="FFFFFF"/>
                 </a:solidFill>
@@ -9029,7 +11213,7 @@
               </a:rPr>
               <a:t>Fiyatı Bataryadan Daha Çok Motor Gücü Belirliyor</a:t>
             </a:r>
-            <a:endParaRPr b="0" i="0" sz="1350" u="none" cap="none" strike="noStrike">
+            <a:endParaRPr sz="1350" b="0" i="0" u="none" strike="noStrike" cap="none">
               <a:solidFill>
                 <a:schemeClr val="dk1"/>
               </a:solidFill>
@@ -9061,12 +11245,12 @@
           </a:ln>
         </p:spPr>
         <p:txBody>
-          <a:bodyPr anchorCtr="0" anchor="t" bIns="0" lIns="0" spcFirstLastPara="1" rIns="0" wrap="square" tIns="0">
+          <a:bodyPr spcFirstLastPara="1" wrap="square" lIns="0" tIns="0" rIns="0" bIns="0" anchor="t" anchorCtr="0">
             <a:noAutofit/>
           </a:bodyPr>
           <a:lstStyle/>
           <a:p>
-            <a:pPr indent="0" lvl="0" marL="0" marR="0" rtl="0" algn="l">
+            <a:pPr marL="0" marR="0" lvl="0" indent="0" algn="l" rtl="0">
               <a:lnSpc>
                 <a:spcPct val="105000"/>
               </a:lnSpc>
@@ -9084,7 +11268,7 @@
               <a:buNone/>
             </a:pPr>
             <a:r>
-              <a:rPr b="0" i="0" lang="en-US" sz="1080" u="none" cap="none" strike="noStrike">
+              <a:rPr lang="en-US" sz="1080" b="0" i="0" u="none" strike="noStrike" cap="none" dirty="0" err="1">
                 <a:solidFill>
                   <a:srgbClr val="AFC3E8"/>
                 </a:solidFill>
@@ -9093,9 +11277,237 @@
                 <a:cs typeface="Calibri"/>
                 <a:sym typeface="Calibri"/>
               </a:rPr>
-              <a:t>Fiyat ↔ güç ilişkisi (r = 0,765), fiyat ↔ batarya kapasitesi ilişkisinden (r = 0,164) çok daha güçlü.</a:t>
-            </a:r>
-            <a:endParaRPr b="0" i="0" sz="1080" u="none" cap="none" strike="noStrike">
+              <a:t>Fiyat</a:t>
+            </a:r>
+            <a:r>
+              <a:rPr lang="en-US" sz="1080" b="0" i="0" u="none" strike="noStrike" cap="none" dirty="0">
+                <a:solidFill>
+                  <a:srgbClr val="AFC3E8"/>
+                </a:solidFill>
+                <a:latin typeface="Calibri"/>
+                <a:ea typeface="Calibri"/>
+                <a:cs typeface="Calibri"/>
+                <a:sym typeface="Calibri"/>
+              </a:rPr>
+              <a:t> ↔ </a:t>
+            </a:r>
+            <a:r>
+              <a:rPr lang="en-US" sz="1080" b="0" i="0" u="none" strike="noStrike" cap="none" dirty="0" err="1">
+                <a:solidFill>
+                  <a:srgbClr val="AFC3E8"/>
+                </a:solidFill>
+                <a:latin typeface="Calibri"/>
+                <a:ea typeface="Calibri"/>
+                <a:cs typeface="Calibri"/>
+                <a:sym typeface="Calibri"/>
+              </a:rPr>
+              <a:t>güç</a:t>
+            </a:r>
+            <a:r>
+              <a:rPr lang="en-US" sz="1080" b="0" i="0" u="none" strike="noStrike" cap="none" dirty="0">
+                <a:solidFill>
+                  <a:srgbClr val="AFC3E8"/>
+                </a:solidFill>
+                <a:latin typeface="Calibri"/>
+                <a:ea typeface="Calibri"/>
+                <a:cs typeface="Calibri"/>
+                <a:sym typeface="Calibri"/>
+              </a:rPr>
+              <a:t> </a:t>
+            </a:r>
+            <a:r>
+              <a:rPr lang="en-US" sz="1080" b="0" i="0" u="none" strike="noStrike" cap="none" dirty="0" err="1">
+                <a:solidFill>
+                  <a:srgbClr val="AFC3E8"/>
+                </a:solidFill>
+                <a:latin typeface="Calibri"/>
+                <a:ea typeface="Calibri"/>
+                <a:cs typeface="Calibri"/>
+                <a:sym typeface="Calibri"/>
+              </a:rPr>
+              <a:t>ilişkisi</a:t>
+            </a:r>
+            <a:r>
+              <a:rPr lang="en-US" sz="1080" b="0" i="0" u="none" strike="noStrike" cap="none" dirty="0">
+                <a:solidFill>
+                  <a:srgbClr val="AFC3E8"/>
+                </a:solidFill>
+                <a:latin typeface="Calibri"/>
+                <a:ea typeface="Calibri"/>
+                <a:cs typeface="Calibri"/>
+                <a:sym typeface="Calibri"/>
+              </a:rPr>
+              <a:t> (r = 0,765), </a:t>
+            </a:r>
+            <a:r>
+              <a:rPr lang="en-US" sz="1080" b="0" i="0" u="none" strike="noStrike" cap="none" dirty="0" err="1">
+                <a:solidFill>
+                  <a:srgbClr val="AFC3E8"/>
+                </a:solidFill>
+                <a:latin typeface="Calibri"/>
+                <a:ea typeface="Calibri"/>
+                <a:cs typeface="Calibri"/>
+                <a:sym typeface="Calibri"/>
+              </a:rPr>
+              <a:t>fiyat</a:t>
+            </a:r>
+            <a:r>
+              <a:rPr lang="en-US" sz="1080" b="0" i="0" u="none" strike="noStrike" cap="none" dirty="0">
+                <a:solidFill>
+                  <a:srgbClr val="AFC3E8"/>
+                </a:solidFill>
+                <a:latin typeface="Calibri"/>
+                <a:ea typeface="Calibri"/>
+                <a:cs typeface="Calibri"/>
+                <a:sym typeface="Calibri"/>
+              </a:rPr>
+              <a:t> ↔ </a:t>
+            </a:r>
+            <a:r>
+              <a:rPr lang="en-US" sz="1080" b="0" i="0" u="none" strike="noStrike" cap="none" dirty="0" err="1">
+                <a:solidFill>
+                  <a:srgbClr val="AFC3E8"/>
+                </a:solidFill>
+                <a:latin typeface="Calibri"/>
+                <a:ea typeface="Calibri"/>
+                <a:cs typeface="Calibri"/>
+                <a:sym typeface="Calibri"/>
+              </a:rPr>
+              <a:t>batarya</a:t>
+            </a:r>
+            <a:r>
+              <a:rPr lang="en-US" sz="1080" b="0" i="0" u="none" strike="noStrike" cap="none" dirty="0">
+                <a:solidFill>
+                  <a:srgbClr val="AFC3E8"/>
+                </a:solidFill>
+                <a:latin typeface="Calibri"/>
+                <a:ea typeface="Calibri"/>
+                <a:cs typeface="Calibri"/>
+                <a:sym typeface="Calibri"/>
+              </a:rPr>
+              <a:t> </a:t>
+            </a:r>
+            <a:r>
+              <a:rPr lang="en-US" sz="1080" b="0" i="0" u="none" strike="noStrike" cap="none" dirty="0" err="1">
+                <a:solidFill>
+                  <a:srgbClr val="AFC3E8"/>
+                </a:solidFill>
+                <a:latin typeface="Calibri"/>
+                <a:ea typeface="Calibri"/>
+                <a:cs typeface="Calibri"/>
+                <a:sym typeface="Calibri"/>
+              </a:rPr>
+              <a:t>kapasitesi</a:t>
+            </a:r>
+            <a:r>
+              <a:rPr lang="en-US" sz="1080" b="0" i="0" u="none" strike="noStrike" cap="none" dirty="0">
+                <a:solidFill>
+                  <a:srgbClr val="AFC3E8"/>
+                </a:solidFill>
+                <a:latin typeface="Calibri"/>
+                <a:ea typeface="Calibri"/>
+                <a:cs typeface="Calibri"/>
+                <a:sym typeface="Calibri"/>
+              </a:rPr>
+              <a:t> </a:t>
+            </a:r>
+            <a:r>
+              <a:rPr lang="en-US" sz="1080" b="0" i="0" u="none" strike="noStrike" cap="none" dirty="0" err="1">
+                <a:solidFill>
+                  <a:srgbClr val="AFC3E8"/>
+                </a:solidFill>
+                <a:latin typeface="Calibri"/>
+                <a:ea typeface="Calibri"/>
+                <a:cs typeface="Calibri"/>
+                <a:sym typeface="Calibri"/>
+              </a:rPr>
+              <a:t>ilişkisinden</a:t>
+            </a:r>
+            <a:r>
+              <a:rPr lang="en-US" sz="1080" b="0" i="0" u="none" strike="noStrike" cap="none" dirty="0">
+                <a:solidFill>
+                  <a:srgbClr val="AFC3E8"/>
+                </a:solidFill>
+                <a:latin typeface="Calibri"/>
+                <a:ea typeface="Calibri"/>
+                <a:cs typeface="Calibri"/>
+                <a:sym typeface="Calibri"/>
+              </a:rPr>
+              <a:t> (r = 0,164) </a:t>
+            </a:r>
+            <a:r>
+              <a:rPr lang="en-US" sz="1080" b="0" i="0" u="none" strike="noStrike" cap="none" dirty="0" err="1">
+                <a:solidFill>
+                  <a:srgbClr val="AFC3E8"/>
+                </a:solidFill>
+                <a:latin typeface="Calibri"/>
+                <a:ea typeface="Calibri"/>
+                <a:cs typeface="Calibri"/>
+                <a:sym typeface="Calibri"/>
+              </a:rPr>
+              <a:t>çok</a:t>
+            </a:r>
+            <a:r>
+              <a:rPr lang="en-US" sz="1080" b="0" i="0" u="none" strike="noStrike" cap="none" dirty="0">
+                <a:solidFill>
+                  <a:srgbClr val="AFC3E8"/>
+                </a:solidFill>
+                <a:latin typeface="Calibri"/>
+                <a:ea typeface="Calibri"/>
+                <a:cs typeface="Calibri"/>
+                <a:sym typeface="Calibri"/>
+              </a:rPr>
+              <a:t> </a:t>
+            </a:r>
+            <a:r>
+              <a:rPr lang="en-US" sz="1080" b="0" i="0" u="none" strike="noStrike" cap="none" dirty="0" err="1">
+                <a:solidFill>
+                  <a:srgbClr val="AFC3E8"/>
+                </a:solidFill>
+                <a:latin typeface="Calibri"/>
+                <a:ea typeface="Calibri"/>
+                <a:cs typeface="Calibri"/>
+                <a:sym typeface="Calibri"/>
+              </a:rPr>
+              <a:t>daha</a:t>
+            </a:r>
+            <a:r>
+              <a:rPr lang="en-US" sz="1080" b="0" i="0" u="none" strike="noStrike" cap="none" dirty="0">
+                <a:solidFill>
+                  <a:srgbClr val="AFC3E8"/>
+                </a:solidFill>
+                <a:latin typeface="Calibri"/>
+                <a:ea typeface="Calibri"/>
+                <a:cs typeface="Calibri"/>
+                <a:sym typeface="Calibri"/>
+              </a:rPr>
+              <a:t> </a:t>
+            </a:r>
+            <a:r>
+              <a:rPr lang="en-US" sz="1080" b="0" i="0" u="none" strike="noStrike" cap="none" dirty="0" err="1">
+                <a:solidFill>
+                  <a:srgbClr val="AFC3E8"/>
+                </a:solidFill>
+                <a:latin typeface="Calibri"/>
+                <a:ea typeface="Calibri"/>
+                <a:cs typeface="Calibri"/>
+                <a:sym typeface="Calibri"/>
+              </a:rPr>
+              <a:t>güçlü</a:t>
+            </a:r>
+            <a:r>
+              <a:rPr lang="en-US" sz="1080" b="0" i="0" u="none" strike="noStrike" cap="none" dirty="0">
+                <a:solidFill>
+                  <a:srgbClr val="AFC3E8"/>
+                </a:solidFill>
+                <a:latin typeface="Calibri"/>
+                <a:ea typeface="Calibri"/>
+                <a:cs typeface="Calibri"/>
+                <a:sym typeface="Calibri"/>
+              </a:rPr>
+              <a:t>.</a:t>
+            </a:r>
+            <a:endParaRPr sz="1080" b="0" i="0" u="none" strike="noStrike" cap="none" dirty="0">
               <a:solidFill>
                 <a:schemeClr val="dk1"/>
               </a:solidFill>
@@ -9120,7 +11532,7 @@
           </a:xfrm>
           <a:prstGeom prst="roundRect">
             <a:avLst>
-              <a:gd fmla="val 8421" name="adj"/>
+              <a:gd name="adj" fmla="val 8421"/>
             </a:avLst>
           </a:prstGeom>
           <a:solidFill>
@@ -9131,12 +11543,12 @@
           </a:ln>
         </p:spPr>
         <p:txBody>
-          <a:bodyPr anchorCtr="0" anchor="ctr" bIns="91425" lIns="91425" spcFirstLastPara="1" rIns="91425" wrap="square" tIns="91425">
+          <a:bodyPr spcFirstLastPara="1" wrap="square" lIns="91425" tIns="91425" rIns="91425" bIns="91425" anchor="ctr" anchorCtr="0">
             <a:noAutofit/>
           </a:bodyPr>
           <a:lstStyle/>
           <a:p>
-            <a:pPr indent="0" lvl="0" marL="0" rtl="0" algn="l">
+            <a:pPr marL="0" lvl="0" indent="0" algn="l" rtl="0">
               <a:spcBef>
                 <a:spcPts val="0"/>
               </a:spcBef>
@@ -9145,9 +11557,6 @@
               </a:spcAft>
               <a:buNone/>
             </a:pPr>
-            <a:r>
-              <a:t/>
-            </a:r>
             <a:endParaRPr/>
           </a:p>
         </p:txBody>
@@ -9174,12 +11583,12 @@
           </a:ln>
         </p:spPr>
         <p:txBody>
-          <a:bodyPr anchorCtr="0" anchor="ctr" bIns="91425" lIns="91425" spcFirstLastPara="1" rIns="91425" wrap="square" tIns="91425">
+          <a:bodyPr spcFirstLastPara="1" wrap="square" lIns="91425" tIns="91425" rIns="91425" bIns="91425" anchor="ctr" anchorCtr="0">
             <a:noAutofit/>
           </a:bodyPr>
           <a:lstStyle/>
           <a:p>
-            <a:pPr indent="0" lvl="0" marL="0" rtl="0" algn="l">
+            <a:pPr marL="0" lvl="0" indent="0" algn="l" rtl="0">
               <a:spcBef>
                 <a:spcPts val="0"/>
               </a:spcBef>
@@ -9188,16 +11597,13 @@
               </a:spcAft>
               <a:buNone/>
             </a:pPr>
-            <a:r>
-              <a:t/>
-            </a:r>
             <a:endParaRPr/>
           </a:p>
         </p:txBody>
       </p:sp>
       <p:pic>
         <p:nvPicPr>
-          <p:cNvPr descr="/home/claude/images/icon_trending.png" id="146" name="Google Shape;146;p8"/>
+          <p:cNvPr id="146" name="Google Shape;146;p8" descr="/home/claude/images/icon_trending.png"/>
           <p:cNvPicPr preferRelativeResize="0"/>
           <p:nvPr/>
         </p:nvPicPr>
@@ -9205,7 +11611,7 @@
           <a:blip r:embed="rId6">
             <a:alphaModFix/>
           </a:blip>
-          <a:srcRect b="0" l="0" r="0" t="0"/>
+          <a:srcRect/>
           <a:stretch/>
         </p:blipFill>
         <p:spPr>
@@ -9242,12 +11648,12 @@
           </a:ln>
         </p:spPr>
         <p:txBody>
-          <a:bodyPr anchorCtr="0" anchor="t" bIns="0" lIns="0" spcFirstLastPara="1" rIns="0" wrap="square" tIns="0">
+          <a:bodyPr spcFirstLastPara="1" wrap="square" lIns="0" tIns="0" rIns="0" bIns="0" anchor="t" anchorCtr="0">
             <a:noAutofit/>
           </a:bodyPr>
           <a:lstStyle/>
           <a:p>
-            <a:pPr indent="0" lvl="0" marL="0" marR="0" rtl="0" algn="l">
+            <a:pPr marL="0" marR="0" lvl="0" indent="0" algn="l" rtl="0">
               <a:spcBef>
                 <a:spcPts val="0"/>
               </a:spcBef>
@@ -9262,7 +11668,7 @@
               <a:buNone/>
             </a:pPr>
             <a:r>
-              <a:rPr b="1" i="0" lang="en-US" sz="1350" u="none" cap="none" strike="noStrike">
+              <a:rPr lang="en-US" sz="1350" b="1" i="0" u="none" strike="noStrike" cap="none">
                 <a:solidFill>
                   <a:srgbClr val="FFFFFF"/>
                 </a:solidFill>
@@ -9273,7 +11679,7 @@
               </a:rPr>
               <a:t>Yüksek Fiyat Otomatik Olarak Yüksek Satış Anlamına Gelmiyor</a:t>
             </a:r>
-            <a:endParaRPr b="0" i="0" sz="1350" u="none" cap="none" strike="noStrike">
+            <a:endParaRPr sz="1350" b="0" i="0" u="none" strike="noStrike" cap="none">
               <a:solidFill>
                 <a:schemeClr val="dk1"/>
               </a:solidFill>
@@ -9305,12 +11711,12 @@
           </a:ln>
         </p:spPr>
         <p:txBody>
-          <a:bodyPr anchorCtr="0" anchor="t" bIns="0" lIns="0" spcFirstLastPara="1" rIns="0" wrap="square" tIns="0">
+          <a:bodyPr spcFirstLastPara="1" wrap="square" lIns="0" tIns="0" rIns="0" bIns="0" anchor="t" anchorCtr="0">
             <a:noAutofit/>
           </a:bodyPr>
           <a:lstStyle/>
           <a:p>
-            <a:pPr indent="0" lvl="0" marL="0" marR="0" rtl="0" algn="l">
+            <a:pPr marL="0" marR="0" lvl="0" indent="0" algn="l" rtl="0">
               <a:lnSpc>
                 <a:spcPct val="105000"/>
               </a:lnSpc>
@@ -9328,7 +11734,7 @@
               <a:buNone/>
             </a:pPr>
             <a:r>
-              <a:rPr b="0" i="0" lang="en-US" sz="1080" u="none" cap="none" strike="noStrike">
+              <a:rPr lang="en-US" sz="1080" b="0" i="0" u="none" strike="noStrike" cap="none" dirty="0">
                 <a:solidFill>
                   <a:srgbClr val="AFC3E8"/>
                 </a:solidFill>
@@ -9337,9 +11743,153 @@
                 <a:cs typeface="Calibri"/>
                 <a:sym typeface="Calibri"/>
               </a:rPr>
-              <a:t>Lucid fiyatta önde, ama satışta VW, Tesla ve Budget segmenti önde.</a:t>
-            </a:r>
-            <a:endParaRPr b="0" i="0" sz="1080" u="none" cap="none" strike="noStrike">
+              <a:t>Lucid </a:t>
+            </a:r>
+            <a:r>
+              <a:rPr lang="en-US" sz="1080" b="0" i="0" u="none" strike="noStrike" cap="none" dirty="0" err="1">
+                <a:solidFill>
+                  <a:srgbClr val="AFC3E8"/>
+                </a:solidFill>
+                <a:latin typeface="Calibri"/>
+                <a:ea typeface="Calibri"/>
+                <a:cs typeface="Calibri"/>
+                <a:sym typeface="Calibri"/>
+              </a:rPr>
+              <a:t>fiyatta</a:t>
+            </a:r>
+            <a:r>
+              <a:rPr lang="en-US" sz="1080" b="0" i="0" u="none" strike="noStrike" cap="none" dirty="0">
+                <a:solidFill>
+                  <a:srgbClr val="AFC3E8"/>
+                </a:solidFill>
+                <a:latin typeface="Calibri"/>
+                <a:ea typeface="Calibri"/>
+                <a:cs typeface="Calibri"/>
+                <a:sym typeface="Calibri"/>
+              </a:rPr>
+              <a:t> </a:t>
+            </a:r>
+            <a:r>
+              <a:rPr lang="en-US" sz="1080" b="0" i="0" u="none" strike="noStrike" cap="none" dirty="0" err="1">
+                <a:solidFill>
+                  <a:srgbClr val="AFC3E8"/>
+                </a:solidFill>
+                <a:latin typeface="Calibri"/>
+                <a:ea typeface="Calibri"/>
+                <a:cs typeface="Calibri"/>
+                <a:sym typeface="Calibri"/>
+              </a:rPr>
+              <a:t>önde</a:t>
+            </a:r>
+            <a:r>
+              <a:rPr lang="en-US" sz="1080" b="0" i="0" u="none" strike="noStrike" cap="none" dirty="0">
+                <a:solidFill>
+                  <a:srgbClr val="AFC3E8"/>
+                </a:solidFill>
+                <a:latin typeface="Calibri"/>
+                <a:ea typeface="Calibri"/>
+                <a:cs typeface="Calibri"/>
+                <a:sym typeface="Calibri"/>
+              </a:rPr>
+              <a:t>, ama </a:t>
+            </a:r>
+            <a:r>
+              <a:rPr lang="en-US" sz="1080" b="0" i="0" u="none" strike="noStrike" cap="none" dirty="0" err="1">
+                <a:solidFill>
+                  <a:srgbClr val="AFC3E8"/>
+                </a:solidFill>
+                <a:latin typeface="Calibri"/>
+                <a:ea typeface="Calibri"/>
+                <a:cs typeface="Calibri"/>
+                <a:sym typeface="Calibri"/>
+              </a:rPr>
+              <a:t>satışta</a:t>
+            </a:r>
+            <a:r>
+              <a:rPr lang="en-US" sz="1080" b="0" i="0" u="none" strike="noStrike" cap="none" dirty="0">
+                <a:solidFill>
+                  <a:srgbClr val="AFC3E8"/>
+                </a:solidFill>
+                <a:latin typeface="Calibri"/>
+                <a:ea typeface="Calibri"/>
+                <a:cs typeface="Calibri"/>
+                <a:sym typeface="Calibri"/>
+              </a:rPr>
+              <a:t> VW, Tesla </a:t>
+            </a:r>
+            <a:r>
+              <a:rPr lang="en-US" sz="1080" b="0" i="0" u="none" strike="noStrike" cap="none" dirty="0" err="1">
+                <a:solidFill>
+                  <a:srgbClr val="AFC3E8"/>
+                </a:solidFill>
+                <a:latin typeface="Calibri"/>
+                <a:ea typeface="Calibri"/>
+                <a:cs typeface="Calibri"/>
+                <a:sym typeface="Calibri"/>
+              </a:rPr>
+              <a:t>ve</a:t>
+            </a:r>
+            <a:r>
+              <a:rPr lang="en-US" sz="1080" b="0" i="0" u="none" strike="noStrike" cap="none" dirty="0">
+                <a:solidFill>
+                  <a:srgbClr val="AFC3E8"/>
+                </a:solidFill>
+                <a:latin typeface="Calibri"/>
+                <a:ea typeface="Calibri"/>
+                <a:cs typeface="Calibri"/>
+                <a:sym typeface="Calibri"/>
+              </a:rPr>
+              <a:t> budget </a:t>
+            </a:r>
+            <a:r>
+              <a:rPr lang="en-US" sz="1080" b="0" i="0" u="none" strike="noStrike" cap="none" dirty="0" err="1">
+                <a:solidFill>
+                  <a:srgbClr val="AFC3E8"/>
+                </a:solidFill>
+                <a:latin typeface="Calibri"/>
+                <a:ea typeface="Calibri"/>
+                <a:cs typeface="Calibri"/>
+                <a:sym typeface="Calibri"/>
+              </a:rPr>
+              <a:t>segmenti</a:t>
+            </a:r>
+            <a:r>
+              <a:rPr lang="en-US" sz="1080" b="0" i="0" u="none" strike="noStrike" cap="none" dirty="0">
+                <a:solidFill>
+                  <a:srgbClr val="AFC3E8"/>
+                </a:solidFill>
+                <a:latin typeface="Calibri"/>
+                <a:ea typeface="Calibri"/>
+                <a:cs typeface="Calibri"/>
+                <a:sym typeface="Calibri"/>
+              </a:rPr>
+              <a:t> </a:t>
+            </a:r>
+            <a:r>
+              <a:rPr lang="en-US" sz="1080" b="0" i="0" u="none" strike="noStrike" cap="none" dirty="0" err="1">
+                <a:solidFill>
+                  <a:srgbClr val="AFC3E8"/>
+                </a:solidFill>
+                <a:latin typeface="Calibri"/>
+                <a:ea typeface="Calibri"/>
+                <a:cs typeface="Calibri"/>
+                <a:sym typeface="Calibri"/>
+              </a:rPr>
+              <a:t>önde</a:t>
+            </a:r>
+            <a:r>
+              <a:rPr lang="en-US" sz="1080" b="0" i="0" u="none" strike="noStrike" cap="none" dirty="0">
+                <a:solidFill>
+                  <a:srgbClr val="AFC3E8"/>
+                </a:solidFill>
+                <a:latin typeface="Calibri"/>
+                <a:ea typeface="Calibri"/>
+                <a:cs typeface="Calibri"/>
+                <a:sym typeface="Calibri"/>
+              </a:rPr>
+              <a:t>.</a:t>
+            </a:r>
+            <a:endParaRPr sz="1080" b="0" i="0" u="none" strike="noStrike" cap="none" dirty="0">
               <a:solidFill>
                 <a:schemeClr val="dk1"/>
               </a:solidFill>
@@ -9364,7 +11914,7 @@
           </a:xfrm>
           <a:prstGeom prst="roundRect">
             <a:avLst>
-              <a:gd fmla="val 8421" name="adj"/>
+              <a:gd name="adj" fmla="val 8421"/>
             </a:avLst>
           </a:prstGeom>
           <a:solidFill>
@@ -9375,12 +11925,12 @@
           </a:ln>
         </p:spPr>
         <p:txBody>
-          <a:bodyPr anchorCtr="0" anchor="ctr" bIns="91425" lIns="91425" spcFirstLastPara="1" rIns="91425" wrap="square" tIns="91425">
+          <a:bodyPr spcFirstLastPara="1" wrap="square" lIns="91425" tIns="91425" rIns="91425" bIns="91425" anchor="ctr" anchorCtr="0">
             <a:noAutofit/>
           </a:bodyPr>
           <a:lstStyle/>
           <a:p>
-            <a:pPr indent="0" lvl="0" marL="0" rtl="0" algn="l">
+            <a:pPr marL="0" lvl="0" indent="0" algn="l" rtl="0">
               <a:spcBef>
                 <a:spcPts val="0"/>
               </a:spcBef>
@@ -9389,9 +11939,6 @@
               </a:spcAft>
               <a:buNone/>
             </a:pPr>
-            <a:r>
-              <a:t/>
-            </a:r>
             <a:endParaRPr/>
           </a:p>
         </p:txBody>
@@ -9418,12 +11965,12 @@
           </a:ln>
         </p:spPr>
         <p:txBody>
-          <a:bodyPr anchorCtr="0" anchor="ctr" bIns="91425" lIns="91425" spcFirstLastPara="1" rIns="91425" wrap="square" tIns="91425">
+          <a:bodyPr spcFirstLastPara="1" wrap="square" lIns="91425" tIns="91425" rIns="91425" bIns="91425" anchor="ctr" anchorCtr="0">
             <a:noAutofit/>
           </a:bodyPr>
           <a:lstStyle/>
           <a:p>
-            <a:pPr indent="0" lvl="0" marL="0" rtl="0" algn="l">
+            <a:pPr marL="0" lvl="0" indent="0" algn="l" rtl="0">
               <a:spcBef>
                 <a:spcPts val="0"/>
               </a:spcBef>
@@ -9432,16 +11979,13 @@
               </a:spcAft>
               <a:buNone/>
             </a:pPr>
-            <a:r>
-              <a:t/>
-            </a:r>
             <a:endParaRPr/>
           </a:p>
         </p:txBody>
       </p:sp>
       <p:pic>
         <p:nvPicPr>
-          <p:cNvPr descr="/home/claude/images/icon_grid.png" id="151" name="Google Shape;151;p8"/>
+          <p:cNvPr id="151" name="Google Shape;151;p8" descr="/home/claude/images/icon_grid.png"/>
           <p:cNvPicPr preferRelativeResize="0"/>
           <p:nvPr/>
         </p:nvPicPr>
@@ -9449,7 +11993,7 @@
           <a:blip r:embed="rId7">
             <a:alphaModFix/>
           </a:blip>
-          <a:srcRect b="0" l="0" r="0" t="0"/>
+          <a:srcRect/>
           <a:stretch/>
         </p:blipFill>
         <p:spPr>
@@ -9486,12 +12030,12 @@
           </a:ln>
         </p:spPr>
         <p:txBody>
-          <a:bodyPr anchorCtr="0" anchor="t" bIns="0" lIns="0" spcFirstLastPara="1" rIns="0" wrap="square" tIns="0">
+          <a:bodyPr spcFirstLastPara="1" wrap="square" lIns="0" tIns="0" rIns="0" bIns="0" anchor="t" anchorCtr="0">
             <a:noAutofit/>
           </a:bodyPr>
           <a:lstStyle/>
           <a:p>
-            <a:pPr indent="0" lvl="0" marL="0" marR="0" rtl="0" algn="l">
+            <a:pPr marL="0" marR="0" lvl="0" indent="0" algn="l" rtl="0">
               <a:spcBef>
                 <a:spcPts val="0"/>
               </a:spcBef>
@@ -9506,7 +12050,7 @@
               <a:buNone/>
             </a:pPr>
             <a:r>
-              <a:rPr b="1" i="0" lang="en-US" sz="1350" u="none" cap="none" strike="noStrike">
+              <a:rPr lang="en-US" sz="1350" b="1" i="0" u="none" strike="noStrike" cap="none">
                 <a:solidFill>
                   <a:srgbClr val="FFFFFF"/>
                 </a:solidFill>
@@ -9517,7 +12061,7 @@
               </a:rPr>
               <a:t>Birden Fazla Faktör Birlikte Etkili Oluyor</a:t>
             </a:r>
-            <a:endParaRPr b="0" i="0" sz="1350" u="none" cap="none" strike="noStrike">
+            <a:endParaRPr sz="1350" b="0" i="0" u="none" strike="noStrike" cap="none">
               <a:solidFill>
                 <a:schemeClr val="dk1"/>
               </a:solidFill>
@@ -9549,12 +12093,12 @@
           </a:ln>
         </p:spPr>
         <p:txBody>
-          <a:bodyPr anchorCtr="0" anchor="t" bIns="0" lIns="0" spcFirstLastPara="1" rIns="0" wrap="square" tIns="0">
+          <a:bodyPr spcFirstLastPara="1" wrap="square" lIns="0" tIns="0" rIns="0" bIns="0" anchor="t" anchorCtr="0">
             <a:noAutofit/>
           </a:bodyPr>
           <a:lstStyle/>
           <a:p>
-            <a:pPr indent="0" lvl="0" marL="0" marR="0" rtl="0" algn="l">
+            <a:pPr marL="0" marR="0" lvl="0" indent="0" algn="l" rtl="0">
               <a:lnSpc>
                 <a:spcPct val="105000"/>
               </a:lnSpc>
@@ -9572,7 +12116,7 @@
               <a:buNone/>
             </a:pPr>
             <a:r>
-              <a:rPr b="0" i="0" lang="en-US" sz="1080" u="none" cap="none" strike="noStrike">
+              <a:rPr lang="en-US" sz="1080" b="0" i="0" u="none" strike="noStrike" cap="none">
                 <a:solidFill>
                   <a:srgbClr val="AFC3E8"/>
                 </a:solidFill>
@@ -9583,7 +12127,7 @@
               </a:rPr>
               <a:t>Fiyat, memnuniyet ve satış yalnızca marka, segment ve teknik özelliklerin birlikte etkisiyle açıklanabiliyor.</a:t>
             </a:r>
-            <a:endParaRPr b="0" i="0" sz="1080" u="none" cap="none" strike="noStrike">
+            <a:endParaRPr sz="1080" b="0" i="0" u="none" strike="noStrike" cap="none">
               <a:solidFill>
                 <a:schemeClr val="dk1"/>
               </a:solidFill>
@@ -9615,12 +12159,12 @@
           </a:ln>
         </p:spPr>
         <p:txBody>
-          <a:bodyPr anchorCtr="0" anchor="ctr" bIns="0" lIns="0" spcFirstLastPara="1" rIns="0" wrap="square" tIns="0">
+          <a:bodyPr spcFirstLastPara="1" wrap="square" lIns="0" tIns="0" rIns="0" bIns="0" anchor="ctr" anchorCtr="0">
             <a:noAutofit/>
           </a:bodyPr>
           <a:lstStyle/>
           <a:p>
-            <a:pPr indent="0" lvl="0" marL="0" marR="0" rtl="0" algn="l">
+            <a:pPr marL="0" marR="0" lvl="0" indent="0" algn="l" rtl="0">
               <a:lnSpc>
                 <a:spcPct val="110000"/>
               </a:lnSpc>
@@ -9638,7 +12182,7 @@
               <a:buNone/>
             </a:pPr>
             <a:r>
-              <a:rPr b="0" i="1" lang="en-US" sz="1250" u="none" cap="none" strike="noStrike">
+              <a:rPr lang="en-US" sz="1250" b="0" i="1" u="none" strike="noStrike" cap="none">
                 <a:solidFill>
                   <a:srgbClr val="0FB5C9"/>
                 </a:solidFill>
@@ -9649,7 +12193,7 @@
               </a:rPr>
               <a:t>Sonuç: Veri seti eksiksiz ve tutarlıdır; tahmine dayalı modelleme ve iş zekâsı uygulamaları için sağlam bir temel oluşturur.</a:t>
             </a:r>
-            <a:endParaRPr b="0" i="0" sz="1250" u="none" cap="none" strike="noStrike">
+            <a:endParaRPr sz="1250" b="0" i="0" u="none" strike="noStrike" cap="none">
               <a:solidFill>
                 <a:schemeClr val="dk1"/>
               </a:solidFill>
@@ -9681,12 +12225,12 @@
           </a:ln>
         </p:spPr>
         <p:txBody>
-          <a:bodyPr anchorCtr="0" anchor="ctr" bIns="0" lIns="0" spcFirstLastPara="1" rIns="0" wrap="square" tIns="0">
+          <a:bodyPr spcFirstLastPara="1" wrap="square" lIns="0" tIns="0" rIns="0" bIns="0" anchor="ctr" anchorCtr="0">
             <a:noAutofit/>
           </a:bodyPr>
           <a:lstStyle/>
           <a:p>
-            <a:pPr indent="0" lvl="0" marL="0" marR="0" rtl="0" algn="ctr">
+            <a:pPr marL="0" marR="0" lvl="0" indent="0" algn="ctr" rtl="0">
               <a:spcBef>
                 <a:spcPts val="0"/>
               </a:spcBef>
@@ -9701,7 +12245,7 @@
               <a:buNone/>
             </a:pPr>
             <a:r>
-              <a:rPr b="1" i="0" lang="en-US" sz="1150" u="none" cap="none" strike="noStrike">
+              <a:rPr lang="en-US" sz="1150" b="1" i="0" u="none" strike="noStrike" cap="none">
                 <a:solidFill>
                   <a:srgbClr val="FFFFFF"/>
                 </a:solidFill>
@@ -9712,7 +12256,7 @@
               </a:rPr>
               <a:t>Hazırlayan:  Süha Çağrı Özbakışlar</a:t>
             </a:r>
-            <a:endParaRPr b="0" i="0" sz="1150" u="none" cap="none" strike="noStrike">
+            <a:endParaRPr sz="1150" b="0" i="0" u="none" strike="noStrike" cap="none">
               <a:solidFill>
                 <a:schemeClr val="dk1"/>
               </a:solidFill>
@@ -9733,7 +12277,7 @@
 </file>
 
 <file path=ppt/theme/theme1.xml><?xml version="1.0" encoding="utf-8"?>
-<a:theme xmlns:a="http://schemas.openxmlformats.org/drawingml/2006/main" xmlns:r="http://schemas.openxmlformats.org/officeDocument/2006/relationships" name="Office Theme">
+<a:theme xmlns:a="http://schemas.openxmlformats.org/drawingml/2006/main" name="Office Theme">
   <a:themeElements>
     <a:clrScheme name="Office">
       <a:dk1>
@@ -10008,11 +12552,13 @@
       </a:bgFillStyleLst>
     </a:fmtScheme>
   </a:themeElements>
+  <a:objectDefaults/>
+  <a:extraClrSchemeLst/>
 </a:theme>
 </file>
 
 <file path=ppt/theme/theme2.xml><?xml version="1.0" encoding="utf-8"?>
-<a:theme xmlns:a="http://schemas.openxmlformats.org/drawingml/2006/main" xmlns:r="http://schemas.openxmlformats.org/officeDocument/2006/relationships" name="Office Theme">
+<a:theme xmlns:a="http://schemas.openxmlformats.org/drawingml/2006/main" name="Office Theme">
   <a:themeElements>
     <a:clrScheme name="Office">
       <a:dk1>
@@ -10287,5 +12833,7 @@
       </a:bgFillStyleLst>
     </a:fmtScheme>
   </a:themeElements>
+  <a:objectDefaults/>
+  <a:extraClrSchemeLst/>
 </a:theme>
 </file>